--- a/tesi/block-diagram-extended-system.pptx
+++ b/tesi/block-diagram-extended-system.pptx
@@ -6,6 +6,9 @@
   </p:sldMasterIdLst>
   <p:sldIdLst>
     <p:sldId id="256" r:id="rId2"/>
+    <p:sldId id="257" r:id="rId3"/>
+    <p:sldId id="258" r:id="rId4"/>
+    <p:sldId id="259" r:id="rId5"/>
   </p:sldIdLst>
   <p:sldSz cx="12192000" cy="6858000"/>
   <p:notesSz cx="6858000" cy="9144000"/>
@@ -104,6 +107,11 @@
       </a:defRPr>
     </a:lvl9pPr>
   </p:defaultTextStyle>
+  <p:extLst>
+    <p:ext uri="{EFAFB233-063F-42B5-8137-9DF3F51BA10A}">
+      <p15:sldGuideLst xmlns:p15="http://schemas.microsoft.com/office/powerpoint/2012/main"/>
+    </p:ext>
+  </p:extLst>
 </p:presentation>
 </file>
 
@@ -254,7 +262,7 @@
           <a:p>
             <a:fld id="{C8B3C85B-8319-4F35-817E-FF9CBA4827F6}" type="datetimeFigureOut">
               <a:rPr lang="it-IT" smtClean="0"/>
-              <a:t>14/07/2025</a:t>
+              <a:t>15/07/2025</a:t>
             </a:fld>
             <a:endParaRPr lang="it-IT"/>
           </a:p>
@@ -452,7 +460,7 @@
           <a:p>
             <a:fld id="{C8B3C85B-8319-4F35-817E-FF9CBA4827F6}" type="datetimeFigureOut">
               <a:rPr lang="it-IT" smtClean="0"/>
-              <a:t>14/07/2025</a:t>
+              <a:t>15/07/2025</a:t>
             </a:fld>
             <a:endParaRPr lang="it-IT"/>
           </a:p>
@@ -660,7 +668,7 @@
           <a:p>
             <a:fld id="{C8B3C85B-8319-4F35-817E-FF9CBA4827F6}" type="datetimeFigureOut">
               <a:rPr lang="it-IT" smtClean="0"/>
-              <a:t>14/07/2025</a:t>
+              <a:t>15/07/2025</a:t>
             </a:fld>
             <a:endParaRPr lang="it-IT"/>
           </a:p>
@@ -858,7 +866,7 @@
           <a:p>
             <a:fld id="{C8B3C85B-8319-4F35-817E-FF9CBA4827F6}" type="datetimeFigureOut">
               <a:rPr lang="it-IT" smtClean="0"/>
-              <a:t>14/07/2025</a:t>
+              <a:t>15/07/2025</a:t>
             </a:fld>
             <a:endParaRPr lang="it-IT"/>
           </a:p>
@@ -1133,7 +1141,7 @@
           <a:p>
             <a:fld id="{C8B3C85B-8319-4F35-817E-FF9CBA4827F6}" type="datetimeFigureOut">
               <a:rPr lang="it-IT" smtClean="0"/>
-              <a:t>14/07/2025</a:t>
+              <a:t>15/07/2025</a:t>
             </a:fld>
             <a:endParaRPr lang="it-IT"/>
           </a:p>
@@ -1398,7 +1406,7 @@
           <a:p>
             <a:fld id="{C8B3C85B-8319-4F35-817E-FF9CBA4827F6}" type="datetimeFigureOut">
               <a:rPr lang="it-IT" smtClean="0"/>
-              <a:t>14/07/2025</a:t>
+              <a:t>15/07/2025</a:t>
             </a:fld>
             <a:endParaRPr lang="it-IT"/>
           </a:p>
@@ -1810,7 +1818,7 @@
           <a:p>
             <a:fld id="{C8B3C85B-8319-4F35-817E-FF9CBA4827F6}" type="datetimeFigureOut">
               <a:rPr lang="it-IT" smtClean="0"/>
-              <a:t>14/07/2025</a:t>
+              <a:t>15/07/2025</a:t>
             </a:fld>
             <a:endParaRPr lang="it-IT"/>
           </a:p>
@@ -1951,7 +1959,7 @@
           <a:p>
             <a:fld id="{C8B3C85B-8319-4F35-817E-FF9CBA4827F6}" type="datetimeFigureOut">
               <a:rPr lang="it-IT" smtClean="0"/>
-              <a:t>14/07/2025</a:t>
+              <a:t>15/07/2025</a:t>
             </a:fld>
             <a:endParaRPr lang="it-IT"/>
           </a:p>
@@ -2064,7 +2072,7 @@
           <a:p>
             <a:fld id="{C8B3C85B-8319-4F35-817E-FF9CBA4827F6}" type="datetimeFigureOut">
               <a:rPr lang="it-IT" smtClean="0"/>
-              <a:t>14/07/2025</a:t>
+              <a:t>15/07/2025</a:t>
             </a:fld>
             <a:endParaRPr lang="it-IT"/>
           </a:p>
@@ -2375,7 +2383,7 @@
           <a:p>
             <a:fld id="{C8B3C85B-8319-4F35-817E-FF9CBA4827F6}" type="datetimeFigureOut">
               <a:rPr lang="it-IT" smtClean="0"/>
-              <a:t>14/07/2025</a:t>
+              <a:t>15/07/2025</a:t>
             </a:fld>
             <a:endParaRPr lang="it-IT"/>
           </a:p>
@@ -2663,7 +2671,7 @@
           <a:p>
             <a:fld id="{C8B3C85B-8319-4F35-817E-FF9CBA4827F6}" type="datetimeFigureOut">
               <a:rPr lang="it-IT" smtClean="0"/>
-              <a:t>14/07/2025</a:t>
+              <a:t>15/07/2025</a:t>
             </a:fld>
             <a:endParaRPr lang="it-IT"/>
           </a:p>
@@ -2904,7 +2912,7 @@
           <a:p>
             <a:fld id="{C8B3C85B-8319-4F35-817E-FF9CBA4827F6}" type="datetimeFigureOut">
               <a:rPr lang="it-IT" smtClean="0"/>
-              <a:t>14/07/2025</a:t>
+              <a:t>15/07/2025</a:t>
             </a:fld>
             <a:endParaRPr lang="it-IT"/>
           </a:p>
@@ -3341,8 +3349,8 @@
             <a:chExt cx="6904656" cy="1676882"/>
           </a:xfrm>
         </p:grpSpPr>
-        <mc:AlternateContent xmlns:mc="http://schemas.openxmlformats.org/markup-compatibility/2006">
-          <mc:Choice xmlns:a14="http://schemas.microsoft.com/office/drawing/2010/main" Requires="a14">
+        <mc:AlternateContent xmlns:mc="http://schemas.openxmlformats.org/markup-compatibility/2006" xmlns:a14="http://schemas.microsoft.com/office/drawing/2010/main">
+          <mc:Choice Requires="a14">
             <p:sp>
               <p:nvSpPr>
                 <p:cNvPr id="5" name="CasellaDiTesto 4">
@@ -3416,7 +3424,7 @@
               </p:txBody>
             </p:sp>
           </mc:Choice>
-          <mc:Fallback>
+          <mc:Fallback xmlns="">
             <p:sp>
               <p:nvSpPr>
                 <p:cNvPr id="5" name="CasellaDiTesto 4">
@@ -3549,8 +3557,8 @@
               </a:p>
             </p:txBody>
           </p:sp>
-          <mc:AlternateContent xmlns:mc="http://schemas.openxmlformats.org/markup-compatibility/2006">
-            <mc:Choice xmlns:a14="http://schemas.microsoft.com/office/drawing/2010/main" Requires="a14">
+          <mc:AlternateContent xmlns:mc="http://schemas.openxmlformats.org/markup-compatibility/2006" xmlns:a14="http://schemas.microsoft.com/office/drawing/2010/main">
+            <mc:Choice Requires="a14">
               <p:sp>
                 <p:nvSpPr>
                   <p:cNvPr id="7" name="CasellaDiTesto 6">
@@ -3622,7 +3630,7 @@
                 </p:txBody>
               </p:sp>
             </mc:Choice>
-            <mc:Fallback>
+            <mc:Fallback xmlns="">
               <p:sp>
                 <p:nvSpPr>
                   <p:cNvPr id="7" name="CasellaDiTesto 6">
@@ -3747,8 +3755,8 @@
               </a:p>
             </p:txBody>
           </p:sp>
-          <mc:AlternateContent xmlns:mc="http://schemas.openxmlformats.org/markup-compatibility/2006">
-            <mc:Choice xmlns:a14="http://schemas.microsoft.com/office/drawing/2010/main" Requires="a14">
+          <mc:AlternateContent xmlns:mc="http://schemas.openxmlformats.org/markup-compatibility/2006" xmlns:a14="http://schemas.microsoft.com/office/drawing/2010/main">
+            <mc:Choice Requires="a14">
               <p:sp>
                 <p:nvSpPr>
                   <p:cNvPr id="11" name="CasellaDiTesto 10">
@@ -3817,7 +3825,7 @@
                 </p:txBody>
               </p:sp>
             </mc:Choice>
-            <mc:Fallback>
+            <mc:Fallback xmlns="">
               <p:sp>
                 <p:nvSpPr>
                   <p:cNvPr id="11" name="CasellaDiTesto 10">
@@ -3866,8 +3874,8 @@
             </mc:Fallback>
           </mc:AlternateContent>
         </p:grpSp>
-        <mc:AlternateContent xmlns:mc="http://schemas.openxmlformats.org/markup-compatibility/2006">
-          <mc:Choice xmlns:a14="http://schemas.microsoft.com/office/drawing/2010/main" Requires="a14">
+        <mc:AlternateContent xmlns:mc="http://schemas.openxmlformats.org/markup-compatibility/2006" xmlns:a14="http://schemas.microsoft.com/office/drawing/2010/main">
+          <mc:Choice Requires="a14">
             <p:sp>
               <p:nvSpPr>
                 <p:cNvPr id="13" name="CasellaDiTesto 12">
@@ -3910,6 +3918,7 @@
                 </a:bodyPr>
                 <a:lstStyle/>
                 <a:p>
+                  <a:pPr/>
                   <a14:m>
                     <m:oMathPara xmlns:m="http://schemas.openxmlformats.org/officeDocument/2006/math">
                       <m:oMathParaPr>
@@ -3955,7 +3964,7 @@
               </p:txBody>
             </p:sp>
           </mc:Choice>
-          <mc:Fallback>
+          <mc:Fallback xmlns="">
             <p:sp>
               <p:nvSpPr>
                 <p:cNvPr id="13" name="CasellaDiTesto 12">
@@ -4088,8 +4097,8 @@
               </a:p>
             </p:txBody>
           </p:sp>
-          <mc:AlternateContent xmlns:mc="http://schemas.openxmlformats.org/markup-compatibility/2006">
-            <mc:Choice xmlns:a14="http://schemas.microsoft.com/office/drawing/2010/main" Requires="a14">
+          <mc:AlternateContent xmlns:mc="http://schemas.openxmlformats.org/markup-compatibility/2006" xmlns:a14="http://schemas.microsoft.com/office/drawing/2010/main">
+            <mc:Choice Requires="a14">
               <p:sp>
                 <p:nvSpPr>
                   <p:cNvPr id="17" name="CasellaDiTesto 16">
@@ -4161,7 +4170,7 @@
                 </p:txBody>
               </p:sp>
             </mc:Choice>
-            <mc:Fallback>
+            <mc:Fallback xmlns="">
               <p:sp>
                 <p:nvSpPr>
                   <p:cNvPr id="17" name="CasellaDiTesto 16">
@@ -4553,8 +4562,8 @@
               </a:p>
             </p:txBody>
           </p:sp>
-          <mc:AlternateContent xmlns:mc="http://schemas.openxmlformats.org/markup-compatibility/2006">
-            <mc:Choice xmlns:a14="http://schemas.microsoft.com/office/drawing/2010/main" Requires="a14">
+          <mc:AlternateContent xmlns:mc="http://schemas.openxmlformats.org/markup-compatibility/2006" xmlns:a14="http://schemas.microsoft.com/office/drawing/2010/main">
+            <mc:Choice Requires="a14">
               <p:sp>
                 <p:nvSpPr>
                   <p:cNvPr id="49" name="CasellaDiTesto 48">
@@ -4623,7 +4632,7 @@
                 </p:txBody>
               </p:sp>
             </mc:Choice>
-            <mc:Fallback>
+            <mc:Fallback xmlns="">
               <p:sp>
                 <p:nvSpPr>
                   <p:cNvPr id="49" name="CasellaDiTesto 48">
@@ -4716,8 +4725,8 @@
             </a:fontRef>
           </p:style>
         </p:cxnSp>
-        <mc:AlternateContent xmlns:mc="http://schemas.openxmlformats.org/markup-compatibility/2006">
-          <mc:Choice xmlns:a14="http://schemas.microsoft.com/office/drawing/2010/main" Requires="a14">
+        <mc:AlternateContent xmlns:mc="http://schemas.openxmlformats.org/markup-compatibility/2006" xmlns:a14="http://schemas.microsoft.com/office/drawing/2010/main">
+          <mc:Choice Requires="a14">
             <p:sp>
               <p:nvSpPr>
                 <p:cNvPr id="66" name="CasellaDiTesto 65">
@@ -4747,6 +4756,7 @@
                 </a:bodyPr>
                 <a:lstStyle/>
                 <a:p>
+                  <a:pPr/>
                   <a14:m>
                     <m:oMathPara xmlns:m="http://schemas.openxmlformats.org/officeDocument/2006/math">
                       <m:oMathParaPr>
@@ -4767,7 +4777,7 @@
               </p:txBody>
             </p:sp>
           </mc:Choice>
-          <mc:Fallback>
+          <mc:Fallback xmlns="">
             <p:sp>
               <p:nvSpPr>
                 <p:cNvPr id="66" name="CasellaDiTesto 65">
@@ -4813,8 +4823,8 @@
             </p:sp>
           </mc:Fallback>
         </mc:AlternateContent>
-        <mc:AlternateContent xmlns:mc="http://schemas.openxmlformats.org/markup-compatibility/2006">
-          <mc:Choice xmlns:a14="http://schemas.microsoft.com/office/drawing/2010/main" Requires="a14">
+        <mc:AlternateContent xmlns:mc="http://schemas.openxmlformats.org/markup-compatibility/2006" xmlns:a14="http://schemas.microsoft.com/office/drawing/2010/main">
+          <mc:Choice Requires="a14">
             <p:sp>
               <p:nvSpPr>
                 <p:cNvPr id="67" name="CasellaDiTesto 66">
@@ -4844,6 +4854,7 @@
                 </a:bodyPr>
                 <a:lstStyle/>
                 <a:p>
+                  <a:pPr/>
                   <a14:m>
                     <m:oMathPara xmlns:m="http://schemas.openxmlformats.org/officeDocument/2006/math">
                       <m:oMathParaPr>
@@ -4876,7 +4887,7 @@
               </p:txBody>
             </p:sp>
           </mc:Choice>
-          <mc:Fallback>
+          <mc:Fallback xmlns="">
             <p:sp>
               <p:nvSpPr>
                 <p:cNvPr id="67" name="CasellaDiTesto 66">
@@ -4922,8 +4933,8 @@
             </p:sp>
           </mc:Fallback>
         </mc:AlternateContent>
-        <mc:AlternateContent xmlns:mc="http://schemas.openxmlformats.org/markup-compatibility/2006">
-          <mc:Choice xmlns:a14="http://schemas.microsoft.com/office/drawing/2010/main" Requires="a14">
+        <mc:AlternateContent xmlns:mc="http://schemas.openxmlformats.org/markup-compatibility/2006" xmlns:a14="http://schemas.microsoft.com/office/drawing/2010/main">
+          <mc:Choice Requires="a14">
             <p:sp>
               <p:nvSpPr>
                 <p:cNvPr id="76" name="CasellaDiTesto 75">
@@ -4953,6 +4964,7 @@
                 </a:bodyPr>
                 <a:lstStyle/>
                 <a:p>
+                  <a:pPr/>
                   <a14:m>
                     <m:oMathPara xmlns:m="http://schemas.openxmlformats.org/officeDocument/2006/math">
                       <m:oMathParaPr>
@@ -4991,7 +5003,7 @@
               </p:txBody>
             </p:sp>
           </mc:Choice>
-          <mc:Fallback>
+          <mc:Fallback xmlns="">
             <p:sp>
               <p:nvSpPr>
                 <p:cNvPr id="76" name="CasellaDiTesto 75">
@@ -5079,8 +5091,8 @@
             </a:fontRef>
           </p:style>
         </p:cxnSp>
-        <mc:AlternateContent xmlns:mc="http://schemas.openxmlformats.org/markup-compatibility/2006">
-          <mc:Choice xmlns:a14="http://schemas.microsoft.com/office/drawing/2010/main" Requires="a14">
+        <mc:AlternateContent xmlns:mc="http://schemas.openxmlformats.org/markup-compatibility/2006" xmlns:a14="http://schemas.microsoft.com/office/drawing/2010/main">
+          <mc:Choice Requires="a14">
             <p:sp>
               <p:nvSpPr>
                 <p:cNvPr id="89" name="CasellaDiTesto 88">
@@ -5110,6 +5122,7 @@
                 </a:bodyPr>
                 <a:lstStyle/>
                 <a:p>
+                  <a:pPr/>
                   <a14:m>
                     <m:oMathPara xmlns:m="http://schemas.openxmlformats.org/officeDocument/2006/math">
                       <m:oMathParaPr>
@@ -5148,7 +5161,7 @@
               </p:txBody>
             </p:sp>
           </mc:Choice>
-          <mc:Fallback>
+          <mc:Fallback xmlns="">
             <p:sp>
               <p:nvSpPr>
                 <p:cNvPr id="89" name="CasellaDiTesto 88">
@@ -5194,8 +5207,8 @@
             </p:sp>
           </mc:Fallback>
         </mc:AlternateContent>
-        <mc:AlternateContent xmlns:mc="http://schemas.openxmlformats.org/markup-compatibility/2006">
-          <mc:Choice xmlns:a14="http://schemas.microsoft.com/office/drawing/2010/main" Requires="a14">
+        <mc:AlternateContent xmlns:mc="http://schemas.openxmlformats.org/markup-compatibility/2006" xmlns:a14="http://schemas.microsoft.com/office/drawing/2010/main">
+          <mc:Choice Requires="a14">
             <p:sp>
               <p:nvSpPr>
                 <p:cNvPr id="90" name="CasellaDiTesto 89">
@@ -5225,6 +5238,7 @@
                 </a:bodyPr>
                 <a:lstStyle/>
                 <a:p>
+                  <a:pPr/>
                   <a14:m>
                     <m:oMathPara xmlns:m="http://schemas.openxmlformats.org/officeDocument/2006/math">
                       <m:oMathParaPr>
@@ -5245,7 +5259,7 @@
               </p:txBody>
             </p:sp>
           </mc:Choice>
-          <mc:Fallback>
+          <mc:Fallback xmlns="">
             <p:sp>
               <p:nvSpPr>
                 <p:cNvPr id="90" name="CasellaDiTesto 89">
@@ -5291,8 +5305,8 @@
             </p:sp>
           </mc:Fallback>
         </mc:AlternateContent>
-        <mc:AlternateContent xmlns:mc="http://schemas.openxmlformats.org/markup-compatibility/2006">
-          <mc:Choice xmlns:a14="http://schemas.microsoft.com/office/drawing/2010/main" Requires="a14">
+        <mc:AlternateContent xmlns:mc="http://schemas.openxmlformats.org/markup-compatibility/2006" xmlns:a14="http://schemas.microsoft.com/office/drawing/2010/main">
+          <mc:Choice Requires="a14">
             <p:sp>
               <p:nvSpPr>
                 <p:cNvPr id="91" name="CasellaDiTesto 90">
@@ -5322,6 +5336,7 @@
                 </a:bodyPr>
                 <a:lstStyle/>
                 <a:p>
+                  <a:pPr/>
                   <a14:m>
                     <m:oMathPara xmlns:m="http://schemas.openxmlformats.org/officeDocument/2006/math">
                       <m:oMathParaPr>
@@ -5342,7 +5357,7 @@
               </p:txBody>
             </p:sp>
           </mc:Choice>
-          <mc:Fallback>
+          <mc:Fallback xmlns="">
             <p:sp>
               <p:nvSpPr>
                 <p:cNvPr id="91" name="CasellaDiTesto 90">
@@ -5388,8 +5403,8 @@
             </p:sp>
           </mc:Fallback>
         </mc:AlternateContent>
-        <mc:AlternateContent xmlns:mc="http://schemas.openxmlformats.org/markup-compatibility/2006">
-          <mc:Choice xmlns:a14="http://schemas.microsoft.com/office/drawing/2010/main" Requires="a14">
+        <mc:AlternateContent xmlns:mc="http://schemas.openxmlformats.org/markup-compatibility/2006" xmlns:a14="http://schemas.microsoft.com/office/drawing/2010/main">
+          <mc:Choice Requires="a14">
             <p:sp>
               <p:nvSpPr>
                 <p:cNvPr id="92" name="CasellaDiTesto 91">
@@ -5419,6 +5434,7 @@
                 </a:bodyPr>
                 <a:lstStyle/>
                 <a:p>
+                  <a:pPr/>
                   <a14:m>
                     <m:oMathPara xmlns:m="http://schemas.openxmlformats.org/officeDocument/2006/math">
                       <m:oMathParaPr>
@@ -5439,7 +5455,7 @@
               </p:txBody>
             </p:sp>
           </mc:Choice>
-          <mc:Fallback>
+          <mc:Fallback xmlns="">
             <p:sp>
               <p:nvSpPr>
                 <p:cNvPr id="92" name="CasellaDiTesto 91">
@@ -5485,8 +5501,8 @@
             </p:sp>
           </mc:Fallback>
         </mc:AlternateContent>
-        <mc:AlternateContent xmlns:mc="http://schemas.openxmlformats.org/markup-compatibility/2006">
-          <mc:Choice xmlns:a14="http://schemas.microsoft.com/office/drawing/2010/main" Requires="a14">
+        <mc:AlternateContent xmlns:mc="http://schemas.openxmlformats.org/markup-compatibility/2006" xmlns:a14="http://schemas.microsoft.com/office/drawing/2010/main">
+          <mc:Choice Requires="a14">
             <p:sp>
               <p:nvSpPr>
                 <p:cNvPr id="93" name="CasellaDiTesto 92">
@@ -5516,6 +5532,7 @@
                 </a:bodyPr>
                 <a:lstStyle/>
                 <a:p>
+                  <a:pPr/>
                   <a14:m>
                     <m:oMathPara xmlns:m="http://schemas.openxmlformats.org/officeDocument/2006/math">
                       <m:oMathParaPr>
@@ -5536,7 +5553,7 @@
               </p:txBody>
             </p:sp>
           </mc:Choice>
-          <mc:Fallback>
+          <mc:Fallback xmlns="">
             <p:sp>
               <p:nvSpPr>
                 <p:cNvPr id="93" name="CasellaDiTesto 92">
@@ -5582,8 +5599,8 @@
             </p:sp>
           </mc:Fallback>
         </mc:AlternateContent>
-        <mc:AlternateContent xmlns:mc="http://schemas.openxmlformats.org/markup-compatibility/2006">
-          <mc:Choice xmlns:a14="http://schemas.microsoft.com/office/drawing/2010/main" Requires="a14">
+        <mc:AlternateContent xmlns:mc="http://schemas.openxmlformats.org/markup-compatibility/2006" xmlns:a14="http://schemas.microsoft.com/office/drawing/2010/main">
+          <mc:Choice Requires="a14">
             <p:sp>
               <p:nvSpPr>
                 <p:cNvPr id="97" name="CasellaDiTesto 96">
@@ -5613,6 +5630,7 @@
                 </a:bodyPr>
                 <a:lstStyle/>
                 <a:p>
+                  <a:pPr/>
                   <a14:m>
                     <m:oMathPara xmlns:m="http://schemas.openxmlformats.org/officeDocument/2006/math">
                       <m:oMathParaPr>
@@ -5651,7 +5669,7 @@
               </p:txBody>
             </p:sp>
           </mc:Choice>
-          <mc:Fallback>
+          <mc:Fallback xmlns="">
             <p:sp>
               <p:nvSpPr>
                 <p:cNvPr id="97" name="CasellaDiTesto 96">
@@ -5702,6 +5720,8246 @@
     <p:extLst>
       <p:ext uri="{BB962C8B-B14F-4D97-AF65-F5344CB8AC3E}">
         <p14:creationId xmlns:p14="http://schemas.microsoft.com/office/powerpoint/2010/main" val="1323656629"/>
+      </p:ext>
+    </p:extLst>
+  </p:cSld>
+  <p:clrMapOvr>
+    <a:masterClrMapping/>
+  </p:clrMapOvr>
+</p:sld>
+</file>
+
+<file path=ppt/slides/slide2.xml><?xml version="1.0" encoding="utf-8"?>
+<p:sld xmlns:a="http://schemas.openxmlformats.org/drawingml/2006/main" xmlns:r="http://schemas.openxmlformats.org/officeDocument/2006/relationships" xmlns:p="http://schemas.openxmlformats.org/presentationml/2006/main">
+  <p:cSld>
+    <p:spTree>
+      <p:nvGrpSpPr>
+        <p:cNvPr id="1" name=""/>
+        <p:cNvGrpSpPr/>
+        <p:nvPr/>
+      </p:nvGrpSpPr>
+      <p:grpSpPr>
+        <a:xfrm>
+          <a:off x="0" y="0"/>
+          <a:ext cx="0" cy="0"/>
+          <a:chOff x="0" y="0"/>
+          <a:chExt cx="0" cy="0"/>
+        </a:xfrm>
+      </p:grpSpPr>
+      <p:sp>
+        <p:nvSpPr>
+          <p:cNvPr id="4" name="Arco 3">
+            <a:extLst>
+              <a:ext uri="{FF2B5EF4-FFF2-40B4-BE49-F238E27FC236}">
+                <a16:creationId xmlns:a16="http://schemas.microsoft.com/office/drawing/2014/main" id="{8E469A56-819A-F4BF-F357-CD8B930E3DC2}"/>
+              </a:ext>
+            </a:extLst>
+          </p:cNvPr>
+          <p:cNvSpPr/>
+          <p:nvPr/>
+        </p:nvSpPr>
+        <p:spPr>
+          <a:xfrm>
+            <a:off x="4184122" y="1542070"/>
+            <a:ext cx="3823756" cy="3970020"/>
+          </a:xfrm>
+          <a:prstGeom prst="arc">
+            <a:avLst>
+              <a:gd name="adj1" fmla="val 14824762"/>
+              <a:gd name="adj2" fmla="val 16205952"/>
+            </a:avLst>
+          </a:prstGeom>
+        </p:spPr>
+        <p:style>
+          <a:lnRef idx="2">
+            <a:schemeClr val="dk1"/>
+          </a:lnRef>
+          <a:fillRef idx="0">
+            <a:schemeClr val="dk1"/>
+          </a:fillRef>
+          <a:effectRef idx="1">
+            <a:schemeClr val="dk1"/>
+          </a:effectRef>
+          <a:fontRef idx="minor">
+            <a:schemeClr val="tx1"/>
+          </a:fontRef>
+        </p:style>
+        <p:txBody>
+          <a:bodyPr rtlCol="0" anchor="ctr"/>
+          <a:lstStyle/>
+          <a:p>
+            <a:pPr algn="ctr"/>
+            <a:endParaRPr lang="it-IT"/>
+          </a:p>
+        </p:txBody>
+      </p:sp>
+      <p:cxnSp>
+        <p:nvCxnSpPr>
+          <p:cNvPr id="5" name="Connettore diritto 4">
+            <a:extLst>
+              <a:ext uri="{FF2B5EF4-FFF2-40B4-BE49-F238E27FC236}">
+                <a16:creationId xmlns:a16="http://schemas.microsoft.com/office/drawing/2014/main" id="{6658B906-2D29-9A55-D735-664298793C82}"/>
+              </a:ext>
+            </a:extLst>
+          </p:cNvPr>
+          <p:cNvCxnSpPr>
+            <a:cxnSpLocks/>
+            <a:stCxn id="9" idx="0"/>
+          </p:cNvCxnSpPr>
+          <p:nvPr/>
+        </p:nvCxnSpPr>
+        <p:spPr>
+          <a:xfrm flipH="1" flipV="1">
+            <a:off x="5273040" y="1592580"/>
+            <a:ext cx="822960" cy="1934500"/>
+          </a:xfrm>
+          <a:prstGeom prst="line">
+            <a:avLst/>
+          </a:prstGeom>
+          <a:ln w="57150">
+            <a:solidFill>
+              <a:schemeClr val="tx1"/>
+            </a:solidFill>
+          </a:ln>
+        </p:spPr>
+        <p:style>
+          <a:lnRef idx="2">
+            <a:schemeClr val="dk1"/>
+          </a:lnRef>
+          <a:fillRef idx="0">
+            <a:schemeClr val="dk1"/>
+          </a:fillRef>
+          <a:effectRef idx="1">
+            <a:schemeClr val="dk1"/>
+          </a:effectRef>
+          <a:fontRef idx="minor">
+            <a:schemeClr val="tx1"/>
+          </a:fontRef>
+        </p:style>
+      </p:cxnSp>
+      <p:cxnSp>
+        <p:nvCxnSpPr>
+          <p:cNvPr id="6" name="Connettore diritto 5">
+            <a:extLst>
+              <a:ext uri="{FF2B5EF4-FFF2-40B4-BE49-F238E27FC236}">
+                <a16:creationId xmlns:a16="http://schemas.microsoft.com/office/drawing/2014/main" id="{6FD090DF-9860-B419-3ABE-BA876BE26EEE}"/>
+              </a:ext>
+            </a:extLst>
+          </p:cNvPr>
+          <p:cNvCxnSpPr>
+            <a:cxnSpLocks/>
+            <a:stCxn id="9" idx="0"/>
+          </p:cNvCxnSpPr>
+          <p:nvPr/>
+        </p:nvCxnSpPr>
+        <p:spPr>
+          <a:xfrm flipV="1">
+            <a:off x="6096000" y="1290638"/>
+            <a:ext cx="0" cy="2236442"/>
+          </a:xfrm>
+          <a:prstGeom prst="line">
+            <a:avLst/>
+          </a:prstGeom>
+          <a:ln>
+            <a:solidFill>
+              <a:schemeClr val="tx1"/>
+            </a:solidFill>
+            <a:prstDash val="sysDash"/>
+          </a:ln>
+        </p:spPr>
+        <p:style>
+          <a:lnRef idx="2">
+            <a:schemeClr val="dk1"/>
+          </a:lnRef>
+          <a:fillRef idx="0">
+            <a:schemeClr val="dk1"/>
+          </a:fillRef>
+          <a:effectRef idx="1">
+            <a:schemeClr val="dk1"/>
+          </a:effectRef>
+          <a:fontRef idx="minor">
+            <a:schemeClr val="tx1"/>
+          </a:fontRef>
+        </p:style>
+      </p:cxnSp>
+      <p:sp>
+        <p:nvSpPr>
+          <p:cNvPr id="7" name="Ovale 6">
+            <a:extLst>
+              <a:ext uri="{FF2B5EF4-FFF2-40B4-BE49-F238E27FC236}">
+                <a16:creationId xmlns:a16="http://schemas.microsoft.com/office/drawing/2014/main" id="{DFC09B86-16C2-BF94-E120-36BC8F6588C2}"/>
+              </a:ext>
+            </a:extLst>
+          </p:cNvPr>
+          <p:cNvSpPr/>
+          <p:nvPr/>
+        </p:nvSpPr>
+        <p:spPr>
+          <a:xfrm>
+            <a:off x="5299075" y="4562855"/>
+            <a:ext cx="409575" cy="409575"/>
+          </a:xfrm>
+          <a:prstGeom prst="ellipse">
+            <a:avLst/>
+          </a:prstGeom>
+          <a:solidFill>
+            <a:schemeClr val="bg1"/>
+          </a:solidFill>
+          <a:ln w="38100">
+            <a:solidFill>
+              <a:schemeClr val="tx1"/>
+            </a:solidFill>
+          </a:ln>
+          <a:effectLst/>
+        </p:spPr>
+        <p:style>
+          <a:lnRef idx="2">
+            <a:schemeClr val="accent1">
+              <a:shade val="15000"/>
+            </a:schemeClr>
+          </a:lnRef>
+          <a:fillRef idx="1">
+            <a:schemeClr val="accent1"/>
+          </a:fillRef>
+          <a:effectRef idx="0">
+            <a:schemeClr val="accent1"/>
+          </a:effectRef>
+          <a:fontRef idx="minor">
+            <a:schemeClr val="lt1"/>
+          </a:fontRef>
+        </p:style>
+        <p:txBody>
+          <a:bodyPr rtlCol="0" anchor="ctr"/>
+          <a:lstStyle/>
+          <a:p>
+            <a:pPr algn="ctr"/>
+            <a:endParaRPr lang="it-IT"/>
+          </a:p>
+        </p:txBody>
+      </p:sp>
+      <p:sp>
+        <p:nvSpPr>
+          <p:cNvPr id="8" name="Ovale 7">
+            <a:extLst>
+              <a:ext uri="{FF2B5EF4-FFF2-40B4-BE49-F238E27FC236}">
+                <a16:creationId xmlns:a16="http://schemas.microsoft.com/office/drawing/2014/main" id="{88BF8D60-6488-8AF1-C94E-0D8F589482AA}"/>
+              </a:ext>
+            </a:extLst>
+          </p:cNvPr>
+          <p:cNvSpPr/>
+          <p:nvPr/>
+        </p:nvSpPr>
+        <p:spPr>
+          <a:xfrm>
+            <a:off x="6483352" y="4562854"/>
+            <a:ext cx="409575" cy="409575"/>
+          </a:xfrm>
+          <a:prstGeom prst="ellipse">
+            <a:avLst/>
+          </a:prstGeom>
+          <a:solidFill>
+            <a:schemeClr val="bg1"/>
+          </a:solidFill>
+          <a:ln w="38100">
+            <a:solidFill>
+              <a:schemeClr val="tx1"/>
+            </a:solidFill>
+          </a:ln>
+          <a:effectLst/>
+        </p:spPr>
+        <p:style>
+          <a:lnRef idx="2">
+            <a:schemeClr val="accent1">
+              <a:shade val="15000"/>
+            </a:schemeClr>
+          </a:lnRef>
+          <a:fillRef idx="1">
+            <a:schemeClr val="accent1"/>
+          </a:fillRef>
+          <a:effectRef idx="0">
+            <a:schemeClr val="accent1"/>
+          </a:effectRef>
+          <a:fontRef idx="minor">
+            <a:schemeClr val="lt1"/>
+          </a:fontRef>
+        </p:style>
+        <p:txBody>
+          <a:bodyPr rtlCol="0" anchor="ctr"/>
+          <a:lstStyle/>
+          <a:p>
+            <a:pPr algn="ctr"/>
+            <a:endParaRPr lang="it-IT"/>
+          </a:p>
+        </p:txBody>
+      </p:sp>
+      <p:sp>
+        <p:nvSpPr>
+          <p:cNvPr id="9" name="Rettangolo 8">
+            <a:extLst>
+              <a:ext uri="{FF2B5EF4-FFF2-40B4-BE49-F238E27FC236}">
+                <a16:creationId xmlns:a16="http://schemas.microsoft.com/office/drawing/2014/main" id="{0EA1A2CE-B06B-C8A4-52D1-C0530C772955}"/>
+              </a:ext>
+            </a:extLst>
+          </p:cNvPr>
+          <p:cNvSpPr/>
+          <p:nvPr/>
+        </p:nvSpPr>
+        <p:spPr>
+          <a:xfrm>
+            <a:off x="5090160" y="3527080"/>
+            <a:ext cx="2011680" cy="1035776"/>
+          </a:xfrm>
+          <a:prstGeom prst="rect">
+            <a:avLst/>
+          </a:prstGeom>
+          <a:solidFill>
+            <a:schemeClr val="bg1"/>
+          </a:solidFill>
+          <a:ln w="28575">
+            <a:solidFill>
+              <a:schemeClr val="tx1"/>
+            </a:solidFill>
+          </a:ln>
+          <a:effectLst/>
+        </p:spPr>
+        <p:style>
+          <a:lnRef idx="2">
+            <a:schemeClr val="accent1">
+              <a:shade val="15000"/>
+            </a:schemeClr>
+          </a:lnRef>
+          <a:fillRef idx="1">
+            <a:schemeClr val="accent1"/>
+          </a:fillRef>
+          <a:effectRef idx="0">
+            <a:schemeClr val="accent1"/>
+          </a:effectRef>
+          <a:fontRef idx="minor">
+            <a:schemeClr val="lt1"/>
+          </a:fontRef>
+        </p:style>
+        <p:txBody>
+          <a:bodyPr rtlCol="0" anchor="ctr"/>
+          <a:lstStyle/>
+          <a:p>
+            <a:pPr algn="ctr"/>
+            <a:endParaRPr lang="it-IT"/>
+          </a:p>
+        </p:txBody>
+      </p:sp>
+      <p:sp>
+        <p:nvSpPr>
+          <p:cNvPr id="10" name="Triangolo isoscele 9">
+            <a:extLst>
+              <a:ext uri="{FF2B5EF4-FFF2-40B4-BE49-F238E27FC236}">
+                <a16:creationId xmlns:a16="http://schemas.microsoft.com/office/drawing/2014/main" id="{DBCA74FA-19FD-5802-9479-FEA0D5B34FD2}"/>
+              </a:ext>
+            </a:extLst>
+          </p:cNvPr>
+          <p:cNvSpPr/>
+          <p:nvPr/>
+        </p:nvSpPr>
+        <p:spPr>
+          <a:xfrm rot="15111459">
+            <a:off x="5334000" y="1645993"/>
+            <a:ext cx="80963" cy="88106"/>
+          </a:xfrm>
+          <a:prstGeom prst="triangle">
+            <a:avLst/>
+          </a:prstGeom>
+          <a:solidFill>
+            <a:schemeClr val="tx1"/>
+          </a:solidFill>
+          <a:ln>
+            <a:solidFill>
+              <a:schemeClr val="tx1"/>
+            </a:solidFill>
+          </a:ln>
+        </p:spPr>
+        <p:style>
+          <a:lnRef idx="2">
+            <a:schemeClr val="accent1">
+              <a:shade val="15000"/>
+            </a:schemeClr>
+          </a:lnRef>
+          <a:fillRef idx="1">
+            <a:schemeClr val="accent1"/>
+          </a:fillRef>
+          <a:effectRef idx="0">
+            <a:schemeClr val="accent1"/>
+          </a:effectRef>
+          <a:fontRef idx="minor">
+            <a:schemeClr val="lt1"/>
+          </a:fontRef>
+        </p:style>
+        <p:txBody>
+          <a:bodyPr rtlCol="0" anchor="ctr"/>
+          <a:lstStyle/>
+          <a:p>
+            <a:pPr algn="ctr"/>
+            <a:endParaRPr lang="it-IT"/>
+          </a:p>
+        </p:txBody>
+      </p:sp>
+      <p:sp>
+        <p:nvSpPr>
+          <p:cNvPr id="11" name="Rettangolo 10">
+            <a:extLst>
+              <a:ext uri="{FF2B5EF4-FFF2-40B4-BE49-F238E27FC236}">
+                <a16:creationId xmlns:a16="http://schemas.microsoft.com/office/drawing/2014/main" id="{B7B68590-0FAE-6252-2C05-F7B664470CD5}"/>
+              </a:ext>
+            </a:extLst>
+          </p:cNvPr>
+          <p:cNvSpPr/>
+          <p:nvPr/>
+        </p:nvSpPr>
+        <p:spPr>
+          <a:xfrm rot="20225249">
+            <a:off x="5880880" y="2353715"/>
+            <a:ext cx="1077036" cy="1003840"/>
+          </a:xfrm>
+          <a:prstGeom prst="rect">
+            <a:avLst/>
+          </a:prstGeom>
+          <a:noFill/>
+          <a:ln w="12700">
+            <a:solidFill>
+              <a:schemeClr val="tx1"/>
+            </a:solidFill>
+            <a:prstDash val="lgDash"/>
+          </a:ln>
+        </p:spPr>
+        <p:style>
+          <a:lnRef idx="2">
+            <a:schemeClr val="accent1">
+              <a:shade val="15000"/>
+            </a:schemeClr>
+          </a:lnRef>
+          <a:fillRef idx="1">
+            <a:schemeClr val="accent1"/>
+          </a:fillRef>
+          <a:effectRef idx="0">
+            <a:schemeClr val="accent1"/>
+          </a:effectRef>
+          <a:fontRef idx="minor">
+            <a:schemeClr val="lt1"/>
+          </a:fontRef>
+        </p:style>
+        <p:txBody>
+          <a:bodyPr rtlCol="0" anchor="ctr"/>
+          <a:lstStyle/>
+          <a:p>
+            <a:pPr algn="ctr"/>
+            <a:endParaRPr lang="it-IT"/>
+          </a:p>
+        </p:txBody>
+      </p:sp>
+      <p:cxnSp>
+        <p:nvCxnSpPr>
+          <p:cNvPr id="14" name="Connettore 2 13">
+            <a:extLst>
+              <a:ext uri="{FF2B5EF4-FFF2-40B4-BE49-F238E27FC236}">
+                <a16:creationId xmlns:a16="http://schemas.microsoft.com/office/drawing/2014/main" id="{621AB656-F25B-2533-F562-DBA4B9CFA1FD}"/>
+              </a:ext>
+            </a:extLst>
+          </p:cNvPr>
+          <p:cNvCxnSpPr>
+            <a:cxnSpLocks/>
+          </p:cNvCxnSpPr>
+          <p:nvPr/>
+        </p:nvCxnSpPr>
+        <p:spPr>
+          <a:xfrm>
+            <a:off x="6711951" y="2164556"/>
+            <a:ext cx="398887" cy="943769"/>
+          </a:xfrm>
+          <a:prstGeom prst="straightConnector1">
+            <a:avLst/>
+          </a:prstGeom>
+          <a:ln>
+            <a:solidFill>
+              <a:schemeClr val="tx1"/>
+            </a:solidFill>
+            <a:headEnd type="triangle"/>
+            <a:tailEnd type="triangle"/>
+          </a:ln>
+        </p:spPr>
+        <p:style>
+          <a:lnRef idx="2">
+            <a:schemeClr val="dk1"/>
+          </a:lnRef>
+          <a:fillRef idx="0">
+            <a:schemeClr val="dk1"/>
+          </a:fillRef>
+          <a:effectRef idx="1">
+            <a:schemeClr val="dk1"/>
+          </a:effectRef>
+          <a:fontRef idx="minor">
+            <a:schemeClr val="tx1"/>
+          </a:fontRef>
+        </p:style>
+      </p:cxnSp>
+      <p:cxnSp>
+        <p:nvCxnSpPr>
+          <p:cNvPr id="18" name="Connettore 2 17">
+            <a:extLst>
+              <a:ext uri="{FF2B5EF4-FFF2-40B4-BE49-F238E27FC236}">
+                <a16:creationId xmlns:a16="http://schemas.microsoft.com/office/drawing/2014/main" id="{8BB65984-712A-FCB9-27C8-C2193DD0122F}"/>
+              </a:ext>
+            </a:extLst>
+          </p:cNvPr>
+          <p:cNvCxnSpPr>
+            <a:cxnSpLocks/>
+          </p:cNvCxnSpPr>
+          <p:nvPr/>
+        </p:nvCxnSpPr>
+        <p:spPr>
+          <a:xfrm>
+            <a:off x="5699512" y="2604308"/>
+            <a:ext cx="0" cy="669911"/>
+          </a:xfrm>
+          <a:prstGeom prst="straightConnector1">
+            <a:avLst/>
+          </a:prstGeom>
+          <a:ln w="28575">
+            <a:solidFill>
+              <a:srgbClr val="FF0000"/>
+            </a:solidFill>
+            <a:tailEnd type="triangle"/>
+          </a:ln>
+        </p:spPr>
+        <p:style>
+          <a:lnRef idx="2">
+            <a:schemeClr val="dk1"/>
+          </a:lnRef>
+          <a:fillRef idx="0">
+            <a:schemeClr val="dk1"/>
+          </a:fillRef>
+          <a:effectRef idx="1">
+            <a:schemeClr val="dk1"/>
+          </a:effectRef>
+          <a:fontRef idx="minor">
+            <a:schemeClr val="tx1"/>
+          </a:fontRef>
+        </p:style>
+      </p:cxnSp>
+      <p:sp>
+        <p:nvSpPr>
+          <p:cNvPr id="16" name="Ovale 15">
+            <a:extLst>
+              <a:ext uri="{FF2B5EF4-FFF2-40B4-BE49-F238E27FC236}">
+                <a16:creationId xmlns:a16="http://schemas.microsoft.com/office/drawing/2014/main" id="{90841A8A-0FF5-E9C9-6864-D0F429ED0BD4}"/>
+              </a:ext>
+            </a:extLst>
+          </p:cNvPr>
+          <p:cNvSpPr/>
+          <p:nvPr/>
+        </p:nvSpPr>
+        <p:spPr>
+          <a:xfrm>
+            <a:off x="5647785" y="2559830"/>
+            <a:ext cx="103454" cy="103454"/>
+          </a:xfrm>
+          <a:prstGeom prst="ellipse">
+            <a:avLst/>
+          </a:prstGeom>
+          <a:ln w="28575"/>
+        </p:spPr>
+        <p:style>
+          <a:lnRef idx="2">
+            <a:schemeClr val="dk1"/>
+          </a:lnRef>
+          <a:fillRef idx="1">
+            <a:schemeClr val="lt1"/>
+          </a:fillRef>
+          <a:effectRef idx="0">
+            <a:schemeClr val="dk1"/>
+          </a:effectRef>
+          <a:fontRef idx="minor">
+            <a:schemeClr val="dk1"/>
+          </a:fontRef>
+        </p:style>
+        <p:txBody>
+          <a:bodyPr rtlCol="0" anchor="ctr"/>
+          <a:lstStyle/>
+          <a:p>
+            <a:pPr algn="ctr"/>
+            <a:endParaRPr lang="it-IT"/>
+          </a:p>
+        </p:txBody>
+      </p:sp>
+      <p:cxnSp>
+        <p:nvCxnSpPr>
+          <p:cNvPr id="23" name="Connettore 2 22">
+            <a:extLst>
+              <a:ext uri="{FF2B5EF4-FFF2-40B4-BE49-F238E27FC236}">
+                <a16:creationId xmlns:a16="http://schemas.microsoft.com/office/drawing/2014/main" id="{C5D6005B-A3CA-DC00-A898-65ADE0AAC6FD}"/>
+              </a:ext>
+            </a:extLst>
+          </p:cNvPr>
+          <p:cNvCxnSpPr/>
+          <p:nvPr/>
+        </p:nvCxnSpPr>
+        <p:spPr>
+          <a:xfrm>
+            <a:off x="3680460" y="4972429"/>
+            <a:ext cx="4998720" cy="0"/>
+          </a:xfrm>
+          <a:prstGeom prst="straightConnector1">
+            <a:avLst/>
+          </a:prstGeom>
+          <a:ln w="28575">
+            <a:solidFill>
+              <a:schemeClr val="tx1"/>
+            </a:solidFill>
+            <a:tailEnd type="triangle"/>
+          </a:ln>
+        </p:spPr>
+        <p:style>
+          <a:lnRef idx="2">
+            <a:schemeClr val="accent1"/>
+          </a:lnRef>
+          <a:fillRef idx="0">
+            <a:schemeClr val="accent1"/>
+          </a:fillRef>
+          <a:effectRef idx="1">
+            <a:schemeClr val="accent1"/>
+          </a:effectRef>
+          <a:fontRef idx="minor">
+            <a:schemeClr val="tx1"/>
+          </a:fontRef>
+        </p:style>
+      </p:cxnSp>
+      <p:cxnSp>
+        <p:nvCxnSpPr>
+          <p:cNvPr id="25" name="Connettore 2 24">
+            <a:extLst>
+              <a:ext uri="{FF2B5EF4-FFF2-40B4-BE49-F238E27FC236}">
+                <a16:creationId xmlns:a16="http://schemas.microsoft.com/office/drawing/2014/main" id="{21D2320D-5932-0C24-2512-8F9FF4D83EA5}"/>
+              </a:ext>
+            </a:extLst>
+          </p:cNvPr>
+          <p:cNvCxnSpPr/>
+          <p:nvPr/>
+        </p:nvCxnSpPr>
+        <p:spPr>
+          <a:xfrm flipV="1">
+            <a:off x="3680460" y="1424940"/>
+            <a:ext cx="0" cy="3547489"/>
+          </a:xfrm>
+          <a:prstGeom prst="straightConnector1">
+            <a:avLst/>
+          </a:prstGeom>
+          <a:ln w="28575">
+            <a:solidFill>
+              <a:schemeClr val="tx1"/>
+            </a:solidFill>
+            <a:tailEnd type="triangle"/>
+          </a:ln>
+        </p:spPr>
+        <p:style>
+          <a:lnRef idx="2">
+            <a:schemeClr val="accent1"/>
+          </a:lnRef>
+          <a:fillRef idx="0">
+            <a:schemeClr val="accent1"/>
+          </a:fillRef>
+          <a:effectRef idx="1">
+            <a:schemeClr val="accent1"/>
+          </a:effectRef>
+          <a:fontRef idx="minor">
+            <a:schemeClr val="tx1"/>
+          </a:fontRef>
+        </p:style>
+      </p:cxnSp>
+      <p:grpSp>
+        <p:nvGrpSpPr>
+          <p:cNvPr id="53" name="Gruppo 52">
+            <a:extLst>
+              <a:ext uri="{FF2B5EF4-FFF2-40B4-BE49-F238E27FC236}">
+                <a16:creationId xmlns:a16="http://schemas.microsoft.com/office/drawing/2014/main" id="{DC83CBCF-1DC7-D0B7-2C63-7E31AA31EB57}"/>
+              </a:ext>
+            </a:extLst>
+          </p:cNvPr>
+          <p:cNvGrpSpPr/>
+          <p:nvPr/>
+        </p:nvGrpSpPr>
+        <p:grpSpPr>
+          <a:xfrm rot="16200000">
+            <a:off x="6968933" y="3544674"/>
+            <a:ext cx="283810" cy="3157679"/>
+            <a:chOff x="3317131" y="1562100"/>
+            <a:chExt cx="363329" cy="3157679"/>
+          </a:xfrm>
+        </p:grpSpPr>
+        <p:cxnSp>
+          <p:nvCxnSpPr>
+            <p:cNvPr id="54" name="Connettore diritto 53">
+              <a:extLst>
+                <a:ext uri="{FF2B5EF4-FFF2-40B4-BE49-F238E27FC236}">
+                  <a16:creationId xmlns:a16="http://schemas.microsoft.com/office/drawing/2014/main" id="{0078CAE4-AD5F-7D9F-11F8-5B07C1EEAD16}"/>
+                </a:ext>
+              </a:extLst>
+            </p:cNvPr>
+            <p:cNvCxnSpPr/>
+            <p:nvPr/>
+          </p:nvCxnSpPr>
+          <p:spPr>
+            <a:xfrm flipH="1">
+              <a:off x="3321844" y="1562100"/>
+              <a:ext cx="358616" cy="230981"/>
+            </a:xfrm>
+            <a:prstGeom prst="line">
+              <a:avLst/>
+            </a:prstGeom>
+            <a:ln>
+              <a:solidFill>
+                <a:schemeClr val="tx1"/>
+              </a:solidFill>
+            </a:ln>
+          </p:spPr>
+          <p:style>
+            <a:lnRef idx="2">
+              <a:schemeClr val="accent1"/>
+            </a:lnRef>
+            <a:fillRef idx="0">
+              <a:schemeClr val="accent1"/>
+            </a:fillRef>
+            <a:effectRef idx="1">
+              <a:schemeClr val="accent1"/>
+            </a:effectRef>
+            <a:fontRef idx="minor">
+              <a:schemeClr val="tx1"/>
+            </a:fontRef>
+          </p:style>
+        </p:cxnSp>
+        <p:cxnSp>
+          <p:nvCxnSpPr>
+            <p:cNvPr id="55" name="Connettore diritto 54">
+              <a:extLst>
+                <a:ext uri="{FF2B5EF4-FFF2-40B4-BE49-F238E27FC236}">
+                  <a16:creationId xmlns:a16="http://schemas.microsoft.com/office/drawing/2014/main" id="{1BDA8923-8646-563F-7993-ADAD48C2370C}"/>
+                </a:ext>
+              </a:extLst>
+            </p:cNvPr>
+            <p:cNvCxnSpPr/>
+            <p:nvPr/>
+          </p:nvCxnSpPr>
+          <p:spPr>
+            <a:xfrm flipH="1">
+              <a:off x="3321844" y="1690046"/>
+              <a:ext cx="358616" cy="230981"/>
+            </a:xfrm>
+            <a:prstGeom prst="line">
+              <a:avLst/>
+            </a:prstGeom>
+            <a:ln>
+              <a:solidFill>
+                <a:schemeClr val="tx1"/>
+              </a:solidFill>
+            </a:ln>
+          </p:spPr>
+          <p:style>
+            <a:lnRef idx="2">
+              <a:schemeClr val="accent1"/>
+            </a:lnRef>
+            <a:fillRef idx="0">
+              <a:schemeClr val="accent1"/>
+            </a:fillRef>
+            <a:effectRef idx="1">
+              <a:schemeClr val="accent1"/>
+            </a:effectRef>
+            <a:fontRef idx="minor">
+              <a:schemeClr val="tx1"/>
+            </a:fontRef>
+          </p:style>
+        </p:cxnSp>
+        <p:cxnSp>
+          <p:nvCxnSpPr>
+            <p:cNvPr id="56" name="Connettore diritto 55">
+              <a:extLst>
+                <a:ext uri="{FF2B5EF4-FFF2-40B4-BE49-F238E27FC236}">
+                  <a16:creationId xmlns:a16="http://schemas.microsoft.com/office/drawing/2014/main" id="{CE6F5FF3-69CB-8DD3-7CD8-79969D3F1D76}"/>
+                </a:ext>
+              </a:extLst>
+            </p:cNvPr>
+            <p:cNvCxnSpPr/>
+            <p:nvPr/>
+          </p:nvCxnSpPr>
+          <p:spPr>
+            <a:xfrm flipH="1">
+              <a:off x="3321844" y="1814750"/>
+              <a:ext cx="358616" cy="230981"/>
+            </a:xfrm>
+            <a:prstGeom prst="line">
+              <a:avLst/>
+            </a:prstGeom>
+            <a:ln>
+              <a:solidFill>
+                <a:schemeClr val="tx1"/>
+              </a:solidFill>
+            </a:ln>
+          </p:spPr>
+          <p:style>
+            <a:lnRef idx="2">
+              <a:schemeClr val="accent1"/>
+            </a:lnRef>
+            <a:fillRef idx="0">
+              <a:schemeClr val="accent1"/>
+            </a:fillRef>
+            <a:effectRef idx="1">
+              <a:schemeClr val="accent1"/>
+            </a:effectRef>
+            <a:fontRef idx="minor">
+              <a:schemeClr val="tx1"/>
+            </a:fontRef>
+          </p:style>
+        </p:cxnSp>
+        <p:cxnSp>
+          <p:nvCxnSpPr>
+            <p:cNvPr id="57" name="Connettore diritto 56">
+              <a:extLst>
+                <a:ext uri="{FF2B5EF4-FFF2-40B4-BE49-F238E27FC236}">
+                  <a16:creationId xmlns:a16="http://schemas.microsoft.com/office/drawing/2014/main" id="{775E208A-280E-97AB-6804-CD947398747E}"/>
+                </a:ext>
+              </a:extLst>
+            </p:cNvPr>
+            <p:cNvCxnSpPr/>
+            <p:nvPr/>
+          </p:nvCxnSpPr>
+          <p:spPr>
+            <a:xfrm flipH="1">
+              <a:off x="3321843" y="1942696"/>
+              <a:ext cx="358616" cy="230981"/>
+            </a:xfrm>
+            <a:prstGeom prst="line">
+              <a:avLst/>
+            </a:prstGeom>
+            <a:ln>
+              <a:solidFill>
+                <a:schemeClr val="tx1"/>
+              </a:solidFill>
+            </a:ln>
+          </p:spPr>
+          <p:style>
+            <a:lnRef idx="2">
+              <a:schemeClr val="accent1"/>
+            </a:lnRef>
+            <a:fillRef idx="0">
+              <a:schemeClr val="accent1"/>
+            </a:fillRef>
+            <a:effectRef idx="1">
+              <a:schemeClr val="accent1"/>
+            </a:effectRef>
+            <a:fontRef idx="minor">
+              <a:schemeClr val="tx1"/>
+            </a:fontRef>
+          </p:style>
+        </p:cxnSp>
+        <p:cxnSp>
+          <p:nvCxnSpPr>
+            <p:cNvPr id="58" name="Connettore diritto 57">
+              <a:extLst>
+                <a:ext uri="{FF2B5EF4-FFF2-40B4-BE49-F238E27FC236}">
+                  <a16:creationId xmlns:a16="http://schemas.microsoft.com/office/drawing/2014/main" id="{B8A4AD56-BD57-0D59-7D2B-5DE5B85B36F2}"/>
+                </a:ext>
+              </a:extLst>
+            </p:cNvPr>
+            <p:cNvCxnSpPr/>
+            <p:nvPr/>
+          </p:nvCxnSpPr>
+          <p:spPr>
+            <a:xfrm flipH="1">
+              <a:off x="3321843" y="2070642"/>
+              <a:ext cx="358616" cy="230981"/>
+            </a:xfrm>
+            <a:prstGeom prst="line">
+              <a:avLst/>
+            </a:prstGeom>
+            <a:ln>
+              <a:solidFill>
+                <a:schemeClr val="tx1"/>
+              </a:solidFill>
+            </a:ln>
+          </p:spPr>
+          <p:style>
+            <a:lnRef idx="2">
+              <a:schemeClr val="accent1"/>
+            </a:lnRef>
+            <a:fillRef idx="0">
+              <a:schemeClr val="accent1"/>
+            </a:fillRef>
+            <a:effectRef idx="1">
+              <a:schemeClr val="accent1"/>
+            </a:effectRef>
+            <a:fontRef idx="minor">
+              <a:schemeClr val="tx1"/>
+            </a:fontRef>
+          </p:style>
+        </p:cxnSp>
+        <p:cxnSp>
+          <p:nvCxnSpPr>
+            <p:cNvPr id="59" name="Connettore diritto 58">
+              <a:extLst>
+                <a:ext uri="{FF2B5EF4-FFF2-40B4-BE49-F238E27FC236}">
+                  <a16:creationId xmlns:a16="http://schemas.microsoft.com/office/drawing/2014/main" id="{E9433E0E-3EC9-02CE-2ECC-4A58CD39234B}"/>
+                </a:ext>
+              </a:extLst>
+            </p:cNvPr>
+            <p:cNvCxnSpPr/>
+            <p:nvPr/>
+          </p:nvCxnSpPr>
+          <p:spPr>
+            <a:xfrm flipH="1">
+              <a:off x="3321843" y="2195346"/>
+              <a:ext cx="358616" cy="230981"/>
+            </a:xfrm>
+            <a:prstGeom prst="line">
+              <a:avLst/>
+            </a:prstGeom>
+            <a:ln>
+              <a:solidFill>
+                <a:schemeClr val="tx1"/>
+              </a:solidFill>
+            </a:ln>
+          </p:spPr>
+          <p:style>
+            <a:lnRef idx="2">
+              <a:schemeClr val="accent1"/>
+            </a:lnRef>
+            <a:fillRef idx="0">
+              <a:schemeClr val="accent1"/>
+            </a:fillRef>
+            <a:effectRef idx="1">
+              <a:schemeClr val="accent1"/>
+            </a:effectRef>
+            <a:fontRef idx="minor">
+              <a:schemeClr val="tx1"/>
+            </a:fontRef>
+          </p:style>
+        </p:cxnSp>
+        <p:cxnSp>
+          <p:nvCxnSpPr>
+            <p:cNvPr id="60" name="Connettore diritto 59">
+              <a:extLst>
+                <a:ext uri="{FF2B5EF4-FFF2-40B4-BE49-F238E27FC236}">
+                  <a16:creationId xmlns:a16="http://schemas.microsoft.com/office/drawing/2014/main" id="{2ED3565F-4E7D-01E7-E22C-E5D8C477A738}"/>
+                </a:ext>
+              </a:extLst>
+            </p:cNvPr>
+            <p:cNvCxnSpPr/>
+            <p:nvPr/>
+          </p:nvCxnSpPr>
+          <p:spPr>
+            <a:xfrm flipH="1">
+              <a:off x="3321844" y="2328229"/>
+              <a:ext cx="358616" cy="230981"/>
+            </a:xfrm>
+            <a:prstGeom prst="line">
+              <a:avLst/>
+            </a:prstGeom>
+            <a:ln>
+              <a:solidFill>
+                <a:schemeClr val="tx1"/>
+              </a:solidFill>
+            </a:ln>
+          </p:spPr>
+          <p:style>
+            <a:lnRef idx="2">
+              <a:schemeClr val="accent1"/>
+            </a:lnRef>
+            <a:fillRef idx="0">
+              <a:schemeClr val="accent1"/>
+            </a:fillRef>
+            <a:effectRef idx="1">
+              <a:schemeClr val="accent1"/>
+            </a:effectRef>
+            <a:fontRef idx="minor">
+              <a:schemeClr val="tx1"/>
+            </a:fontRef>
+          </p:style>
+        </p:cxnSp>
+        <p:cxnSp>
+          <p:nvCxnSpPr>
+            <p:cNvPr id="61" name="Connettore diritto 60">
+              <a:extLst>
+                <a:ext uri="{FF2B5EF4-FFF2-40B4-BE49-F238E27FC236}">
+                  <a16:creationId xmlns:a16="http://schemas.microsoft.com/office/drawing/2014/main" id="{5EAA472D-5105-6131-F533-901E56B140EC}"/>
+                </a:ext>
+              </a:extLst>
+            </p:cNvPr>
+            <p:cNvCxnSpPr/>
+            <p:nvPr/>
+          </p:nvCxnSpPr>
+          <p:spPr>
+            <a:xfrm flipH="1">
+              <a:off x="3321844" y="2456175"/>
+              <a:ext cx="358616" cy="230981"/>
+            </a:xfrm>
+            <a:prstGeom prst="line">
+              <a:avLst/>
+            </a:prstGeom>
+            <a:ln>
+              <a:solidFill>
+                <a:schemeClr val="tx1"/>
+              </a:solidFill>
+            </a:ln>
+          </p:spPr>
+          <p:style>
+            <a:lnRef idx="2">
+              <a:schemeClr val="accent1"/>
+            </a:lnRef>
+            <a:fillRef idx="0">
+              <a:schemeClr val="accent1"/>
+            </a:fillRef>
+            <a:effectRef idx="1">
+              <a:schemeClr val="accent1"/>
+            </a:effectRef>
+            <a:fontRef idx="minor">
+              <a:schemeClr val="tx1"/>
+            </a:fontRef>
+          </p:style>
+        </p:cxnSp>
+        <p:cxnSp>
+          <p:nvCxnSpPr>
+            <p:cNvPr id="62" name="Connettore diritto 61">
+              <a:extLst>
+                <a:ext uri="{FF2B5EF4-FFF2-40B4-BE49-F238E27FC236}">
+                  <a16:creationId xmlns:a16="http://schemas.microsoft.com/office/drawing/2014/main" id="{7094CBDD-D7EC-2787-27E5-3617BCC2604F}"/>
+                </a:ext>
+              </a:extLst>
+            </p:cNvPr>
+            <p:cNvCxnSpPr/>
+            <p:nvPr/>
+          </p:nvCxnSpPr>
+          <p:spPr>
+            <a:xfrm flipH="1">
+              <a:off x="3321844" y="2580879"/>
+              <a:ext cx="358616" cy="230981"/>
+            </a:xfrm>
+            <a:prstGeom prst="line">
+              <a:avLst/>
+            </a:prstGeom>
+            <a:ln>
+              <a:solidFill>
+                <a:schemeClr val="tx1"/>
+              </a:solidFill>
+            </a:ln>
+          </p:spPr>
+          <p:style>
+            <a:lnRef idx="2">
+              <a:schemeClr val="accent1"/>
+            </a:lnRef>
+            <a:fillRef idx="0">
+              <a:schemeClr val="accent1"/>
+            </a:fillRef>
+            <a:effectRef idx="1">
+              <a:schemeClr val="accent1"/>
+            </a:effectRef>
+            <a:fontRef idx="minor">
+              <a:schemeClr val="tx1"/>
+            </a:fontRef>
+          </p:style>
+        </p:cxnSp>
+        <p:cxnSp>
+          <p:nvCxnSpPr>
+            <p:cNvPr id="63" name="Connettore diritto 62">
+              <a:extLst>
+                <a:ext uri="{FF2B5EF4-FFF2-40B4-BE49-F238E27FC236}">
+                  <a16:creationId xmlns:a16="http://schemas.microsoft.com/office/drawing/2014/main" id="{20215F2E-BD71-C2A9-2729-63A60B523166}"/>
+                </a:ext>
+              </a:extLst>
+            </p:cNvPr>
+            <p:cNvCxnSpPr/>
+            <p:nvPr/>
+          </p:nvCxnSpPr>
+          <p:spPr>
+            <a:xfrm flipH="1">
+              <a:off x="3321843" y="2708825"/>
+              <a:ext cx="358616" cy="230981"/>
+            </a:xfrm>
+            <a:prstGeom prst="line">
+              <a:avLst/>
+            </a:prstGeom>
+            <a:ln>
+              <a:solidFill>
+                <a:schemeClr val="tx1"/>
+              </a:solidFill>
+            </a:ln>
+          </p:spPr>
+          <p:style>
+            <a:lnRef idx="2">
+              <a:schemeClr val="accent1"/>
+            </a:lnRef>
+            <a:fillRef idx="0">
+              <a:schemeClr val="accent1"/>
+            </a:fillRef>
+            <a:effectRef idx="1">
+              <a:schemeClr val="accent1"/>
+            </a:effectRef>
+            <a:fontRef idx="minor">
+              <a:schemeClr val="tx1"/>
+            </a:fontRef>
+          </p:style>
+        </p:cxnSp>
+        <p:cxnSp>
+          <p:nvCxnSpPr>
+            <p:cNvPr id="64" name="Connettore diritto 63">
+              <a:extLst>
+                <a:ext uri="{FF2B5EF4-FFF2-40B4-BE49-F238E27FC236}">
+                  <a16:creationId xmlns:a16="http://schemas.microsoft.com/office/drawing/2014/main" id="{714AD00C-90A0-9D3A-12A8-78042F591BCD}"/>
+                </a:ext>
+              </a:extLst>
+            </p:cNvPr>
+            <p:cNvCxnSpPr/>
+            <p:nvPr/>
+          </p:nvCxnSpPr>
+          <p:spPr>
+            <a:xfrm flipH="1">
+              <a:off x="3321843" y="2836771"/>
+              <a:ext cx="358616" cy="230981"/>
+            </a:xfrm>
+            <a:prstGeom prst="line">
+              <a:avLst/>
+            </a:prstGeom>
+            <a:ln>
+              <a:solidFill>
+                <a:schemeClr val="tx1"/>
+              </a:solidFill>
+            </a:ln>
+          </p:spPr>
+          <p:style>
+            <a:lnRef idx="2">
+              <a:schemeClr val="accent1"/>
+            </a:lnRef>
+            <a:fillRef idx="0">
+              <a:schemeClr val="accent1"/>
+            </a:fillRef>
+            <a:effectRef idx="1">
+              <a:schemeClr val="accent1"/>
+            </a:effectRef>
+            <a:fontRef idx="minor">
+              <a:schemeClr val="tx1"/>
+            </a:fontRef>
+          </p:style>
+        </p:cxnSp>
+        <p:cxnSp>
+          <p:nvCxnSpPr>
+            <p:cNvPr id="65" name="Connettore diritto 64">
+              <a:extLst>
+                <a:ext uri="{FF2B5EF4-FFF2-40B4-BE49-F238E27FC236}">
+                  <a16:creationId xmlns:a16="http://schemas.microsoft.com/office/drawing/2014/main" id="{FEBB183C-F87C-E754-8B45-1DDD7046E2BA}"/>
+                </a:ext>
+              </a:extLst>
+            </p:cNvPr>
+            <p:cNvCxnSpPr/>
+            <p:nvPr/>
+          </p:nvCxnSpPr>
+          <p:spPr>
+            <a:xfrm flipH="1">
+              <a:off x="3321843" y="2961475"/>
+              <a:ext cx="358616" cy="230981"/>
+            </a:xfrm>
+            <a:prstGeom prst="line">
+              <a:avLst/>
+            </a:prstGeom>
+            <a:ln>
+              <a:solidFill>
+                <a:schemeClr val="tx1"/>
+              </a:solidFill>
+            </a:ln>
+          </p:spPr>
+          <p:style>
+            <a:lnRef idx="2">
+              <a:schemeClr val="accent1"/>
+            </a:lnRef>
+            <a:fillRef idx="0">
+              <a:schemeClr val="accent1"/>
+            </a:fillRef>
+            <a:effectRef idx="1">
+              <a:schemeClr val="accent1"/>
+            </a:effectRef>
+            <a:fontRef idx="minor">
+              <a:schemeClr val="tx1"/>
+            </a:fontRef>
+          </p:style>
+        </p:cxnSp>
+        <p:cxnSp>
+          <p:nvCxnSpPr>
+            <p:cNvPr id="66" name="Connettore diritto 65">
+              <a:extLst>
+                <a:ext uri="{FF2B5EF4-FFF2-40B4-BE49-F238E27FC236}">
+                  <a16:creationId xmlns:a16="http://schemas.microsoft.com/office/drawing/2014/main" id="{F3BE770F-C74A-2DFE-C5AA-35807731F1E9}"/>
+                </a:ext>
+              </a:extLst>
+            </p:cNvPr>
+            <p:cNvCxnSpPr/>
+            <p:nvPr/>
+          </p:nvCxnSpPr>
+          <p:spPr>
+            <a:xfrm flipH="1">
+              <a:off x="3317132" y="3089423"/>
+              <a:ext cx="358616" cy="230981"/>
+            </a:xfrm>
+            <a:prstGeom prst="line">
+              <a:avLst/>
+            </a:prstGeom>
+            <a:ln>
+              <a:solidFill>
+                <a:schemeClr val="tx1"/>
+              </a:solidFill>
+            </a:ln>
+          </p:spPr>
+          <p:style>
+            <a:lnRef idx="2">
+              <a:schemeClr val="accent1"/>
+            </a:lnRef>
+            <a:fillRef idx="0">
+              <a:schemeClr val="accent1"/>
+            </a:fillRef>
+            <a:effectRef idx="1">
+              <a:schemeClr val="accent1"/>
+            </a:effectRef>
+            <a:fontRef idx="minor">
+              <a:schemeClr val="tx1"/>
+            </a:fontRef>
+          </p:style>
+        </p:cxnSp>
+        <p:cxnSp>
+          <p:nvCxnSpPr>
+            <p:cNvPr id="67" name="Connettore diritto 66">
+              <a:extLst>
+                <a:ext uri="{FF2B5EF4-FFF2-40B4-BE49-F238E27FC236}">
+                  <a16:creationId xmlns:a16="http://schemas.microsoft.com/office/drawing/2014/main" id="{557D055B-4A17-6D5B-812A-739C461EDC47}"/>
+                </a:ext>
+              </a:extLst>
+            </p:cNvPr>
+            <p:cNvCxnSpPr/>
+            <p:nvPr/>
+          </p:nvCxnSpPr>
+          <p:spPr>
+            <a:xfrm flipH="1">
+              <a:off x="3317132" y="3217369"/>
+              <a:ext cx="358616" cy="230981"/>
+            </a:xfrm>
+            <a:prstGeom prst="line">
+              <a:avLst/>
+            </a:prstGeom>
+            <a:ln>
+              <a:solidFill>
+                <a:schemeClr val="tx1"/>
+              </a:solidFill>
+            </a:ln>
+          </p:spPr>
+          <p:style>
+            <a:lnRef idx="2">
+              <a:schemeClr val="accent1"/>
+            </a:lnRef>
+            <a:fillRef idx="0">
+              <a:schemeClr val="accent1"/>
+            </a:fillRef>
+            <a:effectRef idx="1">
+              <a:schemeClr val="accent1"/>
+            </a:effectRef>
+            <a:fontRef idx="minor">
+              <a:schemeClr val="tx1"/>
+            </a:fontRef>
+          </p:style>
+        </p:cxnSp>
+        <p:cxnSp>
+          <p:nvCxnSpPr>
+            <p:cNvPr id="68" name="Connettore diritto 67">
+              <a:extLst>
+                <a:ext uri="{FF2B5EF4-FFF2-40B4-BE49-F238E27FC236}">
+                  <a16:creationId xmlns:a16="http://schemas.microsoft.com/office/drawing/2014/main" id="{3DA3C397-5796-0D32-E75E-B0B406341FD1}"/>
+                </a:ext>
+              </a:extLst>
+            </p:cNvPr>
+            <p:cNvCxnSpPr/>
+            <p:nvPr/>
+          </p:nvCxnSpPr>
+          <p:spPr>
+            <a:xfrm flipH="1">
+              <a:off x="3317132" y="3342073"/>
+              <a:ext cx="358616" cy="230981"/>
+            </a:xfrm>
+            <a:prstGeom prst="line">
+              <a:avLst/>
+            </a:prstGeom>
+            <a:ln>
+              <a:solidFill>
+                <a:schemeClr val="tx1"/>
+              </a:solidFill>
+            </a:ln>
+          </p:spPr>
+          <p:style>
+            <a:lnRef idx="2">
+              <a:schemeClr val="accent1"/>
+            </a:lnRef>
+            <a:fillRef idx="0">
+              <a:schemeClr val="accent1"/>
+            </a:fillRef>
+            <a:effectRef idx="1">
+              <a:schemeClr val="accent1"/>
+            </a:effectRef>
+            <a:fontRef idx="minor">
+              <a:schemeClr val="tx1"/>
+            </a:fontRef>
+          </p:style>
+        </p:cxnSp>
+        <p:cxnSp>
+          <p:nvCxnSpPr>
+            <p:cNvPr id="69" name="Connettore diritto 68">
+              <a:extLst>
+                <a:ext uri="{FF2B5EF4-FFF2-40B4-BE49-F238E27FC236}">
+                  <a16:creationId xmlns:a16="http://schemas.microsoft.com/office/drawing/2014/main" id="{C0760C20-DE86-BE54-693F-6F6F700038A4}"/>
+                </a:ext>
+              </a:extLst>
+            </p:cNvPr>
+            <p:cNvCxnSpPr/>
+            <p:nvPr/>
+          </p:nvCxnSpPr>
+          <p:spPr>
+            <a:xfrm flipH="1">
+              <a:off x="3317131" y="3470019"/>
+              <a:ext cx="358616" cy="230981"/>
+            </a:xfrm>
+            <a:prstGeom prst="line">
+              <a:avLst/>
+            </a:prstGeom>
+            <a:ln>
+              <a:solidFill>
+                <a:schemeClr val="tx1"/>
+              </a:solidFill>
+            </a:ln>
+          </p:spPr>
+          <p:style>
+            <a:lnRef idx="2">
+              <a:schemeClr val="accent1"/>
+            </a:lnRef>
+            <a:fillRef idx="0">
+              <a:schemeClr val="accent1"/>
+            </a:fillRef>
+            <a:effectRef idx="1">
+              <a:schemeClr val="accent1"/>
+            </a:effectRef>
+            <a:fontRef idx="minor">
+              <a:schemeClr val="tx1"/>
+            </a:fontRef>
+          </p:style>
+        </p:cxnSp>
+        <p:cxnSp>
+          <p:nvCxnSpPr>
+            <p:cNvPr id="70" name="Connettore diritto 69">
+              <a:extLst>
+                <a:ext uri="{FF2B5EF4-FFF2-40B4-BE49-F238E27FC236}">
+                  <a16:creationId xmlns:a16="http://schemas.microsoft.com/office/drawing/2014/main" id="{336E6076-F11E-E90E-3B8D-E8CA0CEFF85F}"/>
+                </a:ext>
+              </a:extLst>
+            </p:cNvPr>
+            <p:cNvCxnSpPr/>
+            <p:nvPr/>
+          </p:nvCxnSpPr>
+          <p:spPr>
+            <a:xfrm flipH="1">
+              <a:off x="3317131" y="3597965"/>
+              <a:ext cx="358616" cy="230981"/>
+            </a:xfrm>
+            <a:prstGeom prst="line">
+              <a:avLst/>
+            </a:prstGeom>
+            <a:ln>
+              <a:solidFill>
+                <a:schemeClr val="tx1"/>
+              </a:solidFill>
+            </a:ln>
+          </p:spPr>
+          <p:style>
+            <a:lnRef idx="2">
+              <a:schemeClr val="accent1"/>
+            </a:lnRef>
+            <a:fillRef idx="0">
+              <a:schemeClr val="accent1"/>
+            </a:fillRef>
+            <a:effectRef idx="1">
+              <a:schemeClr val="accent1"/>
+            </a:effectRef>
+            <a:fontRef idx="minor">
+              <a:schemeClr val="tx1"/>
+            </a:fontRef>
+          </p:style>
+        </p:cxnSp>
+        <p:cxnSp>
+          <p:nvCxnSpPr>
+            <p:cNvPr id="71" name="Connettore diritto 70">
+              <a:extLst>
+                <a:ext uri="{FF2B5EF4-FFF2-40B4-BE49-F238E27FC236}">
+                  <a16:creationId xmlns:a16="http://schemas.microsoft.com/office/drawing/2014/main" id="{E7FD3DBC-8DB9-A014-3A2F-048956646BFE}"/>
+                </a:ext>
+              </a:extLst>
+            </p:cNvPr>
+            <p:cNvCxnSpPr/>
+            <p:nvPr/>
+          </p:nvCxnSpPr>
+          <p:spPr>
+            <a:xfrm flipH="1">
+              <a:off x="3317131" y="3722669"/>
+              <a:ext cx="358616" cy="230981"/>
+            </a:xfrm>
+            <a:prstGeom prst="line">
+              <a:avLst/>
+            </a:prstGeom>
+            <a:ln>
+              <a:solidFill>
+                <a:schemeClr val="tx1"/>
+              </a:solidFill>
+            </a:ln>
+          </p:spPr>
+          <p:style>
+            <a:lnRef idx="2">
+              <a:schemeClr val="accent1"/>
+            </a:lnRef>
+            <a:fillRef idx="0">
+              <a:schemeClr val="accent1"/>
+            </a:fillRef>
+            <a:effectRef idx="1">
+              <a:schemeClr val="accent1"/>
+            </a:effectRef>
+            <a:fontRef idx="minor">
+              <a:schemeClr val="tx1"/>
+            </a:fontRef>
+          </p:style>
+        </p:cxnSp>
+        <p:cxnSp>
+          <p:nvCxnSpPr>
+            <p:cNvPr id="72" name="Connettore diritto 71">
+              <a:extLst>
+                <a:ext uri="{FF2B5EF4-FFF2-40B4-BE49-F238E27FC236}">
+                  <a16:creationId xmlns:a16="http://schemas.microsoft.com/office/drawing/2014/main" id="{31E7FB12-1296-FB74-9BB8-83DBFEFCBB7B}"/>
+                </a:ext>
+              </a:extLst>
+            </p:cNvPr>
+            <p:cNvCxnSpPr/>
+            <p:nvPr/>
+          </p:nvCxnSpPr>
+          <p:spPr>
+            <a:xfrm flipH="1">
+              <a:off x="3317132" y="3855552"/>
+              <a:ext cx="358616" cy="230981"/>
+            </a:xfrm>
+            <a:prstGeom prst="line">
+              <a:avLst/>
+            </a:prstGeom>
+            <a:ln>
+              <a:solidFill>
+                <a:schemeClr val="tx1"/>
+              </a:solidFill>
+            </a:ln>
+          </p:spPr>
+          <p:style>
+            <a:lnRef idx="2">
+              <a:schemeClr val="accent1"/>
+            </a:lnRef>
+            <a:fillRef idx="0">
+              <a:schemeClr val="accent1"/>
+            </a:fillRef>
+            <a:effectRef idx="1">
+              <a:schemeClr val="accent1"/>
+            </a:effectRef>
+            <a:fontRef idx="minor">
+              <a:schemeClr val="tx1"/>
+            </a:fontRef>
+          </p:style>
+        </p:cxnSp>
+        <p:cxnSp>
+          <p:nvCxnSpPr>
+            <p:cNvPr id="73" name="Connettore diritto 72">
+              <a:extLst>
+                <a:ext uri="{FF2B5EF4-FFF2-40B4-BE49-F238E27FC236}">
+                  <a16:creationId xmlns:a16="http://schemas.microsoft.com/office/drawing/2014/main" id="{D21A5961-3528-426B-A99C-4D30D0F347DC}"/>
+                </a:ext>
+              </a:extLst>
+            </p:cNvPr>
+            <p:cNvCxnSpPr/>
+            <p:nvPr/>
+          </p:nvCxnSpPr>
+          <p:spPr>
+            <a:xfrm flipH="1">
+              <a:off x="3317132" y="3983498"/>
+              <a:ext cx="358616" cy="230981"/>
+            </a:xfrm>
+            <a:prstGeom prst="line">
+              <a:avLst/>
+            </a:prstGeom>
+            <a:ln>
+              <a:solidFill>
+                <a:schemeClr val="tx1"/>
+              </a:solidFill>
+            </a:ln>
+          </p:spPr>
+          <p:style>
+            <a:lnRef idx="2">
+              <a:schemeClr val="accent1"/>
+            </a:lnRef>
+            <a:fillRef idx="0">
+              <a:schemeClr val="accent1"/>
+            </a:fillRef>
+            <a:effectRef idx="1">
+              <a:schemeClr val="accent1"/>
+            </a:effectRef>
+            <a:fontRef idx="minor">
+              <a:schemeClr val="tx1"/>
+            </a:fontRef>
+          </p:style>
+        </p:cxnSp>
+        <p:cxnSp>
+          <p:nvCxnSpPr>
+            <p:cNvPr id="74" name="Connettore diritto 73">
+              <a:extLst>
+                <a:ext uri="{FF2B5EF4-FFF2-40B4-BE49-F238E27FC236}">
+                  <a16:creationId xmlns:a16="http://schemas.microsoft.com/office/drawing/2014/main" id="{81E07EFE-6919-2C76-1C54-64F3612CD8BF}"/>
+                </a:ext>
+              </a:extLst>
+            </p:cNvPr>
+            <p:cNvCxnSpPr/>
+            <p:nvPr/>
+          </p:nvCxnSpPr>
+          <p:spPr>
+            <a:xfrm flipH="1">
+              <a:off x="3317132" y="4108202"/>
+              <a:ext cx="358616" cy="230981"/>
+            </a:xfrm>
+            <a:prstGeom prst="line">
+              <a:avLst/>
+            </a:prstGeom>
+            <a:ln>
+              <a:solidFill>
+                <a:schemeClr val="tx1"/>
+              </a:solidFill>
+            </a:ln>
+          </p:spPr>
+          <p:style>
+            <a:lnRef idx="2">
+              <a:schemeClr val="accent1"/>
+            </a:lnRef>
+            <a:fillRef idx="0">
+              <a:schemeClr val="accent1"/>
+            </a:fillRef>
+            <a:effectRef idx="1">
+              <a:schemeClr val="accent1"/>
+            </a:effectRef>
+            <a:fontRef idx="minor">
+              <a:schemeClr val="tx1"/>
+            </a:fontRef>
+          </p:style>
+        </p:cxnSp>
+        <p:cxnSp>
+          <p:nvCxnSpPr>
+            <p:cNvPr id="75" name="Connettore diritto 74">
+              <a:extLst>
+                <a:ext uri="{FF2B5EF4-FFF2-40B4-BE49-F238E27FC236}">
+                  <a16:creationId xmlns:a16="http://schemas.microsoft.com/office/drawing/2014/main" id="{8A7B0800-2E49-0DBC-B889-9C1F54FE4902}"/>
+                </a:ext>
+              </a:extLst>
+            </p:cNvPr>
+            <p:cNvCxnSpPr/>
+            <p:nvPr/>
+          </p:nvCxnSpPr>
+          <p:spPr>
+            <a:xfrm flipH="1">
+              <a:off x="3317131" y="4236148"/>
+              <a:ext cx="358616" cy="230981"/>
+            </a:xfrm>
+            <a:prstGeom prst="line">
+              <a:avLst/>
+            </a:prstGeom>
+            <a:ln>
+              <a:solidFill>
+                <a:schemeClr val="tx1"/>
+              </a:solidFill>
+            </a:ln>
+          </p:spPr>
+          <p:style>
+            <a:lnRef idx="2">
+              <a:schemeClr val="accent1"/>
+            </a:lnRef>
+            <a:fillRef idx="0">
+              <a:schemeClr val="accent1"/>
+            </a:fillRef>
+            <a:effectRef idx="1">
+              <a:schemeClr val="accent1"/>
+            </a:effectRef>
+            <a:fontRef idx="minor">
+              <a:schemeClr val="tx1"/>
+            </a:fontRef>
+          </p:style>
+        </p:cxnSp>
+        <p:cxnSp>
+          <p:nvCxnSpPr>
+            <p:cNvPr id="76" name="Connettore diritto 75">
+              <a:extLst>
+                <a:ext uri="{FF2B5EF4-FFF2-40B4-BE49-F238E27FC236}">
+                  <a16:creationId xmlns:a16="http://schemas.microsoft.com/office/drawing/2014/main" id="{9E3B89E1-8E43-CB5A-865C-F4B9A7A08E38}"/>
+                </a:ext>
+              </a:extLst>
+            </p:cNvPr>
+            <p:cNvCxnSpPr/>
+            <p:nvPr/>
+          </p:nvCxnSpPr>
+          <p:spPr>
+            <a:xfrm flipH="1">
+              <a:off x="3317131" y="4364094"/>
+              <a:ext cx="358616" cy="230981"/>
+            </a:xfrm>
+            <a:prstGeom prst="line">
+              <a:avLst/>
+            </a:prstGeom>
+            <a:ln>
+              <a:solidFill>
+                <a:schemeClr val="tx1"/>
+              </a:solidFill>
+            </a:ln>
+          </p:spPr>
+          <p:style>
+            <a:lnRef idx="2">
+              <a:schemeClr val="accent1"/>
+            </a:lnRef>
+            <a:fillRef idx="0">
+              <a:schemeClr val="accent1"/>
+            </a:fillRef>
+            <a:effectRef idx="1">
+              <a:schemeClr val="accent1"/>
+            </a:effectRef>
+            <a:fontRef idx="minor">
+              <a:schemeClr val="tx1"/>
+            </a:fontRef>
+          </p:style>
+        </p:cxnSp>
+        <p:cxnSp>
+          <p:nvCxnSpPr>
+            <p:cNvPr id="77" name="Connettore diritto 76">
+              <a:extLst>
+                <a:ext uri="{FF2B5EF4-FFF2-40B4-BE49-F238E27FC236}">
+                  <a16:creationId xmlns:a16="http://schemas.microsoft.com/office/drawing/2014/main" id="{E2C465D0-FE6F-1ADB-38F6-2DA6D1042D57}"/>
+                </a:ext>
+              </a:extLst>
+            </p:cNvPr>
+            <p:cNvCxnSpPr/>
+            <p:nvPr/>
+          </p:nvCxnSpPr>
+          <p:spPr>
+            <a:xfrm flipH="1">
+              <a:off x="3317131" y="4488798"/>
+              <a:ext cx="358616" cy="230981"/>
+            </a:xfrm>
+            <a:prstGeom prst="line">
+              <a:avLst/>
+            </a:prstGeom>
+            <a:ln>
+              <a:solidFill>
+                <a:schemeClr val="tx1"/>
+              </a:solidFill>
+            </a:ln>
+          </p:spPr>
+          <p:style>
+            <a:lnRef idx="2">
+              <a:schemeClr val="accent1"/>
+            </a:lnRef>
+            <a:fillRef idx="0">
+              <a:schemeClr val="accent1"/>
+            </a:fillRef>
+            <a:effectRef idx="1">
+              <a:schemeClr val="accent1"/>
+            </a:effectRef>
+            <a:fontRef idx="minor">
+              <a:schemeClr val="tx1"/>
+            </a:fontRef>
+          </p:style>
+        </p:cxnSp>
+      </p:grpSp>
+      <p:grpSp>
+        <p:nvGrpSpPr>
+          <p:cNvPr id="78" name="Gruppo 77">
+            <a:extLst>
+              <a:ext uri="{FF2B5EF4-FFF2-40B4-BE49-F238E27FC236}">
+                <a16:creationId xmlns:a16="http://schemas.microsoft.com/office/drawing/2014/main" id="{5925A7A6-5C2F-DFD7-E6D0-3C830DED461B}"/>
+              </a:ext>
+            </a:extLst>
+          </p:cNvPr>
+          <p:cNvGrpSpPr/>
+          <p:nvPr/>
+        </p:nvGrpSpPr>
+        <p:grpSpPr>
+          <a:xfrm rot="16200000">
+            <a:off x="4551606" y="4174526"/>
+            <a:ext cx="283809" cy="1883008"/>
+            <a:chOff x="3317131" y="2836771"/>
+            <a:chExt cx="363328" cy="1883008"/>
+          </a:xfrm>
+        </p:grpSpPr>
+        <p:cxnSp>
+          <p:nvCxnSpPr>
+            <p:cNvPr id="89" name="Connettore diritto 88">
+              <a:extLst>
+                <a:ext uri="{FF2B5EF4-FFF2-40B4-BE49-F238E27FC236}">
+                  <a16:creationId xmlns:a16="http://schemas.microsoft.com/office/drawing/2014/main" id="{4B4CBDB9-FF79-F0B5-5186-D86BAE868942}"/>
+                </a:ext>
+              </a:extLst>
+            </p:cNvPr>
+            <p:cNvCxnSpPr/>
+            <p:nvPr/>
+          </p:nvCxnSpPr>
+          <p:spPr>
+            <a:xfrm flipH="1">
+              <a:off x="3321843" y="2836771"/>
+              <a:ext cx="358616" cy="230981"/>
+            </a:xfrm>
+            <a:prstGeom prst="line">
+              <a:avLst/>
+            </a:prstGeom>
+            <a:ln>
+              <a:solidFill>
+                <a:schemeClr val="tx1"/>
+              </a:solidFill>
+            </a:ln>
+          </p:spPr>
+          <p:style>
+            <a:lnRef idx="2">
+              <a:schemeClr val="accent1"/>
+            </a:lnRef>
+            <a:fillRef idx="0">
+              <a:schemeClr val="accent1"/>
+            </a:fillRef>
+            <a:effectRef idx="1">
+              <a:schemeClr val="accent1"/>
+            </a:effectRef>
+            <a:fontRef idx="minor">
+              <a:schemeClr val="tx1"/>
+            </a:fontRef>
+          </p:style>
+        </p:cxnSp>
+        <p:cxnSp>
+          <p:nvCxnSpPr>
+            <p:cNvPr id="90" name="Connettore diritto 89">
+              <a:extLst>
+                <a:ext uri="{FF2B5EF4-FFF2-40B4-BE49-F238E27FC236}">
+                  <a16:creationId xmlns:a16="http://schemas.microsoft.com/office/drawing/2014/main" id="{0D4C29CB-BC75-4166-9BD3-A04E932E3DB6}"/>
+                </a:ext>
+              </a:extLst>
+            </p:cNvPr>
+            <p:cNvCxnSpPr/>
+            <p:nvPr/>
+          </p:nvCxnSpPr>
+          <p:spPr>
+            <a:xfrm flipH="1">
+              <a:off x="3321843" y="2961475"/>
+              <a:ext cx="358616" cy="230981"/>
+            </a:xfrm>
+            <a:prstGeom prst="line">
+              <a:avLst/>
+            </a:prstGeom>
+            <a:ln>
+              <a:solidFill>
+                <a:schemeClr val="tx1"/>
+              </a:solidFill>
+            </a:ln>
+          </p:spPr>
+          <p:style>
+            <a:lnRef idx="2">
+              <a:schemeClr val="accent1"/>
+            </a:lnRef>
+            <a:fillRef idx="0">
+              <a:schemeClr val="accent1"/>
+            </a:fillRef>
+            <a:effectRef idx="1">
+              <a:schemeClr val="accent1"/>
+            </a:effectRef>
+            <a:fontRef idx="minor">
+              <a:schemeClr val="tx1"/>
+            </a:fontRef>
+          </p:style>
+        </p:cxnSp>
+        <p:cxnSp>
+          <p:nvCxnSpPr>
+            <p:cNvPr id="91" name="Connettore diritto 90">
+              <a:extLst>
+                <a:ext uri="{FF2B5EF4-FFF2-40B4-BE49-F238E27FC236}">
+                  <a16:creationId xmlns:a16="http://schemas.microsoft.com/office/drawing/2014/main" id="{E69F65A9-A09D-69CC-1486-3BEA46CD1378}"/>
+                </a:ext>
+              </a:extLst>
+            </p:cNvPr>
+            <p:cNvCxnSpPr/>
+            <p:nvPr/>
+          </p:nvCxnSpPr>
+          <p:spPr>
+            <a:xfrm flipH="1">
+              <a:off x="3317132" y="3089423"/>
+              <a:ext cx="358616" cy="230981"/>
+            </a:xfrm>
+            <a:prstGeom prst="line">
+              <a:avLst/>
+            </a:prstGeom>
+            <a:ln>
+              <a:solidFill>
+                <a:schemeClr val="tx1"/>
+              </a:solidFill>
+            </a:ln>
+          </p:spPr>
+          <p:style>
+            <a:lnRef idx="2">
+              <a:schemeClr val="accent1"/>
+            </a:lnRef>
+            <a:fillRef idx="0">
+              <a:schemeClr val="accent1"/>
+            </a:fillRef>
+            <a:effectRef idx="1">
+              <a:schemeClr val="accent1"/>
+            </a:effectRef>
+            <a:fontRef idx="minor">
+              <a:schemeClr val="tx1"/>
+            </a:fontRef>
+          </p:style>
+        </p:cxnSp>
+        <p:cxnSp>
+          <p:nvCxnSpPr>
+            <p:cNvPr id="92" name="Connettore diritto 91">
+              <a:extLst>
+                <a:ext uri="{FF2B5EF4-FFF2-40B4-BE49-F238E27FC236}">
+                  <a16:creationId xmlns:a16="http://schemas.microsoft.com/office/drawing/2014/main" id="{4D0FE201-1398-94CE-1FD0-37AD80DA0F81}"/>
+                </a:ext>
+              </a:extLst>
+            </p:cNvPr>
+            <p:cNvCxnSpPr/>
+            <p:nvPr/>
+          </p:nvCxnSpPr>
+          <p:spPr>
+            <a:xfrm flipH="1">
+              <a:off x="3317132" y="3217369"/>
+              <a:ext cx="358616" cy="230981"/>
+            </a:xfrm>
+            <a:prstGeom prst="line">
+              <a:avLst/>
+            </a:prstGeom>
+            <a:ln>
+              <a:solidFill>
+                <a:schemeClr val="tx1"/>
+              </a:solidFill>
+            </a:ln>
+          </p:spPr>
+          <p:style>
+            <a:lnRef idx="2">
+              <a:schemeClr val="accent1"/>
+            </a:lnRef>
+            <a:fillRef idx="0">
+              <a:schemeClr val="accent1"/>
+            </a:fillRef>
+            <a:effectRef idx="1">
+              <a:schemeClr val="accent1"/>
+            </a:effectRef>
+            <a:fontRef idx="minor">
+              <a:schemeClr val="tx1"/>
+            </a:fontRef>
+          </p:style>
+        </p:cxnSp>
+        <p:cxnSp>
+          <p:nvCxnSpPr>
+            <p:cNvPr id="93" name="Connettore diritto 92">
+              <a:extLst>
+                <a:ext uri="{FF2B5EF4-FFF2-40B4-BE49-F238E27FC236}">
+                  <a16:creationId xmlns:a16="http://schemas.microsoft.com/office/drawing/2014/main" id="{0EE3E46E-0788-0444-5F83-1E854B2DBF86}"/>
+                </a:ext>
+              </a:extLst>
+            </p:cNvPr>
+            <p:cNvCxnSpPr/>
+            <p:nvPr/>
+          </p:nvCxnSpPr>
+          <p:spPr>
+            <a:xfrm flipH="1">
+              <a:off x="3317132" y="3342073"/>
+              <a:ext cx="358616" cy="230981"/>
+            </a:xfrm>
+            <a:prstGeom prst="line">
+              <a:avLst/>
+            </a:prstGeom>
+            <a:ln>
+              <a:solidFill>
+                <a:schemeClr val="tx1"/>
+              </a:solidFill>
+            </a:ln>
+          </p:spPr>
+          <p:style>
+            <a:lnRef idx="2">
+              <a:schemeClr val="accent1"/>
+            </a:lnRef>
+            <a:fillRef idx="0">
+              <a:schemeClr val="accent1"/>
+            </a:fillRef>
+            <a:effectRef idx="1">
+              <a:schemeClr val="accent1"/>
+            </a:effectRef>
+            <a:fontRef idx="minor">
+              <a:schemeClr val="tx1"/>
+            </a:fontRef>
+          </p:style>
+        </p:cxnSp>
+        <p:cxnSp>
+          <p:nvCxnSpPr>
+            <p:cNvPr id="94" name="Connettore diritto 93">
+              <a:extLst>
+                <a:ext uri="{FF2B5EF4-FFF2-40B4-BE49-F238E27FC236}">
+                  <a16:creationId xmlns:a16="http://schemas.microsoft.com/office/drawing/2014/main" id="{0E5FE6AF-9ABA-525A-1D87-260A41074335}"/>
+                </a:ext>
+              </a:extLst>
+            </p:cNvPr>
+            <p:cNvCxnSpPr/>
+            <p:nvPr/>
+          </p:nvCxnSpPr>
+          <p:spPr>
+            <a:xfrm flipH="1">
+              <a:off x="3317131" y="3470019"/>
+              <a:ext cx="358616" cy="230981"/>
+            </a:xfrm>
+            <a:prstGeom prst="line">
+              <a:avLst/>
+            </a:prstGeom>
+            <a:ln>
+              <a:solidFill>
+                <a:schemeClr val="tx1"/>
+              </a:solidFill>
+            </a:ln>
+          </p:spPr>
+          <p:style>
+            <a:lnRef idx="2">
+              <a:schemeClr val="accent1"/>
+            </a:lnRef>
+            <a:fillRef idx="0">
+              <a:schemeClr val="accent1"/>
+            </a:fillRef>
+            <a:effectRef idx="1">
+              <a:schemeClr val="accent1"/>
+            </a:effectRef>
+            <a:fontRef idx="minor">
+              <a:schemeClr val="tx1"/>
+            </a:fontRef>
+          </p:style>
+        </p:cxnSp>
+        <p:cxnSp>
+          <p:nvCxnSpPr>
+            <p:cNvPr id="95" name="Connettore diritto 94">
+              <a:extLst>
+                <a:ext uri="{FF2B5EF4-FFF2-40B4-BE49-F238E27FC236}">
+                  <a16:creationId xmlns:a16="http://schemas.microsoft.com/office/drawing/2014/main" id="{B6FA9B78-8C67-1BD3-1256-3B63AB6B9E75}"/>
+                </a:ext>
+              </a:extLst>
+            </p:cNvPr>
+            <p:cNvCxnSpPr/>
+            <p:nvPr/>
+          </p:nvCxnSpPr>
+          <p:spPr>
+            <a:xfrm flipH="1">
+              <a:off x="3317131" y="3597965"/>
+              <a:ext cx="358616" cy="230981"/>
+            </a:xfrm>
+            <a:prstGeom prst="line">
+              <a:avLst/>
+            </a:prstGeom>
+            <a:ln>
+              <a:solidFill>
+                <a:schemeClr val="tx1"/>
+              </a:solidFill>
+            </a:ln>
+          </p:spPr>
+          <p:style>
+            <a:lnRef idx="2">
+              <a:schemeClr val="accent1"/>
+            </a:lnRef>
+            <a:fillRef idx="0">
+              <a:schemeClr val="accent1"/>
+            </a:fillRef>
+            <a:effectRef idx="1">
+              <a:schemeClr val="accent1"/>
+            </a:effectRef>
+            <a:fontRef idx="minor">
+              <a:schemeClr val="tx1"/>
+            </a:fontRef>
+          </p:style>
+        </p:cxnSp>
+        <p:cxnSp>
+          <p:nvCxnSpPr>
+            <p:cNvPr id="96" name="Connettore diritto 95">
+              <a:extLst>
+                <a:ext uri="{FF2B5EF4-FFF2-40B4-BE49-F238E27FC236}">
+                  <a16:creationId xmlns:a16="http://schemas.microsoft.com/office/drawing/2014/main" id="{8CC80ABD-5D27-DD1D-0D3E-5E7CFAFA6CFA}"/>
+                </a:ext>
+              </a:extLst>
+            </p:cNvPr>
+            <p:cNvCxnSpPr/>
+            <p:nvPr/>
+          </p:nvCxnSpPr>
+          <p:spPr>
+            <a:xfrm flipH="1">
+              <a:off x="3317131" y="3722669"/>
+              <a:ext cx="358616" cy="230981"/>
+            </a:xfrm>
+            <a:prstGeom prst="line">
+              <a:avLst/>
+            </a:prstGeom>
+            <a:ln>
+              <a:solidFill>
+                <a:schemeClr val="tx1"/>
+              </a:solidFill>
+            </a:ln>
+          </p:spPr>
+          <p:style>
+            <a:lnRef idx="2">
+              <a:schemeClr val="accent1"/>
+            </a:lnRef>
+            <a:fillRef idx="0">
+              <a:schemeClr val="accent1"/>
+            </a:fillRef>
+            <a:effectRef idx="1">
+              <a:schemeClr val="accent1"/>
+            </a:effectRef>
+            <a:fontRef idx="minor">
+              <a:schemeClr val="tx1"/>
+            </a:fontRef>
+          </p:style>
+        </p:cxnSp>
+        <p:cxnSp>
+          <p:nvCxnSpPr>
+            <p:cNvPr id="97" name="Connettore diritto 96">
+              <a:extLst>
+                <a:ext uri="{FF2B5EF4-FFF2-40B4-BE49-F238E27FC236}">
+                  <a16:creationId xmlns:a16="http://schemas.microsoft.com/office/drawing/2014/main" id="{1CBD9DA5-CF00-A862-620A-113FB92EEA1A}"/>
+                </a:ext>
+              </a:extLst>
+            </p:cNvPr>
+            <p:cNvCxnSpPr/>
+            <p:nvPr/>
+          </p:nvCxnSpPr>
+          <p:spPr>
+            <a:xfrm flipH="1">
+              <a:off x="3317132" y="3855552"/>
+              <a:ext cx="358616" cy="230981"/>
+            </a:xfrm>
+            <a:prstGeom prst="line">
+              <a:avLst/>
+            </a:prstGeom>
+            <a:ln>
+              <a:solidFill>
+                <a:schemeClr val="tx1"/>
+              </a:solidFill>
+            </a:ln>
+          </p:spPr>
+          <p:style>
+            <a:lnRef idx="2">
+              <a:schemeClr val="accent1"/>
+            </a:lnRef>
+            <a:fillRef idx="0">
+              <a:schemeClr val="accent1"/>
+            </a:fillRef>
+            <a:effectRef idx="1">
+              <a:schemeClr val="accent1"/>
+            </a:effectRef>
+            <a:fontRef idx="minor">
+              <a:schemeClr val="tx1"/>
+            </a:fontRef>
+          </p:style>
+        </p:cxnSp>
+        <p:cxnSp>
+          <p:nvCxnSpPr>
+            <p:cNvPr id="98" name="Connettore diritto 97">
+              <a:extLst>
+                <a:ext uri="{FF2B5EF4-FFF2-40B4-BE49-F238E27FC236}">
+                  <a16:creationId xmlns:a16="http://schemas.microsoft.com/office/drawing/2014/main" id="{A9DA61CC-68EB-693D-72A6-8A4A38C34DB9}"/>
+                </a:ext>
+              </a:extLst>
+            </p:cNvPr>
+            <p:cNvCxnSpPr/>
+            <p:nvPr/>
+          </p:nvCxnSpPr>
+          <p:spPr>
+            <a:xfrm flipH="1">
+              <a:off x="3317132" y="3983498"/>
+              <a:ext cx="358616" cy="230981"/>
+            </a:xfrm>
+            <a:prstGeom prst="line">
+              <a:avLst/>
+            </a:prstGeom>
+            <a:ln>
+              <a:solidFill>
+                <a:schemeClr val="tx1"/>
+              </a:solidFill>
+            </a:ln>
+          </p:spPr>
+          <p:style>
+            <a:lnRef idx="2">
+              <a:schemeClr val="accent1"/>
+            </a:lnRef>
+            <a:fillRef idx="0">
+              <a:schemeClr val="accent1"/>
+            </a:fillRef>
+            <a:effectRef idx="1">
+              <a:schemeClr val="accent1"/>
+            </a:effectRef>
+            <a:fontRef idx="minor">
+              <a:schemeClr val="tx1"/>
+            </a:fontRef>
+          </p:style>
+        </p:cxnSp>
+        <p:cxnSp>
+          <p:nvCxnSpPr>
+            <p:cNvPr id="99" name="Connettore diritto 98">
+              <a:extLst>
+                <a:ext uri="{FF2B5EF4-FFF2-40B4-BE49-F238E27FC236}">
+                  <a16:creationId xmlns:a16="http://schemas.microsoft.com/office/drawing/2014/main" id="{8E1FBE0D-B7F4-CA2D-AA1A-A1F01C25794A}"/>
+                </a:ext>
+              </a:extLst>
+            </p:cNvPr>
+            <p:cNvCxnSpPr/>
+            <p:nvPr/>
+          </p:nvCxnSpPr>
+          <p:spPr>
+            <a:xfrm flipH="1">
+              <a:off x="3317132" y="4108202"/>
+              <a:ext cx="358616" cy="230981"/>
+            </a:xfrm>
+            <a:prstGeom prst="line">
+              <a:avLst/>
+            </a:prstGeom>
+            <a:ln>
+              <a:solidFill>
+                <a:schemeClr val="tx1"/>
+              </a:solidFill>
+            </a:ln>
+          </p:spPr>
+          <p:style>
+            <a:lnRef idx="2">
+              <a:schemeClr val="accent1"/>
+            </a:lnRef>
+            <a:fillRef idx="0">
+              <a:schemeClr val="accent1"/>
+            </a:fillRef>
+            <a:effectRef idx="1">
+              <a:schemeClr val="accent1"/>
+            </a:effectRef>
+            <a:fontRef idx="minor">
+              <a:schemeClr val="tx1"/>
+            </a:fontRef>
+          </p:style>
+        </p:cxnSp>
+        <p:cxnSp>
+          <p:nvCxnSpPr>
+            <p:cNvPr id="100" name="Connettore diritto 99">
+              <a:extLst>
+                <a:ext uri="{FF2B5EF4-FFF2-40B4-BE49-F238E27FC236}">
+                  <a16:creationId xmlns:a16="http://schemas.microsoft.com/office/drawing/2014/main" id="{05445BBA-695D-E86D-17AB-E72CF3168F6F}"/>
+                </a:ext>
+              </a:extLst>
+            </p:cNvPr>
+            <p:cNvCxnSpPr/>
+            <p:nvPr/>
+          </p:nvCxnSpPr>
+          <p:spPr>
+            <a:xfrm flipH="1">
+              <a:off x="3317131" y="4236148"/>
+              <a:ext cx="358616" cy="230981"/>
+            </a:xfrm>
+            <a:prstGeom prst="line">
+              <a:avLst/>
+            </a:prstGeom>
+            <a:ln>
+              <a:solidFill>
+                <a:schemeClr val="tx1"/>
+              </a:solidFill>
+            </a:ln>
+          </p:spPr>
+          <p:style>
+            <a:lnRef idx="2">
+              <a:schemeClr val="accent1"/>
+            </a:lnRef>
+            <a:fillRef idx="0">
+              <a:schemeClr val="accent1"/>
+            </a:fillRef>
+            <a:effectRef idx="1">
+              <a:schemeClr val="accent1"/>
+            </a:effectRef>
+            <a:fontRef idx="minor">
+              <a:schemeClr val="tx1"/>
+            </a:fontRef>
+          </p:style>
+        </p:cxnSp>
+        <p:cxnSp>
+          <p:nvCxnSpPr>
+            <p:cNvPr id="101" name="Connettore diritto 100">
+              <a:extLst>
+                <a:ext uri="{FF2B5EF4-FFF2-40B4-BE49-F238E27FC236}">
+                  <a16:creationId xmlns:a16="http://schemas.microsoft.com/office/drawing/2014/main" id="{024596F9-922A-9A59-69C1-E098F7CE27CD}"/>
+                </a:ext>
+              </a:extLst>
+            </p:cNvPr>
+            <p:cNvCxnSpPr/>
+            <p:nvPr/>
+          </p:nvCxnSpPr>
+          <p:spPr>
+            <a:xfrm flipH="1">
+              <a:off x="3317131" y="4364094"/>
+              <a:ext cx="358616" cy="230981"/>
+            </a:xfrm>
+            <a:prstGeom prst="line">
+              <a:avLst/>
+            </a:prstGeom>
+            <a:ln>
+              <a:solidFill>
+                <a:schemeClr val="tx1"/>
+              </a:solidFill>
+            </a:ln>
+          </p:spPr>
+          <p:style>
+            <a:lnRef idx="2">
+              <a:schemeClr val="accent1"/>
+            </a:lnRef>
+            <a:fillRef idx="0">
+              <a:schemeClr val="accent1"/>
+            </a:fillRef>
+            <a:effectRef idx="1">
+              <a:schemeClr val="accent1"/>
+            </a:effectRef>
+            <a:fontRef idx="minor">
+              <a:schemeClr val="tx1"/>
+            </a:fontRef>
+          </p:style>
+        </p:cxnSp>
+        <p:cxnSp>
+          <p:nvCxnSpPr>
+            <p:cNvPr id="102" name="Connettore diritto 101">
+              <a:extLst>
+                <a:ext uri="{FF2B5EF4-FFF2-40B4-BE49-F238E27FC236}">
+                  <a16:creationId xmlns:a16="http://schemas.microsoft.com/office/drawing/2014/main" id="{A21706CF-FAEC-AFBD-6D44-2967F4F4D905}"/>
+                </a:ext>
+              </a:extLst>
+            </p:cNvPr>
+            <p:cNvCxnSpPr/>
+            <p:nvPr/>
+          </p:nvCxnSpPr>
+          <p:spPr>
+            <a:xfrm flipH="1">
+              <a:off x="3317131" y="4488798"/>
+              <a:ext cx="358616" cy="230981"/>
+            </a:xfrm>
+            <a:prstGeom prst="line">
+              <a:avLst/>
+            </a:prstGeom>
+            <a:ln>
+              <a:solidFill>
+                <a:schemeClr val="tx1"/>
+              </a:solidFill>
+            </a:ln>
+          </p:spPr>
+          <p:style>
+            <a:lnRef idx="2">
+              <a:schemeClr val="accent1"/>
+            </a:lnRef>
+            <a:fillRef idx="0">
+              <a:schemeClr val="accent1"/>
+            </a:fillRef>
+            <a:effectRef idx="1">
+              <a:schemeClr val="accent1"/>
+            </a:effectRef>
+            <a:fontRef idx="minor">
+              <a:schemeClr val="tx1"/>
+            </a:fontRef>
+          </p:style>
+        </p:cxnSp>
+      </p:grpSp>
+      <p:cxnSp>
+        <p:nvCxnSpPr>
+          <p:cNvPr id="104" name="Connettore 2 103">
+            <a:extLst>
+              <a:ext uri="{FF2B5EF4-FFF2-40B4-BE49-F238E27FC236}">
+                <a16:creationId xmlns:a16="http://schemas.microsoft.com/office/drawing/2014/main" id="{6327F32A-1E69-DB3B-63FD-F0EBDA6B33F3}"/>
+              </a:ext>
+            </a:extLst>
+          </p:cNvPr>
+          <p:cNvCxnSpPr>
+            <a:stCxn id="9" idx="3"/>
+          </p:cNvCxnSpPr>
+          <p:nvPr/>
+        </p:nvCxnSpPr>
+        <p:spPr>
+          <a:xfrm>
+            <a:off x="7101840" y="4044968"/>
+            <a:ext cx="590727" cy="0"/>
+          </a:xfrm>
+          <a:prstGeom prst="straightConnector1">
+            <a:avLst/>
+          </a:prstGeom>
+          <a:ln w="28575">
+            <a:solidFill>
+              <a:schemeClr val="tx2">
+                <a:lumMod val="50000"/>
+                <a:lumOff val="50000"/>
+              </a:schemeClr>
+            </a:solidFill>
+            <a:tailEnd type="triangle"/>
+          </a:ln>
+        </p:spPr>
+        <p:style>
+          <a:lnRef idx="2">
+            <a:schemeClr val="dk1"/>
+          </a:lnRef>
+          <a:fillRef idx="0">
+            <a:schemeClr val="dk1"/>
+          </a:fillRef>
+          <a:effectRef idx="1">
+            <a:schemeClr val="dk1"/>
+          </a:effectRef>
+          <a:fontRef idx="minor">
+            <a:schemeClr val="tx1"/>
+          </a:fontRef>
+        </p:style>
+      </p:cxnSp>
+      <p:cxnSp>
+        <p:nvCxnSpPr>
+          <p:cNvPr id="117" name="Connettore 2 116">
+            <a:extLst>
+              <a:ext uri="{FF2B5EF4-FFF2-40B4-BE49-F238E27FC236}">
+                <a16:creationId xmlns:a16="http://schemas.microsoft.com/office/drawing/2014/main" id="{936D42BD-DF59-6CC7-6803-56E91857A507}"/>
+              </a:ext>
+            </a:extLst>
+          </p:cNvPr>
+          <p:cNvCxnSpPr>
+            <a:stCxn id="9" idx="1"/>
+          </p:cNvCxnSpPr>
+          <p:nvPr/>
+        </p:nvCxnSpPr>
+        <p:spPr>
+          <a:xfrm flipH="1">
+            <a:off x="4513201" y="4044968"/>
+            <a:ext cx="576959" cy="0"/>
+          </a:xfrm>
+          <a:prstGeom prst="straightConnector1">
+            <a:avLst/>
+          </a:prstGeom>
+          <a:ln w="28575">
+            <a:solidFill>
+              <a:schemeClr val="tx2">
+                <a:lumMod val="50000"/>
+                <a:lumOff val="50000"/>
+              </a:schemeClr>
+            </a:solidFill>
+            <a:tailEnd type="triangle"/>
+          </a:ln>
+        </p:spPr>
+        <p:style>
+          <a:lnRef idx="2">
+            <a:schemeClr val="dk1"/>
+          </a:lnRef>
+          <a:fillRef idx="0">
+            <a:schemeClr val="dk1"/>
+          </a:fillRef>
+          <a:effectRef idx="1">
+            <a:schemeClr val="dk1"/>
+          </a:effectRef>
+          <a:fontRef idx="minor">
+            <a:schemeClr val="tx1"/>
+          </a:fontRef>
+        </p:style>
+      </p:cxnSp>
+      <p:cxnSp>
+        <p:nvCxnSpPr>
+          <p:cNvPr id="108" name="Connettore 2 107">
+            <a:extLst>
+              <a:ext uri="{FF2B5EF4-FFF2-40B4-BE49-F238E27FC236}">
+                <a16:creationId xmlns:a16="http://schemas.microsoft.com/office/drawing/2014/main" id="{BEF146D8-93F0-328E-375C-0C17ED9F2687}"/>
+              </a:ext>
+            </a:extLst>
+          </p:cNvPr>
+          <p:cNvCxnSpPr/>
+          <p:nvPr/>
+        </p:nvCxnSpPr>
+        <p:spPr>
+          <a:xfrm>
+            <a:off x="6096000" y="3467100"/>
+            <a:ext cx="852042" cy="0"/>
+          </a:xfrm>
+          <a:prstGeom prst="straightConnector1">
+            <a:avLst/>
+          </a:prstGeom>
+          <a:ln w="28575">
+            <a:solidFill>
+              <a:schemeClr val="tx2">
+                <a:lumMod val="50000"/>
+                <a:lumOff val="50000"/>
+              </a:schemeClr>
+            </a:solidFill>
+            <a:tailEnd type="triangle"/>
+          </a:ln>
+        </p:spPr>
+        <p:style>
+          <a:lnRef idx="2">
+            <a:schemeClr val="accent1"/>
+          </a:lnRef>
+          <a:fillRef idx="0">
+            <a:schemeClr val="accent1"/>
+          </a:fillRef>
+          <a:effectRef idx="1">
+            <a:schemeClr val="accent1"/>
+          </a:effectRef>
+          <a:fontRef idx="minor">
+            <a:schemeClr val="tx1"/>
+          </a:fontRef>
+        </p:style>
+      </p:cxnSp>
+      <p:cxnSp>
+        <p:nvCxnSpPr>
+          <p:cNvPr id="109" name="Connettore 2 108">
+            <a:extLst>
+              <a:ext uri="{FF2B5EF4-FFF2-40B4-BE49-F238E27FC236}">
+                <a16:creationId xmlns:a16="http://schemas.microsoft.com/office/drawing/2014/main" id="{EB30D8B3-F3E4-3195-B9FE-6B8835745335}"/>
+              </a:ext>
+            </a:extLst>
+          </p:cNvPr>
+          <p:cNvCxnSpPr>
+            <a:cxnSpLocks/>
+          </p:cNvCxnSpPr>
+          <p:nvPr/>
+        </p:nvCxnSpPr>
+        <p:spPr>
+          <a:xfrm flipH="1">
+            <a:off x="5276550" y="3467100"/>
+            <a:ext cx="802781" cy="0"/>
+          </a:xfrm>
+          <a:prstGeom prst="straightConnector1">
+            <a:avLst/>
+          </a:prstGeom>
+          <a:ln w="28575">
+            <a:solidFill>
+              <a:srgbClr val="FF0000"/>
+            </a:solidFill>
+            <a:tailEnd type="triangle"/>
+          </a:ln>
+        </p:spPr>
+        <p:style>
+          <a:lnRef idx="2">
+            <a:schemeClr val="accent1"/>
+          </a:lnRef>
+          <a:fillRef idx="0">
+            <a:schemeClr val="accent1"/>
+          </a:fillRef>
+          <a:effectRef idx="1">
+            <a:schemeClr val="accent1"/>
+          </a:effectRef>
+          <a:fontRef idx="minor">
+            <a:schemeClr val="tx1"/>
+          </a:fontRef>
+        </p:style>
+      </p:cxnSp>
+      <p:cxnSp>
+        <p:nvCxnSpPr>
+          <p:cNvPr id="113" name="Connettore 2 112">
+            <a:extLst>
+              <a:ext uri="{FF2B5EF4-FFF2-40B4-BE49-F238E27FC236}">
+                <a16:creationId xmlns:a16="http://schemas.microsoft.com/office/drawing/2014/main" id="{18F4D2E2-CB88-0EB5-BB06-BB0AE475BD43}"/>
+              </a:ext>
+            </a:extLst>
+          </p:cNvPr>
+          <p:cNvCxnSpPr>
+            <a:cxnSpLocks/>
+          </p:cNvCxnSpPr>
+          <p:nvPr/>
+        </p:nvCxnSpPr>
+        <p:spPr>
+          <a:xfrm flipV="1">
+            <a:off x="6096000" y="2795655"/>
+            <a:ext cx="0" cy="671445"/>
+          </a:xfrm>
+          <a:prstGeom prst="straightConnector1">
+            <a:avLst/>
+          </a:prstGeom>
+          <a:ln w="28575">
+            <a:solidFill>
+              <a:srgbClr val="FF0000"/>
+            </a:solidFill>
+            <a:tailEnd type="triangle"/>
+          </a:ln>
+        </p:spPr>
+        <p:style>
+          <a:lnRef idx="2">
+            <a:schemeClr val="accent1"/>
+          </a:lnRef>
+          <a:fillRef idx="0">
+            <a:schemeClr val="accent1"/>
+          </a:fillRef>
+          <a:effectRef idx="1">
+            <a:schemeClr val="accent1"/>
+          </a:effectRef>
+          <a:fontRef idx="minor">
+            <a:schemeClr val="tx1"/>
+          </a:fontRef>
+        </p:style>
+      </p:cxnSp>
+      <mc:AlternateContent xmlns:mc="http://schemas.openxmlformats.org/markup-compatibility/2006">
+        <mc:Choice xmlns:a14="http://schemas.microsoft.com/office/drawing/2010/main" Requires="a14">
+          <p:sp>
+            <p:nvSpPr>
+              <p:cNvPr id="123" name="CasellaDiTesto 122">
+                <a:extLst>
+                  <a:ext uri="{FF2B5EF4-FFF2-40B4-BE49-F238E27FC236}">
+                    <a16:creationId xmlns:a16="http://schemas.microsoft.com/office/drawing/2014/main" id="{AE1218AC-6FDB-68ED-ADAA-2CD63192456C}"/>
+                  </a:ext>
+                </a:extLst>
+              </p:cNvPr>
+              <p:cNvSpPr txBox="1"/>
+              <p:nvPr/>
+            </p:nvSpPr>
+            <p:spPr>
+              <a:xfrm>
+                <a:off x="5273936" y="2831326"/>
+                <a:ext cx="385490" cy="276999"/>
+              </a:xfrm>
+              <a:prstGeom prst="rect">
+                <a:avLst/>
+              </a:prstGeom>
+              <a:noFill/>
+            </p:spPr>
+            <p:txBody>
+              <a:bodyPr wrap="none" lIns="0" tIns="0" rIns="0" bIns="0" rtlCol="0">
+                <a:spAutoFit/>
+              </a:bodyPr>
+              <a:lstStyle/>
+              <a:p>
+                <a14:m>
+                  <m:oMathPara xmlns:m="http://schemas.openxmlformats.org/officeDocument/2006/math">
+                    <m:oMathParaPr>
+                      <m:jc m:val="centerGroup"/>
+                    </m:oMathParaPr>
+                    <m:oMath xmlns:m="http://schemas.openxmlformats.org/officeDocument/2006/math">
+                      <m:r>
+                        <a:rPr lang="it-IT" b="0" i="1" smtClean="0">
+                          <a:latin typeface="Cambria Math" panose="02040503050406030204" pitchFamily="18" charset="0"/>
+                        </a:rPr>
+                        <m:t>𝑚𝑔</m:t>
+                      </m:r>
+                    </m:oMath>
+                  </m:oMathPara>
+                </a14:m>
+                <a:endParaRPr lang="it-IT" dirty="0"/>
+              </a:p>
+            </p:txBody>
+          </p:sp>
+        </mc:Choice>
+        <mc:Fallback>
+          <p:sp>
+            <p:nvSpPr>
+              <p:cNvPr id="123" name="CasellaDiTesto 122">
+                <a:extLst>
+                  <a:ext uri="{FF2B5EF4-FFF2-40B4-BE49-F238E27FC236}">
+                    <a16:creationId xmlns:a16="http://schemas.microsoft.com/office/drawing/2014/main" id="{AE1218AC-6FDB-68ED-ADAA-2CD63192456C}"/>
+                  </a:ext>
+                </a:extLst>
+              </p:cNvPr>
+              <p:cNvSpPr txBox="1">
+                <a:spLocks noRot="1" noChangeAspect="1" noMove="1" noResize="1" noEditPoints="1" noAdjustHandles="1" noChangeArrowheads="1" noChangeShapeType="1" noTextEdit="1"/>
+              </p:cNvSpPr>
+              <p:nvPr/>
+            </p:nvSpPr>
+            <p:spPr>
+              <a:xfrm>
+                <a:off x="5273936" y="2831326"/>
+                <a:ext cx="385490" cy="276999"/>
+              </a:xfrm>
+              <a:prstGeom prst="rect">
+                <a:avLst/>
+              </a:prstGeom>
+              <a:blipFill>
+                <a:blip r:embed="rId2"/>
+                <a:stretch>
+                  <a:fillRect l="-15873" r="-15873" b="-23913"/>
+                </a:stretch>
+              </a:blipFill>
+            </p:spPr>
+            <p:txBody>
+              <a:bodyPr/>
+              <a:lstStyle/>
+              <a:p>
+                <a:r>
+                  <a:rPr lang="it-IT">
+                    <a:noFill/>
+                  </a:rPr>
+                  <a:t> </a:t>
+                </a:r>
+              </a:p>
+            </p:txBody>
+          </p:sp>
+        </mc:Fallback>
+      </mc:AlternateContent>
+      <mc:AlternateContent xmlns:mc="http://schemas.openxmlformats.org/markup-compatibility/2006">
+        <mc:Choice xmlns:a14="http://schemas.microsoft.com/office/drawing/2010/main" Requires="a14">
+          <p:sp>
+            <p:nvSpPr>
+              <p:cNvPr id="124" name="CasellaDiTesto 123">
+                <a:extLst>
+                  <a:ext uri="{FF2B5EF4-FFF2-40B4-BE49-F238E27FC236}">
+                    <a16:creationId xmlns:a16="http://schemas.microsoft.com/office/drawing/2014/main" id="{033B00FD-466B-25A7-E095-018F24C2BD80}"/>
+                  </a:ext>
+                </a:extLst>
+              </p:cNvPr>
+              <p:cNvSpPr txBox="1"/>
+              <p:nvPr/>
+            </p:nvSpPr>
+            <p:spPr>
+              <a:xfrm rot="4061236">
+                <a:off x="6964606" y="2421330"/>
+                <a:ext cx="174663" cy="276999"/>
+              </a:xfrm>
+              <a:prstGeom prst="rect">
+                <a:avLst/>
+              </a:prstGeom>
+              <a:noFill/>
+            </p:spPr>
+            <p:txBody>
+              <a:bodyPr wrap="none" lIns="0" tIns="0" rIns="0" bIns="0" rtlCol="0">
+                <a:spAutoFit/>
+              </a:bodyPr>
+              <a:lstStyle/>
+              <a:p>
+                <a14:m>
+                  <m:oMathPara xmlns:m="http://schemas.openxmlformats.org/officeDocument/2006/math">
+                    <m:oMathParaPr>
+                      <m:jc m:val="centerGroup"/>
+                    </m:oMathParaPr>
+                    <m:oMath xmlns:m="http://schemas.openxmlformats.org/officeDocument/2006/math">
+                      <m:r>
+                        <a:rPr lang="it-IT" b="0" i="1" smtClean="0">
+                          <a:latin typeface="Cambria Math" panose="02040503050406030204" pitchFamily="18" charset="0"/>
+                        </a:rPr>
+                        <m:t>𝐿</m:t>
+                      </m:r>
+                    </m:oMath>
+                  </m:oMathPara>
+                </a14:m>
+                <a:endParaRPr lang="it-IT" dirty="0"/>
+              </a:p>
+            </p:txBody>
+          </p:sp>
+        </mc:Choice>
+        <mc:Fallback>
+          <p:sp>
+            <p:nvSpPr>
+              <p:cNvPr id="124" name="CasellaDiTesto 123">
+                <a:extLst>
+                  <a:ext uri="{FF2B5EF4-FFF2-40B4-BE49-F238E27FC236}">
+                    <a16:creationId xmlns:a16="http://schemas.microsoft.com/office/drawing/2014/main" id="{033B00FD-466B-25A7-E095-018F24C2BD80}"/>
+                  </a:ext>
+                </a:extLst>
+              </p:cNvPr>
+              <p:cNvSpPr txBox="1">
+                <a:spLocks noRot="1" noChangeAspect="1" noMove="1" noResize="1" noEditPoints="1" noAdjustHandles="1" noChangeArrowheads="1" noChangeShapeType="1" noTextEdit="1"/>
+              </p:cNvSpPr>
+              <p:nvPr/>
+            </p:nvSpPr>
+            <p:spPr>
+              <a:xfrm rot="4061236">
+                <a:off x="6964606" y="2421330"/>
+                <a:ext cx="174663" cy="276999"/>
+              </a:xfrm>
+              <a:prstGeom prst="rect">
+                <a:avLst/>
+              </a:prstGeom>
+              <a:blipFill>
+                <a:blip r:embed="rId3"/>
+                <a:stretch>
+                  <a:fillRect l="-11111" t="-18182" r="-1852" b="-20455"/>
+                </a:stretch>
+              </a:blipFill>
+            </p:spPr>
+            <p:txBody>
+              <a:bodyPr/>
+              <a:lstStyle/>
+              <a:p>
+                <a:r>
+                  <a:rPr lang="it-IT">
+                    <a:noFill/>
+                  </a:rPr>
+                  <a:t> </a:t>
+                </a:r>
+              </a:p>
+            </p:txBody>
+          </p:sp>
+        </mc:Fallback>
+      </mc:AlternateContent>
+      <mc:AlternateContent xmlns:mc="http://schemas.openxmlformats.org/markup-compatibility/2006">
+        <mc:Choice xmlns:a14="http://schemas.microsoft.com/office/drawing/2010/main" Requires="a14">
+          <p:sp>
+            <p:nvSpPr>
+              <p:cNvPr id="125" name="CasellaDiTesto 124">
+                <a:extLst>
+                  <a:ext uri="{FF2B5EF4-FFF2-40B4-BE49-F238E27FC236}">
+                    <a16:creationId xmlns:a16="http://schemas.microsoft.com/office/drawing/2014/main" id="{EEF80DDD-F126-8002-5C40-88EF5CB7CBF9}"/>
+                  </a:ext>
+                </a:extLst>
+              </p:cNvPr>
+              <p:cNvSpPr txBox="1"/>
+              <p:nvPr/>
+            </p:nvSpPr>
+            <p:spPr>
+              <a:xfrm>
+                <a:off x="5684520" y="2230868"/>
+                <a:ext cx="244426" cy="276999"/>
+              </a:xfrm>
+              <a:prstGeom prst="rect">
+                <a:avLst/>
+              </a:prstGeom>
+              <a:noFill/>
+            </p:spPr>
+            <p:txBody>
+              <a:bodyPr wrap="none" lIns="0" tIns="0" rIns="0" bIns="0" rtlCol="0">
+                <a:spAutoFit/>
+              </a:bodyPr>
+              <a:lstStyle/>
+              <a:p>
+                <a14:m>
+                  <m:oMathPara xmlns:m="http://schemas.openxmlformats.org/officeDocument/2006/math">
+                    <m:oMathParaPr>
+                      <m:jc m:val="centerGroup"/>
+                    </m:oMathParaPr>
+                    <m:oMath xmlns:m="http://schemas.openxmlformats.org/officeDocument/2006/math">
+                      <m:r>
+                        <a:rPr lang="it-IT" b="0" i="1" smtClean="0">
+                          <a:latin typeface="Cambria Math" panose="02040503050406030204" pitchFamily="18" charset="0"/>
+                        </a:rPr>
+                        <m:t>𝑚</m:t>
+                      </m:r>
+                    </m:oMath>
+                  </m:oMathPara>
+                </a14:m>
+                <a:endParaRPr lang="it-IT" dirty="0"/>
+              </a:p>
+            </p:txBody>
+          </p:sp>
+        </mc:Choice>
+        <mc:Fallback>
+          <p:sp>
+            <p:nvSpPr>
+              <p:cNvPr id="125" name="CasellaDiTesto 124">
+                <a:extLst>
+                  <a:ext uri="{FF2B5EF4-FFF2-40B4-BE49-F238E27FC236}">
+                    <a16:creationId xmlns:a16="http://schemas.microsoft.com/office/drawing/2014/main" id="{EEF80DDD-F126-8002-5C40-88EF5CB7CBF9}"/>
+                  </a:ext>
+                </a:extLst>
+              </p:cNvPr>
+              <p:cNvSpPr txBox="1">
+                <a:spLocks noRot="1" noChangeAspect="1" noMove="1" noResize="1" noEditPoints="1" noAdjustHandles="1" noChangeArrowheads="1" noChangeShapeType="1" noTextEdit="1"/>
+              </p:cNvSpPr>
+              <p:nvPr/>
+            </p:nvSpPr>
+            <p:spPr>
+              <a:xfrm>
+                <a:off x="5684520" y="2230868"/>
+                <a:ext cx="244426" cy="276999"/>
+              </a:xfrm>
+              <a:prstGeom prst="rect">
+                <a:avLst/>
+              </a:prstGeom>
+              <a:blipFill>
+                <a:blip r:embed="rId4"/>
+                <a:stretch>
+                  <a:fillRect l="-15000" r="-12500"/>
+                </a:stretch>
+              </a:blipFill>
+            </p:spPr>
+            <p:txBody>
+              <a:bodyPr/>
+              <a:lstStyle/>
+              <a:p>
+                <a:r>
+                  <a:rPr lang="it-IT">
+                    <a:noFill/>
+                  </a:rPr>
+                  <a:t> </a:t>
+                </a:r>
+              </a:p>
+            </p:txBody>
+          </p:sp>
+        </mc:Fallback>
+      </mc:AlternateContent>
+      <mc:AlternateContent xmlns:mc="http://schemas.openxmlformats.org/markup-compatibility/2006">
+        <mc:Choice xmlns:a14="http://schemas.microsoft.com/office/drawing/2010/main" Requires="a14">
+          <p:sp>
+            <p:nvSpPr>
+              <p:cNvPr id="126" name="CasellaDiTesto 125">
+                <a:extLst>
+                  <a:ext uri="{FF2B5EF4-FFF2-40B4-BE49-F238E27FC236}">
+                    <a16:creationId xmlns:a16="http://schemas.microsoft.com/office/drawing/2014/main" id="{175AD57F-7610-FEA8-E2B3-B49E094A17ED}"/>
+                  </a:ext>
+                </a:extLst>
+              </p:cNvPr>
+              <p:cNvSpPr txBox="1"/>
+              <p:nvPr/>
+            </p:nvSpPr>
+            <p:spPr>
+              <a:xfrm>
+                <a:off x="6172488" y="2831325"/>
+                <a:ext cx="198067" cy="276999"/>
+              </a:xfrm>
+              <a:prstGeom prst="rect">
+                <a:avLst/>
+              </a:prstGeom>
+              <a:noFill/>
+            </p:spPr>
+            <p:txBody>
+              <a:bodyPr wrap="none" lIns="0" tIns="0" rIns="0" bIns="0" rtlCol="0">
+                <a:spAutoFit/>
+              </a:bodyPr>
+              <a:lstStyle/>
+              <a:p>
+                <a14:m>
+                  <m:oMathPara xmlns:m="http://schemas.openxmlformats.org/officeDocument/2006/math">
+                    <m:oMathParaPr>
+                      <m:jc m:val="centerGroup"/>
+                    </m:oMathParaPr>
+                    <m:oMath xmlns:m="http://schemas.openxmlformats.org/officeDocument/2006/math">
+                      <m:r>
+                        <a:rPr lang="it-IT" b="0" i="1" smtClean="0">
+                          <a:latin typeface="Cambria Math" panose="02040503050406030204" pitchFamily="18" charset="0"/>
+                        </a:rPr>
+                        <m:t>𝑉</m:t>
+                      </m:r>
+                    </m:oMath>
+                  </m:oMathPara>
+                </a14:m>
+                <a:endParaRPr lang="it-IT" dirty="0"/>
+              </a:p>
+            </p:txBody>
+          </p:sp>
+        </mc:Choice>
+        <mc:Fallback>
+          <p:sp>
+            <p:nvSpPr>
+              <p:cNvPr id="126" name="CasellaDiTesto 125">
+                <a:extLst>
+                  <a:ext uri="{FF2B5EF4-FFF2-40B4-BE49-F238E27FC236}">
+                    <a16:creationId xmlns:a16="http://schemas.microsoft.com/office/drawing/2014/main" id="{175AD57F-7610-FEA8-E2B3-B49E094A17ED}"/>
+                  </a:ext>
+                </a:extLst>
+              </p:cNvPr>
+              <p:cNvSpPr txBox="1">
+                <a:spLocks noRot="1" noChangeAspect="1" noMove="1" noResize="1" noEditPoints="1" noAdjustHandles="1" noChangeArrowheads="1" noChangeShapeType="1" noTextEdit="1"/>
+              </p:cNvSpPr>
+              <p:nvPr/>
+            </p:nvSpPr>
+            <p:spPr>
+              <a:xfrm>
+                <a:off x="6172488" y="2831325"/>
+                <a:ext cx="198067" cy="276999"/>
+              </a:xfrm>
+              <a:prstGeom prst="rect">
+                <a:avLst/>
+              </a:prstGeom>
+              <a:blipFill>
+                <a:blip r:embed="rId5"/>
+                <a:stretch>
+                  <a:fillRect l="-31250" r="-28125" b="-6522"/>
+                </a:stretch>
+              </a:blipFill>
+            </p:spPr>
+            <p:txBody>
+              <a:bodyPr/>
+              <a:lstStyle/>
+              <a:p>
+                <a:r>
+                  <a:rPr lang="it-IT">
+                    <a:noFill/>
+                  </a:rPr>
+                  <a:t> </a:t>
+                </a:r>
+              </a:p>
+            </p:txBody>
+          </p:sp>
+        </mc:Fallback>
+      </mc:AlternateContent>
+      <mc:AlternateContent xmlns:mc="http://schemas.openxmlformats.org/markup-compatibility/2006">
+        <mc:Choice xmlns:a14="http://schemas.microsoft.com/office/drawing/2010/main" Requires="a14">
+          <p:sp>
+            <p:nvSpPr>
+              <p:cNvPr id="127" name="CasellaDiTesto 126">
+                <a:extLst>
+                  <a:ext uri="{FF2B5EF4-FFF2-40B4-BE49-F238E27FC236}">
+                    <a16:creationId xmlns:a16="http://schemas.microsoft.com/office/drawing/2014/main" id="{65B6A9DF-607A-2DC5-C5D3-45A99CB78DCE}"/>
+                  </a:ext>
+                </a:extLst>
+              </p:cNvPr>
+              <p:cNvSpPr txBox="1"/>
+              <p:nvPr/>
+            </p:nvSpPr>
+            <p:spPr>
+              <a:xfrm>
+                <a:off x="5014225" y="3249503"/>
+                <a:ext cx="211700" cy="276999"/>
+              </a:xfrm>
+              <a:prstGeom prst="rect">
+                <a:avLst/>
+              </a:prstGeom>
+              <a:noFill/>
+            </p:spPr>
+            <p:txBody>
+              <a:bodyPr wrap="square" lIns="0" tIns="0" rIns="0" bIns="0" rtlCol="0">
+                <a:spAutoFit/>
+              </a:bodyPr>
+              <a:lstStyle/>
+              <a:p>
+                <a14:m>
+                  <m:oMathPara xmlns:m="http://schemas.openxmlformats.org/officeDocument/2006/math">
+                    <m:oMathParaPr>
+                      <m:jc m:val="centerGroup"/>
+                    </m:oMathParaPr>
+                    <m:oMath xmlns:m="http://schemas.openxmlformats.org/officeDocument/2006/math">
+                      <m:r>
+                        <a:rPr lang="it-IT" b="0" i="1" smtClean="0">
+                          <a:latin typeface="Cambria Math" panose="02040503050406030204" pitchFamily="18" charset="0"/>
+                        </a:rPr>
+                        <m:t>𝐻</m:t>
+                      </m:r>
+                    </m:oMath>
+                  </m:oMathPara>
+                </a14:m>
+                <a:endParaRPr lang="it-IT" dirty="0"/>
+              </a:p>
+            </p:txBody>
+          </p:sp>
+        </mc:Choice>
+        <mc:Fallback>
+          <p:sp>
+            <p:nvSpPr>
+              <p:cNvPr id="127" name="CasellaDiTesto 126">
+                <a:extLst>
+                  <a:ext uri="{FF2B5EF4-FFF2-40B4-BE49-F238E27FC236}">
+                    <a16:creationId xmlns:a16="http://schemas.microsoft.com/office/drawing/2014/main" id="{65B6A9DF-607A-2DC5-C5D3-45A99CB78DCE}"/>
+                  </a:ext>
+                </a:extLst>
+              </p:cNvPr>
+              <p:cNvSpPr txBox="1">
+                <a:spLocks noRot="1" noChangeAspect="1" noMove="1" noResize="1" noEditPoints="1" noAdjustHandles="1" noChangeArrowheads="1" noChangeShapeType="1" noTextEdit="1"/>
+              </p:cNvSpPr>
+              <p:nvPr/>
+            </p:nvSpPr>
+            <p:spPr>
+              <a:xfrm>
+                <a:off x="5014225" y="3249503"/>
+                <a:ext cx="211700" cy="276999"/>
+              </a:xfrm>
+              <a:prstGeom prst="rect">
+                <a:avLst/>
+              </a:prstGeom>
+              <a:blipFill>
+                <a:blip r:embed="rId6"/>
+                <a:stretch>
+                  <a:fillRect l="-32353" r="-29412" b="-8889"/>
+                </a:stretch>
+              </a:blipFill>
+            </p:spPr>
+            <p:txBody>
+              <a:bodyPr/>
+              <a:lstStyle/>
+              <a:p>
+                <a:r>
+                  <a:rPr lang="it-IT">
+                    <a:noFill/>
+                  </a:rPr>
+                  <a:t> </a:t>
+                </a:r>
+              </a:p>
+            </p:txBody>
+          </p:sp>
+        </mc:Fallback>
+      </mc:AlternateContent>
+      <mc:AlternateContent xmlns:mc="http://schemas.openxmlformats.org/markup-compatibility/2006">
+        <mc:Choice xmlns:a14="http://schemas.microsoft.com/office/drawing/2010/main" Requires="a14">
+          <p:sp>
+            <p:nvSpPr>
+              <p:cNvPr id="129" name="CasellaDiTesto 128">
+                <a:extLst>
+                  <a:ext uri="{FF2B5EF4-FFF2-40B4-BE49-F238E27FC236}">
+                    <a16:creationId xmlns:a16="http://schemas.microsoft.com/office/drawing/2014/main" id="{7CE4FB07-8766-BA16-E9EB-2DB6809096AB}"/>
+                  </a:ext>
+                </a:extLst>
+              </p:cNvPr>
+              <p:cNvSpPr txBox="1"/>
+              <p:nvPr/>
+            </p:nvSpPr>
+            <p:spPr>
+              <a:xfrm>
+                <a:off x="6976663" y="3259028"/>
+                <a:ext cx="211700" cy="276999"/>
+              </a:xfrm>
+              <a:prstGeom prst="rect">
+                <a:avLst/>
+              </a:prstGeom>
+              <a:noFill/>
+            </p:spPr>
+            <p:txBody>
+              <a:bodyPr wrap="square" lIns="0" tIns="0" rIns="0" bIns="0" rtlCol="0">
+                <a:spAutoFit/>
+              </a:bodyPr>
+              <a:lstStyle/>
+              <a:p>
+                <a14:m>
+                  <m:oMathPara xmlns:m="http://schemas.openxmlformats.org/officeDocument/2006/math">
+                    <m:oMathParaPr>
+                      <m:jc m:val="centerGroup"/>
+                    </m:oMathParaPr>
+                    <m:oMath xmlns:m="http://schemas.openxmlformats.org/officeDocument/2006/math">
+                      <m:r>
+                        <a:rPr lang="it-IT" b="0" i="1" smtClean="0">
+                          <a:latin typeface="Cambria Math" panose="02040503050406030204" pitchFamily="18" charset="0"/>
+                        </a:rPr>
+                        <m:t>𝐻</m:t>
+                      </m:r>
+                    </m:oMath>
+                  </m:oMathPara>
+                </a14:m>
+                <a:endParaRPr lang="it-IT" dirty="0"/>
+              </a:p>
+            </p:txBody>
+          </p:sp>
+        </mc:Choice>
+        <mc:Fallback>
+          <p:sp>
+            <p:nvSpPr>
+              <p:cNvPr id="129" name="CasellaDiTesto 128">
+                <a:extLst>
+                  <a:ext uri="{FF2B5EF4-FFF2-40B4-BE49-F238E27FC236}">
+                    <a16:creationId xmlns:a16="http://schemas.microsoft.com/office/drawing/2014/main" id="{7CE4FB07-8766-BA16-E9EB-2DB6809096AB}"/>
+                  </a:ext>
+                </a:extLst>
+              </p:cNvPr>
+              <p:cNvSpPr txBox="1">
+                <a:spLocks noRot="1" noChangeAspect="1" noMove="1" noResize="1" noEditPoints="1" noAdjustHandles="1" noChangeArrowheads="1" noChangeShapeType="1" noTextEdit="1"/>
+              </p:cNvSpPr>
+              <p:nvPr/>
+            </p:nvSpPr>
+            <p:spPr>
+              <a:xfrm>
+                <a:off x="6976663" y="3259028"/>
+                <a:ext cx="211700" cy="276999"/>
+              </a:xfrm>
+              <a:prstGeom prst="rect">
+                <a:avLst/>
+              </a:prstGeom>
+              <a:blipFill>
+                <a:blip r:embed="rId7"/>
+                <a:stretch>
+                  <a:fillRect l="-28571" r="-28571" b="-6667"/>
+                </a:stretch>
+              </a:blipFill>
+            </p:spPr>
+            <p:txBody>
+              <a:bodyPr/>
+              <a:lstStyle/>
+              <a:p>
+                <a:r>
+                  <a:rPr lang="it-IT">
+                    <a:noFill/>
+                  </a:rPr>
+                  <a:t> </a:t>
+                </a:r>
+              </a:p>
+            </p:txBody>
+          </p:sp>
+        </mc:Fallback>
+      </mc:AlternateContent>
+      <mc:AlternateContent xmlns:mc="http://schemas.openxmlformats.org/markup-compatibility/2006">
+        <mc:Choice xmlns:a14="http://schemas.microsoft.com/office/drawing/2010/main" Requires="a14">
+          <p:sp>
+            <p:nvSpPr>
+              <p:cNvPr id="130" name="CasellaDiTesto 129">
+                <a:extLst>
+                  <a:ext uri="{FF2B5EF4-FFF2-40B4-BE49-F238E27FC236}">
+                    <a16:creationId xmlns:a16="http://schemas.microsoft.com/office/drawing/2014/main" id="{21B0CEAB-9D02-5732-213A-B77FD4F4B2CF}"/>
+                  </a:ext>
+                </a:extLst>
+              </p:cNvPr>
+              <p:cNvSpPr txBox="1"/>
+              <p:nvPr/>
+            </p:nvSpPr>
+            <p:spPr>
+              <a:xfrm>
+                <a:off x="4241402" y="3679051"/>
+                <a:ext cx="323357" cy="276999"/>
+              </a:xfrm>
+              <a:prstGeom prst="rect">
+                <a:avLst/>
+              </a:prstGeom>
+              <a:noFill/>
+            </p:spPr>
+            <p:txBody>
+              <a:bodyPr wrap="none" lIns="0" tIns="0" rIns="0" bIns="0" rtlCol="0">
+                <a:spAutoFit/>
+              </a:bodyPr>
+              <a:lstStyle/>
+              <a:p>
+                <a14:m>
+                  <m:oMathPara xmlns:m="http://schemas.openxmlformats.org/officeDocument/2006/math">
+                    <m:oMathParaPr>
+                      <m:jc m:val="centerGroup"/>
+                    </m:oMathParaPr>
+                    <m:oMath xmlns:m="http://schemas.openxmlformats.org/officeDocument/2006/math">
+                      <m:r>
+                        <a:rPr lang="it-IT" b="0" i="1" smtClean="0">
+                          <a:latin typeface="Cambria Math" panose="02040503050406030204" pitchFamily="18" charset="0"/>
+                        </a:rPr>
+                        <m:t>𝛽</m:t>
+                      </m:r>
+                      <m:acc>
+                        <m:accPr>
+                          <m:chr m:val="̇"/>
+                          <m:ctrlPr>
+                            <a:rPr lang="it-IT" b="0" i="1" smtClean="0">
+                              <a:latin typeface="Cambria Math" panose="02040503050406030204" pitchFamily="18" charset="0"/>
+                            </a:rPr>
+                          </m:ctrlPr>
+                        </m:accPr>
+                        <m:e>
+                          <m:r>
+                            <a:rPr lang="it-IT" b="0" i="1" smtClean="0">
+                              <a:latin typeface="Cambria Math" panose="02040503050406030204" pitchFamily="18" charset="0"/>
+                            </a:rPr>
+                            <m:t>𝑥</m:t>
+                          </m:r>
+                        </m:e>
+                      </m:acc>
+                    </m:oMath>
+                  </m:oMathPara>
+                </a14:m>
+                <a:endParaRPr lang="it-IT" dirty="0"/>
+              </a:p>
+            </p:txBody>
+          </p:sp>
+        </mc:Choice>
+        <mc:Fallback>
+          <p:sp>
+            <p:nvSpPr>
+              <p:cNvPr id="130" name="CasellaDiTesto 129">
+                <a:extLst>
+                  <a:ext uri="{FF2B5EF4-FFF2-40B4-BE49-F238E27FC236}">
+                    <a16:creationId xmlns:a16="http://schemas.microsoft.com/office/drawing/2014/main" id="{21B0CEAB-9D02-5732-213A-B77FD4F4B2CF}"/>
+                  </a:ext>
+                </a:extLst>
+              </p:cNvPr>
+              <p:cNvSpPr txBox="1">
+                <a:spLocks noRot="1" noChangeAspect="1" noMove="1" noResize="1" noEditPoints="1" noAdjustHandles="1" noChangeArrowheads="1" noChangeShapeType="1" noTextEdit="1"/>
+              </p:cNvSpPr>
+              <p:nvPr/>
+            </p:nvSpPr>
+            <p:spPr>
+              <a:xfrm>
+                <a:off x="4241402" y="3679051"/>
+                <a:ext cx="323357" cy="276999"/>
+              </a:xfrm>
+              <a:prstGeom prst="rect">
+                <a:avLst/>
+              </a:prstGeom>
+              <a:blipFill>
+                <a:blip r:embed="rId8"/>
+                <a:stretch>
+                  <a:fillRect l="-26415" t="-4444" r="-30189" b="-35556"/>
+                </a:stretch>
+              </a:blipFill>
+            </p:spPr>
+            <p:txBody>
+              <a:bodyPr/>
+              <a:lstStyle/>
+              <a:p>
+                <a:r>
+                  <a:rPr lang="it-IT">
+                    <a:noFill/>
+                  </a:rPr>
+                  <a:t> </a:t>
+                </a:r>
+              </a:p>
+            </p:txBody>
+          </p:sp>
+        </mc:Fallback>
+      </mc:AlternateContent>
+      <mc:AlternateContent xmlns:mc="http://schemas.openxmlformats.org/markup-compatibility/2006">
+        <mc:Choice xmlns:a14="http://schemas.microsoft.com/office/drawing/2010/main" Requires="a14">
+          <p:sp>
+            <p:nvSpPr>
+              <p:cNvPr id="131" name="CasellaDiTesto 130">
+                <a:extLst>
+                  <a:ext uri="{FF2B5EF4-FFF2-40B4-BE49-F238E27FC236}">
+                    <a16:creationId xmlns:a16="http://schemas.microsoft.com/office/drawing/2014/main" id="{1C963FD8-DA73-CB18-4785-C83C2642191A}"/>
+                  </a:ext>
+                </a:extLst>
+              </p:cNvPr>
+              <p:cNvSpPr txBox="1"/>
+              <p:nvPr/>
+            </p:nvSpPr>
+            <p:spPr>
+              <a:xfrm>
+                <a:off x="7605759" y="3713045"/>
+                <a:ext cx="211700" cy="276999"/>
+              </a:xfrm>
+              <a:prstGeom prst="rect">
+                <a:avLst/>
+              </a:prstGeom>
+              <a:noFill/>
+            </p:spPr>
+            <p:txBody>
+              <a:bodyPr wrap="square" lIns="0" tIns="0" rIns="0" bIns="0" rtlCol="0">
+                <a:spAutoFit/>
+              </a:bodyPr>
+              <a:lstStyle/>
+              <a:p>
+                <a14:m>
+                  <m:oMathPara xmlns:m="http://schemas.openxmlformats.org/officeDocument/2006/math">
+                    <m:oMathParaPr>
+                      <m:jc m:val="centerGroup"/>
+                    </m:oMathParaPr>
+                    <m:oMath xmlns:m="http://schemas.openxmlformats.org/officeDocument/2006/math">
+                      <m:r>
+                        <a:rPr lang="it-IT" b="0" i="1" smtClean="0">
+                          <a:latin typeface="Cambria Math" panose="02040503050406030204" pitchFamily="18" charset="0"/>
+                        </a:rPr>
+                        <m:t>𝐹</m:t>
+                      </m:r>
+                    </m:oMath>
+                  </m:oMathPara>
+                </a14:m>
+                <a:endParaRPr lang="it-IT" dirty="0"/>
+              </a:p>
+            </p:txBody>
+          </p:sp>
+        </mc:Choice>
+        <mc:Fallback>
+          <p:sp>
+            <p:nvSpPr>
+              <p:cNvPr id="131" name="CasellaDiTesto 130">
+                <a:extLst>
+                  <a:ext uri="{FF2B5EF4-FFF2-40B4-BE49-F238E27FC236}">
+                    <a16:creationId xmlns:a16="http://schemas.microsoft.com/office/drawing/2014/main" id="{1C963FD8-DA73-CB18-4785-C83C2642191A}"/>
+                  </a:ext>
+                </a:extLst>
+              </p:cNvPr>
+              <p:cNvSpPr txBox="1">
+                <a:spLocks noRot="1" noChangeAspect="1" noMove="1" noResize="1" noEditPoints="1" noAdjustHandles="1" noChangeArrowheads="1" noChangeShapeType="1" noTextEdit="1"/>
+              </p:cNvSpPr>
+              <p:nvPr/>
+            </p:nvSpPr>
+            <p:spPr>
+              <a:xfrm>
+                <a:off x="7605759" y="3713045"/>
+                <a:ext cx="211700" cy="276999"/>
+              </a:xfrm>
+              <a:prstGeom prst="rect">
+                <a:avLst/>
+              </a:prstGeom>
+              <a:blipFill>
+                <a:blip r:embed="rId9"/>
+                <a:stretch>
+                  <a:fillRect l="-26471" r="-20588" b="-6522"/>
+                </a:stretch>
+              </a:blipFill>
+            </p:spPr>
+            <p:txBody>
+              <a:bodyPr/>
+              <a:lstStyle/>
+              <a:p>
+                <a:r>
+                  <a:rPr lang="it-IT">
+                    <a:noFill/>
+                  </a:rPr>
+                  <a:t> </a:t>
+                </a:r>
+              </a:p>
+            </p:txBody>
+          </p:sp>
+        </mc:Fallback>
+      </mc:AlternateContent>
+      <mc:AlternateContent xmlns:mc="http://schemas.openxmlformats.org/markup-compatibility/2006">
+        <mc:Choice xmlns:a14="http://schemas.microsoft.com/office/drawing/2010/main" Requires="a14">
+          <p:sp>
+            <p:nvSpPr>
+              <p:cNvPr id="132" name="CasellaDiTesto 131">
+                <a:extLst>
+                  <a:ext uri="{FF2B5EF4-FFF2-40B4-BE49-F238E27FC236}">
+                    <a16:creationId xmlns:a16="http://schemas.microsoft.com/office/drawing/2014/main" id="{1F8C3131-57A7-FFC0-082E-2300CE54506A}"/>
+                  </a:ext>
+                </a:extLst>
+              </p:cNvPr>
+              <p:cNvSpPr txBox="1"/>
+              <p:nvPr/>
+            </p:nvSpPr>
+            <p:spPr>
+              <a:xfrm>
+                <a:off x="5944331" y="3808156"/>
+                <a:ext cx="211700" cy="369332"/>
+              </a:xfrm>
+              <a:prstGeom prst="rect">
+                <a:avLst/>
+              </a:prstGeom>
+              <a:noFill/>
+            </p:spPr>
+            <p:txBody>
+              <a:bodyPr wrap="square" lIns="0" tIns="0" rIns="0" bIns="0" rtlCol="0">
+                <a:spAutoFit/>
+              </a:bodyPr>
+              <a:lstStyle/>
+              <a:p>
+                <a14:m>
+                  <m:oMathPara xmlns:m="http://schemas.openxmlformats.org/officeDocument/2006/math">
+                    <m:oMathParaPr>
+                      <m:jc m:val="centerGroup"/>
+                    </m:oMathParaPr>
+                    <m:oMath xmlns:m="http://schemas.openxmlformats.org/officeDocument/2006/math">
+                      <m:r>
+                        <a:rPr lang="it-IT" sz="2400" b="0" i="1" smtClean="0">
+                          <a:latin typeface="Cambria Math" panose="02040503050406030204" pitchFamily="18" charset="0"/>
+                        </a:rPr>
+                        <m:t>𝑀</m:t>
+                      </m:r>
+                    </m:oMath>
+                  </m:oMathPara>
+                </a14:m>
+                <a:endParaRPr lang="it-IT" dirty="0"/>
+              </a:p>
+            </p:txBody>
+          </p:sp>
+        </mc:Choice>
+        <mc:Fallback>
+          <p:sp>
+            <p:nvSpPr>
+              <p:cNvPr id="132" name="CasellaDiTesto 131">
+                <a:extLst>
+                  <a:ext uri="{FF2B5EF4-FFF2-40B4-BE49-F238E27FC236}">
+                    <a16:creationId xmlns:a16="http://schemas.microsoft.com/office/drawing/2014/main" id="{1F8C3131-57A7-FFC0-082E-2300CE54506A}"/>
+                  </a:ext>
+                </a:extLst>
+              </p:cNvPr>
+              <p:cNvSpPr txBox="1">
+                <a:spLocks noRot="1" noChangeAspect="1" noMove="1" noResize="1" noEditPoints="1" noAdjustHandles="1" noChangeArrowheads="1" noChangeShapeType="1" noTextEdit="1"/>
+              </p:cNvSpPr>
+              <p:nvPr/>
+            </p:nvSpPr>
+            <p:spPr>
+              <a:xfrm>
+                <a:off x="5944331" y="3808156"/>
+                <a:ext cx="211700" cy="369332"/>
+              </a:xfrm>
+              <a:prstGeom prst="rect">
+                <a:avLst/>
+              </a:prstGeom>
+              <a:blipFill>
+                <a:blip r:embed="rId10"/>
+                <a:stretch>
+                  <a:fillRect l="-48571" r="-74286" b="-5000"/>
+                </a:stretch>
+              </a:blipFill>
+            </p:spPr>
+            <p:txBody>
+              <a:bodyPr/>
+              <a:lstStyle/>
+              <a:p>
+                <a:r>
+                  <a:rPr lang="it-IT">
+                    <a:noFill/>
+                  </a:rPr>
+                  <a:t> </a:t>
+                </a:r>
+              </a:p>
+            </p:txBody>
+          </p:sp>
+        </mc:Fallback>
+      </mc:AlternateContent>
+      <mc:AlternateContent xmlns:mc="http://schemas.openxmlformats.org/markup-compatibility/2006">
+        <mc:Choice xmlns:a14="http://schemas.microsoft.com/office/drawing/2010/main" Requires="a14">
+          <p:sp>
+            <p:nvSpPr>
+              <p:cNvPr id="133" name="CasellaDiTesto 132">
+                <a:extLst>
+                  <a:ext uri="{FF2B5EF4-FFF2-40B4-BE49-F238E27FC236}">
+                    <a16:creationId xmlns:a16="http://schemas.microsoft.com/office/drawing/2014/main" id="{195771CE-DBD4-1FA9-12E2-44140D07C9B1}"/>
+                  </a:ext>
+                </a:extLst>
+              </p:cNvPr>
+              <p:cNvSpPr txBox="1"/>
+              <p:nvPr/>
+            </p:nvSpPr>
+            <p:spPr>
+              <a:xfrm>
+                <a:off x="5724247" y="1265070"/>
+                <a:ext cx="211700" cy="276999"/>
+              </a:xfrm>
+              <a:prstGeom prst="rect">
+                <a:avLst/>
+              </a:prstGeom>
+              <a:noFill/>
+            </p:spPr>
+            <p:txBody>
+              <a:bodyPr wrap="square" lIns="0" tIns="0" rIns="0" bIns="0" rtlCol="0">
+                <a:spAutoFit/>
+              </a:bodyPr>
+              <a:lstStyle/>
+              <a:p>
+                <a14:m>
+                  <m:oMathPara xmlns:m="http://schemas.openxmlformats.org/officeDocument/2006/math">
+                    <m:oMathParaPr>
+                      <m:jc m:val="centerGroup"/>
+                    </m:oMathParaPr>
+                    <m:oMath xmlns:m="http://schemas.openxmlformats.org/officeDocument/2006/math">
+                      <m:r>
+                        <a:rPr lang="it-IT" b="0" i="1" smtClean="0">
+                          <a:latin typeface="Cambria Math" panose="02040503050406030204" pitchFamily="18" charset="0"/>
+                        </a:rPr>
+                        <m:t>𝜃</m:t>
+                      </m:r>
+                    </m:oMath>
+                  </m:oMathPara>
+                </a14:m>
+                <a:endParaRPr lang="it-IT" dirty="0"/>
+              </a:p>
+            </p:txBody>
+          </p:sp>
+        </mc:Choice>
+        <mc:Fallback>
+          <p:sp>
+            <p:nvSpPr>
+              <p:cNvPr id="133" name="CasellaDiTesto 132">
+                <a:extLst>
+                  <a:ext uri="{FF2B5EF4-FFF2-40B4-BE49-F238E27FC236}">
+                    <a16:creationId xmlns:a16="http://schemas.microsoft.com/office/drawing/2014/main" id="{195771CE-DBD4-1FA9-12E2-44140D07C9B1}"/>
+                  </a:ext>
+                </a:extLst>
+              </p:cNvPr>
+              <p:cNvSpPr txBox="1">
+                <a:spLocks noRot="1" noChangeAspect="1" noMove="1" noResize="1" noEditPoints="1" noAdjustHandles="1" noChangeArrowheads="1" noChangeShapeType="1" noTextEdit="1"/>
+              </p:cNvSpPr>
+              <p:nvPr/>
+            </p:nvSpPr>
+            <p:spPr>
+              <a:xfrm>
+                <a:off x="5724247" y="1265070"/>
+                <a:ext cx="211700" cy="276999"/>
+              </a:xfrm>
+              <a:prstGeom prst="rect">
+                <a:avLst/>
+              </a:prstGeom>
+              <a:blipFill>
+                <a:blip r:embed="rId11"/>
+                <a:stretch>
+                  <a:fillRect l="-20000" r="-17143" b="-6667"/>
+                </a:stretch>
+              </a:blipFill>
+            </p:spPr>
+            <p:txBody>
+              <a:bodyPr/>
+              <a:lstStyle/>
+              <a:p>
+                <a:r>
+                  <a:rPr lang="it-IT">
+                    <a:noFill/>
+                  </a:rPr>
+                  <a:t> </a:t>
+                </a:r>
+              </a:p>
+            </p:txBody>
+          </p:sp>
+        </mc:Fallback>
+      </mc:AlternateContent>
+      <mc:AlternateContent xmlns:mc="http://schemas.openxmlformats.org/markup-compatibility/2006">
+        <mc:Choice xmlns:a14="http://schemas.microsoft.com/office/drawing/2010/main" Requires="a14">
+          <p:sp>
+            <p:nvSpPr>
+              <p:cNvPr id="134" name="CasellaDiTesto 133">
+                <a:extLst>
+                  <a:ext uri="{FF2B5EF4-FFF2-40B4-BE49-F238E27FC236}">
+                    <a16:creationId xmlns:a16="http://schemas.microsoft.com/office/drawing/2014/main" id="{AAE0A42D-F4B8-CF7A-B6E6-8DC9836A387A}"/>
+                  </a:ext>
+                </a:extLst>
+              </p:cNvPr>
+              <p:cNvSpPr txBox="1"/>
+              <p:nvPr/>
+            </p:nvSpPr>
+            <p:spPr>
+              <a:xfrm>
+                <a:off x="8691445" y="4647157"/>
+                <a:ext cx="211700" cy="369332"/>
+              </a:xfrm>
+              <a:prstGeom prst="rect">
+                <a:avLst/>
+              </a:prstGeom>
+              <a:noFill/>
+            </p:spPr>
+            <p:txBody>
+              <a:bodyPr wrap="square" lIns="0" tIns="0" rIns="0" bIns="0" rtlCol="0">
+                <a:spAutoFit/>
+              </a:bodyPr>
+              <a:lstStyle/>
+              <a:p>
+                <a14:m>
+                  <m:oMathPara xmlns:m="http://schemas.openxmlformats.org/officeDocument/2006/math">
+                    <m:oMathParaPr>
+                      <m:jc m:val="centerGroup"/>
+                    </m:oMathParaPr>
+                    <m:oMath xmlns:m="http://schemas.openxmlformats.org/officeDocument/2006/math">
+                      <m:r>
+                        <a:rPr lang="it-IT" sz="2400" b="0" i="1" smtClean="0">
+                          <a:latin typeface="Cambria Math" panose="02040503050406030204" pitchFamily="18" charset="0"/>
+                        </a:rPr>
+                        <m:t>𝑥</m:t>
+                      </m:r>
+                    </m:oMath>
+                  </m:oMathPara>
+                </a14:m>
+                <a:endParaRPr lang="it-IT" sz="2400" dirty="0"/>
+              </a:p>
+            </p:txBody>
+          </p:sp>
+        </mc:Choice>
+        <mc:Fallback>
+          <p:sp>
+            <p:nvSpPr>
+              <p:cNvPr id="134" name="CasellaDiTesto 133">
+                <a:extLst>
+                  <a:ext uri="{FF2B5EF4-FFF2-40B4-BE49-F238E27FC236}">
+                    <a16:creationId xmlns:a16="http://schemas.microsoft.com/office/drawing/2014/main" id="{AAE0A42D-F4B8-CF7A-B6E6-8DC9836A387A}"/>
+                  </a:ext>
+                </a:extLst>
+              </p:cNvPr>
+              <p:cNvSpPr txBox="1">
+                <a:spLocks noRot="1" noChangeAspect="1" noMove="1" noResize="1" noEditPoints="1" noAdjustHandles="1" noChangeArrowheads="1" noChangeShapeType="1" noTextEdit="1"/>
+              </p:cNvSpPr>
+              <p:nvPr/>
+            </p:nvSpPr>
+            <p:spPr>
+              <a:xfrm>
+                <a:off x="8691445" y="4647157"/>
+                <a:ext cx="211700" cy="369332"/>
+              </a:xfrm>
+              <a:prstGeom prst="rect">
+                <a:avLst/>
+              </a:prstGeom>
+              <a:blipFill>
+                <a:blip r:embed="rId12"/>
+                <a:stretch>
+                  <a:fillRect l="-29412" r="-23529"/>
+                </a:stretch>
+              </a:blipFill>
+            </p:spPr>
+            <p:txBody>
+              <a:bodyPr/>
+              <a:lstStyle/>
+              <a:p>
+                <a:r>
+                  <a:rPr lang="it-IT">
+                    <a:noFill/>
+                  </a:rPr>
+                  <a:t> </a:t>
+                </a:r>
+              </a:p>
+            </p:txBody>
+          </p:sp>
+        </mc:Fallback>
+      </mc:AlternateContent>
+      <mc:AlternateContent xmlns:mc="http://schemas.openxmlformats.org/markup-compatibility/2006">
+        <mc:Choice xmlns:a14="http://schemas.microsoft.com/office/drawing/2010/main" Requires="a14">
+          <p:sp>
+            <p:nvSpPr>
+              <p:cNvPr id="135" name="CasellaDiTesto 134">
+                <a:extLst>
+                  <a:ext uri="{FF2B5EF4-FFF2-40B4-BE49-F238E27FC236}">
+                    <a16:creationId xmlns:a16="http://schemas.microsoft.com/office/drawing/2014/main" id="{0C635107-0651-C2BF-A1BE-54A9A96F36A0}"/>
+                  </a:ext>
+                </a:extLst>
+              </p:cNvPr>
+              <p:cNvSpPr txBox="1"/>
+              <p:nvPr/>
+            </p:nvSpPr>
+            <p:spPr>
+              <a:xfrm>
+                <a:off x="3376442" y="1240274"/>
+                <a:ext cx="211700" cy="369332"/>
+              </a:xfrm>
+              <a:prstGeom prst="rect">
+                <a:avLst/>
+              </a:prstGeom>
+              <a:noFill/>
+            </p:spPr>
+            <p:txBody>
+              <a:bodyPr wrap="square" lIns="0" tIns="0" rIns="0" bIns="0" rtlCol="0">
+                <a:spAutoFit/>
+              </a:bodyPr>
+              <a:lstStyle/>
+              <a:p>
+                <a14:m>
+                  <m:oMathPara xmlns:m="http://schemas.openxmlformats.org/officeDocument/2006/math">
+                    <m:oMathParaPr>
+                      <m:jc m:val="centerGroup"/>
+                    </m:oMathParaPr>
+                    <m:oMath xmlns:m="http://schemas.openxmlformats.org/officeDocument/2006/math">
+                      <m:r>
+                        <a:rPr lang="it-IT" sz="2400" b="0" i="1" smtClean="0">
+                          <a:latin typeface="Cambria Math" panose="02040503050406030204" pitchFamily="18" charset="0"/>
+                        </a:rPr>
+                        <m:t>𝑦</m:t>
+                      </m:r>
+                    </m:oMath>
+                  </m:oMathPara>
+                </a14:m>
+                <a:endParaRPr lang="it-IT" sz="2400" dirty="0"/>
+              </a:p>
+            </p:txBody>
+          </p:sp>
+        </mc:Choice>
+        <mc:Fallback>
+          <p:sp>
+            <p:nvSpPr>
+              <p:cNvPr id="135" name="CasellaDiTesto 134">
+                <a:extLst>
+                  <a:ext uri="{FF2B5EF4-FFF2-40B4-BE49-F238E27FC236}">
+                    <a16:creationId xmlns:a16="http://schemas.microsoft.com/office/drawing/2014/main" id="{0C635107-0651-C2BF-A1BE-54A9A96F36A0}"/>
+                  </a:ext>
+                </a:extLst>
+              </p:cNvPr>
+              <p:cNvSpPr txBox="1">
+                <a:spLocks noRot="1" noChangeAspect="1" noMove="1" noResize="1" noEditPoints="1" noAdjustHandles="1" noChangeArrowheads="1" noChangeShapeType="1" noTextEdit="1"/>
+              </p:cNvSpPr>
+              <p:nvPr/>
+            </p:nvSpPr>
+            <p:spPr>
+              <a:xfrm>
+                <a:off x="3376442" y="1240274"/>
+                <a:ext cx="211700" cy="369332"/>
+              </a:xfrm>
+              <a:prstGeom prst="rect">
+                <a:avLst/>
+              </a:prstGeom>
+              <a:blipFill>
+                <a:blip r:embed="rId13"/>
+                <a:stretch>
+                  <a:fillRect l="-42857" r="-40000" b="-22951"/>
+                </a:stretch>
+              </a:blipFill>
+            </p:spPr>
+            <p:txBody>
+              <a:bodyPr/>
+              <a:lstStyle/>
+              <a:p>
+                <a:r>
+                  <a:rPr lang="it-IT">
+                    <a:noFill/>
+                  </a:rPr>
+                  <a:t> </a:t>
+                </a:r>
+              </a:p>
+            </p:txBody>
+          </p:sp>
+        </mc:Fallback>
+      </mc:AlternateContent>
+      <p:sp>
+        <p:nvSpPr>
+          <p:cNvPr id="136" name="Arco 135">
+            <a:extLst>
+              <a:ext uri="{FF2B5EF4-FFF2-40B4-BE49-F238E27FC236}">
+                <a16:creationId xmlns:a16="http://schemas.microsoft.com/office/drawing/2014/main" id="{FCD1DDAA-DF09-FBAA-78C3-A05411A76928}"/>
+              </a:ext>
+            </a:extLst>
+          </p:cNvPr>
+          <p:cNvSpPr/>
+          <p:nvPr/>
+        </p:nvSpPr>
+        <p:spPr>
+          <a:xfrm>
+            <a:off x="4393453" y="1787512"/>
+            <a:ext cx="3405094" cy="3535344"/>
+          </a:xfrm>
+          <a:prstGeom prst="arc">
+            <a:avLst>
+              <a:gd name="adj1" fmla="val 14824762"/>
+              <a:gd name="adj2" fmla="val 15541667"/>
+            </a:avLst>
+          </a:prstGeom>
+          <a:ln w="28575">
+            <a:solidFill>
+              <a:srgbClr val="FF0000"/>
+            </a:solidFill>
+          </a:ln>
+        </p:spPr>
+        <p:style>
+          <a:lnRef idx="2">
+            <a:schemeClr val="dk1"/>
+          </a:lnRef>
+          <a:fillRef idx="0">
+            <a:schemeClr val="dk1"/>
+          </a:fillRef>
+          <a:effectRef idx="1">
+            <a:schemeClr val="dk1"/>
+          </a:effectRef>
+          <a:fontRef idx="minor">
+            <a:schemeClr val="tx1"/>
+          </a:fontRef>
+        </p:style>
+        <p:txBody>
+          <a:bodyPr rtlCol="0" anchor="ctr"/>
+          <a:lstStyle/>
+          <a:p>
+            <a:pPr algn="ctr"/>
+            <a:endParaRPr lang="it-IT"/>
+          </a:p>
+        </p:txBody>
+      </p:sp>
+      <p:sp>
+        <p:nvSpPr>
+          <p:cNvPr id="137" name="Triangolo isoscele 136">
+            <a:extLst>
+              <a:ext uri="{FF2B5EF4-FFF2-40B4-BE49-F238E27FC236}">
+                <a16:creationId xmlns:a16="http://schemas.microsoft.com/office/drawing/2014/main" id="{8C3DBCFB-68AA-C081-8064-D0A323D7EB37}"/>
+              </a:ext>
+            </a:extLst>
+          </p:cNvPr>
+          <p:cNvSpPr/>
+          <p:nvPr/>
+        </p:nvSpPr>
+        <p:spPr>
+          <a:xfrm rot="4756538">
+            <a:off x="5752871" y="1776833"/>
+            <a:ext cx="80963" cy="88106"/>
+          </a:xfrm>
+          <a:prstGeom prst="triangle">
+            <a:avLst/>
+          </a:prstGeom>
+          <a:solidFill>
+            <a:srgbClr val="FF0000"/>
+          </a:solidFill>
+          <a:ln>
+            <a:solidFill>
+              <a:srgbClr val="FF0000"/>
+            </a:solidFill>
+          </a:ln>
+        </p:spPr>
+        <p:style>
+          <a:lnRef idx="2">
+            <a:schemeClr val="accent1">
+              <a:shade val="15000"/>
+            </a:schemeClr>
+          </a:lnRef>
+          <a:fillRef idx="1">
+            <a:schemeClr val="accent1"/>
+          </a:fillRef>
+          <a:effectRef idx="0">
+            <a:schemeClr val="accent1"/>
+          </a:effectRef>
+          <a:fontRef idx="minor">
+            <a:schemeClr val="lt1"/>
+          </a:fontRef>
+        </p:style>
+        <p:txBody>
+          <a:bodyPr rtlCol="0" anchor="ctr"/>
+          <a:lstStyle/>
+          <a:p>
+            <a:pPr algn="ctr"/>
+            <a:endParaRPr lang="it-IT"/>
+          </a:p>
+        </p:txBody>
+      </p:sp>
+      <mc:AlternateContent xmlns:mc="http://schemas.openxmlformats.org/markup-compatibility/2006">
+        <mc:Choice xmlns:a14="http://schemas.microsoft.com/office/drawing/2010/main" Requires="a14">
+          <p:sp>
+            <p:nvSpPr>
+              <p:cNvPr id="138" name="CasellaDiTesto 137">
+                <a:extLst>
+                  <a:ext uri="{FF2B5EF4-FFF2-40B4-BE49-F238E27FC236}">
+                    <a16:creationId xmlns:a16="http://schemas.microsoft.com/office/drawing/2014/main" id="{9F379834-8E8C-5D2A-AFDA-503411D3D79C}"/>
+                  </a:ext>
+                </a:extLst>
+              </p:cNvPr>
+              <p:cNvSpPr txBox="1"/>
+              <p:nvPr/>
+            </p:nvSpPr>
+            <p:spPr>
+              <a:xfrm>
+                <a:off x="5054456" y="1935114"/>
+                <a:ext cx="327910" cy="289823"/>
+              </a:xfrm>
+              <a:prstGeom prst="rect">
+                <a:avLst/>
+              </a:prstGeom>
+              <a:noFill/>
+            </p:spPr>
+            <p:txBody>
+              <a:bodyPr wrap="none" lIns="0" tIns="0" rIns="0" bIns="0" rtlCol="0">
+                <a:spAutoFit/>
+              </a:bodyPr>
+              <a:lstStyle/>
+              <a:p>
+                <a14:m>
+                  <m:oMathPara xmlns:m="http://schemas.openxmlformats.org/officeDocument/2006/math">
+                    <m:oMathParaPr>
+                      <m:jc m:val="centerGroup"/>
+                    </m:oMathParaPr>
+                    <m:oMath xmlns:m="http://schemas.openxmlformats.org/officeDocument/2006/math">
+                      <m:r>
+                        <a:rPr lang="it-IT" b="0" i="1" smtClean="0">
+                          <a:latin typeface="Cambria Math" panose="02040503050406030204" pitchFamily="18" charset="0"/>
+                        </a:rPr>
+                        <m:t>𝛼</m:t>
+                      </m:r>
+                      <m:acc>
+                        <m:accPr>
+                          <m:chr m:val="̇"/>
+                          <m:ctrlPr>
+                            <a:rPr lang="it-IT" b="0" i="1" smtClean="0">
+                              <a:latin typeface="Cambria Math" panose="02040503050406030204" pitchFamily="18" charset="0"/>
+                            </a:rPr>
+                          </m:ctrlPr>
+                        </m:accPr>
+                        <m:e>
+                          <m:r>
+                            <a:rPr lang="it-IT" b="0" i="1" smtClean="0">
+                              <a:latin typeface="Cambria Math" panose="02040503050406030204" pitchFamily="18" charset="0"/>
+                            </a:rPr>
+                            <m:t>𝜃</m:t>
+                          </m:r>
+                        </m:e>
+                      </m:acc>
+                    </m:oMath>
+                  </m:oMathPara>
+                </a14:m>
+                <a:endParaRPr lang="it-IT" dirty="0"/>
+              </a:p>
+            </p:txBody>
+          </p:sp>
+        </mc:Choice>
+        <mc:Fallback>
+          <p:sp>
+            <p:nvSpPr>
+              <p:cNvPr id="138" name="CasellaDiTesto 137">
+                <a:extLst>
+                  <a:ext uri="{FF2B5EF4-FFF2-40B4-BE49-F238E27FC236}">
+                    <a16:creationId xmlns:a16="http://schemas.microsoft.com/office/drawing/2014/main" id="{9F379834-8E8C-5D2A-AFDA-503411D3D79C}"/>
+                  </a:ext>
+                </a:extLst>
+              </p:cNvPr>
+              <p:cNvSpPr txBox="1">
+                <a:spLocks noRot="1" noChangeAspect="1" noMove="1" noResize="1" noEditPoints="1" noAdjustHandles="1" noChangeArrowheads="1" noChangeShapeType="1" noTextEdit="1"/>
+              </p:cNvSpPr>
+              <p:nvPr/>
+            </p:nvSpPr>
+            <p:spPr>
+              <a:xfrm>
+                <a:off x="5054456" y="1935114"/>
+                <a:ext cx="327910" cy="289823"/>
+              </a:xfrm>
+              <a:prstGeom prst="rect">
+                <a:avLst/>
+              </a:prstGeom>
+              <a:blipFill>
+                <a:blip r:embed="rId14"/>
+                <a:stretch>
+                  <a:fillRect l="-11111" t="-12500" r="-31481" b="-6250"/>
+                </a:stretch>
+              </a:blipFill>
+            </p:spPr>
+            <p:txBody>
+              <a:bodyPr/>
+              <a:lstStyle/>
+              <a:p>
+                <a:r>
+                  <a:rPr lang="it-IT">
+                    <a:noFill/>
+                  </a:rPr>
+                  <a:t> </a:t>
+                </a:r>
+              </a:p>
+            </p:txBody>
+          </p:sp>
+        </mc:Fallback>
+      </mc:AlternateContent>
+    </p:spTree>
+    <p:extLst>
+      <p:ext uri="{BB962C8B-B14F-4D97-AF65-F5344CB8AC3E}">
+        <p14:creationId xmlns:p14="http://schemas.microsoft.com/office/powerpoint/2010/main" val="1094891746"/>
+      </p:ext>
+    </p:extLst>
+  </p:cSld>
+  <p:clrMapOvr>
+    <a:masterClrMapping/>
+  </p:clrMapOvr>
+</p:sld>
+</file>
+
+<file path=ppt/slides/slide3.xml><?xml version="1.0" encoding="utf-8"?>
+<p:sld xmlns:a="http://schemas.openxmlformats.org/drawingml/2006/main" xmlns:r="http://schemas.openxmlformats.org/officeDocument/2006/relationships" xmlns:p="http://schemas.openxmlformats.org/presentationml/2006/main">
+  <p:cSld>
+    <p:spTree>
+      <p:nvGrpSpPr>
+        <p:cNvPr id="1" name=""/>
+        <p:cNvGrpSpPr/>
+        <p:nvPr/>
+      </p:nvGrpSpPr>
+      <p:grpSpPr>
+        <a:xfrm>
+          <a:off x="0" y="0"/>
+          <a:ext cx="0" cy="0"/>
+          <a:chOff x="0" y="0"/>
+          <a:chExt cx="0" cy="0"/>
+        </a:xfrm>
+      </p:grpSpPr>
+      <p:sp>
+        <p:nvSpPr>
+          <p:cNvPr id="7" name="Ovale 6">
+            <a:extLst>
+              <a:ext uri="{FF2B5EF4-FFF2-40B4-BE49-F238E27FC236}">
+                <a16:creationId xmlns:a16="http://schemas.microsoft.com/office/drawing/2014/main" id="{2F975E46-D4A8-3C79-6646-B3797C4F6FB9}"/>
+              </a:ext>
+            </a:extLst>
+          </p:cNvPr>
+          <p:cNvSpPr/>
+          <p:nvPr/>
+        </p:nvSpPr>
+        <p:spPr>
+          <a:xfrm>
+            <a:off x="5299075" y="4562855"/>
+            <a:ext cx="409575" cy="409575"/>
+          </a:xfrm>
+          <a:prstGeom prst="ellipse">
+            <a:avLst/>
+          </a:prstGeom>
+          <a:solidFill>
+            <a:schemeClr val="bg1"/>
+          </a:solidFill>
+          <a:ln w="38100">
+            <a:solidFill>
+              <a:schemeClr val="tx1"/>
+            </a:solidFill>
+          </a:ln>
+        </p:spPr>
+        <p:style>
+          <a:lnRef idx="2">
+            <a:schemeClr val="accent1">
+              <a:shade val="15000"/>
+            </a:schemeClr>
+          </a:lnRef>
+          <a:fillRef idx="1">
+            <a:schemeClr val="accent1"/>
+          </a:fillRef>
+          <a:effectRef idx="0">
+            <a:schemeClr val="accent1"/>
+          </a:effectRef>
+          <a:fontRef idx="minor">
+            <a:schemeClr val="lt1"/>
+          </a:fontRef>
+        </p:style>
+        <p:txBody>
+          <a:bodyPr rtlCol="0" anchor="ctr"/>
+          <a:lstStyle/>
+          <a:p>
+            <a:pPr algn="ctr"/>
+            <a:endParaRPr lang="it-IT"/>
+          </a:p>
+        </p:txBody>
+      </p:sp>
+      <p:sp>
+        <p:nvSpPr>
+          <p:cNvPr id="8" name="Ovale 7">
+            <a:extLst>
+              <a:ext uri="{FF2B5EF4-FFF2-40B4-BE49-F238E27FC236}">
+                <a16:creationId xmlns:a16="http://schemas.microsoft.com/office/drawing/2014/main" id="{1AFE83C0-0E14-226B-6910-9E0CE0F1E61D}"/>
+              </a:ext>
+            </a:extLst>
+          </p:cNvPr>
+          <p:cNvSpPr/>
+          <p:nvPr/>
+        </p:nvSpPr>
+        <p:spPr>
+          <a:xfrm>
+            <a:off x="6483352" y="4562854"/>
+            <a:ext cx="409575" cy="409575"/>
+          </a:xfrm>
+          <a:prstGeom prst="ellipse">
+            <a:avLst/>
+          </a:prstGeom>
+          <a:solidFill>
+            <a:schemeClr val="bg1"/>
+          </a:solidFill>
+          <a:ln w="38100">
+            <a:solidFill>
+              <a:schemeClr val="tx1"/>
+            </a:solidFill>
+          </a:ln>
+        </p:spPr>
+        <p:style>
+          <a:lnRef idx="2">
+            <a:schemeClr val="accent1">
+              <a:shade val="15000"/>
+            </a:schemeClr>
+          </a:lnRef>
+          <a:fillRef idx="1">
+            <a:schemeClr val="accent1"/>
+          </a:fillRef>
+          <a:effectRef idx="0">
+            <a:schemeClr val="accent1"/>
+          </a:effectRef>
+          <a:fontRef idx="minor">
+            <a:schemeClr val="lt1"/>
+          </a:fontRef>
+        </p:style>
+        <p:txBody>
+          <a:bodyPr rtlCol="0" anchor="ctr"/>
+          <a:lstStyle/>
+          <a:p>
+            <a:pPr algn="ctr"/>
+            <a:endParaRPr lang="it-IT"/>
+          </a:p>
+        </p:txBody>
+      </p:sp>
+      <p:sp>
+        <p:nvSpPr>
+          <p:cNvPr id="9" name="Rettangolo 8">
+            <a:extLst>
+              <a:ext uri="{FF2B5EF4-FFF2-40B4-BE49-F238E27FC236}">
+                <a16:creationId xmlns:a16="http://schemas.microsoft.com/office/drawing/2014/main" id="{CFFA4B8E-7319-A6A0-3E64-417F0E9D8C93}"/>
+              </a:ext>
+            </a:extLst>
+          </p:cNvPr>
+          <p:cNvSpPr/>
+          <p:nvPr/>
+        </p:nvSpPr>
+        <p:spPr>
+          <a:xfrm>
+            <a:off x="5090160" y="3527080"/>
+            <a:ext cx="2011680" cy="1035776"/>
+          </a:xfrm>
+          <a:prstGeom prst="rect">
+            <a:avLst/>
+          </a:prstGeom>
+          <a:solidFill>
+            <a:schemeClr val="bg1"/>
+          </a:solidFill>
+          <a:ln w="28575">
+            <a:solidFill>
+              <a:schemeClr val="tx1"/>
+            </a:solidFill>
+          </a:ln>
+        </p:spPr>
+        <p:style>
+          <a:lnRef idx="2">
+            <a:schemeClr val="accent1">
+              <a:shade val="15000"/>
+            </a:schemeClr>
+          </a:lnRef>
+          <a:fillRef idx="1">
+            <a:schemeClr val="accent1"/>
+          </a:fillRef>
+          <a:effectRef idx="0">
+            <a:schemeClr val="accent1"/>
+          </a:effectRef>
+          <a:fontRef idx="minor">
+            <a:schemeClr val="lt1"/>
+          </a:fontRef>
+        </p:style>
+        <p:txBody>
+          <a:bodyPr rtlCol="0" anchor="ctr"/>
+          <a:lstStyle/>
+          <a:p>
+            <a:pPr algn="ctr"/>
+            <a:endParaRPr lang="it-IT"/>
+          </a:p>
+        </p:txBody>
+      </p:sp>
+      <p:cxnSp>
+        <p:nvCxnSpPr>
+          <p:cNvPr id="15" name="Connettore 2 14">
+            <a:extLst>
+              <a:ext uri="{FF2B5EF4-FFF2-40B4-BE49-F238E27FC236}">
+                <a16:creationId xmlns:a16="http://schemas.microsoft.com/office/drawing/2014/main" id="{868DCD43-BCA4-2E74-E578-52CEA0606BDC}"/>
+              </a:ext>
+            </a:extLst>
+          </p:cNvPr>
+          <p:cNvCxnSpPr/>
+          <p:nvPr/>
+        </p:nvCxnSpPr>
+        <p:spPr>
+          <a:xfrm>
+            <a:off x="3680460" y="4972429"/>
+            <a:ext cx="4998720" cy="0"/>
+          </a:xfrm>
+          <a:prstGeom prst="straightConnector1">
+            <a:avLst/>
+          </a:prstGeom>
+          <a:ln w="28575">
+            <a:solidFill>
+              <a:schemeClr val="tx1"/>
+            </a:solidFill>
+            <a:tailEnd type="triangle"/>
+          </a:ln>
+        </p:spPr>
+        <p:style>
+          <a:lnRef idx="2">
+            <a:schemeClr val="accent1"/>
+          </a:lnRef>
+          <a:fillRef idx="0">
+            <a:schemeClr val="accent1"/>
+          </a:fillRef>
+          <a:effectRef idx="1">
+            <a:schemeClr val="accent1"/>
+          </a:effectRef>
+          <a:fontRef idx="minor">
+            <a:schemeClr val="tx1"/>
+          </a:fontRef>
+        </p:style>
+      </p:cxnSp>
+      <p:cxnSp>
+        <p:nvCxnSpPr>
+          <p:cNvPr id="16" name="Connettore 2 15">
+            <a:extLst>
+              <a:ext uri="{FF2B5EF4-FFF2-40B4-BE49-F238E27FC236}">
+                <a16:creationId xmlns:a16="http://schemas.microsoft.com/office/drawing/2014/main" id="{7C3509B7-F568-DD71-8201-3A75271989B1}"/>
+              </a:ext>
+            </a:extLst>
+          </p:cNvPr>
+          <p:cNvCxnSpPr>
+            <a:cxnSpLocks/>
+          </p:cNvCxnSpPr>
+          <p:nvPr/>
+        </p:nvCxnSpPr>
+        <p:spPr>
+          <a:xfrm flipV="1">
+            <a:off x="3680460" y="2990850"/>
+            <a:ext cx="0" cy="1981579"/>
+          </a:xfrm>
+          <a:prstGeom prst="straightConnector1">
+            <a:avLst/>
+          </a:prstGeom>
+          <a:ln w="28575">
+            <a:solidFill>
+              <a:schemeClr val="tx1"/>
+            </a:solidFill>
+            <a:tailEnd type="triangle"/>
+          </a:ln>
+        </p:spPr>
+        <p:style>
+          <a:lnRef idx="2">
+            <a:schemeClr val="accent1"/>
+          </a:lnRef>
+          <a:fillRef idx="0">
+            <a:schemeClr val="accent1"/>
+          </a:fillRef>
+          <a:effectRef idx="1">
+            <a:schemeClr val="accent1"/>
+          </a:effectRef>
+          <a:fontRef idx="minor">
+            <a:schemeClr val="tx1"/>
+          </a:fontRef>
+        </p:style>
+      </p:cxnSp>
+      <p:grpSp>
+        <p:nvGrpSpPr>
+          <p:cNvPr id="17" name="Gruppo 16">
+            <a:extLst>
+              <a:ext uri="{FF2B5EF4-FFF2-40B4-BE49-F238E27FC236}">
+                <a16:creationId xmlns:a16="http://schemas.microsoft.com/office/drawing/2014/main" id="{FA306253-2AC1-292B-4CD8-9D8B7C45438C}"/>
+              </a:ext>
+            </a:extLst>
+          </p:cNvPr>
+          <p:cNvGrpSpPr/>
+          <p:nvPr/>
+        </p:nvGrpSpPr>
+        <p:grpSpPr>
+          <a:xfrm rot="16200000">
+            <a:off x="6968933" y="3544674"/>
+            <a:ext cx="283810" cy="3157679"/>
+            <a:chOff x="3317131" y="1562100"/>
+            <a:chExt cx="363329" cy="3157679"/>
+          </a:xfrm>
+        </p:grpSpPr>
+        <p:cxnSp>
+          <p:nvCxnSpPr>
+            <p:cNvPr id="18" name="Connettore diritto 17">
+              <a:extLst>
+                <a:ext uri="{FF2B5EF4-FFF2-40B4-BE49-F238E27FC236}">
+                  <a16:creationId xmlns:a16="http://schemas.microsoft.com/office/drawing/2014/main" id="{D876419F-8526-7832-9CC8-8716D29B9B1A}"/>
+                </a:ext>
+              </a:extLst>
+            </p:cNvPr>
+            <p:cNvCxnSpPr/>
+            <p:nvPr/>
+          </p:nvCxnSpPr>
+          <p:spPr>
+            <a:xfrm flipH="1">
+              <a:off x="3321844" y="1562100"/>
+              <a:ext cx="358616" cy="230981"/>
+            </a:xfrm>
+            <a:prstGeom prst="line">
+              <a:avLst/>
+            </a:prstGeom>
+            <a:ln>
+              <a:solidFill>
+                <a:schemeClr val="tx1"/>
+              </a:solidFill>
+            </a:ln>
+          </p:spPr>
+          <p:style>
+            <a:lnRef idx="2">
+              <a:schemeClr val="accent1"/>
+            </a:lnRef>
+            <a:fillRef idx="0">
+              <a:schemeClr val="accent1"/>
+            </a:fillRef>
+            <a:effectRef idx="1">
+              <a:schemeClr val="accent1"/>
+            </a:effectRef>
+            <a:fontRef idx="minor">
+              <a:schemeClr val="tx1"/>
+            </a:fontRef>
+          </p:style>
+        </p:cxnSp>
+        <p:cxnSp>
+          <p:nvCxnSpPr>
+            <p:cNvPr id="19" name="Connettore diritto 18">
+              <a:extLst>
+                <a:ext uri="{FF2B5EF4-FFF2-40B4-BE49-F238E27FC236}">
+                  <a16:creationId xmlns:a16="http://schemas.microsoft.com/office/drawing/2014/main" id="{1EC20290-4D8C-7ED8-9D5F-D9FC21806CF4}"/>
+                </a:ext>
+              </a:extLst>
+            </p:cNvPr>
+            <p:cNvCxnSpPr/>
+            <p:nvPr/>
+          </p:nvCxnSpPr>
+          <p:spPr>
+            <a:xfrm flipH="1">
+              <a:off x="3321844" y="1690046"/>
+              <a:ext cx="358616" cy="230981"/>
+            </a:xfrm>
+            <a:prstGeom prst="line">
+              <a:avLst/>
+            </a:prstGeom>
+            <a:ln>
+              <a:solidFill>
+                <a:schemeClr val="tx1"/>
+              </a:solidFill>
+            </a:ln>
+          </p:spPr>
+          <p:style>
+            <a:lnRef idx="2">
+              <a:schemeClr val="accent1"/>
+            </a:lnRef>
+            <a:fillRef idx="0">
+              <a:schemeClr val="accent1"/>
+            </a:fillRef>
+            <a:effectRef idx="1">
+              <a:schemeClr val="accent1"/>
+            </a:effectRef>
+            <a:fontRef idx="minor">
+              <a:schemeClr val="tx1"/>
+            </a:fontRef>
+          </p:style>
+        </p:cxnSp>
+        <p:cxnSp>
+          <p:nvCxnSpPr>
+            <p:cNvPr id="20" name="Connettore diritto 19">
+              <a:extLst>
+                <a:ext uri="{FF2B5EF4-FFF2-40B4-BE49-F238E27FC236}">
+                  <a16:creationId xmlns:a16="http://schemas.microsoft.com/office/drawing/2014/main" id="{CD3F534A-AE4E-8739-6B81-B2123DC9DBF4}"/>
+                </a:ext>
+              </a:extLst>
+            </p:cNvPr>
+            <p:cNvCxnSpPr/>
+            <p:nvPr/>
+          </p:nvCxnSpPr>
+          <p:spPr>
+            <a:xfrm flipH="1">
+              <a:off x="3321844" y="1814750"/>
+              <a:ext cx="358616" cy="230981"/>
+            </a:xfrm>
+            <a:prstGeom prst="line">
+              <a:avLst/>
+            </a:prstGeom>
+            <a:ln>
+              <a:solidFill>
+                <a:schemeClr val="tx1"/>
+              </a:solidFill>
+            </a:ln>
+          </p:spPr>
+          <p:style>
+            <a:lnRef idx="2">
+              <a:schemeClr val="accent1"/>
+            </a:lnRef>
+            <a:fillRef idx="0">
+              <a:schemeClr val="accent1"/>
+            </a:fillRef>
+            <a:effectRef idx="1">
+              <a:schemeClr val="accent1"/>
+            </a:effectRef>
+            <a:fontRef idx="minor">
+              <a:schemeClr val="tx1"/>
+            </a:fontRef>
+          </p:style>
+        </p:cxnSp>
+        <p:cxnSp>
+          <p:nvCxnSpPr>
+            <p:cNvPr id="21" name="Connettore diritto 20">
+              <a:extLst>
+                <a:ext uri="{FF2B5EF4-FFF2-40B4-BE49-F238E27FC236}">
+                  <a16:creationId xmlns:a16="http://schemas.microsoft.com/office/drawing/2014/main" id="{C6A1B58F-C126-6613-CFD9-1DCD7E082E8C}"/>
+                </a:ext>
+              </a:extLst>
+            </p:cNvPr>
+            <p:cNvCxnSpPr/>
+            <p:nvPr/>
+          </p:nvCxnSpPr>
+          <p:spPr>
+            <a:xfrm flipH="1">
+              <a:off x="3321843" y="1942696"/>
+              <a:ext cx="358616" cy="230981"/>
+            </a:xfrm>
+            <a:prstGeom prst="line">
+              <a:avLst/>
+            </a:prstGeom>
+            <a:ln>
+              <a:solidFill>
+                <a:schemeClr val="tx1"/>
+              </a:solidFill>
+            </a:ln>
+          </p:spPr>
+          <p:style>
+            <a:lnRef idx="2">
+              <a:schemeClr val="accent1"/>
+            </a:lnRef>
+            <a:fillRef idx="0">
+              <a:schemeClr val="accent1"/>
+            </a:fillRef>
+            <a:effectRef idx="1">
+              <a:schemeClr val="accent1"/>
+            </a:effectRef>
+            <a:fontRef idx="minor">
+              <a:schemeClr val="tx1"/>
+            </a:fontRef>
+          </p:style>
+        </p:cxnSp>
+        <p:cxnSp>
+          <p:nvCxnSpPr>
+            <p:cNvPr id="22" name="Connettore diritto 21">
+              <a:extLst>
+                <a:ext uri="{FF2B5EF4-FFF2-40B4-BE49-F238E27FC236}">
+                  <a16:creationId xmlns:a16="http://schemas.microsoft.com/office/drawing/2014/main" id="{341486ED-81ED-7A10-37BE-833C9FE8AF20}"/>
+                </a:ext>
+              </a:extLst>
+            </p:cNvPr>
+            <p:cNvCxnSpPr/>
+            <p:nvPr/>
+          </p:nvCxnSpPr>
+          <p:spPr>
+            <a:xfrm flipH="1">
+              <a:off x="3321843" y="2070642"/>
+              <a:ext cx="358616" cy="230981"/>
+            </a:xfrm>
+            <a:prstGeom prst="line">
+              <a:avLst/>
+            </a:prstGeom>
+            <a:ln>
+              <a:solidFill>
+                <a:schemeClr val="tx1"/>
+              </a:solidFill>
+            </a:ln>
+          </p:spPr>
+          <p:style>
+            <a:lnRef idx="2">
+              <a:schemeClr val="accent1"/>
+            </a:lnRef>
+            <a:fillRef idx="0">
+              <a:schemeClr val="accent1"/>
+            </a:fillRef>
+            <a:effectRef idx="1">
+              <a:schemeClr val="accent1"/>
+            </a:effectRef>
+            <a:fontRef idx="minor">
+              <a:schemeClr val="tx1"/>
+            </a:fontRef>
+          </p:style>
+        </p:cxnSp>
+        <p:cxnSp>
+          <p:nvCxnSpPr>
+            <p:cNvPr id="23" name="Connettore diritto 22">
+              <a:extLst>
+                <a:ext uri="{FF2B5EF4-FFF2-40B4-BE49-F238E27FC236}">
+                  <a16:creationId xmlns:a16="http://schemas.microsoft.com/office/drawing/2014/main" id="{F581FDD6-F9E5-7DBD-8B35-7CF9C52EAD1D}"/>
+                </a:ext>
+              </a:extLst>
+            </p:cNvPr>
+            <p:cNvCxnSpPr/>
+            <p:nvPr/>
+          </p:nvCxnSpPr>
+          <p:spPr>
+            <a:xfrm flipH="1">
+              <a:off x="3321843" y="2195346"/>
+              <a:ext cx="358616" cy="230981"/>
+            </a:xfrm>
+            <a:prstGeom prst="line">
+              <a:avLst/>
+            </a:prstGeom>
+            <a:ln>
+              <a:solidFill>
+                <a:schemeClr val="tx1"/>
+              </a:solidFill>
+            </a:ln>
+          </p:spPr>
+          <p:style>
+            <a:lnRef idx="2">
+              <a:schemeClr val="accent1"/>
+            </a:lnRef>
+            <a:fillRef idx="0">
+              <a:schemeClr val="accent1"/>
+            </a:fillRef>
+            <a:effectRef idx="1">
+              <a:schemeClr val="accent1"/>
+            </a:effectRef>
+            <a:fontRef idx="minor">
+              <a:schemeClr val="tx1"/>
+            </a:fontRef>
+          </p:style>
+        </p:cxnSp>
+        <p:cxnSp>
+          <p:nvCxnSpPr>
+            <p:cNvPr id="24" name="Connettore diritto 23">
+              <a:extLst>
+                <a:ext uri="{FF2B5EF4-FFF2-40B4-BE49-F238E27FC236}">
+                  <a16:creationId xmlns:a16="http://schemas.microsoft.com/office/drawing/2014/main" id="{B863460C-3C76-9F7C-64A3-05932D1ABAC8}"/>
+                </a:ext>
+              </a:extLst>
+            </p:cNvPr>
+            <p:cNvCxnSpPr/>
+            <p:nvPr/>
+          </p:nvCxnSpPr>
+          <p:spPr>
+            <a:xfrm flipH="1">
+              <a:off x="3321844" y="2328229"/>
+              <a:ext cx="358616" cy="230981"/>
+            </a:xfrm>
+            <a:prstGeom prst="line">
+              <a:avLst/>
+            </a:prstGeom>
+            <a:ln>
+              <a:solidFill>
+                <a:schemeClr val="tx1"/>
+              </a:solidFill>
+            </a:ln>
+          </p:spPr>
+          <p:style>
+            <a:lnRef idx="2">
+              <a:schemeClr val="accent1"/>
+            </a:lnRef>
+            <a:fillRef idx="0">
+              <a:schemeClr val="accent1"/>
+            </a:fillRef>
+            <a:effectRef idx="1">
+              <a:schemeClr val="accent1"/>
+            </a:effectRef>
+            <a:fontRef idx="minor">
+              <a:schemeClr val="tx1"/>
+            </a:fontRef>
+          </p:style>
+        </p:cxnSp>
+        <p:cxnSp>
+          <p:nvCxnSpPr>
+            <p:cNvPr id="25" name="Connettore diritto 24">
+              <a:extLst>
+                <a:ext uri="{FF2B5EF4-FFF2-40B4-BE49-F238E27FC236}">
+                  <a16:creationId xmlns:a16="http://schemas.microsoft.com/office/drawing/2014/main" id="{F1A0C6AA-F28E-2843-9E70-8A4216FB2043}"/>
+                </a:ext>
+              </a:extLst>
+            </p:cNvPr>
+            <p:cNvCxnSpPr/>
+            <p:nvPr/>
+          </p:nvCxnSpPr>
+          <p:spPr>
+            <a:xfrm flipH="1">
+              <a:off x="3321844" y="2456175"/>
+              <a:ext cx="358616" cy="230981"/>
+            </a:xfrm>
+            <a:prstGeom prst="line">
+              <a:avLst/>
+            </a:prstGeom>
+            <a:ln>
+              <a:solidFill>
+                <a:schemeClr val="tx1"/>
+              </a:solidFill>
+            </a:ln>
+          </p:spPr>
+          <p:style>
+            <a:lnRef idx="2">
+              <a:schemeClr val="accent1"/>
+            </a:lnRef>
+            <a:fillRef idx="0">
+              <a:schemeClr val="accent1"/>
+            </a:fillRef>
+            <a:effectRef idx="1">
+              <a:schemeClr val="accent1"/>
+            </a:effectRef>
+            <a:fontRef idx="minor">
+              <a:schemeClr val="tx1"/>
+            </a:fontRef>
+          </p:style>
+        </p:cxnSp>
+        <p:cxnSp>
+          <p:nvCxnSpPr>
+            <p:cNvPr id="26" name="Connettore diritto 25">
+              <a:extLst>
+                <a:ext uri="{FF2B5EF4-FFF2-40B4-BE49-F238E27FC236}">
+                  <a16:creationId xmlns:a16="http://schemas.microsoft.com/office/drawing/2014/main" id="{6040E1D2-6B60-EAEB-E7A5-DDC1D8D5BF06}"/>
+                </a:ext>
+              </a:extLst>
+            </p:cNvPr>
+            <p:cNvCxnSpPr/>
+            <p:nvPr/>
+          </p:nvCxnSpPr>
+          <p:spPr>
+            <a:xfrm flipH="1">
+              <a:off x="3321844" y="2580879"/>
+              <a:ext cx="358616" cy="230981"/>
+            </a:xfrm>
+            <a:prstGeom prst="line">
+              <a:avLst/>
+            </a:prstGeom>
+            <a:ln>
+              <a:solidFill>
+                <a:schemeClr val="tx1"/>
+              </a:solidFill>
+            </a:ln>
+          </p:spPr>
+          <p:style>
+            <a:lnRef idx="2">
+              <a:schemeClr val="accent1"/>
+            </a:lnRef>
+            <a:fillRef idx="0">
+              <a:schemeClr val="accent1"/>
+            </a:fillRef>
+            <a:effectRef idx="1">
+              <a:schemeClr val="accent1"/>
+            </a:effectRef>
+            <a:fontRef idx="minor">
+              <a:schemeClr val="tx1"/>
+            </a:fontRef>
+          </p:style>
+        </p:cxnSp>
+        <p:cxnSp>
+          <p:nvCxnSpPr>
+            <p:cNvPr id="27" name="Connettore diritto 26">
+              <a:extLst>
+                <a:ext uri="{FF2B5EF4-FFF2-40B4-BE49-F238E27FC236}">
+                  <a16:creationId xmlns:a16="http://schemas.microsoft.com/office/drawing/2014/main" id="{F68DD5BD-F5D3-BEBA-2061-C5EA9E7B5326}"/>
+                </a:ext>
+              </a:extLst>
+            </p:cNvPr>
+            <p:cNvCxnSpPr/>
+            <p:nvPr/>
+          </p:nvCxnSpPr>
+          <p:spPr>
+            <a:xfrm flipH="1">
+              <a:off x="3321843" y="2708825"/>
+              <a:ext cx="358616" cy="230981"/>
+            </a:xfrm>
+            <a:prstGeom prst="line">
+              <a:avLst/>
+            </a:prstGeom>
+            <a:ln>
+              <a:solidFill>
+                <a:schemeClr val="tx1"/>
+              </a:solidFill>
+            </a:ln>
+          </p:spPr>
+          <p:style>
+            <a:lnRef idx="2">
+              <a:schemeClr val="accent1"/>
+            </a:lnRef>
+            <a:fillRef idx="0">
+              <a:schemeClr val="accent1"/>
+            </a:fillRef>
+            <a:effectRef idx="1">
+              <a:schemeClr val="accent1"/>
+            </a:effectRef>
+            <a:fontRef idx="minor">
+              <a:schemeClr val="tx1"/>
+            </a:fontRef>
+          </p:style>
+        </p:cxnSp>
+        <p:cxnSp>
+          <p:nvCxnSpPr>
+            <p:cNvPr id="28" name="Connettore diritto 27">
+              <a:extLst>
+                <a:ext uri="{FF2B5EF4-FFF2-40B4-BE49-F238E27FC236}">
+                  <a16:creationId xmlns:a16="http://schemas.microsoft.com/office/drawing/2014/main" id="{34011C85-AEB8-27E0-B4DC-955B7F1E42DD}"/>
+                </a:ext>
+              </a:extLst>
+            </p:cNvPr>
+            <p:cNvCxnSpPr/>
+            <p:nvPr/>
+          </p:nvCxnSpPr>
+          <p:spPr>
+            <a:xfrm flipH="1">
+              <a:off x="3321843" y="2836771"/>
+              <a:ext cx="358616" cy="230981"/>
+            </a:xfrm>
+            <a:prstGeom prst="line">
+              <a:avLst/>
+            </a:prstGeom>
+            <a:ln>
+              <a:solidFill>
+                <a:schemeClr val="tx1"/>
+              </a:solidFill>
+            </a:ln>
+          </p:spPr>
+          <p:style>
+            <a:lnRef idx="2">
+              <a:schemeClr val="accent1"/>
+            </a:lnRef>
+            <a:fillRef idx="0">
+              <a:schemeClr val="accent1"/>
+            </a:fillRef>
+            <a:effectRef idx="1">
+              <a:schemeClr val="accent1"/>
+            </a:effectRef>
+            <a:fontRef idx="minor">
+              <a:schemeClr val="tx1"/>
+            </a:fontRef>
+          </p:style>
+        </p:cxnSp>
+        <p:cxnSp>
+          <p:nvCxnSpPr>
+            <p:cNvPr id="29" name="Connettore diritto 28">
+              <a:extLst>
+                <a:ext uri="{FF2B5EF4-FFF2-40B4-BE49-F238E27FC236}">
+                  <a16:creationId xmlns:a16="http://schemas.microsoft.com/office/drawing/2014/main" id="{6826FAC7-0A15-65DA-3C6E-478FD7B1BCD7}"/>
+                </a:ext>
+              </a:extLst>
+            </p:cNvPr>
+            <p:cNvCxnSpPr/>
+            <p:nvPr/>
+          </p:nvCxnSpPr>
+          <p:spPr>
+            <a:xfrm flipH="1">
+              <a:off x="3321843" y="2961475"/>
+              <a:ext cx="358616" cy="230981"/>
+            </a:xfrm>
+            <a:prstGeom prst="line">
+              <a:avLst/>
+            </a:prstGeom>
+            <a:ln>
+              <a:solidFill>
+                <a:schemeClr val="tx1"/>
+              </a:solidFill>
+            </a:ln>
+          </p:spPr>
+          <p:style>
+            <a:lnRef idx="2">
+              <a:schemeClr val="accent1"/>
+            </a:lnRef>
+            <a:fillRef idx="0">
+              <a:schemeClr val="accent1"/>
+            </a:fillRef>
+            <a:effectRef idx="1">
+              <a:schemeClr val="accent1"/>
+            </a:effectRef>
+            <a:fontRef idx="minor">
+              <a:schemeClr val="tx1"/>
+            </a:fontRef>
+          </p:style>
+        </p:cxnSp>
+        <p:cxnSp>
+          <p:nvCxnSpPr>
+            <p:cNvPr id="30" name="Connettore diritto 29">
+              <a:extLst>
+                <a:ext uri="{FF2B5EF4-FFF2-40B4-BE49-F238E27FC236}">
+                  <a16:creationId xmlns:a16="http://schemas.microsoft.com/office/drawing/2014/main" id="{D19E14BE-1A41-B037-32D7-1984133B8E5A}"/>
+                </a:ext>
+              </a:extLst>
+            </p:cNvPr>
+            <p:cNvCxnSpPr/>
+            <p:nvPr/>
+          </p:nvCxnSpPr>
+          <p:spPr>
+            <a:xfrm flipH="1">
+              <a:off x="3317132" y="3089423"/>
+              <a:ext cx="358616" cy="230981"/>
+            </a:xfrm>
+            <a:prstGeom prst="line">
+              <a:avLst/>
+            </a:prstGeom>
+            <a:ln>
+              <a:solidFill>
+                <a:schemeClr val="tx1"/>
+              </a:solidFill>
+            </a:ln>
+          </p:spPr>
+          <p:style>
+            <a:lnRef idx="2">
+              <a:schemeClr val="accent1"/>
+            </a:lnRef>
+            <a:fillRef idx="0">
+              <a:schemeClr val="accent1"/>
+            </a:fillRef>
+            <a:effectRef idx="1">
+              <a:schemeClr val="accent1"/>
+            </a:effectRef>
+            <a:fontRef idx="minor">
+              <a:schemeClr val="tx1"/>
+            </a:fontRef>
+          </p:style>
+        </p:cxnSp>
+        <p:cxnSp>
+          <p:nvCxnSpPr>
+            <p:cNvPr id="31" name="Connettore diritto 30">
+              <a:extLst>
+                <a:ext uri="{FF2B5EF4-FFF2-40B4-BE49-F238E27FC236}">
+                  <a16:creationId xmlns:a16="http://schemas.microsoft.com/office/drawing/2014/main" id="{2EC0291B-6AD1-B17C-F572-1D626D297AB0}"/>
+                </a:ext>
+              </a:extLst>
+            </p:cNvPr>
+            <p:cNvCxnSpPr/>
+            <p:nvPr/>
+          </p:nvCxnSpPr>
+          <p:spPr>
+            <a:xfrm flipH="1">
+              <a:off x="3317132" y="3217369"/>
+              <a:ext cx="358616" cy="230981"/>
+            </a:xfrm>
+            <a:prstGeom prst="line">
+              <a:avLst/>
+            </a:prstGeom>
+            <a:ln>
+              <a:solidFill>
+                <a:schemeClr val="tx1"/>
+              </a:solidFill>
+            </a:ln>
+          </p:spPr>
+          <p:style>
+            <a:lnRef idx="2">
+              <a:schemeClr val="accent1"/>
+            </a:lnRef>
+            <a:fillRef idx="0">
+              <a:schemeClr val="accent1"/>
+            </a:fillRef>
+            <a:effectRef idx="1">
+              <a:schemeClr val="accent1"/>
+            </a:effectRef>
+            <a:fontRef idx="minor">
+              <a:schemeClr val="tx1"/>
+            </a:fontRef>
+          </p:style>
+        </p:cxnSp>
+        <p:cxnSp>
+          <p:nvCxnSpPr>
+            <p:cNvPr id="32" name="Connettore diritto 31">
+              <a:extLst>
+                <a:ext uri="{FF2B5EF4-FFF2-40B4-BE49-F238E27FC236}">
+                  <a16:creationId xmlns:a16="http://schemas.microsoft.com/office/drawing/2014/main" id="{A1BC8981-4462-92A9-ADB2-03C99ECA950B}"/>
+                </a:ext>
+              </a:extLst>
+            </p:cNvPr>
+            <p:cNvCxnSpPr/>
+            <p:nvPr/>
+          </p:nvCxnSpPr>
+          <p:spPr>
+            <a:xfrm flipH="1">
+              <a:off x="3317132" y="3342073"/>
+              <a:ext cx="358616" cy="230981"/>
+            </a:xfrm>
+            <a:prstGeom prst="line">
+              <a:avLst/>
+            </a:prstGeom>
+            <a:ln>
+              <a:solidFill>
+                <a:schemeClr val="tx1"/>
+              </a:solidFill>
+            </a:ln>
+          </p:spPr>
+          <p:style>
+            <a:lnRef idx="2">
+              <a:schemeClr val="accent1"/>
+            </a:lnRef>
+            <a:fillRef idx="0">
+              <a:schemeClr val="accent1"/>
+            </a:fillRef>
+            <a:effectRef idx="1">
+              <a:schemeClr val="accent1"/>
+            </a:effectRef>
+            <a:fontRef idx="minor">
+              <a:schemeClr val="tx1"/>
+            </a:fontRef>
+          </p:style>
+        </p:cxnSp>
+        <p:cxnSp>
+          <p:nvCxnSpPr>
+            <p:cNvPr id="33" name="Connettore diritto 32">
+              <a:extLst>
+                <a:ext uri="{FF2B5EF4-FFF2-40B4-BE49-F238E27FC236}">
+                  <a16:creationId xmlns:a16="http://schemas.microsoft.com/office/drawing/2014/main" id="{8B20772A-68C0-38DF-7E04-B2992CDC2EDF}"/>
+                </a:ext>
+              </a:extLst>
+            </p:cNvPr>
+            <p:cNvCxnSpPr/>
+            <p:nvPr/>
+          </p:nvCxnSpPr>
+          <p:spPr>
+            <a:xfrm flipH="1">
+              <a:off x="3317131" y="3470019"/>
+              <a:ext cx="358616" cy="230981"/>
+            </a:xfrm>
+            <a:prstGeom prst="line">
+              <a:avLst/>
+            </a:prstGeom>
+            <a:ln>
+              <a:solidFill>
+                <a:schemeClr val="tx1"/>
+              </a:solidFill>
+            </a:ln>
+          </p:spPr>
+          <p:style>
+            <a:lnRef idx="2">
+              <a:schemeClr val="accent1"/>
+            </a:lnRef>
+            <a:fillRef idx="0">
+              <a:schemeClr val="accent1"/>
+            </a:fillRef>
+            <a:effectRef idx="1">
+              <a:schemeClr val="accent1"/>
+            </a:effectRef>
+            <a:fontRef idx="minor">
+              <a:schemeClr val="tx1"/>
+            </a:fontRef>
+          </p:style>
+        </p:cxnSp>
+        <p:cxnSp>
+          <p:nvCxnSpPr>
+            <p:cNvPr id="34" name="Connettore diritto 33">
+              <a:extLst>
+                <a:ext uri="{FF2B5EF4-FFF2-40B4-BE49-F238E27FC236}">
+                  <a16:creationId xmlns:a16="http://schemas.microsoft.com/office/drawing/2014/main" id="{39714CA9-D290-5385-239B-18C131AC3F91}"/>
+                </a:ext>
+              </a:extLst>
+            </p:cNvPr>
+            <p:cNvCxnSpPr/>
+            <p:nvPr/>
+          </p:nvCxnSpPr>
+          <p:spPr>
+            <a:xfrm flipH="1">
+              <a:off x="3317131" y="3597965"/>
+              <a:ext cx="358616" cy="230981"/>
+            </a:xfrm>
+            <a:prstGeom prst="line">
+              <a:avLst/>
+            </a:prstGeom>
+            <a:ln>
+              <a:solidFill>
+                <a:schemeClr val="tx1"/>
+              </a:solidFill>
+            </a:ln>
+          </p:spPr>
+          <p:style>
+            <a:lnRef idx="2">
+              <a:schemeClr val="accent1"/>
+            </a:lnRef>
+            <a:fillRef idx="0">
+              <a:schemeClr val="accent1"/>
+            </a:fillRef>
+            <a:effectRef idx="1">
+              <a:schemeClr val="accent1"/>
+            </a:effectRef>
+            <a:fontRef idx="minor">
+              <a:schemeClr val="tx1"/>
+            </a:fontRef>
+          </p:style>
+        </p:cxnSp>
+        <p:cxnSp>
+          <p:nvCxnSpPr>
+            <p:cNvPr id="35" name="Connettore diritto 34">
+              <a:extLst>
+                <a:ext uri="{FF2B5EF4-FFF2-40B4-BE49-F238E27FC236}">
+                  <a16:creationId xmlns:a16="http://schemas.microsoft.com/office/drawing/2014/main" id="{704D5A3E-A73F-8AF8-CF65-D2CB4370B332}"/>
+                </a:ext>
+              </a:extLst>
+            </p:cNvPr>
+            <p:cNvCxnSpPr/>
+            <p:nvPr/>
+          </p:nvCxnSpPr>
+          <p:spPr>
+            <a:xfrm flipH="1">
+              <a:off x="3317131" y="3722669"/>
+              <a:ext cx="358616" cy="230981"/>
+            </a:xfrm>
+            <a:prstGeom prst="line">
+              <a:avLst/>
+            </a:prstGeom>
+            <a:ln>
+              <a:solidFill>
+                <a:schemeClr val="tx1"/>
+              </a:solidFill>
+            </a:ln>
+          </p:spPr>
+          <p:style>
+            <a:lnRef idx="2">
+              <a:schemeClr val="accent1"/>
+            </a:lnRef>
+            <a:fillRef idx="0">
+              <a:schemeClr val="accent1"/>
+            </a:fillRef>
+            <a:effectRef idx="1">
+              <a:schemeClr val="accent1"/>
+            </a:effectRef>
+            <a:fontRef idx="minor">
+              <a:schemeClr val="tx1"/>
+            </a:fontRef>
+          </p:style>
+        </p:cxnSp>
+        <p:cxnSp>
+          <p:nvCxnSpPr>
+            <p:cNvPr id="36" name="Connettore diritto 35">
+              <a:extLst>
+                <a:ext uri="{FF2B5EF4-FFF2-40B4-BE49-F238E27FC236}">
+                  <a16:creationId xmlns:a16="http://schemas.microsoft.com/office/drawing/2014/main" id="{78BA0B10-ABFE-D430-186A-1DC949A57AF7}"/>
+                </a:ext>
+              </a:extLst>
+            </p:cNvPr>
+            <p:cNvCxnSpPr/>
+            <p:nvPr/>
+          </p:nvCxnSpPr>
+          <p:spPr>
+            <a:xfrm flipH="1">
+              <a:off x="3317132" y="3855552"/>
+              <a:ext cx="358616" cy="230981"/>
+            </a:xfrm>
+            <a:prstGeom prst="line">
+              <a:avLst/>
+            </a:prstGeom>
+            <a:ln>
+              <a:solidFill>
+                <a:schemeClr val="tx1"/>
+              </a:solidFill>
+            </a:ln>
+          </p:spPr>
+          <p:style>
+            <a:lnRef idx="2">
+              <a:schemeClr val="accent1"/>
+            </a:lnRef>
+            <a:fillRef idx="0">
+              <a:schemeClr val="accent1"/>
+            </a:fillRef>
+            <a:effectRef idx="1">
+              <a:schemeClr val="accent1"/>
+            </a:effectRef>
+            <a:fontRef idx="minor">
+              <a:schemeClr val="tx1"/>
+            </a:fontRef>
+          </p:style>
+        </p:cxnSp>
+        <p:cxnSp>
+          <p:nvCxnSpPr>
+            <p:cNvPr id="37" name="Connettore diritto 36">
+              <a:extLst>
+                <a:ext uri="{FF2B5EF4-FFF2-40B4-BE49-F238E27FC236}">
+                  <a16:creationId xmlns:a16="http://schemas.microsoft.com/office/drawing/2014/main" id="{2D74C8A7-9385-CCAE-8DB7-897462E7C860}"/>
+                </a:ext>
+              </a:extLst>
+            </p:cNvPr>
+            <p:cNvCxnSpPr/>
+            <p:nvPr/>
+          </p:nvCxnSpPr>
+          <p:spPr>
+            <a:xfrm flipH="1">
+              <a:off x="3317132" y="3983498"/>
+              <a:ext cx="358616" cy="230981"/>
+            </a:xfrm>
+            <a:prstGeom prst="line">
+              <a:avLst/>
+            </a:prstGeom>
+            <a:ln>
+              <a:solidFill>
+                <a:schemeClr val="tx1"/>
+              </a:solidFill>
+            </a:ln>
+          </p:spPr>
+          <p:style>
+            <a:lnRef idx="2">
+              <a:schemeClr val="accent1"/>
+            </a:lnRef>
+            <a:fillRef idx="0">
+              <a:schemeClr val="accent1"/>
+            </a:fillRef>
+            <a:effectRef idx="1">
+              <a:schemeClr val="accent1"/>
+            </a:effectRef>
+            <a:fontRef idx="minor">
+              <a:schemeClr val="tx1"/>
+            </a:fontRef>
+          </p:style>
+        </p:cxnSp>
+        <p:cxnSp>
+          <p:nvCxnSpPr>
+            <p:cNvPr id="38" name="Connettore diritto 37">
+              <a:extLst>
+                <a:ext uri="{FF2B5EF4-FFF2-40B4-BE49-F238E27FC236}">
+                  <a16:creationId xmlns:a16="http://schemas.microsoft.com/office/drawing/2014/main" id="{4F4C0A33-798F-6D92-CD6A-C34AE7DB6B39}"/>
+                </a:ext>
+              </a:extLst>
+            </p:cNvPr>
+            <p:cNvCxnSpPr/>
+            <p:nvPr/>
+          </p:nvCxnSpPr>
+          <p:spPr>
+            <a:xfrm flipH="1">
+              <a:off x="3317132" y="4108202"/>
+              <a:ext cx="358616" cy="230981"/>
+            </a:xfrm>
+            <a:prstGeom prst="line">
+              <a:avLst/>
+            </a:prstGeom>
+            <a:ln>
+              <a:solidFill>
+                <a:schemeClr val="tx1"/>
+              </a:solidFill>
+            </a:ln>
+          </p:spPr>
+          <p:style>
+            <a:lnRef idx="2">
+              <a:schemeClr val="accent1"/>
+            </a:lnRef>
+            <a:fillRef idx="0">
+              <a:schemeClr val="accent1"/>
+            </a:fillRef>
+            <a:effectRef idx="1">
+              <a:schemeClr val="accent1"/>
+            </a:effectRef>
+            <a:fontRef idx="minor">
+              <a:schemeClr val="tx1"/>
+            </a:fontRef>
+          </p:style>
+        </p:cxnSp>
+        <p:cxnSp>
+          <p:nvCxnSpPr>
+            <p:cNvPr id="39" name="Connettore diritto 38">
+              <a:extLst>
+                <a:ext uri="{FF2B5EF4-FFF2-40B4-BE49-F238E27FC236}">
+                  <a16:creationId xmlns:a16="http://schemas.microsoft.com/office/drawing/2014/main" id="{FCA5953D-4A8D-E4E1-4EAC-7BFE68A0DD1A}"/>
+                </a:ext>
+              </a:extLst>
+            </p:cNvPr>
+            <p:cNvCxnSpPr/>
+            <p:nvPr/>
+          </p:nvCxnSpPr>
+          <p:spPr>
+            <a:xfrm flipH="1">
+              <a:off x="3317131" y="4236148"/>
+              <a:ext cx="358616" cy="230981"/>
+            </a:xfrm>
+            <a:prstGeom prst="line">
+              <a:avLst/>
+            </a:prstGeom>
+            <a:ln>
+              <a:solidFill>
+                <a:schemeClr val="tx1"/>
+              </a:solidFill>
+            </a:ln>
+          </p:spPr>
+          <p:style>
+            <a:lnRef idx="2">
+              <a:schemeClr val="accent1"/>
+            </a:lnRef>
+            <a:fillRef idx="0">
+              <a:schemeClr val="accent1"/>
+            </a:fillRef>
+            <a:effectRef idx="1">
+              <a:schemeClr val="accent1"/>
+            </a:effectRef>
+            <a:fontRef idx="minor">
+              <a:schemeClr val="tx1"/>
+            </a:fontRef>
+          </p:style>
+        </p:cxnSp>
+        <p:cxnSp>
+          <p:nvCxnSpPr>
+            <p:cNvPr id="40" name="Connettore diritto 39">
+              <a:extLst>
+                <a:ext uri="{FF2B5EF4-FFF2-40B4-BE49-F238E27FC236}">
+                  <a16:creationId xmlns:a16="http://schemas.microsoft.com/office/drawing/2014/main" id="{50192781-EDFD-4E78-D3F2-1BF1A27E5978}"/>
+                </a:ext>
+              </a:extLst>
+            </p:cNvPr>
+            <p:cNvCxnSpPr/>
+            <p:nvPr/>
+          </p:nvCxnSpPr>
+          <p:spPr>
+            <a:xfrm flipH="1">
+              <a:off x="3317131" y="4364094"/>
+              <a:ext cx="358616" cy="230981"/>
+            </a:xfrm>
+            <a:prstGeom prst="line">
+              <a:avLst/>
+            </a:prstGeom>
+            <a:ln>
+              <a:solidFill>
+                <a:schemeClr val="tx1"/>
+              </a:solidFill>
+            </a:ln>
+          </p:spPr>
+          <p:style>
+            <a:lnRef idx="2">
+              <a:schemeClr val="accent1"/>
+            </a:lnRef>
+            <a:fillRef idx="0">
+              <a:schemeClr val="accent1"/>
+            </a:fillRef>
+            <a:effectRef idx="1">
+              <a:schemeClr val="accent1"/>
+            </a:effectRef>
+            <a:fontRef idx="minor">
+              <a:schemeClr val="tx1"/>
+            </a:fontRef>
+          </p:style>
+        </p:cxnSp>
+        <p:cxnSp>
+          <p:nvCxnSpPr>
+            <p:cNvPr id="41" name="Connettore diritto 40">
+              <a:extLst>
+                <a:ext uri="{FF2B5EF4-FFF2-40B4-BE49-F238E27FC236}">
+                  <a16:creationId xmlns:a16="http://schemas.microsoft.com/office/drawing/2014/main" id="{44B1FC3F-A7C2-B92F-7567-F7B60AB38FA8}"/>
+                </a:ext>
+              </a:extLst>
+            </p:cNvPr>
+            <p:cNvCxnSpPr/>
+            <p:nvPr/>
+          </p:nvCxnSpPr>
+          <p:spPr>
+            <a:xfrm flipH="1">
+              <a:off x="3317131" y="4488798"/>
+              <a:ext cx="358616" cy="230981"/>
+            </a:xfrm>
+            <a:prstGeom prst="line">
+              <a:avLst/>
+            </a:prstGeom>
+            <a:ln>
+              <a:solidFill>
+                <a:schemeClr val="tx1"/>
+              </a:solidFill>
+            </a:ln>
+          </p:spPr>
+          <p:style>
+            <a:lnRef idx="2">
+              <a:schemeClr val="accent1"/>
+            </a:lnRef>
+            <a:fillRef idx="0">
+              <a:schemeClr val="accent1"/>
+            </a:fillRef>
+            <a:effectRef idx="1">
+              <a:schemeClr val="accent1"/>
+            </a:effectRef>
+            <a:fontRef idx="minor">
+              <a:schemeClr val="tx1"/>
+            </a:fontRef>
+          </p:style>
+        </p:cxnSp>
+      </p:grpSp>
+      <p:grpSp>
+        <p:nvGrpSpPr>
+          <p:cNvPr id="42" name="Gruppo 41">
+            <a:extLst>
+              <a:ext uri="{FF2B5EF4-FFF2-40B4-BE49-F238E27FC236}">
+                <a16:creationId xmlns:a16="http://schemas.microsoft.com/office/drawing/2014/main" id="{692A9B41-54E3-A103-7531-DA21A0DCC1DE}"/>
+              </a:ext>
+            </a:extLst>
+          </p:cNvPr>
+          <p:cNvGrpSpPr/>
+          <p:nvPr/>
+        </p:nvGrpSpPr>
+        <p:grpSpPr>
+          <a:xfrm rot="16200000">
+            <a:off x="4551606" y="4174526"/>
+            <a:ext cx="283809" cy="1883008"/>
+            <a:chOff x="3317131" y="2836771"/>
+            <a:chExt cx="363328" cy="1883008"/>
+          </a:xfrm>
+        </p:grpSpPr>
+        <p:cxnSp>
+          <p:nvCxnSpPr>
+            <p:cNvPr id="43" name="Connettore diritto 42">
+              <a:extLst>
+                <a:ext uri="{FF2B5EF4-FFF2-40B4-BE49-F238E27FC236}">
+                  <a16:creationId xmlns:a16="http://schemas.microsoft.com/office/drawing/2014/main" id="{F37EED15-510F-27EE-EE29-FF1FA5DB71A2}"/>
+                </a:ext>
+              </a:extLst>
+            </p:cNvPr>
+            <p:cNvCxnSpPr/>
+            <p:nvPr/>
+          </p:nvCxnSpPr>
+          <p:spPr>
+            <a:xfrm flipH="1">
+              <a:off x="3321843" y="2836771"/>
+              <a:ext cx="358616" cy="230981"/>
+            </a:xfrm>
+            <a:prstGeom prst="line">
+              <a:avLst/>
+            </a:prstGeom>
+            <a:ln>
+              <a:solidFill>
+                <a:schemeClr val="tx1"/>
+              </a:solidFill>
+            </a:ln>
+          </p:spPr>
+          <p:style>
+            <a:lnRef idx="2">
+              <a:schemeClr val="accent1"/>
+            </a:lnRef>
+            <a:fillRef idx="0">
+              <a:schemeClr val="accent1"/>
+            </a:fillRef>
+            <a:effectRef idx="1">
+              <a:schemeClr val="accent1"/>
+            </a:effectRef>
+            <a:fontRef idx="minor">
+              <a:schemeClr val="tx1"/>
+            </a:fontRef>
+          </p:style>
+        </p:cxnSp>
+        <p:cxnSp>
+          <p:nvCxnSpPr>
+            <p:cNvPr id="44" name="Connettore diritto 43">
+              <a:extLst>
+                <a:ext uri="{FF2B5EF4-FFF2-40B4-BE49-F238E27FC236}">
+                  <a16:creationId xmlns:a16="http://schemas.microsoft.com/office/drawing/2014/main" id="{6FD8615E-7BC2-40AE-D83C-3E07BDBA3FA1}"/>
+                </a:ext>
+              </a:extLst>
+            </p:cNvPr>
+            <p:cNvCxnSpPr/>
+            <p:nvPr/>
+          </p:nvCxnSpPr>
+          <p:spPr>
+            <a:xfrm flipH="1">
+              <a:off x="3321843" y="2961475"/>
+              <a:ext cx="358616" cy="230981"/>
+            </a:xfrm>
+            <a:prstGeom prst="line">
+              <a:avLst/>
+            </a:prstGeom>
+            <a:ln>
+              <a:solidFill>
+                <a:schemeClr val="tx1"/>
+              </a:solidFill>
+            </a:ln>
+          </p:spPr>
+          <p:style>
+            <a:lnRef idx="2">
+              <a:schemeClr val="accent1"/>
+            </a:lnRef>
+            <a:fillRef idx="0">
+              <a:schemeClr val="accent1"/>
+            </a:fillRef>
+            <a:effectRef idx="1">
+              <a:schemeClr val="accent1"/>
+            </a:effectRef>
+            <a:fontRef idx="minor">
+              <a:schemeClr val="tx1"/>
+            </a:fontRef>
+          </p:style>
+        </p:cxnSp>
+        <p:cxnSp>
+          <p:nvCxnSpPr>
+            <p:cNvPr id="45" name="Connettore diritto 44">
+              <a:extLst>
+                <a:ext uri="{FF2B5EF4-FFF2-40B4-BE49-F238E27FC236}">
+                  <a16:creationId xmlns:a16="http://schemas.microsoft.com/office/drawing/2014/main" id="{FF02CA41-0345-8936-8032-46FDC9E2E380}"/>
+                </a:ext>
+              </a:extLst>
+            </p:cNvPr>
+            <p:cNvCxnSpPr/>
+            <p:nvPr/>
+          </p:nvCxnSpPr>
+          <p:spPr>
+            <a:xfrm flipH="1">
+              <a:off x="3317132" y="3089423"/>
+              <a:ext cx="358616" cy="230981"/>
+            </a:xfrm>
+            <a:prstGeom prst="line">
+              <a:avLst/>
+            </a:prstGeom>
+            <a:ln>
+              <a:solidFill>
+                <a:schemeClr val="tx1"/>
+              </a:solidFill>
+            </a:ln>
+          </p:spPr>
+          <p:style>
+            <a:lnRef idx="2">
+              <a:schemeClr val="accent1"/>
+            </a:lnRef>
+            <a:fillRef idx="0">
+              <a:schemeClr val="accent1"/>
+            </a:fillRef>
+            <a:effectRef idx="1">
+              <a:schemeClr val="accent1"/>
+            </a:effectRef>
+            <a:fontRef idx="minor">
+              <a:schemeClr val="tx1"/>
+            </a:fontRef>
+          </p:style>
+        </p:cxnSp>
+        <p:cxnSp>
+          <p:nvCxnSpPr>
+            <p:cNvPr id="46" name="Connettore diritto 45">
+              <a:extLst>
+                <a:ext uri="{FF2B5EF4-FFF2-40B4-BE49-F238E27FC236}">
+                  <a16:creationId xmlns:a16="http://schemas.microsoft.com/office/drawing/2014/main" id="{F32E67D4-287A-ACFA-7DD5-0C5A0957FCC1}"/>
+                </a:ext>
+              </a:extLst>
+            </p:cNvPr>
+            <p:cNvCxnSpPr/>
+            <p:nvPr/>
+          </p:nvCxnSpPr>
+          <p:spPr>
+            <a:xfrm flipH="1">
+              <a:off x="3317132" y="3217369"/>
+              <a:ext cx="358616" cy="230981"/>
+            </a:xfrm>
+            <a:prstGeom prst="line">
+              <a:avLst/>
+            </a:prstGeom>
+            <a:ln>
+              <a:solidFill>
+                <a:schemeClr val="tx1"/>
+              </a:solidFill>
+            </a:ln>
+          </p:spPr>
+          <p:style>
+            <a:lnRef idx="2">
+              <a:schemeClr val="accent1"/>
+            </a:lnRef>
+            <a:fillRef idx="0">
+              <a:schemeClr val="accent1"/>
+            </a:fillRef>
+            <a:effectRef idx="1">
+              <a:schemeClr val="accent1"/>
+            </a:effectRef>
+            <a:fontRef idx="minor">
+              <a:schemeClr val="tx1"/>
+            </a:fontRef>
+          </p:style>
+        </p:cxnSp>
+        <p:cxnSp>
+          <p:nvCxnSpPr>
+            <p:cNvPr id="47" name="Connettore diritto 46">
+              <a:extLst>
+                <a:ext uri="{FF2B5EF4-FFF2-40B4-BE49-F238E27FC236}">
+                  <a16:creationId xmlns:a16="http://schemas.microsoft.com/office/drawing/2014/main" id="{522662AF-2FA6-7FE0-5291-83055E998457}"/>
+                </a:ext>
+              </a:extLst>
+            </p:cNvPr>
+            <p:cNvCxnSpPr/>
+            <p:nvPr/>
+          </p:nvCxnSpPr>
+          <p:spPr>
+            <a:xfrm flipH="1">
+              <a:off x="3317132" y="3342073"/>
+              <a:ext cx="358616" cy="230981"/>
+            </a:xfrm>
+            <a:prstGeom prst="line">
+              <a:avLst/>
+            </a:prstGeom>
+            <a:ln>
+              <a:solidFill>
+                <a:schemeClr val="tx1"/>
+              </a:solidFill>
+            </a:ln>
+          </p:spPr>
+          <p:style>
+            <a:lnRef idx="2">
+              <a:schemeClr val="accent1"/>
+            </a:lnRef>
+            <a:fillRef idx="0">
+              <a:schemeClr val="accent1"/>
+            </a:fillRef>
+            <a:effectRef idx="1">
+              <a:schemeClr val="accent1"/>
+            </a:effectRef>
+            <a:fontRef idx="minor">
+              <a:schemeClr val="tx1"/>
+            </a:fontRef>
+          </p:style>
+        </p:cxnSp>
+        <p:cxnSp>
+          <p:nvCxnSpPr>
+            <p:cNvPr id="48" name="Connettore diritto 47">
+              <a:extLst>
+                <a:ext uri="{FF2B5EF4-FFF2-40B4-BE49-F238E27FC236}">
+                  <a16:creationId xmlns:a16="http://schemas.microsoft.com/office/drawing/2014/main" id="{96214374-A2EC-72A7-1896-57A11AA431C0}"/>
+                </a:ext>
+              </a:extLst>
+            </p:cNvPr>
+            <p:cNvCxnSpPr/>
+            <p:nvPr/>
+          </p:nvCxnSpPr>
+          <p:spPr>
+            <a:xfrm flipH="1">
+              <a:off x="3317131" y="3470019"/>
+              <a:ext cx="358616" cy="230981"/>
+            </a:xfrm>
+            <a:prstGeom prst="line">
+              <a:avLst/>
+            </a:prstGeom>
+            <a:ln>
+              <a:solidFill>
+                <a:schemeClr val="tx1"/>
+              </a:solidFill>
+            </a:ln>
+          </p:spPr>
+          <p:style>
+            <a:lnRef idx="2">
+              <a:schemeClr val="accent1"/>
+            </a:lnRef>
+            <a:fillRef idx="0">
+              <a:schemeClr val="accent1"/>
+            </a:fillRef>
+            <a:effectRef idx="1">
+              <a:schemeClr val="accent1"/>
+            </a:effectRef>
+            <a:fontRef idx="minor">
+              <a:schemeClr val="tx1"/>
+            </a:fontRef>
+          </p:style>
+        </p:cxnSp>
+        <p:cxnSp>
+          <p:nvCxnSpPr>
+            <p:cNvPr id="49" name="Connettore diritto 48">
+              <a:extLst>
+                <a:ext uri="{FF2B5EF4-FFF2-40B4-BE49-F238E27FC236}">
+                  <a16:creationId xmlns:a16="http://schemas.microsoft.com/office/drawing/2014/main" id="{8EC74F4D-C8B6-1517-356F-6086803A4ADE}"/>
+                </a:ext>
+              </a:extLst>
+            </p:cNvPr>
+            <p:cNvCxnSpPr/>
+            <p:nvPr/>
+          </p:nvCxnSpPr>
+          <p:spPr>
+            <a:xfrm flipH="1">
+              <a:off x="3317131" y="3597965"/>
+              <a:ext cx="358616" cy="230981"/>
+            </a:xfrm>
+            <a:prstGeom prst="line">
+              <a:avLst/>
+            </a:prstGeom>
+            <a:ln>
+              <a:solidFill>
+                <a:schemeClr val="tx1"/>
+              </a:solidFill>
+            </a:ln>
+          </p:spPr>
+          <p:style>
+            <a:lnRef idx="2">
+              <a:schemeClr val="accent1"/>
+            </a:lnRef>
+            <a:fillRef idx="0">
+              <a:schemeClr val="accent1"/>
+            </a:fillRef>
+            <a:effectRef idx="1">
+              <a:schemeClr val="accent1"/>
+            </a:effectRef>
+            <a:fontRef idx="minor">
+              <a:schemeClr val="tx1"/>
+            </a:fontRef>
+          </p:style>
+        </p:cxnSp>
+        <p:cxnSp>
+          <p:nvCxnSpPr>
+            <p:cNvPr id="50" name="Connettore diritto 49">
+              <a:extLst>
+                <a:ext uri="{FF2B5EF4-FFF2-40B4-BE49-F238E27FC236}">
+                  <a16:creationId xmlns:a16="http://schemas.microsoft.com/office/drawing/2014/main" id="{BBF38CB9-6909-79A3-810C-EDAE309988D4}"/>
+                </a:ext>
+              </a:extLst>
+            </p:cNvPr>
+            <p:cNvCxnSpPr/>
+            <p:nvPr/>
+          </p:nvCxnSpPr>
+          <p:spPr>
+            <a:xfrm flipH="1">
+              <a:off x="3317131" y="3722669"/>
+              <a:ext cx="358616" cy="230981"/>
+            </a:xfrm>
+            <a:prstGeom prst="line">
+              <a:avLst/>
+            </a:prstGeom>
+            <a:ln>
+              <a:solidFill>
+                <a:schemeClr val="tx1"/>
+              </a:solidFill>
+            </a:ln>
+          </p:spPr>
+          <p:style>
+            <a:lnRef idx="2">
+              <a:schemeClr val="accent1"/>
+            </a:lnRef>
+            <a:fillRef idx="0">
+              <a:schemeClr val="accent1"/>
+            </a:fillRef>
+            <a:effectRef idx="1">
+              <a:schemeClr val="accent1"/>
+            </a:effectRef>
+            <a:fontRef idx="minor">
+              <a:schemeClr val="tx1"/>
+            </a:fontRef>
+          </p:style>
+        </p:cxnSp>
+        <p:cxnSp>
+          <p:nvCxnSpPr>
+            <p:cNvPr id="51" name="Connettore diritto 50">
+              <a:extLst>
+                <a:ext uri="{FF2B5EF4-FFF2-40B4-BE49-F238E27FC236}">
+                  <a16:creationId xmlns:a16="http://schemas.microsoft.com/office/drawing/2014/main" id="{4EE1C5DD-300C-2B6D-2C8C-873F8C728ED9}"/>
+                </a:ext>
+              </a:extLst>
+            </p:cNvPr>
+            <p:cNvCxnSpPr/>
+            <p:nvPr/>
+          </p:nvCxnSpPr>
+          <p:spPr>
+            <a:xfrm flipH="1">
+              <a:off x="3317132" y="3855552"/>
+              <a:ext cx="358616" cy="230981"/>
+            </a:xfrm>
+            <a:prstGeom prst="line">
+              <a:avLst/>
+            </a:prstGeom>
+            <a:ln>
+              <a:solidFill>
+                <a:schemeClr val="tx1"/>
+              </a:solidFill>
+            </a:ln>
+          </p:spPr>
+          <p:style>
+            <a:lnRef idx="2">
+              <a:schemeClr val="accent1"/>
+            </a:lnRef>
+            <a:fillRef idx="0">
+              <a:schemeClr val="accent1"/>
+            </a:fillRef>
+            <a:effectRef idx="1">
+              <a:schemeClr val="accent1"/>
+            </a:effectRef>
+            <a:fontRef idx="minor">
+              <a:schemeClr val="tx1"/>
+            </a:fontRef>
+          </p:style>
+        </p:cxnSp>
+        <p:cxnSp>
+          <p:nvCxnSpPr>
+            <p:cNvPr id="52" name="Connettore diritto 51">
+              <a:extLst>
+                <a:ext uri="{FF2B5EF4-FFF2-40B4-BE49-F238E27FC236}">
+                  <a16:creationId xmlns:a16="http://schemas.microsoft.com/office/drawing/2014/main" id="{E94F8B39-3C8A-BC46-ABF3-6F1DB9D52D0A}"/>
+                </a:ext>
+              </a:extLst>
+            </p:cNvPr>
+            <p:cNvCxnSpPr/>
+            <p:nvPr/>
+          </p:nvCxnSpPr>
+          <p:spPr>
+            <a:xfrm flipH="1">
+              <a:off x="3317132" y="3983498"/>
+              <a:ext cx="358616" cy="230981"/>
+            </a:xfrm>
+            <a:prstGeom prst="line">
+              <a:avLst/>
+            </a:prstGeom>
+            <a:ln>
+              <a:solidFill>
+                <a:schemeClr val="tx1"/>
+              </a:solidFill>
+            </a:ln>
+          </p:spPr>
+          <p:style>
+            <a:lnRef idx="2">
+              <a:schemeClr val="accent1"/>
+            </a:lnRef>
+            <a:fillRef idx="0">
+              <a:schemeClr val="accent1"/>
+            </a:fillRef>
+            <a:effectRef idx="1">
+              <a:schemeClr val="accent1"/>
+            </a:effectRef>
+            <a:fontRef idx="minor">
+              <a:schemeClr val="tx1"/>
+            </a:fontRef>
+          </p:style>
+        </p:cxnSp>
+        <p:cxnSp>
+          <p:nvCxnSpPr>
+            <p:cNvPr id="53" name="Connettore diritto 52">
+              <a:extLst>
+                <a:ext uri="{FF2B5EF4-FFF2-40B4-BE49-F238E27FC236}">
+                  <a16:creationId xmlns:a16="http://schemas.microsoft.com/office/drawing/2014/main" id="{D9AB9F89-33D1-EA57-BDD7-17DE76ED6513}"/>
+                </a:ext>
+              </a:extLst>
+            </p:cNvPr>
+            <p:cNvCxnSpPr/>
+            <p:nvPr/>
+          </p:nvCxnSpPr>
+          <p:spPr>
+            <a:xfrm flipH="1">
+              <a:off x="3317132" y="4108202"/>
+              <a:ext cx="358616" cy="230981"/>
+            </a:xfrm>
+            <a:prstGeom prst="line">
+              <a:avLst/>
+            </a:prstGeom>
+            <a:ln>
+              <a:solidFill>
+                <a:schemeClr val="tx1"/>
+              </a:solidFill>
+            </a:ln>
+          </p:spPr>
+          <p:style>
+            <a:lnRef idx="2">
+              <a:schemeClr val="accent1"/>
+            </a:lnRef>
+            <a:fillRef idx="0">
+              <a:schemeClr val="accent1"/>
+            </a:fillRef>
+            <a:effectRef idx="1">
+              <a:schemeClr val="accent1"/>
+            </a:effectRef>
+            <a:fontRef idx="minor">
+              <a:schemeClr val="tx1"/>
+            </a:fontRef>
+          </p:style>
+        </p:cxnSp>
+        <p:cxnSp>
+          <p:nvCxnSpPr>
+            <p:cNvPr id="54" name="Connettore diritto 53">
+              <a:extLst>
+                <a:ext uri="{FF2B5EF4-FFF2-40B4-BE49-F238E27FC236}">
+                  <a16:creationId xmlns:a16="http://schemas.microsoft.com/office/drawing/2014/main" id="{82128074-D008-670B-A21C-1E2921FE27F7}"/>
+                </a:ext>
+              </a:extLst>
+            </p:cNvPr>
+            <p:cNvCxnSpPr/>
+            <p:nvPr/>
+          </p:nvCxnSpPr>
+          <p:spPr>
+            <a:xfrm flipH="1">
+              <a:off x="3317131" y="4236148"/>
+              <a:ext cx="358616" cy="230981"/>
+            </a:xfrm>
+            <a:prstGeom prst="line">
+              <a:avLst/>
+            </a:prstGeom>
+            <a:ln>
+              <a:solidFill>
+                <a:schemeClr val="tx1"/>
+              </a:solidFill>
+            </a:ln>
+          </p:spPr>
+          <p:style>
+            <a:lnRef idx="2">
+              <a:schemeClr val="accent1"/>
+            </a:lnRef>
+            <a:fillRef idx="0">
+              <a:schemeClr val="accent1"/>
+            </a:fillRef>
+            <a:effectRef idx="1">
+              <a:schemeClr val="accent1"/>
+            </a:effectRef>
+            <a:fontRef idx="minor">
+              <a:schemeClr val="tx1"/>
+            </a:fontRef>
+          </p:style>
+        </p:cxnSp>
+        <p:cxnSp>
+          <p:nvCxnSpPr>
+            <p:cNvPr id="55" name="Connettore diritto 54">
+              <a:extLst>
+                <a:ext uri="{FF2B5EF4-FFF2-40B4-BE49-F238E27FC236}">
+                  <a16:creationId xmlns:a16="http://schemas.microsoft.com/office/drawing/2014/main" id="{D6EEF3B3-98F1-E67A-BD98-E2BA081EF8C6}"/>
+                </a:ext>
+              </a:extLst>
+            </p:cNvPr>
+            <p:cNvCxnSpPr/>
+            <p:nvPr/>
+          </p:nvCxnSpPr>
+          <p:spPr>
+            <a:xfrm flipH="1">
+              <a:off x="3317131" y="4364094"/>
+              <a:ext cx="358616" cy="230981"/>
+            </a:xfrm>
+            <a:prstGeom prst="line">
+              <a:avLst/>
+            </a:prstGeom>
+            <a:ln>
+              <a:solidFill>
+                <a:schemeClr val="tx1"/>
+              </a:solidFill>
+            </a:ln>
+          </p:spPr>
+          <p:style>
+            <a:lnRef idx="2">
+              <a:schemeClr val="accent1"/>
+            </a:lnRef>
+            <a:fillRef idx="0">
+              <a:schemeClr val="accent1"/>
+            </a:fillRef>
+            <a:effectRef idx="1">
+              <a:schemeClr val="accent1"/>
+            </a:effectRef>
+            <a:fontRef idx="minor">
+              <a:schemeClr val="tx1"/>
+            </a:fontRef>
+          </p:style>
+        </p:cxnSp>
+        <p:cxnSp>
+          <p:nvCxnSpPr>
+            <p:cNvPr id="56" name="Connettore diritto 55">
+              <a:extLst>
+                <a:ext uri="{FF2B5EF4-FFF2-40B4-BE49-F238E27FC236}">
+                  <a16:creationId xmlns:a16="http://schemas.microsoft.com/office/drawing/2014/main" id="{360A0E6C-2C95-612D-DB5B-08EE2C4D25F1}"/>
+                </a:ext>
+              </a:extLst>
+            </p:cNvPr>
+            <p:cNvCxnSpPr/>
+            <p:nvPr/>
+          </p:nvCxnSpPr>
+          <p:spPr>
+            <a:xfrm flipH="1">
+              <a:off x="3317131" y="4488798"/>
+              <a:ext cx="358616" cy="230981"/>
+            </a:xfrm>
+            <a:prstGeom prst="line">
+              <a:avLst/>
+            </a:prstGeom>
+            <a:ln>
+              <a:solidFill>
+                <a:schemeClr val="tx1"/>
+              </a:solidFill>
+            </a:ln>
+          </p:spPr>
+          <p:style>
+            <a:lnRef idx="2">
+              <a:schemeClr val="accent1"/>
+            </a:lnRef>
+            <a:fillRef idx="0">
+              <a:schemeClr val="accent1"/>
+            </a:fillRef>
+            <a:effectRef idx="1">
+              <a:schemeClr val="accent1"/>
+            </a:effectRef>
+            <a:fontRef idx="minor">
+              <a:schemeClr val="tx1"/>
+            </a:fontRef>
+          </p:style>
+        </p:cxnSp>
+      </p:grpSp>
+      <p:cxnSp>
+        <p:nvCxnSpPr>
+          <p:cNvPr id="57" name="Connettore 2 56">
+            <a:extLst>
+              <a:ext uri="{FF2B5EF4-FFF2-40B4-BE49-F238E27FC236}">
+                <a16:creationId xmlns:a16="http://schemas.microsoft.com/office/drawing/2014/main" id="{07901654-CA59-DF3F-7954-5285C5C974BF}"/>
+              </a:ext>
+            </a:extLst>
+          </p:cNvPr>
+          <p:cNvCxnSpPr>
+            <a:stCxn id="9" idx="3"/>
+          </p:cNvCxnSpPr>
+          <p:nvPr/>
+        </p:nvCxnSpPr>
+        <p:spPr>
+          <a:xfrm>
+            <a:off x="7101840" y="4044968"/>
+            <a:ext cx="590727" cy="0"/>
+          </a:xfrm>
+          <a:prstGeom prst="straightConnector1">
+            <a:avLst/>
+          </a:prstGeom>
+          <a:ln w="28575">
+            <a:solidFill>
+              <a:schemeClr val="tx2">
+                <a:lumMod val="50000"/>
+                <a:lumOff val="50000"/>
+              </a:schemeClr>
+            </a:solidFill>
+            <a:tailEnd type="triangle"/>
+          </a:ln>
+        </p:spPr>
+        <p:style>
+          <a:lnRef idx="2">
+            <a:schemeClr val="dk1"/>
+          </a:lnRef>
+          <a:fillRef idx="0">
+            <a:schemeClr val="dk1"/>
+          </a:fillRef>
+          <a:effectRef idx="1">
+            <a:schemeClr val="dk1"/>
+          </a:effectRef>
+          <a:fontRef idx="minor">
+            <a:schemeClr val="tx1"/>
+          </a:fontRef>
+        </p:style>
+      </p:cxnSp>
+      <p:cxnSp>
+        <p:nvCxnSpPr>
+          <p:cNvPr id="58" name="Connettore 2 57">
+            <a:extLst>
+              <a:ext uri="{FF2B5EF4-FFF2-40B4-BE49-F238E27FC236}">
+                <a16:creationId xmlns:a16="http://schemas.microsoft.com/office/drawing/2014/main" id="{AA2F3DDB-1285-6190-0559-E9428E4F746A}"/>
+              </a:ext>
+            </a:extLst>
+          </p:cNvPr>
+          <p:cNvCxnSpPr>
+            <a:stCxn id="9" idx="1"/>
+          </p:cNvCxnSpPr>
+          <p:nvPr/>
+        </p:nvCxnSpPr>
+        <p:spPr>
+          <a:xfrm flipH="1">
+            <a:off x="4513201" y="4044968"/>
+            <a:ext cx="576959" cy="0"/>
+          </a:xfrm>
+          <a:prstGeom prst="straightConnector1">
+            <a:avLst/>
+          </a:prstGeom>
+          <a:ln w="28575">
+            <a:solidFill>
+              <a:schemeClr val="tx2">
+                <a:lumMod val="50000"/>
+                <a:lumOff val="50000"/>
+              </a:schemeClr>
+            </a:solidFill>
+            <a:tailEnd type="triangle"/>
+          </a:ln>
+        </p:spPr>
+        <p:style>
+          <a:lnRef idx="2">
+            <a:schemeClr val="dk1"/>
+          </a:lnRef>
+          <a:fillRef idx="0">
+            <a:schemeClr val="dk1"/>
+          </a:fillRef>
+          <a:effectRef idx="1">
+            <a:schemeClr val="dk1"/>
+          </a:effectRef>
+          <a:fontRef idx="minor">
+            <a:schemeClr val="tx1"/>
+          </a:fontRef>
+        </p:style>
+      </p:cxnSp>
+      <p:cxnSp>
+        <p:nvCxnSpPr>
+          <p:cNvPr id="59" name="Connettore 2 58">
+            <a:extLst>
+              <a:ext uri="{FF2B5EF4-FFF2-40B4-BE49-F238E27FC236}">
+                <a16:creationId xmlns:a16="http://schemas.microsoft.com/office/drawing/2014/main" id="{865F949D-77C7-BE4E-B648-896704A1B307}"/>
+              </a:ext>
+            </a:extLst>
+          </p:cNvPr>
+          <p:cNvCxnSpPr/>
+          <p:nvPr/>
+        </p:nvCxnSpPr>
+        <p:spPr>
+          <a:xfrm>
+            <a:off x="6096000" y="3467100"/>
+            <a:ext cx="852042" cy="0"/>
+          </a:xfrm>
+          <a:prstGeom prst="straightConnector1">
+            <a:avLst/>
+          </a:prstGeom>
+          <a:ln w="28575">
+            <a:solidFill>
+              <a:schemeClr val="tx2">
+                <a:lumMod val="50000"/>
+                <a:lumOff val="50000"/>
+              </a:schemeClr>
+            </a:solidFill>
+            <a:tailEnd type="triangle"/>
+          </a:ln>
+        </p:spPr>
+        <p:style>
+          <a:lnRef idx="2">
+            <a:schemeClr val="accent1"/>
+          </a:lnRef>
+          <a:fillRef idx="0">
+            <a:schemeClr val="accent1"/>
+          </a:fillRef>
+          <a:effectRef idx="1">
+            <a:schemeClr val="accent1"/>
+          </a:effectRef>
+          <a:fontRef idx="minor">
+            <a:schemeClr val="tx1"/>
+          </a:fontRef>
+        </p:style>
+      </p:cxnSp>
+      <mc:AlternateContent xmlns:mc="http://schemas.openxmlformats.org/markup-compatibility/2006">
+        <mc:Choice xmlns:a14="http://schemas.microsoft.com/office/drawing/2010/main" Requires="a14">
+          <p:sp>
+            <p:nvSpPr>
+              <p:cNvPr id="67" name="CasellaDiTesto 66">
+                <a:extLst>
+                  <a:ext uri="{FF2B5EF4-FFF2-40B4-BE49-F238E27FC236}">
+                    <a16:creationId xmlns:a16="http://schemas.microsoft.com/office/drawing/2014/main" id="{9FEA0567-3117-2049-F36A-66264D848863}"/>
+                  </a:ext>
+                </a:extLst>
+              </p:cNvPr>
+              <p:cNvSpPr txBox="1"/>
+              <p:nvPr/>
+            </p:nvSpPr>
+            <p:spPr>
+              <a:xfrm>
+                <a:off x="6976663" y="3259028"/>
+                <a:ext cx="211700" cy="276999"/>
+              </a:xfrm>
+              <a:prstGeom prst="rect">
+                <a:avLst/>
+              </a:prstGeom>
+              <a:noFill/>
+            </p:spPr>
+            <p:txBody>
+              <a:bodyPr wrap="square" lIns="0" tIns="0" rIns="0" bIns="0" rtlCol="0">
+                <a:spAutoFit/>
+              </a:bodyPr>
+              <a:lstStyle/>
+              <a:p>
+                <a14:m>
+                  <m:oMathPara xmlns:m="http://schemas.openxmlformats.org/officeDocument/2006/math">
+                    <m:oMathParaPr>
+                      <m:jc m:val="centerGroup"/>
+                    </m:oMathParaPr>
+                    <m:oMath xmlns:m="http://schemas.openxmlformats.org/officeDocument/2006/math">
+                      <m:r>
+                        <a:rPr lang="it-IT" b="0" i="1" smtClean="0">
+                          <a:latin typeface="Cambria Math" panose="02040503050406030204" pitchFamily="18" charset="0"/>
+                        </a:rPr>
+                        <m:t>𝐻</m:t>
+                      </m:r>
+                    </m:oMath>
+                  </m:oMathPara>
+                </a14:m>
+                <a:endParaRPr lang="it-IT" dirty="0"/>
+              </a:p>
+            </p:txBody>
+          </p:sp>
+        </mc:Choice>
+        <mc:Fallback>
+          <p:sp>
+            <p:nvSpPr>
+              <p:cNvPr id="67" name="CasellaDiTesto 66">
+                <a:extLst>
+                  <a:ext uri="{FF2B5EF4-FFF2-40B4-BE49-F238E27FC236}">
+                    <a16:creationId xmlns:a16="http://schemas.microsoft.com/office/drawing/2014/main" id="{9FEA0567-3117-2049-F36A-66264D848863}"/>
+                  </a:ext>
+                </a:extLst>
+              </p:cNvPr>
+              <p:cNvSpPr txBox="1">
+                <a:spLocks noRot="1" noChangeAspect="1" noMove="1" noResize="1" noEditPoints="1" noAdjustHandles="1" noChangeArrowheads="1" noChangeShapeType="1" noTextEdit="1"/>
+              </p:cNvSpPr>
+              <p:nvPr/>
+            </p:nvSpPr>
+            <p:spPr>
+              <a:xfrm>
+                <a:off x="6976663" y="3259028"/>
+                <a:ext cx="211700" cy="276999"/>
+              </a:xfrm>
+              <a:prstGeom prst="rect">
+                <a:avLst/>
+              </a:prstGeom>
+              <a:blipFill>
+                <a:blip r:embed="rId2"/>
+                <a:stretch>
+                  <a:fillRect l="-28571" r="-28571" b="-6667"/>
+                </a:stretch>
+              </a:blipFill>
+            </p:spPr>
+            <p:txBody>
+              <a:bodyPr/>
+              <a:lstStyle/>
+              <a:p>
+                <a:r>
+                  <a:rPr lang="it-IT">
+                    <a:noFill/>
+                  </a:rPr>
+                  <a:t> </a:t>
+                </a:r>
+              </a:p>
+            </p:txBody>
+          </p:sp>
+        </mc:Fallback>
+      </mc:AlternateContent>
+      <mc:AlternateContent xmlns:mc="http://schemas.openxmlformats.org/markup-compatibility/2006">
+        <mc:Choice xmlns:a14="http://schemas.microsoft.com/office/drawing/2010/main" Requires="a14">
+          <p:sp>
+            <p:nvSpPr>
+              <p:cNvPr id="68" name="CasellaDiTesto 67">
+                <a:extLst>
+                  <a:ext uri="{FF2B5EF4-FFF2-40B4-BE49-F238E27FC236}">
+                    <a16:creationId xmlns:a16="http://schemas.microsoft.com/office/drawing/2014/main" id="{8A9D93F2-6374-8699-D5F4-194E2273199B}"/>
+                  </a:ext>
+                </a:extLst>
+              </p:cNvPr>
+              <p:cNvSpPr txBox="1"/>
+              <p:nvPr/>
+            </p:nvSpPr>
+            <p:spPr>
+              <a:xfrm>
+                <a:off x="4241402" y="3679051"/>
+                <a:ext cx="323357" cy="276999"/>
+              </a:xfrm>
+              <a:prstGeom prst="rect">
+                <a:avLst/>
+              </a:prstGeom>
+              <a:noFill/>
+            </p:spPr>
+            <p:txBody>
+              <a:bodyPr wrap="none" lIns="0" tIns="0" rIns="0" bIns="0" rtlCol="0">
+                <a:spAutoFit/>
+              </a:bodyPr>
+              <a:lstStyle/>
+              <a:p>
+                <a14:m>
+                  <m:oMathPara xmlns:m="http://schemas.openxmlformats.org/officeDocument/2006/math">
+                    <m:oMathParaPr>
+                      <m:jc m:val="centerGroup"/>
+                    </m:oMathParaPr>
+                    <m:oMath xmlns:m="http://schemas.openxmlformats.org/officeDocument/2006/math">
+                      <m:r>
+                        <a:rPr lang="it-IT" b="0" i="1" smtClean="0">
+                          <a:latin typeface="Cambria Math" panose="02040503050406030204" pitchFamily="18" charset="0"/>
+                        </a:rPr>
+                        <m:t>𝛽</m:t>
+                      </m:r>
+                      <m:acc>
+                        <m:accPr>
+                          <m:chr m:val="̇"/>
+                          <m:ctrlPr>
+                            <a:rPr lang="it-IT" b="0" i="1" smtClean="0">
+                              <a:latin typeface="Cambria Math" panose="02040503050406030204" pitchFamily="18" charset="0"/>
+                            </a:rPr>
+                          </m:ctrlPr>
+                        </m:accPr>
+                        <m:e>
+                          <m:r>
+                            <a:rPr lang="it-IT" b="0" i="1" smtClean="0">
+                              <a:latin typeface="Cambria Math" panose="02040503050406030204" pitchFamily="18" charset="0"/>
+                            </a:rPr>
+                            <m:t>𝑥</m:t>
+                          </m:r>
+                        </m:e>
+                      </m:acc>
+                    </m:oMath>
+                  </m:oMathPara>
+                </a14:m>
+                <a:endParaRPr lang="it-IT" dirty="0"/>
+              </a:p>
+            </p:txBody>
+          </p:sp>
+        </mc:Choice>
+        <mc:Fallback>
+          <p:sp>
+            <p:nvSpPr>
+              <p:cNvPr id="68" name="CasellaDiTesto 67">
+                <a:extLst>
+                  <a:ext uri="{FF2B5EF4-FFF2-40B4-BE49-F238E27FC236}">
+                    <a16:creationId xmlns:a16="http://schemas.microsoft.com/office/drawing/2014/main" id="{8A9D93F2-6374-8699-D5F4-194E2273199B}"/>
+                  </a:ext>
+                </a:extLst>
+              </p:cNvPr>
+              <p:cNvSpPr txBox="1">
+                <a:spLocks noRot="1" noChangeAspect="1" noMove="1" noResize="1" noEditPoints="1" noAdjustHandles="1" noChangeArrowheads="1" noChangeShapeType="1" noTextEdit="1"/>
+              </p:cNvSpPr>
+              <p:nvPr/>
+            </p:nvSpPr>
+            <p:spPr>
+              <a:xfrm>
+                <a:off x="4241402" y="3679051"/>
+                <a:ext cx="323357" cy="276999"/>
+              </a:xfrm>
+              <a:prstGeom prst="rect">
+                <a:avLst/>
+              </a:prstGeom>
+              <a:blipFill>
+                <a:blip r:embed="rId3"/>
+                <a:stretch>
+                  <a:fillRect l="-26415" t="-4444" r="-30189" b="-35556"/>
+                </a:stretch>
+              </a:blipFill>
+            </p:spPr>
+            <p:txBody>
+              <a:bodyPr/>
+              <a:lstStyle/>
+              <a:p>
+                <a:r>
+                  <a:rPr lang="it-IT">
+                    <a:noFill/>
+                  </a:rPr>
+                  <a:t> </a:t>
+                </a:r>
+              </a:p>
+            </p:txBody>
+          </p:sp>
+        </mc:Fallback>
+      </mc:AlternateContent>
+      <mc:AlternateContent xmlns:mc="http://schemas.openxmlformats.org/markup-compatibility/2006">
+        <mc:Choice xmlns:a14="http://schemas.microsoft.com/office/drawing/2010/main" Requires="a14">
+          <p:sp>
+            <p:nvSpPr>
+              <p:cNvPr id="69" name="CasellaDiTesto 68">
+                <a:extLst>
+                  <a:ext uri="{FF2B5EF4-FFF2-40B4-BE49-F238E27FC236}">
+                    <a16:creationId xmlns:a16="http://schemas.microsoft.com/office/drawing/2014/main" id="{D68C1935-A866-2805-D97E-7E8503AE62F4}"/>
+                  </a:ext>
+                </a:extLst>
+              </p:cNvPr>
+              <p:cNvSpPr txBox="1"/>
+              <p:nvPr/>
+            </p:nvSpPr>
+            <p:spPr>
+              <a:xfrm>
+                <a:off x="7605759" y="3713045"/>
+                <a:ext cx="211700" cy="276999"/>
+              </a:xfrm>
+              <a:prstGeom prst="rect">
+                <a:avLst/>
+              </a:prstGeom>
+              <a:noFill/>
+            </p:spPr>
+            <p:txBody>
+              <a:bodyPr wrap="square" lIns="0" tIns="0" rIns="0" bIns="0" rtlCol="0">
+                <a:spAutoFit/>
+              </a:bodyPr>
+              <a:lstStyle/>
+              <a:p>
+                <a14:m>
+                  <m:oMathPara xmlns:m="http://schemas.openxmlformats.org/officeDocument/2006/math">
+                    <m:oMathParaPr>
+                      <m:jc m:val="centerGroup"/>
+                    </m:oMathParaPr>
+                    <m:oMath xmlns:m="http://schemas.openxmlformats.org/officeDocument/2006/math">
+                      <m:r>
+                        <a:rPr lang="it-IT" b="0" i="1" smtClean="0">
+                          <a:latin typeface="Cambria Math" panose="02040503050406030204" pitchFamily="18" charset="0"/>
+                        </a:rPr>
+                        <m:t>𝐹</m:t>
+                      </m:r>
+                    </m:oMath>
+                  </m:oMathPara>
+                </a14:m>
+                <a:endParaRPr lang="it-IT" dirty="0"/>
+              </a:p>
+            </p:txBody>
+          </p:sp>
+        </mc:Choice>
+        <mc:Fallback>
+          <p:sp>
+            <p:nvSpPr>
+              <p:cNvPr id="69" name="CasellaDiTesto 68">
+                <a:extLst>
+                  <a:ext uri="{FF2B5EF4-FFF2-40B4-BE49-F238E27FC236}">
+                    <a16:creationId xmlns:a16="http://schemas.microsoft.com/office/drawing/2014/main" id="{D68C1935-A866-2805-D97E-7E8503AE62F4}"/>
+                  </a:ext>
+                </a:extLst>
+              </p:cNvPr>
+              <p:cNvSpPr txBox="1">
+                <a:spLocks noRot="1" noChangeAspect="1" noMove="1" noResize="1" noEditPoints="1" noAdjustHandles="1" noChangeArrowheads="1" noChangeShapeType="1" noTextEdit="1"/>
+              </p:cNvSpPr>
+              <p:nvPr/>
+            </p:nvSpPr>
+            <p:spPr>
+              <a:xfrm>
+                <a:off x="7605759" y="3713045"/>
+                <a:ext cx="211700" cy="276999"/>
+              </a:xfrm>
+              <a:prstGeom prst="rect">
+                <a:avLst/>
+              </a:prstGeom>
+              <a:blipFill>
+                <a:blip r:embed="rId4"/>
+                <a:stretch>
+                  <a:fillRect l="-26471" r="-20588" b="-6522"/>
+                </a:stretch>
+              </a:blipFill>
+            </p:spPr>
+            <p:txBody>
+              <a:bodyPr/>
+              <a:lstStyle/>
+              <a:p>
+                <a:r>
+                  <a:rPr lang="it-IT">
+                    <a:noFill/>
+                  </a:rPr>
+                  <a:t> </a:t>
+                </a:r>
+              </a:p>
+            </p:txBody>
+          </p:sp>
+        </mc:Fallback>
+      </mc:AlternateContent>
+      <mc:AlternateContent xmlns:mc="http://schemas.openxmlformats.org/markup-compatibility/2006">
+        <mc:Choice xmlns:a14="http://schemas.microsoft.com/office/drawing/2010/main" Requires="a14">
+          <p:sp>
+            <p:nvSpPr>
+              <p:cNvPr id="70" name="CasellaDiTesto 69">
+                <a:extLst>
+                  <a:ext uri="{FF2B5EF4-FFF2-40B4-BE49-F238E27FC236}">
+                    <a16:creationId xmlns:a16="http://schemas.microsoft.com/office/drawing/2014/main" id="{701607B5-EA36-EE70-329E-AFD1F1215060}"/>
+                  </a:ext>
+                </a:extLst>
+              </p:cNvPr>
+              <p:cNvSpPr txBox="1"/>
+              <p:nvPr/>
+            </p:nvSpPr>
+            <p:spPr>
+              <a:xfrm>
+                <a:off x="5944331" y="3808156"/>
+                <a:ext cx="211700" cy="369332"/>
+              </a:xfrm>
+              <a:prstGeom prst="rect">
+                <a:avLst/>
+              </a:prstGeom>
+              <a:noFill/>
+            </p:spPr>
+            <p:txBody>
+              <a:bodyPr wrap="square" lIns="0" tIns="0" rIns="0" bIns="0" rtlCol="0">
+                <a:spAutoFit/>
+              </a:bodyPr>
+              <a:lstStyle/>
+              <a:p>
+                <a14:m>
+                  <m:oMathPara xmlns:m="http://schemas.openxmlformats.org/officeDocument/2006/math">
+                    <m:oMathParaPr>
+                      <m:jc m:val="centerGroup"/>
+                    </m:oMathParaPr>
+                    <m:oMath xmlns:m="http://schemas.openxmlformats.org/officeDocument/2006/math">
+                      <m:r>
+                        <a:rPr lang="it-IT" sz="2400" b="0" i="1" smtClean="0">
+                          <a:latin typeface="Cambria Math" panose="02040503050406030204" pitchFamily="18" charset="0"/>
+                        </a:rPr>
+                        <m:t>𝑀</m:t>
+                      </m:r>
+                    </m:oMath>
+                  </m:oMathPara>
+                </a14:m>
+                <a:endParaRPr lang="it-IT" dirty="0"/>
+              </a:p>
+            </p:txBody>
+          </p:sp>
+        </mc:Choice>
+        <mc:Fallback>
+          <p:sp>
+            <p:nvSpPr>
+              <p:cNvPr id="70" name="CasellaDiTesto 69">
+                <a:extLst>
+                  <a:ext uri="{FF2B5EF4-FFF2-40B4-BE49-F238E27FC236}">
+                    <a16:creationId xmlns:a16="http://schemas.microsoft.com/office/drawing/2014/main" id="{701607B5-EA36-EE70-329E-AFD1F1215060}"/>
+                  </a:ext>
+                </a:extLst>
+              </p:cNvPr>
+              <p:cNvSpPr txBox="1">
+                <a:spLocks noRot="1" noChangeAspect="1" noMove="1" noResize="1" noEditPoints="1" noAdjustHandles="1" noChangeArrowheads="1" noChangeShapeType="1" noTextEdit="1"/>
+              </p:cNvSpPr>
+              <p:nvPr/>
+            </p:nvSpPr>
+            <p:spPr>
+              <a:xfrm>
+                <a:off x="5944331" y="3808156"/>
+                <a:ext cx="211700" cy="369332"/>
+              </a:xfrm>
+              <a:prstGeom prst="rect">
+                <a:avLst/>
+              </a:prstGeom>
+              <a:blipFill>
+                <a:blip r:embed="rId5"/>
+                <a:stretch>
+                  <a:fillRect l="-48571" r="-74286" b="-5000"/>
+                </a:stretch>
+              </a:blipFill>
+            </p:spPr>
+            <p:txBody>
+              <a:bodyPr/>
+              <a:lstStyle/>
+              <a:p>
+                <a:r>
+                  <a:rPr lang="it-IT">
+                    <a:noFill/>
+                  </a:rPr>
+                  <a:t> </a:t>
+                </a:r>
+              </a:p>
+            </p:txBody>
+          </p:sp>
+        </mc:Fallback>
+      </mc:AlternateContent>
+      <mc:AlternateContent xmlns:mc="http://schemas.openxmlformats.org/markup-compatibility/2006">
+        <mc:Choice xmlns:a14="http://schemas.microsoft.com/office/drawing/2010/main" Requires="a14">
+          <p:sp>
+            <p:nvSpPr>
+              <p:cNvPr id="72" name="CasellaDiTesto 71">
+                <a:extLst>
+                  <a:ext uri="{FF2B5EF4-FFF2-40B4-BE49-F238E27FC236}">
+                    <a16:creationId xmlns:a16="http://schemas.microsoft.com/office/drawing/2014/main" id="{CD4121DB-60B2-1684-63B8-3A37C1040831}"/>
+                  </a:ext>
+                </a:extLst>
+              </p:cNvPr>
+              <p:cNvSpPr txBox="1"/>
+              <p:nvPr/>
+            </p:nvSpPr>
+            <p:spPr>
+              <a:xfrm>
+                <a:off x="8691445" y="4647157"/>
+                <a:ext cx="211700" cy="369332"/>
+              </a:xfrm>
+              <a:prstGeom prst="rect">
+                <a:avLst/>
+              </a:prstGeom>
+              <a:noFill/>
+            </p:spPr>
+            <p:txBody>
+              <a:bodyPr wrap="square" lIns="0" tIns="0" rIns="0" bIns="0" rtlCol="0">
+                <a:spAutoFit/>
+              </a:bodyPr>
+              <a:lstStyle/>
+              <a:p>
+                <a14:m>
+                  <m:oMathPara xmlns:m="http://schemas.openxmlformats.org/officeDocument/2006/math">
+                    <m:oMathParaPr>
+                      <m:jc m:val="centerGroup"/>
+                    </m:oMathParaPr>
+                    <m:oMath xmlns:m="http://schemas.openxmlformats.org/officeDocument/2006/math">
+                      <m:r>
+                        <a:rPr lang="it-IT" sz="2400" b="0" i="1" smtClean="0">
+                          <a:latin typeface="Cambria Math" panose="02040503050406030204" pitchFamily="18" charset="0"/>
+                        </a:rPr>
+                        <m:t>𝑥</m:t>
+                      </m:r>
+                    </m:oMath>
+                  </m:oMathPara>
+                </a14:m>
+                <a:endParaRPr lang="it-IT" sz="2400" dirty="0"/>
+              </a:p>
+            </p:txBody>
+          </p:sp>
+        </mc:Choice>
+        <mc:Fallback>
+          <p:sp>
+            <p:nvSpPr>
+              <p:cNvPr id="72" name="CasellaDiTesto 71">
+                <a:extLst>
+                  <a:ext uri="{FF2B5EF4-FFF2-40B4-BE49-F238E27FC236}">
+                    <a16:creationId xmlns:a16="http://schemas.microsoft.com/office/drawing/2014/main" id="{CD4121DB-60B2-1684-63B8-3A37C1040831}"/>
+                  </a:ext>
+                </a:extLst>
+              </p:cNvPr>
+              <p:cNvSpPr txBox="1">
+                <a:spLocks noRot="1" noChangeAspect="1" noMove="1" noResize="1" noEditPoints="1" noAdjustHandles="1" noChangeArrowheads="1" noChangeShapeType="1" noTextEdit="1"/>
+              </p:cNvSpPr>
+              <p:nvPr/>
+            </p:nvSpPr>
+            <p:spPr>
+              <a:xfrm>
+                <a:off x="8691445" y="4647157"/>
+                <a:ext cx="211700" cy="369332"/>
+              </a:xfrm>
+              <a:prstGeom prst="rect">
+                <a:avLst/>
+              </a:prstGeom>
+              <a:blipFill>
+                <a:blip r:embed="rId6"/>
+                <a:stretch>
+                  <a:fillRect l="-29412" r="-23529"/>
+                </a:stretch>
+              </a:blipFill>
+            </p:spPr>
+            <p:txBody>
+              <a:bodyPr/>
+              <a:lstStyle/>
+              <a:p>
+                <a:r>
+                  <a:rPr lang="it-IT">
+                    <a:noFill/>
+                  </a:rPr>
+                  <a:t> </a:t>
+                </a:r>
+              </a:p>
+            </p:txBody>
+          </p:sp>
+        </mc:Fallback>
+      </mc:AlternateContent>
+      <mc:AlternateContent xmlns:mc="http://schemas.openxmlformats.org/markup-compatibility/2006">
+        <mc:Choice xmlns:a14="http://schemas.microsoft.com/office/drawing/2010/main" Requires="a14">
+          <p:sp>
+            <p:nvSpPr>
+              <p:cNvPr id="73" name="CasellaDiTesto 72">
+                <a:extLst>
+                  <a:ext uri="{FF2B5EF4-FFF2-40B4-BE49-F238E27FC236}">
+                    <a16:creationId xmlns:a16="http://schemas.microsoft.com/office/drawing/2014/main" id="{BE4273C4-0A94-7D0A-C0A1-1C4A0829CB6E}"/>
+                  </a:ext>
+                </a:extLst>
+              </p:cNvPr>
+              <p:cNvSpPr txBox="1"/>
+              <p:nvPr/>
+            </p:nvSpPr>
+            <p:spPr>
+              <a:xfrm>
+                <a:off x="3356263" y="2751574"/>
+                <a:ext cx="211700" cy="369332"/>
+              </a:xfrm>
+              <a:prstGeom prst="rect">
+                <a:avLst/>
+              </a:prstGeom>
+              <a:noFill/>
+            </p:spPr>
+            <p:txBody>
+              <a:bodyPr wrap="square" lIns="0" tIns="0" rIns="0" bIns="0" rtlCol="0">
+                <a:spAutoFit/>
+              </a:bodyPr>
+              <a:lstStyle/>
+              <a:p>
+                <a14:m>
+                  <m:oMathPara xmlns:m="http://schemas.openxmlformats.org/officeDocument/2006/math">
+                    <m:oMathParaPr>
+                      <m:jc m:val="centerGroup"/>
+                    </m:oMathParaPr>
+                    <m:oMath xmlns:m="http://schemas.openxmlformats.org/officeDocument/2006/math">
+                      <m:r>
+                        <a:rPr lang="it-IT" sz="2400" b="0" i="1" smtClean="0">
+                          <a:latin typeface="Cambria Math" panose="02040503050406030204" pitchFamily="18" charset="0"/>
+                        </a:rPr>
+                        <m:t>𝑦</m:t>
+                      </m:r>
+                    </m:oMath>
+                  </m:oMathPara>
+                </a14:m>
+                <a:endParaRPr lang="it-IT" sz="2400" dirty="0"/>
+              </a:p>
+            </p:txBody>
+          </p:sp>
+        </mc:Choice>
+        <mc:Fallback>
+          <p:sp>
+            <p:nvSpPr>
+              <p:cNvPr id="73" name="CasellaDiTesto 72">
+                <a:extLst>
+                  <a:ext uri="{FF2B5EF4-FFF2-40B4-BE49-F238E27FC236}">
+                    <a16:creationId xmlns:a16="http://schemas.microsoft.com/office/drawing/2014/main" id="{BE4273C4-0A94-7D0A-C0A1-1C4A0829CB6E}"/>
+                  </a:ext>
+                </a:extLst>
+              </p:cNvPr>
+              <p:cNvSpPr txBox="1">
+                <a:spLocks noRot="1" noChangeAspect="1" noMove="1" noResize="1" noEditPoints="1" noAdjustHandles="1" noChangeArrowheads="1" noChangeShapeType="1" noTextEdit="1"/>
+              </p:cNvSpPr>
+              <p:nvPr/>
+            </p:nvSpPr>
+            <p:spPr>
+              <a:xfrm>
+                <a:off x="3356263" y="2751574"/>
+                <a:ext cx="211700" cy="369332"/>
+              </a:xfrm>
+              <a:prstGeom prst="rect">
+                <a:avLst/>
+              </a:prstGeom>
+              <a:blipFill>
+                <a:blip r:embed="rId7"/>
+                <a:stretch>
+                  <a:fillRect l="-44118" r="-44118" b="-22951"/>
+                </a:stretch>
+              </a:blipFill>
+            </p:spPr>
+            <p:txBody>
+              <a:bodyPr/>
+              <a:lstStyle/>
+              <a:p>
+                <a:r>
+                  <a:rPr lang="it-IT">
+                    <a:noFill/>
+                  </a:rPr>
+                  <a:t> </a:t>
+                </a:r>
+              </a:p>
+            </p:txBody>
+          </p:sp>
+        </mc:Fallback>
+      </mc:AlternateContent>
+      <p:cxnSp>
+        <p:nvCxnSpPr>
+          <p:cNvPr id="78" name="Connettore diritto 77">
+            <a:extLst>
+              <a:ext uri="{FF2B5EF4-FFF2-40B4-BE49-F238E27FC236}">
+                <a16:creationId xmlns:a16="http://schemas.microsoft.com/office/drawing/2014/main" id="{32EAF73A-81D0-8DF5-652D-D317C43EEC36}"/>
+              </a:ext>
+            </a:extLst>
+          </p:cNvPr>
+          <p:cNvCxnSpPr>
+            <a:cxnSpLocks/>
+          </p:cNvCxnSpPr>
+          <p:nvPr/>
+        </p:nvCxnSpPr>
+        <p:spPr>
+          <a:xfrm flipV="1">
+            <a:off x="6096000" y="2933700"/>
+            <a:ext cx="0" cy="593380"/>
+          </a:xfrm>
+          <a:prstGeom prst="line">
+            <a:avLst/>
+          </a:prstGeom>
+          <a:ln w="28575">
+            <a:solidFill>
+              <a:schemeClr val="tx1"/>
+            </a:solidFill>
+            <a:prstDash val="sysDash"/>
+          </a:ln>
+        </p:spPr>
+        <p:style>
+          <a:lnRef idx="2">
+            <a:schemeClr val="dk1"/>
+          </a:lnRef>
+          <a:fillRef idx="0">
+            <a:schemeClr val="dk1"/>
+          </a:fillRef>
+          <a:effectRef idx="1">
+            <a:schemeClr val="dk1"/>
+          </a:effectRef>
+          <a:fontRef idx="minor">
+            <a:schemeClr val="tx1"/>
+          </a:fontRef>
+        </p:style>
+      </p:cxnSp>
+      <p:cxnSp>
+        <p:nvCxnSpPr>
+          <p:cNvPr id="82" name="Connettore 2 81">
+            <a:extLst>
+              <a:ext uri="{FF2B5EF4-FFF2-40B4-BE49-F238E27FC236}">
+                <a16:creationId xmlns:a16="http://schemas.microsoft.com/office/drawing/2014/main" id="{1308C114-567B-05DE-AFAE-EFAD4B625C1D}"/>
+              </a:ext>
+            </a:extLst>
+          </p:cNvPr>
+          <p:cNvCxnSpPr>
+            <a:cxnSpLocks/>
+          </p:cNvCxnSpPr>
+          <p:nvPr/>
+        </p:nvCxnSpPr>
+        <p:spPr>
+          <a:xfrm>
+            <a:off x="3752006" y="3206750"/>
+            <a:ext cx="2310657" cy="0"/>
+          </a:xfrm>
+          <a:prstGeom prst="straightConnector1">
+            <a:avLst/>
+          </a:prstGeom>
+          <a:ln w="19050">
+            <a:prstDash val="solid"/>
+            <a:tailEnd type="triangle"/>
+          </a:ln>
+        </p:spPr>
+        <p:style>
+          <a:lnRef idx="2">
+            <a:schemeClr val="dk1"/>
+          </a:lnRef>
+          <a:fillRef idx="0">
+            <a:schemeClr val="dk1"/>
+          </a:fillRef>
+          <a:effectRef idx="1">
+            <a:schemeClr val="dk1"/>
+          </a:effectRef>
+          <a:fontRef idx="minor">
+            <a:schemeClr val="tx1"/>
+          </a:fontRef>
+        </p:style>
+      </p:cxnSp>
+      <mc:AlternateContent xmlns:mc="http://schemas.openxmlformats.org/markup-compatibility/2006">
+        <mc:Choice xmlns:a14="http://schemas.microsoft.com/office/drawing/2010/main" Requires="a14">
+          <p:sp>
+            <p:nvSpPr>
+              <p:cNvPr id="84" name="CasellaDiTesto 83">
+                <a:extLst>
+                  <a:ext uri="{FF2B5EF4-FFF2-40B4-BE49-F238E27FC236}">
+                    <a16:creationId xmlns:a16="http://schemas.microsoft.com/office/drawing/2014/main" id="{17A81F10-8BA2-6338-1454-0572BC839402}"/>
+                  </a:ext>
+                </a:extLst>
+              </p:cNvPr>
+              <p:cNvSpPr txBox="1"/>
+              <p:nvPr/>
+            </p:nvSpPr>
+            <p:spPr>
+              <a:xfrm>
+                <a:off x="4756442" y="2831611"/>
+                <a:ext cx="211700" cy="307777"/>
+              </a:xfrm>
+              <a:prstGeom prst="rect">
+                <a:avLst/>
+              </a:prstGeom>
+              <a:noFill/>
+            </p:spPr>
+            <p:txBody>
+              <a:bodyPr wrap="square" lIns="0" tIns="0" rIns="0" bIns="0" rtlCol="0">
+                <a:spAutoFit/>
+              </a:bodyPr>
+              <a:lstStyle/>
+              <a:p>
+                <a14:m>
+                  <m:oMathPara xmlns:m="http://schemas.openxmlformats.org/officeDocument/2006/math">
+                    <m:oMathParaPr>
+                      <m:jc m:val="centerGroup"/>
+                    </m:oMathParaPr>
+                    <m:oMath xmlns:m="http://schemas.openxmlformats.org/officeDocument/2006/math">
+                      <m:r>
+                        <a:rPr lang="it-IT" sz="2000" b="0" i="1" smtClean="0">
+                          <a:latin typeface="Cambria Math" panose="02040503050406030204" pitchFamily="18" charset="0"/>
+                        </a:rPr>
+                        <m:t>𝑥</m:t>
+                      </m:r>
+                      <m:r>
+                        <a:rPr lang="it-IT" sz="2000" b="0" i="1" smtClean="0">
+                          <a:latin typeface="Cambria Math" panose="02040503050406030204" pitchFamily="18" charset="0"/>
+                        </a:rPr>
+                        <m:t>(</m:t>
+                      </m:r>
+                      <m:r>
+                        <a:rPr lang="it-IT" sz="2000" b="0" i="1" smtClean="0">
+                          <a:latin typeface="Cambria Math" panose="02040503050406030204" pitchFamily="18" charset="0"/>
+                        </a:rPr>
+                        <m:t>𝑡</m:t>
+                      </m:r>
+                      <m:r>
+                        <a:rPr lang="it-IT" sz="2000" b="0" i="1" smtClean="0">
+                          <a:latin typeface="Cambria Math" panose="02040503050406030204" pitchFamily="18" charset="0"/>
+                        </a:rPr>
+                        <m:t>)</m:t>
+                      </m:r>
+                    </m:oMath>
+                  </m:oMathPara>
+                </a14:m>
+                <a:endParaRPr lang="it-IT" dirty="0"/>
+              </a:p>
+            </p:txBody>
+          </p:sp>
+        </mc:Choice>
+        <mc:Fallback>
+          <p:sp>
+            <p:nvSpPr>
+              <p:cNvPr id="84" name="CasellaDiTesto 83">
+                <a:extLst>
+                  <a:ext uri="{FF2B5EF4-FFF2-40B4-BE49-F238E27FC236}">
+                    <a16:creationId xmlns:a16="http://schemas.microsoft.com/office/drawing/2014/main" id="{17A81F10-8BA2-6338-1454-0572BC839402}"/>
+                  </a:ext>
+                </a:extLst>
+              </p:cNvPr>
+              <p:cNvSpPr txBox="1">
+                <a:spLocks noRot="1" noChangeAspect="1" noMove="1" noResize="1" noEditPoints="1" noAdjustHandles="1" noChangeArrowheads="1" noChangeShapeType="1" noTextEdit="1"/>
+              </p:cNvSpPr>
+              <p:nvPr/>
+            </p:nvSpPr>
+            <p:spPr>
+              <a:xfrm>
+                <a:off x="4756442" y="2831611"/>
+                <a:ext cx="211700" cy="307777"/>
+              </a:xfrm>
+              <a:prstGeom prst="rect">
+                <a:avLst/>
+              </a:prstGeom>
+              <a:blipFill>
+                <a:blip r:embed="rId8"/>
+                <a:stretch>
+                  <a:fillRect l="-28571" t="-4000" r="-171429" b="-36000"/>
+                </a:stretch>
+              </a:blipFill>
+            </p:spPr>
+            <p:txBody>
+              <a:bodyPr/>
+              <a:lstStyle/>
+              <a:p>
+                <a:r>
+                  <a:rPr lang="it-IT">
+                    <a:noFill/>
+                  </a:rPr>
+                  <a:t> </a:t>
+                </a:r>
+              </a:p>
+            </p:txBody>
+          </p:sp>
+        </mc:Fallback>
+      </mc:AlternateContent>
+    </p:spTree>
+    <p:extLst>
+      <p:ext uri="{BB962C8B-B14F-4D97-AF65-F5344CB8AC3E}">
+        <p14:creationId xmlns:p14="http://schemas.microsoft.com/office/powerpoint/2010/main" val="3218779325"/>
+      </p:ext>
+    </p:extLst>
+  </p:cSld>
+  <p:clrMapOvr>
+    <a:masterClrMapping/>
+  </p:clrMapOvr>
+</p:sld>
+</file>
+
+<file path=ppt/slides/slide4.xml><?xml version="1.0" encoding="utf-8"?>
+<p:sld xmlns:a="http://schemas.openxmlformats.org/drawingml/2006/main" xmlns:r="http://schemas.openxmlformats.org/officeDocument/2006/relationships" xmlns:p="http://schemas.openxmlformats.org/presentationml/2006/main">
+  <p:cSld>
+    <p:spTree>
+      <p:nvGrpSpPr>
+        <p:cNvPr id="1" name=""/>
+        <p:cNvGrpSpPr/>
+        <p:nvPr/>
+      </p:nvGrpSpPr>
+      <p:grpSpPr>
+        <a:xfrm>
+          <a:off x="0" y="0"/>
+          <a:ext cx="0" cy="0"/>
+          <a:chOff x="0" y="0"/>
+          <a:chExt cx="0" cy="0"/>
+        </a:xfrm>
+      </p:grpSpPr>
+      <p:sp>
+        <p:nvSpPr>
+          <p:cNvPr id="4" name="Arco 3">
+            <a:extLst>
+              <a:ext uri="{FF2B5EF4-FFF2-40B4-BE49-F238E27FC236}">
+                <a16:creationId xmlns:a16="http://schemas.microsoft.com/office/drawing/2014/main" id="{1A81E47B-5F18-DFF3-27D8-E19A869F56F1}"/>
+              </a:ext>
+            </a:extLst>
+          </p:cNvPr>
+          <p:cNvSpPr/>
+          <p:nvPr/>
+        </p:nvSpPr>
+        <p:spPr>
+          <a:xfrm>
+            <a:off x="4184122" y="1542070"/>
+            <a:ext cx="3823756" cy="3970020"/>
+          </a:xfrm>
+          <a:prstGeom prst="arc">
+            <a:avLst>
+              <a:gd name="adj1" fmla="val 14824762"/>
+              <a:gd name="adj2" fmla="val 16205952"/>
+            </a:avLst>
+          </a:prstGeom>
+        </p:spPr>
+        <p:style>
+          <a:lnRef idx="2">
+            <a:schemeClr val="dk1"/>
+          </a:lnRef>
+          <a:fillRef idx="0">
+            <a:schemeClr val="dk1"/>
+          </a:fillRef>
+          <a:effectRef idx="1">
+            <a:schemeClr val="dk1"/>
+          </a:effectRef>
+          <a:fontRef idx="minor">
+            <a:schemeClr val="tx1"/>
+          </a:fontRef>
+        </p:style>
+        <p:txBody>
+          <a:bodyPr rtlCol="0" anchor="ctr"/>
+          <a:lstStyle/>
+          <a:p>
+            <a:pPr algn="ctr"/>
+            <a:endParaRPr lang="it-IT"/>
+          </a:p>
+        </p:txBody>
+      </p:sp>
+      <p:cxnSp>
+        <p:nvCxnSpPr>
+          <p:cNvPr id="5" name="Connettore diritto 4">
+            <a:extLst>
+              <a:ext uri="{FF2B5EF4-FFF2-40B4-BE49-F238E27FC236}">
+                <a16:creationId xmlns:a16="http://schemas.microsoft.com/office/drawing/2014/main" id="{6C4523E9-EBF6-B223-0412-E194B6EE5C11}"/>
+              </a:ext>
+            </a:extLst>
+          </p:cNvPr>
+          <p:cNvCxnSpPr>
+            <a:cxnSpLocks/>
+          </p:cNvCxnSpPr>
+          <p:nvPr/>
+        </p:nvCxnSpPr>
+        <p:spPr>
+          <a:xfrm flipH="1" flipV="1">
+            <a:off x="5273040" y="1592580"/>
+            <a:ext cx="822960" cy="1934500"/>
+          </a:xfrm>
+          <a:prstGeom prst="line">
+            <a:avLst/>
+          </a:prstGeom>
+          <a:ln w="57150">
+            <a:solidFill>
+              <a:schemeClr val="tx1"/>
+            </a:solidFill>
+          </a:ln>
+        </p:spPr>
+        <p:style>
+          <a:lnRef idx="2">
+            <a:schemeClr val="dk1"/>
+          </a:lnRef>
+          <a:fillRef idx="0">
+            <a:schemeClr val="dk1"/>
+          </a:fillRef>
+          <a:effectRef idx="1">
+            <a:schemeClr val="dk1"/>
+          </a:effectRef>
+          <a:fontRef idx="minor">
+            <a:schemeClr val="tx1"/>
+          </a:fontRef>
+        </p:style>
+      </p:cxnSp>
+      <p:cxnSp>
+        <p:nvCxnSpPr>
+          <p:cNvPr id="6" name="Connettore diritto 5">
+            <a:extLst>
+              <a:ext uri="{FF2B5EF4-FFF2-40B4-BE49-F238E27FC236}">
+                <a16:creationId xmlns:a16="http://schemas.microsoft.com/office/drawing/2014/main" id="{5422FB31-C438-013A-5E42-FC89936B6ECD}"/>
+              </a:ext>
+            </a:extLst>
+          </p:cNvPr>
+          <p:cNvCxnSpPr>
+            <a:cxnSpLocks/>
+          </p:cNvCxnSpPr>
+          <p:nvPr/>
+        </p:nvCxnSpPr>
+        <p:spPr>
+          <a:xfrm flipV="1">
+            <a:off x="6096000" y="1371600"/>
+            <a:ext cx="0" cy="2154902"/>
+          </a:xfrm>
+          <a:prstGeom prst="line">
+            <a:avLst/>
+          </a:prstGeom>
+          <a:ln>
+            <a:solidFill>
+              <a:schemeClr val="tx1"/>
+            </a:solidFill>
+            <a:prstDash val="sysDash"/>
+          </a:ln>
+        </p:spPr>
+        <p:style>
+          <a:lnRef idx="2">
+            <a:schemeClr val="dk1"/>
+          </a:lnRef>
+          <a:fillRef idx="0">
+            <a:schemeClr val="dk1"/>
+          </a:fillRef>
+          <a:effectRef idx="1">
+            <a:schemeClr val="dk1"/>
+          </a:effectRef>
+          <a:fontRef idx="minor">
+            <a:schemeClr val="tx1"/>
+          </a:fontRef>
+        </p:style>
+      </p:cxnSp>
+      <p:sp>
+        <p:nvSpPr>
+          <p:cNvPr id="10" name="Triangolo isoscele 9">
+            <a:extLst>
+              <a:ext uri="{FF2B5EF4-FFF2-40B4-BE49-F238E27FC236}">
+                <a16:creationId xmlns:a16="http://schemas.microsoft.com/office/drawing/2014/main" id="{3FD3B53F-5574-36AE-EF56-2E8393F62CE7}"/>
+              </a:ext>
+            </a:extLst>
+          </p:cNvPr>
+          <p:cNvSpPr/>
+          <p:nvPr/>
+        </p:nvSpPr>
+        <p:spPr>
+          <a:xfrm rot="15111459">
+            <a:off x="5334000" y="1645993"/>
+            <a:ext cx="80963" cy="88106"/>
+          </a:xfrm>
+          <a:prstGeom prst="triangle">
+            <a:avLst/>
+          </a:prstGeom>
+          <a:solidFill>
+            <a:schemeClr val="tx1"/>
+          </a:solidFill>
+          <a:ln>
+            <a:solidFill>
+              <a:schemeClr val="tx1"/>
+            </a:solidFill>
+          </a:ln>
+        </p:spPr>
+        <p:style>
+          <a:lnRef idx="2">
+            <a:schemeClr val="accent1">
+              <a:shade val="15000"/>
+            </a:schemeClr>
+          </a:lnRef>
+          <a:fillRef idx="1">
+            <a:schemeClr val="accent1"/>
+          </a:fillRef>
+          <a:effectRef idx="0">
+            <a:schemeClr val="accent1"/>
+          </a:effectRef>
+          <a:fontRef idx="minor">
+            <a:schemeClr val="lt1"/>
+          </a:fontRef>
+        </p:style>
+        <p:txBody>
+          <a:bodyPr rtlCol="0" anchor="ctr"/>
+          <a:lstStyle/>
+          <a:p>
+            <a:pPr algn="ctr"/>
+            <a:endParaRPr lang="it-IT"/>
+          </a:p>
+        </p:txBody>
+      </p:sp>
+      <p:sp>
+        <p:nvSpPr>
+          <p:cNvPr id="11" name="Rettangolo 10">
+            <a:extLst>
+              <a:ext uri="{FF2B5EF4-FFF2-40B4-BE49-F238E27FC236}">
+                <a16:creationId xmlns:a16="http://schemas.microsoft.com/office/drawing/2014/main" id="{D5FB3DBD-6C4A-2722-CD21-9E9AF3106509}"/>
+              </a:ext>
+            </a:extLst>
+          </p:cNvPr>
+          <p:cNvSpPr/>
+          <p:nvPr/>
+        </p:nvSpPr>
+        <p:spPr>
+          <a:xfrm rot="20225249">
+            <a:off x="5880880" y="2353715"/>
+            <a:ext cx="1077036" cy="1003840"/>
+          </a:xfrm>
+          <a:prstGeom prst="rect">
+            <a:avLst/>
+          </a:prstGeom>
+          <a:noFill/>
+          <a:ln w="12700">
+            <a:solidFill>
+              <a:schemeClr val="tx1"/>
+            </a:solidFill>
+            <a:prstDash val="lgDash"/>
+          </a:ln>
+        </p:spPr>
+        <p:style>
+          <a:lnRef idx="2">
+            <a:schemeClr val="accent1">
+              <a:shade val="15000"/>
+            </a:schemeClr>
+          </a:lnRef>
+          <a:fillRef idx="1">
+            <a:schemeClr val="accent1"/>
+          </a:fillRef>
+          <a:effectRef idx="0">
+            <a:schemeClr val="accent1"/>
+          </a:effectRef>
+          <a:fontRef idx="minor">
+            <a:schemeClr val="lt1"/>
+          </a:fontRef>
+        </p:style>
+        <p:txBody>
+          <a:bodyPr rtlCol="0" anchor="ctr"/>
+          <a:lstStyle/>
+          <a:p>
+            <a:pPr algn="ctr"/>
+            <a:endParaRPr lang="it-IT"/>
+          </a:p>
+        </p:txBody>
+      </p:sp>
+      <p:cxnSp>
+        <p:nvCxnSpPr>
+          <p:cNvPr id="12" name="Connettore 2 11">
+            <a:extLst>
+              <a:ext uri="{FF2B5EF4-FFF2-40B4-BE49-F238E27FC236}">
+                <a16:creationId xmlns:a16="http://schemas.microsoft.com/office/drawing/2014/main" id="{8AAE8D6B-E3F8-4759-B331-A34943F7A530}"/>
+              </a:ext>
+            </a:extLst>
+          </p:cNvPr>
+          <p:cNvCxnSpPr>
+            <a:cxnSpLocks/>
+          </p:cNvCxnSpPr>
+          <p:nvPr/>
+        </p:nvCxnSpPr>
+        <p:spPr>
+          <a:xfrm>
+            <a:off x="6711951" y="2164556"/>
+            <a:ext cx="398887" cy="943769"/>
+          </a:xfrm>
+          <a:prstGeom prst="straightConnector1">
+            <a:avLst/>
+          </a:prstGeom>
+          <a:ln>
+            <a:solidFill>
+              <a:schemeClr val="tx1"/>
+            </a:solidFill>
+            <a:headEnd type="triangle"/>
+            <a:tailEnd type="triangle"/>
+          </a:ln>
+        </p:spPr>
+        <p:style>
+          <a:lnRef idx="2">
+            <a:schemeClr val="dk1"/>
+          </a:lnRef>
+          <a:fillRef idx="0">
+            <a:schemeClr val="dk1"/>
+          </a:fillRef>
+          <a:effectRef idx="1">
+            <a:schemeClr val="dk1"/>
+          </a:effectRef>
+          <a:fontRef idx="minor">
+            <a:schemeClr val="tx1"/>
+          </a:fontRef>
+        </p:style>
+      </p:cxnSp>
+      <p:cxnSp>
+        <p:nvCxnSpPr>
+          <p:cNvPr id="13" name="Connettore 2 12">
+            <a:extLst>
+              <a:ext uri="{FF2B5EF4-FFF2-40B4-BE49-F238E27FC236}">
+                <a16:creationId xmlns:a16="http://schemas.microsoft.com/office/drawing/2014/main" id="{E525EDAA-086C-0960-942E-CA16AD615A21}"/>
+              </a:ext>
+            </a:extLst>
+          </p:cNvPr>
+          <p:cNvCxnSpPr>
+            <a:cxnSpLocks/>
+          </p:cNvCxnSpPr>
+          <p:nvPr/>
+        </p:nvCxnSpPr>
+        <p:spPr>
+          <a:xfrm>
+            <a:off x="5699512" y="2604308"/>
+            <a:ext cx="0" cy="669911"/>
+          </a:xfrm>
+          <a:prstGeom prst="straightConnector1">
+            <a:avLst/>
+          </a:prstGeom>
+          <a:ln w="28575">
+            <a:solidFill>
+              <a:srgbClr val="FF0000"/>
+            </a:solidFill>
+            <a:tailEnd type="triangle"/>
+          </a:ln>
+        </p:spPr>
+        <p:style>
+          <a:lnRef idx="2">
+            <a:schemeClr val="dk1"/>
+          </a:lnRef>
+          <a:fillRef idx="0">
+            <a:schemeClr val="dk1"/>
+          </a:fillRef>
+          <a:effectRef idx="1">
+            <a:schemeClr val="dk1"/>
+          </a:effectRef>
+          <a:fontRef idx="minor">
+            <a:schemeClr val="tx1"/>
+          </a:fontRef>
+        </p:style>
+      </p:cxnSp>
+      <p:sp>
+        <p:nvSpPr>
+          <p:cNvPr id="14" name="Ovale 13">
+            <a:extLst>
+              <a:ext uri="{FF2B5EF4-FFF2-40B4-BE49-F238E27FC236}">
+                <a16:creationId xmlns:a16="http://schemas.microsoft.com/office/drawing/2014/main" id="{8BEE6BE8-6924-16E5-1CAB-9036B595CDA2}"/>
+              </a:ext>
+            </a:extLst>
+          </p:cNvPr>
+          <p:cNvSpPr/>
+          <p:nvPr/>
+        </p:nvSpPr>
+        <p:spPr>
+          <a:xfrm>
+            <a:off x="5647785" y="2559830"/>
+            <a:ext cx="103454" cy="103454"/>
+          </a:xfrm>
+          <a:prstGeom prst="ellipse">
+            <a:avLst/>
+          </a:prstGeom>
+          <a:ln w="28575"/>
+        </p:spPr>
+        <p:style>
+          <a:lnRef idx="2">
+            <a:schemeClr val="dk1"/>
+          </a:lnRef>
+          <a:fillRef idx="1">
+            <a:schemeClr val="lt1"/>
+          </a:fillRef>
+          <a:effectRef idx="0">
+            <a:schemeClr val="dk1"/>
+          </a:effectRef>
+          <a:fontRef idx="minor">
+            <a:schemeClr val="dk1"/>
+          </a:fontRef>
+        </p:style>
+        <p:txBody>
+          <a:bodyPr rtlCol="0" anchor="ctr"/>
+          <a:lstStyle/>
+          <a:p>
+            <a:pPr algn="ctr"/>
+            <a:endParaRPr lang="it-IT"/>
+          </a:p>
+        </p:txBody>
+      </p:sp>
+      <p:cxnSp>
+        <p:nvCxnSpPr>
+          <p:cNvPr id="60" name="Connettore 2 59">
+            <a:extLst>
+              <a:ext uri="{FF2B5EF4-FFF2-40B4-BE49-F238E27FC236}">
+                <a16:creationId xmlns:a16="http://schemas.microsoft.com/office/drawing/2014/main" id="{22308E00-A017-75EB-A559-5AD98E2BEDFA}"/>
+              </a:ext>
+            </a:extLst>
+          </p:cNvPr>
+          <p:cNvCxnSpPr>
+            <a:cxnSpLocks/>
+          </p:cNvCxnSpPr>
+          <p:nvPr/>
+        </p:nvCxnSpPr>
+        <p:spPr>
+          <a:xfrm flipH="1">
+            <a:off x="5273659" y="3526502"/>
+            <a:ext cx="802781" cy="0"/>
+          </a:xfrm>
+          <a:prstGeom prst="straightConnector1">
+            <a:avLst/>
+          </a:prstGeom>
+          <a:ln w="28575">
+            <a:solidFill>
+              <a:srgbClr val="FF0000"/>
+            </a:solidFill>
+            <a:tailEnd type="triangle"/>
+          </a:ln>
+        </p:spPr>
+        <p:style>
+          <a:lnRef idx="2">
+            <a:schemeClr val="accent1"/>
+          </a:lnRef>
+          <a:fillRef idx="0">
+            <a:schemeClr val="accent1"/>
+          </a:fillRef>
+          <a:effectRef idx="1">
+            <a:schemeClr val="accent1"/>
+          </a:effectRef>
+          <a:fontRef idx="minor">
+            <a:schemeClr val="tx1"/>
+          </a:fontRef>
+        </p:style>
+      </p:cxnSp>
+      <p:cxnSp>
+        <p:nvCxnSpPr>
+          <p:cNvPr id="61" name="Connettore 2 60">
+            <a:extLst>
+              <a:ext uri="{FF2B5EF4-FFF2-40B4-BE49-F238E27FC236}">
+                <a16:creationId xmlns:a16="http://schemas.microsoft.com/office/drawing/2014/main" id="{1BEDDFB1-DE8C-871E-B080-179DF30721C4}"/>
+              </a:ext>
+            </a:extLst>
+          </p:cNvPr>
+          <p:cNvCxnSpPr>
+            <a:cxnSpLocks/>
+          </p:cNvCxnSpPr>
+          <p:nvPr/>
+        </p:nvCxnSpPr>
+        <p:spPr>
+          <a:xfrm flipV="1">
+            <a:off x="6096000" y="2855057"/>
+            <a:ext cx="0" cy="671445"/>
+          </a:xfrm>
+          <a:prstGeom prst="straightConnector1">
+            <a:avLst/>
+          </a:prstGeom>
+          <a:ln w="28575">
+            <a:solidFill>
+              <a:srgbClr val="FF0000"/>
+            </a:solidFill>
+            <a:tailEnd type="triangle"/>
+          </a:ln>
+        </p:spPr>
+        <p:style>
+          <a:lnRef idx="2">
+            <a:schemeClr val="accent1"/>
+          </a:lnRef>
+          <a:fillRef idx="0">
+            <a:schemeClr val="accent1"/>
+          </a:fillRef>
+          <a:effectRef idx="1">
+            <a:schemeClr val="accent1"/>
+          </a:effectRef>
+          <a:fontRef idx="minor">
+            <a:schemeClr val="tx1"/>
+          </a:fontRef>
+        </p:style>
+      </p:cxnSp>
+      <mc:AlternateContent xmlns:mc="http://schemas.openxmlformats.org/markup-compatibility/2006">
+        <mc:Choice xmlns:a14="http://schemas.microsoft.com/office/drawing/2010/main" Requires="a14">
+          <p:sp>
+            <p:nvSpPr>
+              <p:cNvPr id="62" name="CasellaDiTesto 61">
+                <a:extLst>
+                  <a:ext uri="{FF2B5EF4-FFF2-40B4-BE49-F238E27FC236}">
+                    <a16:creationId xmlns:a16="http://schemas.microsoft.com/office/drawing/2014/main" id="{8563417C-124C-486E-71E3-1474BC9D296F}"/>
+                  </a:ext>
+                </a:extLst>
+              </p:cNvPr>
+              <p:cNvSpPr txBox="1"/>
+              <p:nvPr/>
+            </p:nvSpPr>
+            <p:spPr>
+              <a:xfrm>
+                <a:off x="5273936" y="2831326"/>
+                <a:ext cx="385490" cy="276999"/>
+              </a:xfrm>
+              <a:prstGeom prst="rect">
+                <a:avLst/>
+              </a:prstGeom>
+              <a:noFill/>
+            </p:spPr>
+            <p:txBody>
+              <a:bodyPr wrap="none" lIns="0" tIns="0" rIns="0" bIns="0" rtlCol="0">
+                <a:spAutoFit/>
+              </a:bodyPr>
+              <a:lstStyle/>
+              <a:p>
+                <a14:m>
+                  <m:oMathPara xmlns:m="http://schemas.openxmlformats.org/officeDocument/2006/math">
+                    <m:oMathParaPr>
+                      <m:jc m:val="centerGroup"/>
+                    </m:oMathParaPr>
+                    <m:oMath xmlns:m="http://schemas.openxmlformats.org/officeDocument/2006/math">
+                      <m:r>
+                        <a:rPr lang="it-IT" b="0" i="1" smtClean="0">
+                          <a:latin typeface="Cambria Math" panose="02040503050406030204" pitchFamily="18" charset="0"/>
+                        </a:rPr>
+                        <m:t>𝑚𝑔</m:t>
+                      </m:r>
+                    </m:oMath>
+                  </m:oMathPara>
+                </a14:m>
+                <a:endParaRPr lang="it-IT" dirty="0"/>
+              </a:p>
+            </p:txBody>
+          </p:sp>
+        </mc:Choice>
+        <mc:Fallback>
+          <p:sp>
+            <p:nvSpPr>
+              <p:cNvPr id="62" name="CasellaDiTesto 61">
+                <a:extLst>
+                  <a:ext uri="{FF2B5EF4-FFF2-40B4-BE49-F238E27FC236}">
+                    <a16:creationId xmlns:a16="http://schemas.microsoft.com/office/drawing/2014/main" id="{8563417C-124C-486E-71E3-1474BC9D296F}"/>
+                  </a:ext>
+                </a:extLst>
+              </p:cNvPr>
+              <p:cNvSpPr txBox="1">
+                <a:spLocks noRot="1" noChangeAspect="1" noMove="1" noResize="1" noEditPoints="1" noAdjustHandles="1" noChangeArrowheads="1" noChangeShapeType="1" noTextEdit="1"/>
+              </p:cNvSpPr>
+              <p:nvPr/>
+            </p:nvSpPr>
+            <p:spPr>
+              <a:xfrm>
+                <a:off x="5273936" y="2831326"/>
+                <a:ext cx="385490" cy="276999"/>
+              </a:xfrm>
+              <a:prstGeom prst="rect">
+                <a:avLst/>
+              </a:prstGeom>
+              <a:blipFill>
+                <a:blip r:embed="rId2"/>
+                <a:stretch>
+                  <a:fillRect l="-15873" r="-15873" b="-23913"/>
+                </a:stretch>
+              </a:blipFill>
+            </p:spPr>
+            <p:txBody>
+              <a:bodyPr/>
+              <a:lstStyle/>
+              <a:p>
+                <a:r>
+                  <a:rPr lang="it-IT">
+                    <a:noFill/>
+                  </a:rPr>
+                  <a:t> </a:t>
+                </a:r>
+              </a:p>
+            </p:txBody>
+          </p:sp>
+        </mc:Fallback>
+      </mc:AlternateContent>
+      <mc:AlternateContent xmlns:mc="http://schemas.openxmlformats.org/markup-compatibility/2006">
+        <mc:Choice xmlns:a14="http://schemas.microsoft.com/office/drawing/2010/main" Requires="a14">
+          <p:sp>
+            <p:nvSpPr>
+              <p:cNvPr id="63" name="CasellaDiTesto 62">
+                <a:extLst>
+                  <a:ext uri="{FF2B5EF4-FFF2-40B4-BE49-F238E27FC236}">
+                    <a16:creationId xmlns:a16="http://schemas.microsoft.com/office/drawing/2014/main" id="{F3ED5174-2310-8888-957B-9D8F7A7BAD40}"/>
+                  </a:ext>
+                </a:extLst>
+              </p:cNvPr>
+              <p:cNvSpPr txBox="1"/>
+              <p:nvPr/>
+            </p:nvSpPr>
+            <p:spPr>
+              <a:xfrm rot="4061236">
+                <a:off x="6964606" y="2421330"/>
+                <a:ext cx="174663" cy="276999"/>
+              </a:xfrm>
+              <a:prstGeom prst="rect">
+                <a:avLst/>
+              </a:prstGeom>
+              <a:noFill/>
+            </p:spPr>
+            <p:txBody>
+              <a:bodyPr wrap="none" lIns="0" tIns="0" rIns="0" bIns="0" rtlCol="0">
+                <a:spAutoFit/>
+              </a:bodyPr>
+              <a:lstStyle/>
+              <a:p>
+                <a14:m>
+                  <m:oMathPara xmlns:m="http://schemas.openxmlformats.org/officeDocument/2006/math">
+                    <m:oMathParaPr>
+                      <m:jc m:val="centerGroup"/>
+                    </m:oMathParaPr>
+                    <m:oMath xmlns:m="http://schemas.openxmlformats.org/officeDocument/2006/math">
+                      <m:r>
+                        <a:rPr lang="it-IT" b="0" i="1" smtClean="0">
+                          <a:latin typeface="Cambria Math" panose="02040503050406030204" pitchFamily="18" charset="0"/>
+                        </a:rPr>
+                        <m:t>𝐿</m:t>
+                      </m:r>
+                    </m:oMath>
+                  </m:oMathPara>
+                </a14:m>
+                <a:endParaRPr lang="it-IT" dirty="0"/>
+              </a:p>
+            </p:txBody>
+          </p:sp>
+        </mc:Choice>
+        <mc:Fallback>
+          <p:sp>
+            <p:nvSpPr>
+              <p:cNvPr id="63" name="CasellaDiTesto 62">
+                <a:extLst>
+                  <a:ext uri="{FF2B5EF4-FFF2-40B4-BE49-F238E27FC236}">
+                    <a16:creationId xmlns:a16="http://schemas.microsoft.com/office/drawing/2014/main" id="{F3ED5174-2310-8888-957B-9D8F7A7BAD40}"/>
+                  </a:ext>
+                </a:extLst>
+              </p:cNvPr>
+              <p:cNvSpPr txBox="1">
+                <a:spLocks noRot="1" noChangeAspect="1" noMove="1" noResize="1" noEditPoints="1" noAdjustHandles="1" noChangeArrowheads="1" noChangeShapeType="1" noTextEdit="1"/>
+              </p:cNvSpPr>
+              <p:nvPr/>
+            </p:nvSpPr>
+            <p:spPr>
+              <a:xfrm rot="4061236">
+                <a:off x="6964606" y="2421330"/>
+                <a:ext cx="174663" cy="276999"/>
+              </a:xfrm>
+              <a:prstGeom prst="rect">
+                <a:avLst/>
+              </a:prstGeom>
+              <a:blipFill>
+                <a:blip r:embed="rId3"/>
+                <a:stretch>
+                  <a:fillRect l="-11111" t="-18182" r="-1852" b="-20455"/>
+                </a:stretch>
+              </a:blipFill>
+            </p:spPr>
+            <p:txBody>
+              <a:bodyPr/>
+              <a:lstStyle/>
+              <a:p>
+                <a:r>
+                  <a:rPr lang="it-IT">
+                    <a:noFill/>
+                  </a:rPr>
+                  <a:t> </a:t>
+                </a:r>
+              </a:p>
+            </p:txBody>
+          </p:sp>
+        </mc:Fallback>
+      </mc:AlternateContent>
+      <mc:AlternateContent xmlns:mc="http://schemas.openxmlformats.org/markup-compatibility/2006">
+        <mc:Choice xmlns:a14="http://schemas.microsoft.com/office/drawing/2010/main" Requires="a14">
+          <p:sp>
+            <p:nvSpPr>
+              <p:cNvPr id="64" name="CasellaDiTesto 63">
+                <a:extLst>
+                  <a:ext uri="{FF2B5EF4-FFF2-40B4-BE49-F238E27FC236}">
+                    <a16:creationId xmlns:a16="http://schemas.microsoft.com/office/drawing/2014/main" id="{EEFB3D71-DB83-73F4-A94E-602FC16B67B2}"/>
+                  </a:ext>
+                </a:extLst>
+              </p:cNvPr>
+              <p:cNvSpPr txBox="1"/>
+              <p:nvPr/>
+            </p:nvSpPr>
+            <p:spPr>
+              <a:xfrm>
+                <a:off x="5684520" y="2230868"/>
+                <a:ext cx="244426" cy="276999"/>
+              </a:xfrm>
+              <a:prstGeom prst="rect">
+                <a:avLst/>
+              </a:prstGeom>
+              <a:noFill/>
+            </p:spPr>
+            <p:txBody>
+              <a:bodyPr wrap="none" lIns="0" tIns="0" rIns="0" bIns="0" rtlCol="0">
+                <a:spAutoFit/>
+              </a:bodyPr>
+              <a:lstStyle/>
+              <a:p>
+                <a14:m>
+                  <m:oMathPara xmlns:m="http://schemas.openxmlformats.org/officeDocument/2006/math">
+                    <m:oMathParaPr>
+                      <m:jc m:val="centerGroup"/>
+                    </m:oMathParaPr>
+                    <m:oMath xmlns:m="http://schemas.openxmlformats.org/officeDocument/2006/math">
+                      <m:r>
+                        <a:rPr lang="it-IT" b="0" i="1" smtClean="0">
+                          <a:latin typeface="Cambria Math" panose="02040503050406030204" pitchFamily="18" charset="0"/>
+                        </a:rPr>
+                        <m:t>𝑚</m:t>
+                      </m:r>
+                    </m:oMath>
+                  </m:oMathPara>
+                </a14:m>
+                <a:endParaRPr lang="it-IT" dirty="0"/>
+              </a:p>
+            </p:txBody>
+          </p:sp>
+        </mc:Choice>
+        <mc:Fallback>
+          <p:sp>
+            <p:nvSpPr>
+              <p:cNvPr id="64" name="CasellaDiTesto 63">
+                <a:extLst>
+                  <a:ext uri="{FF2B5EF4-FFF2-40B4-BE49-F238E27FC236}">
+                    <a16:creationId xmlns:a16="http://schemas.microsoft.com/office/drawing/2014/main" id="{EEFB3D71-DB83-73F4-A94E-602FC16B67B2}"/>
+                  </a:ext>
+                </a:extLst>
+              </p:cNvPr>
+              <p:cNvSpPr txBox="1">
+                <a:spLocks noRot="1" noChangeAspect="1" noMove="1" noResize="1" noEditPoints="1" noAdjustHandles="1" noChangeArrowheads="1" noChangeShapeType="1" noTextEdit="1"/>
+              </p:cNvSpPr>
+              <p:nvPr/>
+            </p:nvSpPr>
+            <p:spPr>
+              <a:xfrm>
+                <a:off x="5684520" y="2230868"/>
+                <a:ext cx="244426" cy="276999"/>
+              </a:xfrm>
+              <a:prstGeom prst="rect">
+                <a:avLst/>
+              </a:prstGeom>
+              <a:blipFill>
+                <a:blip r:embed="rId4"/>
+                <a:stretch>
+                  <a:fillRect l="-15000" r="-12500"/>
+                </a:stretch>
+              </a:blipFill>
+            </p:spPr>
+            <p:txBody>
+              <a:bodyPr/>
+              <a:lstStyle/>
+              <a:p>
+                <a:r>
+                  <a:rPr lang="it-IT">
+                    <a:noFill/>
+                  </a:rPr>
+                  <a:t> </a:t>
+                </a:r>
+              </a:p>
+            </p:txBody>
+          </p:sp>
+        </mc:Fallback>
+      </mc:AlternateContent>
+      <mc:AlternateContent xmlns:mc="http://schemas.openxmlformats.org/markup-compatibility/2006">
+        <mc:Choice xmlns:a14="http://schemas.microsoft.com/office/drawing/2010/main" Requires="a14">
+          <p:sp>
+            <p:nvSpPr>
+              <p:cNvPr id="65" name="CasellaDiTesto 64">
+                <a:extLst>
+                  <a:ext uri="{FF2B5EF4-FFF2-40B4-BE49-F238E27FC236}">
+                    <a16:creationId xmlns:a16="http://schemas.microsoft.com/office/drawing/2014/main" id="{BAB6A18E-CEC6-B138-0E87-96D1B6C9A031}"/>
+                  </a:ext>
+                </a:extLst>
+              </p:cNvPr>
+              <p:cNvSpPr txBox="1"/>
+              <p:nvPr/>
+            </p:nvSpPr>
+            <p:spPr>
+              <a:xfrm>
+                <a:off x="6172488" y="2831325"/>
+                <a:ext cx="198067" cy="276999"/>
+              </a:xfrm>
+              <a:prstGeom prst="rect">
+                <a:avLst/>
+              </a:prstGeom>
+              <a:noFill/>
+            </p:spPr>
+            <p:txBody>
+              <a:bodyPr wrap="none" lIns="0" tIns="0" rIns="0" bIns="0" rtlCol="0">
+                <a:spAutoFit/>
+              </a:bodyPr>
+              <a:lstStyle/>
+              <a:p>
+                <a14:m>
+                  <m:oMathPara xmlns:m="http://schemas.openxmlformats.org/officeDocument/2006/math">
+                    <m:oMathParaPr>
+                      <m:jc m:val="centerGroup"/>
+                    </m:oMathParaPr>
+                    <m:oMath xmlns:m="http://schemas.openxmlformats.org/officeDocument/2006/math">
+                      <m:r>
+                        <a:rPr lang="it-IT" b="0" i="1" smtClean="0">
+                          <a:latin typeface="Cambria Math" panose="02040503050406030204" pitchFamily="18" charset="0"/>
+                        </a:rPr>
+                        <m:t>𝑉</m:t>
+                      </m:r>
+                    </m:oMath>
+                  </m:oMathPara>
+                </a14:m>
+                <a:endParaRPr lang="it-IT" dirty="0"/>
+              </a:p>
+            </p:txBody>
+          </p:sp>
+        </mc:Choice>
+        <mc:Fallback>
+          <p:sp>
+            <p:nvSpPr>
+              <p:cNvPr id="65" name="CasellaDiTesto 64">
+                <a:extLst>
+                  <a:ext uri="{FF2B5EF4-FFF2-40B4-BE49-F238E27FC236}">
+                    <a16:creationId xmlns:a16="http://schemas.microsoft.com/office/drawing/2014/main" id="{BAB6A18E-CEC6-B138-0E87-96D1B6C9A031}"/>
+                  </a:ext>
+                </a:extLst>
+              </p:cNvPr>
+              <p:cNvSpPr txBox="1">
+                <a:spLocks noRot="1" noChangeAspect="1" noMove="1" noResize="1" noEditPoints="1" noAdjustHandles="1" noChangeArrowheads="1" noChangeShapeType="1" noTextEdit="1"/>
+              </p:cNvSpPr>
+              <p:nvPr/>
+            </p:nvSpPr>
+            <p:spPr>
+              <a:xfrm>
+                <a:off x="6172488" y="2831325"/>
+                <a:ext cx="198067" cy="276999"/>
+              </a:xfrm>
+              <a:prstGeom prst="rect">
+                <a:avLst/>
+              </a:prstGeom>
+              <a:blipFill>
+                <a:blip r:embed="rId5"/>
+                <a:stretch>
+                  <a:fillRect l="-31250" r="-28125" b="-6522"/>
+                </a:stretch>
+              </a:blipFill>
+            </p:spPr>
+            <p:txBody>
+              <a:bodyPr/>
+              <a:lstStyle/>
+              <a:p>
+                <a:r>
+                  <a:rPr lang="it-IT">
+                    <a:noFill/>
+                  </a:rPr>
+                  <a:t> </a:t>
+                </a:r>
+              </a:p>
+            </p:txBody>
+          </p:sp>
+        </mc:Fallback>
+      </mc:AlternateContent>
+      <mc:AlternateContent xmlns:mc="http://schemas.openxmlformats.org/markup-compatibility/2006">
+        <mc:Choice xmlns:a14="http://schemas.microsoft.com/office/drawing/2010/main" Requires="a14">
+          <p:sp>
+            <p:nvSpPr>
+              <p:cNvPr id="66" name="CasellaDiTesto 65">
+                <a:extLst>
+                  <a:ext uri="{FF2B5EF4-FFF2-40B4-BE49-F238E27FC236}">
+                    <a16:creationId xmlns:a16="http://schemas.microsoft.com/office/drawing/2014/main" id="{83A0561A-443B-06A4-2004-5AE2EF859242}"/>
+                  </a:ext>
+                </a:extLst>
+              </p:cNvPr>
+              <p:cNvSpPr txBox="1"/>
+              <p:nvPr/>
+            </p:nvSpPr>
+            <p:spPr>
+              <a:xfrm>
+                <a:off x="5021254" y="3323453"/>
+                <a:ext cx="211700" cy="276999"/>
+              </a:xfrm>
+              <a:prstGeom prst="rect">
+                <a:avLst/>
+              </a:prstGeom>
+              <a:noFill/>
+            </p:spPr>
+            <p:txBody>
+              <a:bodyPr wrap="square" lIns="0" tIns="0" rIns="0" bIns="0" rtlCol="0">
+                <a:spAutoFit/>
+              </a:bodyPr>
+              <a:lstStyle/>
+              <a:p>
+                <a14:m>
+                  <m:oMathPara xmlns:m="http://schemas.openxmlformats.org/officeDocument/2006/math">
+                    <m:oMathParaPr>
+                      <m:jc m:val="centerGroup"/>
+                    </m:oMathParaPr>
+                    <m:oMath xmlns:m="http://schemas.openxmlformats.org/officeDocument/2006/math">
+                      <m:r>
+                        <a:rPr lang="it-IT" b="0" i="1" smtClean="0">
+                          <a:latin typeface="Cambria Math" panose="02040503050406030204" pitchFamily="18" charset="0"/>
+                        </a:rPr>
+                        <m:t>𝐻</m:t>
+                      </m:r>
+                    </m:oMath>
+                  </m:oMathPara>
+                </a14:m>
+                <a:endParaRPr lang="it-IT" dirty="0"/>
+              </a:p>
+            </p:txBody>
+          </p:sp>
+        </mc:Choice>
+        <mc:Fallback>
+          <p:sp>
+            <p:nvSpPr>
+              <p:cNvPr id="66" name="CasellaDiTesto 65">
+                <a:extLst>
+                  <a:ext uri="{FF2B5EF4-FFF2-40B4-BE49-F238E27FC236}">
+                    <a16:creationId xmlns:a16="http://schemas.microsoft.com/office/drawing/2014/main" id="{83A0561A-443B-06A4-2004-5AE2EF859242}"/>
+                  </a:ext>
+                </a:extLst>
+              </p:cNvPr>
+              <p:cNvSpPr txBox="1">
+                <a:spLocks noRot="1" noChangeAspect="1" noMove="1" noResize="1" noEditPoints="1" noAdjustHandles="1" noChangeArrowheads="1" noChangeShapeType="1" noTextEdit="1"/>
+              </p:cNvSpPr>
+              <p:nvPr/>
+            </p:nvSpPr>
+            <p:spPr>
+              <a:xfrm>
+                <a:off x="5021254" y="3323453"/>
+                <a:ext cx="211700" cy="276999"/>
+              </a:xfrm>
+              <a:prstGeom prst="rect">
+                <a:avLst/>
+              </a:prstGeom>
+              <a:blipFill>
+                <a:blip r:embed="rId6"/>
+                <a:stretch>
+                  <a:fillRect l="-32353" r="-29412" b="-6522"/>
+                </a:stretch>
+              </a:blipFill>
+            </p:spPr>
+            <p:txBody>
+              <a:bodyPr/>
+              <a:lstStyle/>
+              <a:p>
+                <a:r>
+                  <a:rPr lang="it-IT">
+                    <a:noFill/>
+                  </a:rPr>
+                  <a:t> </a:t>
+                </a:r>
+              </a:p>
+            </p:txBody>
+          </p:sp>
+        </mc:Fallback>
+      </mc:AlternateContent>
+      <mc:AlternateContent xmlns:mc="http://schemas.openxmlformats.org/markup-compatibility/2006">
+        <mc:Choice xmlns:a14="http://schemas.microsoft.com/office/drawing/2010/main" Requires="a14">
+          <p:sp>
+            <p:nvSpPr>
+              <p:cNvPr id="71" name="CasellaDiTesto 70">
+                <a:extLst>
+                  <a:ext uri="{FF2B5EF4-FFF2-40B4-BE49-F238E27FC236}">
+                    <a16:creationId xmlns:a16="http://schemas.microsoft.com/office/drawing/2014/main" id="{E482C36C-060F-B2A1-9C72-BAD57FCA4E54}"/>
+                  </a:ext>
+                </a:extLst>
+              </p:cNvPr>
+              <p:cNvSpPr txBox="1"/>
+              <p:nvPr/>
+            </p:nvSpPr>
+            <p:spPr>
+              <a:xfrm>
+                <a:off x="5724247" y="1265070"/>
+                <a:ext cx="211700" cy="276999"/>
+              </a:xfrm>
+              <a:prstGeom prst="rect">
+                <a:avLst/>
+              </a:prstGeom>
+              <a:noFill/>
+            </p:spPr>
+            <p:txBody>
+              <a:bodyPr wrap="square" lIns="0" tIns="0" rIns="0" bIns="0" rtlCol="0">
+                <a:spAutoFit/>
+              </a:bodyPr>
+              <a:lstStyle/>
+              <a:p>
+                <a14:m>
+                  <m:oMathPara xmlns:m="http://schemas.openxmlformats.org/officeDocument/2006/math">
+                    <m:oMathParaPr>
+                      <m:jc m:val="centerGroup"/>
+                    </m:oMathParaPr>
+                    <m:oMath xmlns:m="http://schemas.openxmlformats.org/officeDocument/2006/math">
+                      <m:r>
+                        <a:rPr lang="it-IT" b="0" i="1" smtClean="0">
+                          <a:latin typeface="Cambria Math" panose="02040503050406030204" pitchFamily="18" charset="0"/>
+                        </a:rPr>
+                        <m:t>𝜃</m:t>
+                      </m:r>
+                    </m:oMath>
+                  </m:oMathPara>
+                </a14:m>
+                <a:endParaRPr lang="it-IT" dirty="0"/>
+              </a:p>
+            </p:txBody>
+          </p:sp>
+        </mc:Choice>
+        <mc:Fallback>
+          <p:sp>
+            <p:nvSpPr>
+              <p:cNvPr id="71" name="CasellaDiTesto 70">
+                <a:extLst>
+                  <a:ext uri="{FF2B5EF4-FFF2-40B4-BE49-F238E27FC236}">
+                    <a16:creationId xmlns:a16="http://schemas.microsoft.com/office/drawing/2014/main" id="{E482C36C-060F-B2A1-9C72-BAD57FCA4E54}"/>
+                  </a:ext>
+                </a:extLst>
+              </p:cNvPr>
+              <p:cNvSpPr txBox="1">
+                <a:spLocks noRot="1" noChangeAspect="1" noMove="1" noResize="1" noEditPoints="1" noAdjustHandles="1" noChangeArrowheads="1" noChangeShapeType="1" noTextEdit="1"/>
+              </p:cNvSpPr>
+              <p:nvPr/>
+            </p:nvSpPr>
+            <p:spPr>
+              <a:xfrm>
+                <a:off x="5724247" y="1265070"/>
+                <a:ext cx="211700" cy="276999"/>
+              </a:xfrm>
+              <a:prstGeom prst="rect">
+                <a:avLst/>
+              </a:prstGeom>
+              <a:blipFill>
+                <a:blip r:embed="rId7"/>
+                <a:stretch>
+                  <a:fillRect l="-20000" r="-17143" b="-6667"/>
+                </a:stretch>
+              </a:blipFill>
+            </p:spPr>
+            <p:txBody>
+              <a:bodyPr/>
+              <a:lstStyle/>
+              <a:p>
+                <a:r>
+                  <a:rPr lang="it-IT">
+                    <a:noFill/>
+                  </a:rPr>
+                  <a:t> </a:t>
+                </a:r>
+              </a:p>
+            </p:txBody>
+          </p:sp>
+        </mc:Fallback>
+      </mc:AlternateContent>
+      <p:sp>
+        <p:nvSpPr>
+          <p:cNvPr id="74" name="Arco 73">
+            <a:extLst>
+              <a:ext uri="{FF2B5EF4-FFF2-40B4-BE49-F238E27FC236}">
+                <a16:creationId xmlns:a16="http://schemas.microsoft.com/office/drawing/2014/main" id="{8C94D7EA-AB7D-DBB3-9BD1-794F5C7DC85C}"/>
+              </a:ext>
+            </a:extLst>
+          </p:cNvPr>
+          <p:cNvSpPr/>
+          <p:nvPr/>
+        </p:nvSpPr>
+        <p:spPr>
+          <a:xfrm>
+            <a:off x="4393453" y="1787512"/>
+            <a:ext cx="3405094" cy="3535344"/>
+          </a:xfrm>
+          <a:prstGeom prst="arc">
+            <a:avLst>
+              <a:gd name="adj1" fmla="val 14824762"/>
+              <a:gd name="adj2" fmla="val 15541667"/>
+            </a:avLst>
+          </a:prstGeom>
+          <a:ln w="28575">
+            <a:solidFill>
+              <a:srgbClr val="FF0000"/>
+            </a:solidFill>
+          </a:ln>
+        </p:spPr>
+        <p:style>
+          <a:lnRef idx="2">
+            <a:schemeClr val="dk1"/>
+          </a:lnRef>
+          <a:fillRef idx="0">
+            <a:schemeClr val="dk1"/>
+          </a:fillRef>
+          <a:effectRef idx="1">
+            <a:schemeClr val="dk1"/>
+          </a:effectRef>
+          <a:fontRef idx="minor">
+            <a:schemeClr val="tx1"/>
+          </a:fontRef>
+        </p:style>
+        <p:txBody>
+          <a:bodyPr rtlCol="0" anchor="ctr"/>
+          <a:lstStyle/>
+          <a:p>
+            <a:pPr algn="ctr"/>
+            <a:endParaRPr lang="it-IT"/>
+          </a:p>
+        </p:txBody>
+      </p:sp>
+      <p:sp>
+        <p:nvSpPr>
+          <p:cNvPr id="75" name="Triangolo isoscele 74">
+            <a:extLst>
+              <a:ext uri="{FF2B5EF4-FFF2-40B4-BE49-F238E27FC236}">
+                <a16:creationId xmlns:a16="http://schemas.microsoft.com/office/drawing/2014/main" id="{4B825459-09FA-7833-85F5-9A88628FA53B}"/>
+              </a:ext>
+            </a:extLst>
+          </p:cNvPr>
+          <p:cNvSpPr/>
+          <p:nvPr/>
+        </p:nvSpPr>
+        <p:spPr>
+          <a:xfrm rot="4756538">
+            <a:off x="5752871" y="1776833"/>
+            <a:ext cx="80963" cy="88106"/>
+          </a:xfrm>
+          <a:prstGeom prst="triangle">
+            <a:avLst/>
+          </a:prstGeom>
+          <a:solidFill>
+            <a:srgbClr val="FF0000"/>
+          </a:solidFill>
+          <a:ln>
+            <a:solidFill>
+              <a:srgbClr val="FF0000"/>
+            </a:solidFill>
+          </a:ln>
+        </p:spPr>
+        <p:style>
+          <a:lnRef idx="2">
+            <a:schemeClr val="accent1">
+              <a:shade val="15000"/>
+            </a:schemeClr>
+          </a:lnRef>
+          <a:fillRef idx="1">
+            <a:schemeClr val="accent1"/>
+          </a:fillRef>
+          <a:effectRef idx="0">
+            <a:schemeClr val="accent1"/>
+          </a:effectRef>
+          <a:fontRef idx="minor">
+            <a:schemeClr val="lt1"/>
+          </a:fontRef>
+        </p:style>
+        <p:txBody>
+          <a:bodyPr rtlCol="0" anchor="ctr"/>
+          <a:lstStyle/>
+          <a:p>
+            <a:pPr algn="ctr"/>
+            <a:endParaRPr lang="it-IT"/>
+          </a:p>
+        </p:txBody>
+      </p:sp>
+      <mc:AlternateContent xmlns:mc="http://schemas.openxmlformats.org/markup-compatibility/2006">
+        <mc:Choice xmlns:a14="http://schemas.microsoft.com/office/drawing/2010/main" Requires="a14">
+          <p:sp>
+            <p:nvSpPr>
+              <p:cNvPr id="76" name="CasellaDiTesto 75">
+                <a:extLst>
+                  <a:ext uri="{FF2B5EF4-FFF2-40B4-BE49-F238E27FC236}">
+                    <a16:creationId xmlns:a16="http://schemas.microsoft.com/office/drawing/2014/main" id="{8F973027-E100-493A-6FB1-E5440BAF8FC5}"/>
+                  </a:ext>
+                </a:extLst>
+              </p:cNvPr>
+              <p:cNvSpPr txBox="1"/>
+              <p:nvPr/>
+            </p:nvSpPr>
+            <p:spPr>
+              <a:xfrm>
+                <a:off x="5054456" y="1935114"/>
+                <a:ext cx="327910" cy="289823"/>
+              </a:xfrm>
+              <a:prstGeom prst="rect">
+                <a:avLst/>
+              </a:prstGeom>
+              <a:noFill/>
+            </p:spPr>
+            <p:txBody>
+              <a:bodyPr wrap="none" lIns="0" tIns="0" rIns="0" bIns="0" rtlCol="0">
+                <a:spAutoFit/>
+              </a:bodyPr>
+              <a:lstStyle/>
+              <a:p>
+                <a14:m>
+                  <m:oMathPara xmlns:m="http://schemas.openxmlformats.org/officeDocument/2006/math">
+                    <m:oMathParaPr>
+                      <m:jc m:val="centerGroup"/>
+                    </m:oMathParaPr>
+                    <m:oMath xmlns:m="http://schemas.openxmlformats.org/officeDocument/2006/math">
+                      <m:r>
+                        <a:rPr lang="it-IT" b="0" i="1" smtClean="0">
+                          <a:latin typeface="Cambria Math" panose="02040503050406030204" pitchFamily="18" charset="0"/>
+                        </a:rPr>
+                        <m:t>𝛼</m:t>
+                      </m:r>
+                      <m:acc>
+                        <m:accPr>
+                          <m:chr m:val="̇"/>
+                          <m:ctrlPr>
+                            <a:rPr lang="it-IT" b="0" i="1" smtClean="0">
+                              <a:latin typeface="Cambria Math" panose="02040503050406030204" pitchFamily="18" charset="0"/>
+                            </a:rPr>
+                          </m:ctrlPr>
+                        </m:accPr>
+                        <m:e>
+                          <m:r>
+                            <a:rPr lang="it-IT" b="0" i="1" smtClean="0">
+                              <a:latin typeface="Cambria Math" panose="02040503050406030204" pitchFamily="18" charset="0"/>
+                            </a:rPr>
+                            <m:t>𝜃</m:t>
+                          </m:r>
+                        </m:e>
+                      </m:acc>
+                    </m:oMath>
+                  </m:oMathPara>
+                </a14:m>
+                <a:endParaRPr lang="it-IT" dirty="0"/>
+              </a:p>
+            </p:txBody>
+          </p:sp>
+        </mc:Choice>
+        <mc:Fallback>
+          <p:sp>
+            <p:nvSpPr>
+              <p:cNvPr id="76" name="CasellaDiTesto 75">
+                <a:extLst>
+                  <a:ext uri="{FF2B5EF4-FFF2-40B4-BE49-F238E27FC236}">
+                    <a16:creationId xmlns:a16="http://schemas.microsoft.com/office/drawing/2014/main" id="{8F973027-E100-493A-6FB1-E5440BAF8FC5}"/>
+                  </a:ext>
+                </a:extLst>
+              </p:cNvPr>
+              <p:cNvSpPr txBox="1">
+                <a:spLocks noRot="1" noChangeAspect="1" noMove="1" noResize="1" noEditPoints="1" noAdjustHandles="1" noChangeArrowheads="1" noChangeShapeType="1" noTextEdit="1"/>
+              </p:cNvSpPr>
+              <p:nvPr/>
+            </p:nvSpPr>
+            <p:spPr>
+              <a:xfrm>
+                <a:off x="5054456" y="1935114"/>
+                <a:ext cx="327910" cy="289823"/>
+              </a:xfrm>
+              <a:prstGeom prst="rect">
+                <a:avLst/>
+              </a:prstGeom>
+              <a:blipFill>
+                <a:blip r:embed="rId8"/>
+                <a:stretch>
+                  <a:fillRect l="-11111" t="-12500" r="-31481" b="-6250"/>
+                </a:stretch>
+              </a:blipFill>
+            </p:spPr>
+            <p:txBody>
+              <a:bodyPr/>
+              <a:lstStyle/>
+              <a:p>
+                <a:r>
+                  <a:rPr lang="it-IT">
+                    <a:noFill/>
+                  </a:rPr>
+                  <a:t> </a:t>
+                </a:r>
+              </a:p>
+            </p:txBody>
+          </p:sp>
+        </mc:Fallback>
+      </mc:AlternateContent>
+      <p:cxnSp>
+        <p:nvCxnSpPr>
+          <p:cNvPr id="87" name="Connettore 2 86">
+            <a:extLst>
+              <a:ext uri="{FF2B5EF4-FFF2-40B4-BE49-F238E27FC236}">
+                <a16:creationId xmlns:a16="http://schemas.microsoft.com/office/drawing/2014/main" id="{2096F02A-79E4-2E42-BCD7-5FD721E66F1F}"/>
+              </a:ext>
+            </a:extLst>
+          </p:cNvPr>
+          <p:cNvCxnSpPr>
+            <a:cxnSpLocks/>
+          </p:cNvCxnSpPr>
+          <p:nvPr/>
+        </p:nvCxnSpPr>
+        <p:spPr>
+          <a:xfrm>
+            <a:off x="4667250" y="4024873"/>
+            <a:ext cx="1428240" cy="0"/>
+          </a:xfrm>
+          <a:prstGeom prst="straightConnector1">
+            <a:avLst/>
+          </a:prstGeom>
+          <a:ln w="19050">
+            <a:prstDash val="solid"/>
+            <a:tailEnd type="triangle"/>
+          </a:ln>
+        </p:spPr>
+        <p:style>
+          <a:lnRef idx="2">
+            <a:schemeClr val="dk1"/>
+          </a:lnRef>
+          <a:fillRef idx="0">
+            <a:schemeClr val="dk1"/>
+          </a:fillRef>
+          <a:effectRef idx="1">
+            <a:schemeClr val="dk1"/>
+          </a:effectRef>
+          <a:fontRef idx="minor">
+            <a:schemeClr val="tx1"/>
+          </a:fontRef>
+        </p:style>
+      </p:cxnSp>
+      <mc:AlternateContent xmlns:mc="http://schemas.openxmlformats.org/markup-compatibility/2006">
+        <mc:Choice xmlns:a14="http://schemas.microsoft.com/office/drawing/2010/main" Requires="a14">
+          <p:sp>
+            <p:nvSpPr>
+              <p:cNvPr id="88" name="CasellaDiTesto 87">
+                <a:extLst>
+                  <a:ext uri="{FF2B5EF4-FFF2-40B4-BE49-F238E27FC236}">
+                    <a16:creationId xmlns:a16="http://schemas.microsoft.com/office/drawing/2014/main" id="{ABFBF701-5D94-36A4-AB23-6E5F09975D3A}"/>
+                  </a:ext>
+                </a:extLst>
+              </p:cNvPr>
+              <p:cNvSpPr txBox="1"/>
+              <p:nvPr/>
+            </p:nvSpPr>
+            <p:spPr>
+              <a:xfrm>
+                <a:off x="5145530" y="4052952"/>
+                <a:ext cx="457902" cy="307777"/>
+              </a:xfrm>
+              <a:prstGeom prst="rect">
+                <a:avLst/>
+              </a:prstGeom>
+              <a:noFill/>
+            </p:spPr>
+            <p:txBody>
+              <a:bodyPr wrap="square" lIns="0" tIns="0" rIns="0" bIns="0" rtlCol="0">
+                <a:spAutoFit/>
+              </a:bodyPr>
+              <a:lstStyle/>
+              <a:p>
+                <a14:m>
+                  <m:oMathPara xmlns:m="http://schemas.openxmlformats.org/officeDocument/2006/math">
+                    <m:oMathParaPr>
+                      <m:jc m:val="centerGroup"/>
+                    </m:oMathParaPr>
+                    <m:oMath xmlns:m="http://schemas.openxmlformats.org/officeDocument/2006/math">
+                      <m:r>
+                        <a:rPr lang="it-IT" sz="2000" b="0" i="1" smtClean="0">
+                          <a:latin typeface="Cambria Math" panose="02040503050406030204" pitchFamily="18" charset="0"/>
+                        </a:rPr>
+                        <m:t>𝑥</m:t>
+                      </m:r>
+                      <m:r>
+                        <a:rPr lang="it-IT" sz="2000" b="0" i="1" smtClean="0">
+                          <a:latin typeface="Cambria Math" panose="02040503050406030204" pitchFamily="18" charset="0"/>
+                        </a:rPr>
+                        <m:t>(</m:t>
+                      </m:r>
+                      <m:r>
+                        <a:rPr lang="it-IT" sz="2000" b="0" i="1" smtClean="0">
+                          <a:latin typeface="Cambria Math" panose="02040503050406030204" pitchFamily="18" charset="0"/>
+                        </a:rPr>
+                        <m:t>𝑡</m:t>
+                      </m:r>
+                      <m:r>
+                        <a:rPr lang="it-IT" sz="2000" b="0" i="1" smtClean="0">
+                          <a:latin typeface="Cambria Math" panose="02040503050406030204" pitchFamily="18" charset="0"/>
+                        </a:rPr>
+                        <m:t>)</m:t>
+                      </m:r>
+                    </m:oMath>
+                  </m:oMathPara>
+                </a14:m>
+                <a:endParaRPr lang="it-IT" dirty="0"/>
+              </a:p>
+            </p:txBody>
+          </p:sp>
+        </mc:Choice>
+        <mc:Fallback>
+          <p:sp>
+            <p:nvSpPr>
+              <p:cNvPr id="88" name="CasellaDiTesto 87">
+                <a:extLst>
+                  <a:ext uri="{FF2B5EF4-FFF2-40B4-BE49-F238E27FC236}">
+                    <a16:creationId xmlns:a16="http://schemas.microsoft.com/office/drawing/2014/main" id="{ABFBF701-5D94-36A4-AB23-6E5F09975D3A}"/>
+                  </a:ext>
+                </a:extLst>
+              </p:cNvPr>
+              <p:cNvSpPr txBox="1">
+                <a:spLocks noRot="1" noChangeAspect="1" noMove="1" noResize="1" noEditPoints="1" noAdjustHandles="1" noChangeArrowheads="1" noChangeShapeType="1" noTextEdit="1"/>
+              </p:cNvSpPr>
+              <p:nvPr/>
+            </p:nvSpPr>
+            <p:spPr>
+              <a:xfrm>
+                <a:off x="5145530" y="4052952"/>
+                <a:ext cx="457902" cy="307777"/>
+              </a:xfrm>
+              <a:prstGeom prst="rect">
+                <a:avLst/>
+              </a:prstGeom>
+              <a:blipFill>
+                <a:blip r:embed="rId9"/>
+                <a:stretch>
+                  <a:fillRect l="-13333" t="-2000" r="-26667" b="-36000"/>
+                </a:stretch>
+              </a:blipFill>
+            </p:spPr>
+            <p:txBody>
+              <a:bodyPr/>
+              <a:lstStyle/>
+              <a:p>
+                <a:r>
+                  <a:rPr lang="it-IT">
+                    <a:noFill/>
+                  </a:rPr>
+                  <a:t> </a:t>
+                </a:r>
+              </a:p>
+            </p:txBody>
+          </p:sp>
+        </mc:Fallback>
+      </mc:AlternateContent>
+      <p:cxnSp>
+        <p:nvCxnSpPr>
+          <p:cNvPr id="89" name="Connettore 2 88">
+            <a:extLst>
+              <a:ext uri="{FF2B5EF4-FFF2-40B4-BE49-F238E27FC236}">
+                <a16:creationId xmlns:a16="http://schemas.microsoft.com/office/drawing/2014/main" id="{3194BBC6-9E33-D8A7-1782-CDB6BC2A3446}"/>
+              </a:ext>
+            </a:extLst>
+          </p:cNvPr>
+          <p:cNvCxnSpPr>
+            <a:cxnSpLocks/>
+          </p:cNvCxnSpPr>
+          <p:nvPr/>
+        </p:nvCxnSpPr>
+        <p:spPr>
+          <a:xfrm flipV="1">
+            <a:off x="4671312" y="3675707"/>
+            <a:ext cx="0" cy="349166"/>
+          </a:xfrm>
+          <a:prstGeom prst="straightConnector1">
+            <a:avLst/>
+          </a:prstGeom>
+          <a:ln w="28575">
+            <a:solidFill>
+              <a:schemeClr val="tx1"/>
+            </a:solidFill>
+            <a:tailEnd type="triangle"/>
+          </a:ln>
+        </p:spPr>
+        <p:style>
+          <a:lnRef idx="2">
+            <a:schemeClr val="accent1"/>
+          </a:lnRef>
+          <a:fillRef idx="0">
+            <a:schemeClr val="accent1"/>
+          </a:fillRef>
+          <a:effectRef idx="1">
+            <a:schemeClr val="accent1"/>
+          </a:effectRef>
+          <a:fontRef idx="minor">
+            <a:schemeClr val="tx1"/>
+          </a:fontRef>
+        </p:style>
+      </p:cxnSp>
+      <mc:AlternateContent xmlns:mc="http://schemas.openxmlformats.org/markup-compatibility/2006">
+        <mc:Choice xmlns:a14="http://schemas.microsoft.com/office/drawing/2010/main" Requires="a14">
+          <p:sp>
+            <p:nvSpPr>
+              <p:cNvPr id="90" name="CasellaDiTesto 89">
+                <a:extLst>
+                  <a:ext uri="{FF2B5EF4-FFF2-40B4-BE49-F238E27FC236}">
+                    <a16:creationId xmlns:a16="http://schemas.microsoft.com/office/drawing/2014/main" id="{FE7127FD-AE88-C52F-A4F3-7149545A3343}"/>
+                  </a:ext>
+                </a:extLst>
+              </p:cNvPr>
+              <p:cNvSpPr txBox="1"/>
+              <p:nvPr/>
+            </p:nvSpPr>
+            <p:spPr>
+              <a:xfrm>
+                <a:off x="4445390" y="3390837"/>
+                <a:ext cx="211700" cy="369332"/>
+              </a:xfrm>
+              <a:prstGeom prst="rect">
+                <a:avLst/>
+              </a:prstGeom>
+              <a:noFill/>
+            </p:spPr>
+            <p:txBody>
+              <a:bodyPr wrap="square" lIns="0" tIns="0" rIns="0" bIns="0" rtlCol="0">
+                <a:spAutoFit/>
+              </a:bodyPr>
+              <a:lstStyle/>
+              <a:p>
+                <a14:m>
+                  <m:oMathPara xmlns:m="http://schemas.openxmlformats.org/officeDocument/2006/math">
+                    <m:oMathParaPr>
+                      <m:jc m:val="centerGroup"/>
+                    </m:oMathParaPr>
+                    <m:oMath xmlns:m="http://schemas.openxmlformats.org/officeDocument/2006/math">
+                      <m:r>
+                        <a:rPr lang="it-IT" sz="2400" b="0" i="1" smtClean="0">
+                          <a:latin typeface="Cambria Math" panose="02040503050406030204" pitchFamily="18" charset="0"/>
+                        </a:rPr>
+                        <m:t>𝑦</m:t>
+                      </m:r>
+                    </m:oMath>
+                  </m:oMathPara>
+                </a14:m>
+                <a:endParaRPr lang="it-IT" sz="2400" dirty="0"/>
+              </a:p>
+            </p:txBody>
+          </p:sp>
+        </mc:Choice>
+        <mc:Fallback>
+          <p:sp>
+            <p:nvSpPr>
+              <p:cNvPr id="90" name="CasellaDiTesto 89">
+                <a:extLst>
+                  <a:ext uri="{FF2B5EF4-FFF2-40B4-BE49-F238E27FC236}">
+                    <a16:creationId xmlns:a16="http://schemas.microsoft.com/office/drawing/2014/main" id="{FE7127FD-AE88-C52F-A4F3-7149545A3343}"/>
+                  </a:ext>
+                </a:extLst>
+              </p:cNvPr>
+              <p:cNvSpPr txBox="1">
+                <a:spLocks noRot="1" noChangeAspect="1" noMove="1" noResize="1" noEditPoints="1" noAdjustHandles="1" noChangeArrowheads="1" noChangeShapeType="1" noTextEdit="1"/>
+              </p:cNvSpPr>
+              <p:nvPr/>
+            </p:nvSpPr>
+            <p:spPr>
+              <a:xfrm>
+                <a:off x="4445390" y="3390837"/>
+                <a:ext cx="211700" cy="369332"/>
+              </a:xfrm>
+              <a:prstGeom prst="rect">
+                <a:avLst/>
+              </a:prstGeom>
+              <a:blipFill>
+                <a:blip r:embed="rId10"/>
+                <a:stretch>
+                  <a:fillRect l="-42857" r="-40000" b="-22951"/>
+                </a:stretch>
+              </a:blipFill>
+            </p:spPr>
+            <p:txBody>
+              <a:bodyPr/>
+              <a:lstStyle/>
+              <a:p>
+                <a:r>
+                  <a:rPr lang="it-IT">
+                    <a:noFill/>
+                  </a:rPr>
+                  <a:t> </a:t>
+                </a:r>
+              </a:p>
+            </p:txBody>
+          </p:sp>
+        </mc:Fallback>
+      </mc:AlternateContent>
+    </p:spTree>
+    <p:extLst>
+      <p:ext uri="{BB962C8B-B14F-4D97-AF65-F5344CB8AC3E}">
+        <p14:creationId xmlns:p14="http://schemas.microsoft.com/office/powerpoint/2010/main" val="2047062170"/>
       </p:ext>
     </p:extLst>
   </p:cSld>

--- a/tesi/block-diagram-extended-system.pptx
+++ b/tesi/block-diagram-extended-system.pptx
@@ -262,7 +262,7 @@
           <a:p>
             <a:fld id="{C8B3C85B-8319-4F35-817E-FF9CBA4827F6}" type="datetimeFigureOut">
               <a:rPr lang="it-IT" smtClean="0"/>
-              <a:t>15/07/2025</a:t>
+              <a:t>18/07/2025</a:t>
             </a:fld>
             <a:endParaRPr lang="it-IT"/>
           </a:p>
@@ -460,7 +460,7 @@
           <a:p>
             <a:fld id="{C8B3C85B-8319-4F35-817E-FF9CBA4827F6}" type="datetimeFigureOut">
               <a:rPr lang="it-IT" smtClean="0"/>
-              <a:t>15/07/2025</a:t>
+              <a:t>18/07/2025</a:t>
             </a:fld>
             <a:endParaRPr lang="it-IT"/>
           </a:p>
@@ -668,7 +668,7 @@
           <a:p>
             <a:fld id="{C8B3C85B-8319-4F35-817E-FF9CBA4827F6}" type="datetimeFigureOut">
               <a:rPr lang="it-IT" smtClean="0"/>
-              <a:t>15/07/2025</a:t>
+              <a:t>18/07/2025</a:t>
             </a:fld>
             <a:endParaRPr lang="it-IT"/>
           </a:p>
@@ -866,7 +866,7 @@
           <a:p>
             <a:fld id="{C8B3C85B-8319-4F35-817E-FF9CBA4827F6}" type="datetimeFigureOut">
               <a:rPr lang="it-IT" smtClean="0"/>
-              <a:t>15/07/2025</a:t>
+              <a:t>18/07/2025</a:t>
             </a:fld>
             <a:endParaRPr lang="it-IT"/>
           </a:p>
@@ -1141,7 +1141,7 @@
           <a:p>
             <a:fld id="{C8B3C85B-8319-4F35-817E-FF9CBA4827F6}" type="datetimeFigureOut">
               <a:rPr lang="it-IT" smtClean="0"/>
-              <a:t>15/07/2025</a:t>
+              <a:t>18/07/2025</a:t>
             </a:fld>
             <a:endParaRPr lang="it-IT"/>
           </a:p>
@@ -1406,7 +1406,7 @@
           <a:p>
             <a:fld id="{C8B3C85B-8319-4F35-817E-FF9CBA4827F6}" type="datetimeFigureOut">
               <a:rPr lang="it-IT" smtClean="0"/>
-              <a:t>15/07/2025</a:t>
+              <a:t>18/07/2025</a:t>
             </a:fld>
             <a:endParaRPr lang="it-IT"/>
           </a:p>
@@ -1818,7 +1818,7 @@
           <a:p>
             <a:fld id="{C8B3C85B-8319-4F35-817E-FF9CBA4827F6}" type="datetimeFigureOut">
               <a:rPr lang="it-IT" smtClean="0"/>
-              <a:t>15/07/2025</a:t>
+              <a:t>18/07/2025</a:t>
             </a:fld>
             <a:endParaRPr lang="it-IT"/>
           </a:p>
@@ -1959,7 +1959,7 @@
           <a:p>
             <a:fld id="{C8B3C85B-8319-4F35-817E-FF9CBA4827F6}" type="datetimeFigureOut">
               <a:rPr lang="it-IT" smtClean="0"/>
-              <a:t>15/07/2025</a:t>
+              <a:t>18/07/2025</a:t>
             </a:fld>
             <a:endParaRPr lang="it-IT"/>
           </a:p>
@@ -2072,7 +2072,7 @@
           <a:p>
             <a:fld id="{C8B3C85B-8319-4F35-817E-FF9CBA4827F6}" type="datetimeFigureOut">
               <a:rPr lang="it-IT" smtClean="0"/>
-              <a:t>15/07/2025</a:t>
+              <a:t>18/07/2025</a:t>
             </a:fld>
             <a:endParaRPr lang="it-IT"/>
           </a:p>
@@ -2383,7 +2383,7 @@
           <a:p>
             <a:fld id="{C8B3C85B-8319-4F35-817E-FF9CBA4827F6}" type="datetimeFigureOut">
               <a:rPr lang="it-IT" smtClean="0"/>
-              <a:t>15/07/2025</a:t>
+              <a:t>18/07/2025</a:t>
             </a:fld>
             <a:endParaRPr lang="it-IT"/>
           </a:p>
@@ -2671,7 +2671,7 @@
           <a:p>
             <a:fld id="{C8B3C85B-8319-4F35-817E-FF9CBA4827F6}" type="datetimeFigureOut">
               <a:rPr lang="it-IT" smtClean="0"/>
-              <a:t>15/07/2025</a:t>
+              <a:t>18/07/2025</a:t>
             </a:fld>
             <a:endParaRPr lang="it-IT"/>
           </a:p>
@@ -2912,7 +2912,7 @@
           <a:p>
             <a:fld id="{C8B3C85B-8319-4F35-817E-FF9CBA4827F6}" type="datetimeFigureOut">
               <a:rPr lang="it-IT" smtClean="0"/>
-              <a:t>15/07/2025</a:t>
+              <a:t>18/07/2025</a:t>
             </a:fld>
             <a:endParaRPr lang="it-IT"/>
           </a:p>
@@ -4725,8 +4725,8 @@
             </a:fontRef>
           </p:style>
         </p:cxnSp>
-        <mc:AlternateContent xmlns:mc="http://schemas.openxmlformats.org/markup-compatibility/2006" xmlns:a14="http://schemas.microsoft.com/office/drawing/2010/main">
-          <mc:Choice Requires="a14">
+        <mc:AlternateContent xmlns:mc="http://schemas.openxmlformats.org/markup-compatibility/2006">
+          <mc:Choice xmlns:a14="http://schemas.microsoft.com/office/drawing/2010/main" Requires="a14">
             <p:sp>
               <p:nvSpPr>
                 <p:cNvPr id="66" name="CasellaDiTesto 65">
@@ -4741,8 +4741,8 @@
               </p:nvSpPr>
               <p:spPr>
                 <a:xfrm>
-                  <a:off x="5249562" y="1574159"/>
-                  <a:ext cx="261765" cy="267467"/>
+                  <a:off x="5047568" y="1557079"/>
+                  <a:ext cx="502528" cy="267467"/>
                 </a:xfrm>
                 <a:prstGeom prst="rect">
                   <a:avLst/>
@@ -4769,6 +4769,24 @@
                           </a:rPr>
                           <m:t>𝑢</m:t>
                         </m:r>
+                        <m:r>
+                          <a:rPr lang="it-IT" sz="2000" b="0" i="1" smtClean="0">
+                            <a:latin typeface="Cambria Math" panose="02040503050406030204" pitchFamily="18" charset="0"/>
+                          </a:rPr>
+                          <m:t>(</m:t>
+                        </m:r>
+                        <m:r>
+                          <a:rPr lang="it-IT" sz="2000" b="0" i="1" smtClean="0">
+                            <a:latin typeface="Cambria Math" panose="02040503050406030204" pitchFamily="18" charset="0"/>
+                          </a:rPr>
+                          <m:t>𝑘</m:t>
+                        </m:r>
+                        <m:r>
+                          <a:rPr lang="it-IT" sz="2000" b="0" i="1" smtClean="0">
+                            <a:latin typeface="Cambria Math" panose="02040503050406030204" pitchFamily="18" charset="0"/>
+                          </a:rPr>
+                          <m:t>)</m:t>
+                        </m:r>
                       </m:oMath>
                     </m:oMathPara>
                   </a14:m>
@@ -4777,7 +4795,7 @@
               </p:txBody>
             </p:sp>
           </mc:Choice>
-          <mc:Fallback xmlns="">
+          <mc:Fallback>
             <p:sp>
               <p:nvSpPr>
                 <p:cNvPr id="66" name="CasellaDiTesto 65">
@@ -4794,8 +4812,8 @@
               </p:nvSpPr>
               <p:spPr>
                 <a:xfrm>
-                  <a:off x="5249562" y="1574159"/>
-                  <a:ext cx="261765" cy="267467"/>
+                  <a:off x="5047568" y="1557079"/>
+                  <a:ext cx="502528" cy="267467"/>
                 </a:xfrm>
                 <a:prstGeom prst="rect">
                   <a:avLst/>
@@ -4803,7 +4821,7 @@
                 <a:blipFill>
                   <a:blip r:embed="rId7"/>
                   <a:stretch>
-                    <a:fillRect/>
+                    <a:fillRect b="-15385"/>
                   </a:stretch>
                 </a:blipFill>
                 <a:effectLst/>
@@ -4823,8 +4841,8 @@
             </p:sp>
           </mc:Fallback>
         </mc:AlternateContent>
-        <mc:AlternateContent xmlns:mc="http://schemas.openxmlformats.org/markup-compatibility/2006" xmlns:a14="http://schemas.microsoft.com/office/drawing/2010/main">
-          <mc:Choice Requires="a14">
+        <mc:AlternateContent xmlns:mc="http://schemas.openxmlformats.org/markup-compatibility/2006">
+          <mc:Choice xmlns:a14="http://schemas.microsoft.com/office/drawing/2010/main" Requires="a14">
             <p:sp>
               <p:nvSpPr>
                 <p:cNvPr id="67" name="CasellaDiTesto 66">
@@ -4840,7 +4858,7 @@
               <p:spPr>
                 <a:xfrm>
                   <a:off x="6099771" y="2141440"/>
-                  <a:ext cx="280754" cy="308615"/>
+                  <a:ext cx="495842" cy="267467"/>
                 </a:xfrm>
                 <a:prstGeom prst="rect">
                   <a:avLst/>
@@ -4865,20 +4883,38 @@
                           <m:accPr>
                             <m:chr m:val="̅"/>
                             <m:ctrlPr>
-                              <a:rPr lang="it-IT" sz="2400" b="0" i="1" smtClean="0">
+                              <a:rPr lang="it-IT" sz="2000" b="0" i="1" smtClean="0">
                                 <a:latin typeface="Cambria Math" panose="02040503050406030204" pitchFamily="18" charset="0"/>
                               </a:rPr>
                             </m:ctrlPr>
                           </m:accPr>
                           <m:e>
                             <m:r>
-                              <a:rPr lang="it-IT" sz="2400" b="0" i="1" smtClean="0">
+                              <a:rPr lang="it-IT" sz="2000" b="0" i="1" smtClean="0">
                                 <a:latin typeface="Cambria Math" panose="02040503050406030204" pitchFamily="18" charset="0"/>
                               </a:rPr>
                               <m:t>𝑥</m:t>
                             </m:r>
                           </m:e>
                         </m:acc>
+                        <m:r>
+                          <a:rPr lang="it-IT" sz="2000" b="0" i="1" smtClean="0">
+                            <a:latin typeface="Cambria Math" panose="02040503050406030204" pitchFamily="18" charset="0"/>
+                          </a:rPr>
+                          <m:t>(</m:t>
+                        </m:r>
+                        <m:r>
+                          <a:rPr lang="it-IT" sz="2000" b="0" i="1" smtClean="0">
+                            <a:latin typeface="Cambria Math" panose="02040503050406030204" pitchFamily="18" charset="0"/>
+                          </a:rPr>
+                          <m:t>𝑘</m:t>
+                        </m:r>
+                        <m:r>
+                          <a:rPr lang="it-IT" sz="2000" b="0" i="1" smtClean="0">
+                            <a:latin typeface="Cambria Math" panose="02040503050406030204" pitchFamily="18" charset="0"/>
+                          </a:rPr>
+                          <m:t>)</m:t>
+                        </m:r>
                       </m:oMath>
                     </m:oMathPara>
                   </a14:m>
@@ -4887,7 +4923,7 @@
               </p:txBody>
             </p:sp>
           </mc:Choice>
-          <mc:Fallback xmlns="">
+          <mc:Fallback>
             <p:sp>
               <p:nvSpPr>
                 <p:cNvPr id="67" name="CasellaDiTesto 66">
@@ -4905,7 +4941,7 @@
               <p:spPr>
                 <a:xfrm>
                   <a:off x="6099771" y="2141440"/>
-                  <a:ext cx="280754" cy="308615"/>
+                  <a:ext cx="495842" cy="267467"/>
                 </a:xfrm>
                 <a:prstGeom prst="rect">
                   <a:avLst/>
@@ -4913,7 +4949,7 @@
                 <a:blipFill>
                   <a:blip r:embed="rId8"/>
                   <a:stretch>
-                    <a:fillRect r="-30435"/>
+                    <a:fillRect r="-826" b="-13636"/>
                   </a:stretch>
                 </a:blipFill>
                 <a:effectLst/>
@@ -8199,8 +8235,8 @@
           </a:fontRef>
         </p:style>
       </p:cxnSp>
-      <mc:AlternateContent xmlns:mc="http://schemas.openxmlformats.org/markup-compatibility/2006">
-        <mc:Choice xmlns:a14="http://schemas.microsoft.com/office/drawing/2010/main" Requires="a14">
+      <mc:AlternateContent xmlns:mc="http://schemas.openxmlformats.org/markup-compatibility/2006" xmlns:a14="http://schemas.microsoft.com/office/drawing/2010/main">
+        <mc:Choice Requires="a14">
           <p:sp>
             <p:nvSpPr>
               <p:cNvPr id="123" name="CasellaDiTesto 122">
@@ -8229,6 +8265,7 @@
               </a:bodyPr>
               <a:lstStyle/>
               <a:p>
+                <a:pPr/>
                 <a14:m>
                   <m:oMathPara xmlns:m="http://schemas.openxmlformats.org/officeDocument/2006/math">
                     <m:oMathParaPr>
@@ -8249,7 +8286,7 @@
             </p:txBody>
           </p:sp>
         </mc:Choice>
-        <mc:Fallback>
+        <mc:Fallback xmlns="">
           <p:sp>
             <p:nvSpPr>
               <p:cNvPr id="123" name="CasellaDiTesto 122">
@@ -8294,8 +8331,8 @@
           </p:sp>
         </mc:Fallback>
       </mc:AlternateContent>
-      <mc:AlternateContent xmlns:mc="http://schemas.openxmlformats.org/markup-compatibility/2006">
-        <mc:Choice xmlns:a14="http://schemas.microsoft.com/office/drawing/2010/main" Requires="a14">
+      <mc:AlternateContent xmlns:mc="http://schemas.openxmlformats.org/markup-compatibility/2006" xmlns:a14="http://schemas.microsoft.com/office/drawing/2010/main">
+        <mc:Choice Requires="a14">
           <p:sp>
             <p:nvSpPr>
               <p:cNvPr id="124" name="CasellaDiTesto 123">
@@ -8324,6 +8361,7 @@
               </a:bodyPr>
               <a:lstStyle/>
               <a:p>
+                <a:pPr/>
                 <a14:m>
                   <m:oMathPara xmlns:m="http://schemas.openxmlformats.org/officeDocument/2006/math">
                     <m:oMathParaPr>
@@ -8344,7 +8382,7 @@
             </p:txBody>
           </p:sp>
         </mc:Choice>
-        <mc:Fallback>
+        <mc:Fallback xmlns="">
           <p:sp>
             <p:nvSpPr>
               <p:cNvPr id="124" name="CasellaDiTesto 123">
@@ -8389,8 +8427,8 @@
           </p:sp>
         </mc:Fallback>
       </mc:AlternateContent>
-      <mc:AlternateContent xmlns:mc="http://schemas.openxmlformats.org/markup-compatibility/2006">
-        <mc:Choice xmlns:a14="http://schemas.microsoft.com/office/drawing/2010/main" Requires="a14">
+      <mc:AlternateContent xmlns:mc="http://schemas.openxmlformats.org/markup-compatibility/2006" xmlns:a14="http://schemas.microsoft.com/office/drawing/2010/main">
+        <mc:Choice Requires="a14">
           <p:sp>
             <p:nvSpPr>
               <p:cNvPr id="125" name="CasellaDiTesto 124">
@@ -8419,6 +8457,7 @@
               </a:bodyPr>
               <a:lstStyle/>
               <a:p>
+                <a:pPr/>
                 <a14:m>
                   <m:oMathPara xmlns:m="http://schemas.openxmlformats.org/officeDocument/2006/math">
                     <m:oMathParaPr>
@@ -8439,7 +8478,7 @@
             </p:txBody>
           </p:sp>
         </mc:Choice>
-        <mc:Fallback>
+        <mc:Fallback xmlns="">
           <p:sp>
             <p:nvSpPr>
               <p:cNvPr id="125" name="CasellaDiTesto 124">
@@ -8484,8 +8523,8 @@
           </p:sp>
         </mc:Fallback>
       </mc:AlternateContent>
-      <mc:AlternateContent xmlns:mc="http://schemas.openxmlformats.org/markup-compatibility/2006">
-        <mc:Choice xmlns:a14="http://schemas.microsoft.com/office/drawing/2010/main" Requires="a14">
+      <mc:AlternateContent xmlns:mc="http://schemas.openxmlformats.org/markup-compatibility/2006" xmlns:a14="http://schemas.microsoft.com/office/drawing/2010/main">
+        <mc:Choice Requires="a14">
           <p:sp>
             <p:nvSpPr>
               <p:cNvPr id="126" name="CasellaDiTesto 125">
@@ -8514,6 +8553,7 @@
               </a:bodyPr>
               <a:lstStyle/>
               <a:p>
+                <a:pPr/>
                 <a14:m>
                   <m:oMathPara xmlns:m="http://schemas.openxmlformats.org/officeDocument/2006/math">
                     <m:oMathParaPr>
@@ -8534,7 +8574,7 @@
             </p:txBody>
           </p:sp>
         </mc:Choice>
-        <mc:Fallback>
+        <mc:Fallback xmlns="">
           <p:sp>
             <p:nvSpPr>
               <p:cNvPr id="126" name="CasellaDiTesto 125">
@@ -8579,8 +8619,8 @@
           </p:sp>
         </mc:Fallback>
       </mc:AlternateContent>
-      <mc:AlternateContent xmlns:mc="http://schemas.openxmlformats.org/markup-compatibility/2006">
-        <mc:Choice xmlns:a14="http://schemas.microsoft.com/office/drawing/2010/main" Requires="a14">
+      <mc:AlternateContent xmlns:mc="http://schemas.openxmlformats.org/markup-compatibility/2006" xmlns:a14="http://schemas.microsoft.com/office/drawing/2010/main">
+        <mc:Choice Requires="a14">
           <p:sp>
             <p:nvSpPr>
               <p:cNvPr id="127" name="CasellaDiTesto 126">
@@ -8609,6 +8649,7 @@
               </a:bodyPr>
               <a:lstStyle/>
               <a:p>
+                <a:pPr/>
                 <a14:m>
                   <m:oMathPara xmlns:m="http://schemas.openxmlformats.org/officeDocument/2006/math">
                     <m:oMathParaPr>
@@ -8629,7 +8670,7 @@
             </p:txBody>
           </p:sp>
         </mc:Choice>
-        <mc:Fallback>
+        <mc:Fallback xmlns="">
           <p:sp>
             <p:nvSpPr>
               <p:cNvPr id="127" name="CasellaDiTesto 126">
@@ -8674,8 +8715,8 @@
           </p:sp>
         </mc:Fallback>
       </mc:AlternateContent>
-      <mc:AlternateContent xmlns:mc="http://schemas.openxmlformats.org/markup-compatibility/2006">
-        <mc:Choice xmlns:a14="http://schemas.microsoft.com/office/drawing/2010/main" Requires="a14">
+      <mc:AlternateContent xmlns:mc="http://schemas.openxmlformats.org/markup-compatibility/2006" xmlns:a14="http://schemas.microsoft.com/office/drawing/2010/main">
+        <mc:Choice Requires="a14">
           <p:sp>
             <p:nvSpPr>
               <p:cNvPr id="129" name="CasellaDiTesto 128">
@@ -8704,6 +8745,7 @@
               </a:bodyPr>
               <a:lstStyle/>
               <a:p>
+                <a:pPr/>
                 <a14:m>
                   <m:oMathPara xmlns:m="http://schemas.openxmlformats.org/officeDocument/2006/math">
                     <m:oMathParaPr>
@@ -8724,7 +8766,7 @@
             </p:txBody>
           </p:sp>
         </mc:Choice>
-        <mc:Fallback>
+        <mc:Fallback xmlns="">
           <p:sp>
             <p:nvSpPr>
               <p:cNvPr id="129" name="CasellaDiTesto 128">
@@ -8769,8 +8811,8 @@
           </p:sp>
         </mc:Fallback>
       </mc:AlternateContent>
-      <mc:AlternateContent xmlns:mc="http://schemas.openxmlformats.org/markup-compatibility/2006">
-        <mc:Choice xmlns:a14="http://schemas.microsoft.com/office/drawing/2010/main" Requires="a14">
+      <mc:AlternateContent xmlns:mc="http://schemas.openxmlformats.org/markup-compatibility/2006" xmlns:a14="http://schemas.microsoft.com/office/drawing/2010/main">
+        <mc:Choice Requires="a14">
           <p:sp>
             <p:nvSpPr>
               <p:cNvPr id="130" name="CasellaDiTesto 129">
@@ -8799,6 +8841,7 @@
               </a:bodyPr>
               <a:lstStyle/>
               <a:p>
+                <a:pPr/>
                 <a14:m>
                   <m:oMathPara xmlns:m="http://schemas.openxmlformats.org/officeDocument/2006/math">
                     <m:oMathParaPr>
@@ -8837,7 +8880,7 @@
             </p:txBody>
           </p:sp>
         </mc:Choice>
-        <mc:Fallback>
+        <mc:Fallback xmlns="">
           <p:sp>
             <p:nvSpPr>
               <p:cNvPr id="130" name="CasellaDiTesto 129">
@@ -8882,8 +8925,8 @@
           </p:sp>
         </mc:Fallback>
       </mc:AlternateContent>
-      <mc:AlternateContent xmlns:mc="http://schemas.openxmlformats.org/markup-compatibility/2006">
-        <mc:Choice xmlns:a14="http://schemas.microsoft.com/office/drawing/2010/main" Requires="a14">
+      <mc:AlternateContent xmlns:mc="http://schemas.openxmlformats.org/markup-compatibility/2006" xmlns:a14="http://schemas.microsoft.com/office/drawing/2010/main">
+        <mc:Choice Requires="a14">
           <p:sp>
             <p:nvSpPr>
               <p:cNvPr id="131" name="CasellaDiTesto 130">
@@ -8912,6 +8955,7 @@
               </a:bodyPr>
               <a:lstStyle/>
               <a:p>
+                <a:pPr/>
                 <a14:m>
                   <m:oMathPara xmlns:m="http://schemas.openxmlformats.org/officeDocument/2006/math">
                     <m:oMathParaPr>
@@ -8932,7 +8976,7 @@
             </p:txBody>
           </p:sp>
         </mc:Choice>
-        <mc:Fallback>
+        <mc:Fallback xmlns="">
           <p:sp>
             <p:nvSpPr>
               <p:cNvPr id="131" name="CasellaDiTesto 130">
@@ -8977,8 +9021,8 @@
           </p:sp>
         </mc:Fallback>
       </mc:AlternateContent>
-      <mc:AlternateContent xmlns:mc="http://schemas.openxmlformats.org/markup-compatibility/2006">
-        <mc:Choice xmlns:a14="http://schemas.microsoft.com/office/drawing/2010/main" Requires="a14">
+      <mc:AlternateContent xmlns:mc="http://schemas.openxmlformats.org/markup-compatibility/2006" xmlns:a14="http://schemas.microsoft.com/office/drawing/2010/main">
+        <mc:Choice Requires="a14">
           <p:sp>
             <p:nvSpPr>
               <p:cNvPr id="132" name="CasellaDiTesto 131">
@@ -9007,6 +9051,7 @@
               </a:bodyPr>
               <a:lstStyle/>
               <a:p>
+                <a:pPr/>
                 <a14:m>
                   <m:oMathPara xmlns:m="http://schemas.openxmlformats.org/officeDocument/2006/math">
                     <m:oMathParaPr>
@@ -9027,7 +9072,7 @@
             </p:txBody>
           </p:sp>
         </mc:Choice>
-        <mc:Fallback>
+        <mc:Fallback xmlns="">
           <p:sp>
             <p:nvSpPr>
               <p:cNvPr id="132" name="CasellaDiTesto 131">
@@ -9072,8 +9117,8 @@
           </p:sp>
         </mc:Fallback>
       </mc:AlternateContent>
-      <mc:AlternateContent xmlns:mc="http://schemas.openxmlformats.org/markup-compatibility/2006">
-        <mc:Choice xmlns:a14="http://schemas.microsoft.com/office/drawing/2010/main" Requires="a14">
+      <mc:AlternateContent xmlns:mc="http://schemas.openxmlformats.org/markup-compatibility/2006" xmlns:a14="http://schemas.microsoft.com/office/drawing/2010/main">
+        <mc:Choice Requires="a14">
           <p:sp>
             <p:nvSpPr>
               <p:cNvPr id="133" name="CasellaDiTesto 132">
@@ -9102,6 +9147,7 @@
               </a:bodyPr>
               <a:lstStyle/>
               <a:p>
+                <a:pPr/>
                 <a14:m>
                   <m:oMathPara xmlns:m="http://schemas.openxmlformats.org/officeDocument/2006/math">
                     <m:oMathParaPr>
@@ -9122,7 +9168,7 @@
             </p:txBody>
           </p:sp>
         </mc:Choice>
-        <mc:Fallback>
+        <mc:Fallback xmlns="">
           <p:sp>
             <p:nvSpPr>
               <p:cNvPr id="133" name="CasellaDiTesto 132">
@@ -9167,8 +9213,8 @@
           </p:sp>
         </mc:Fallback>
       </mc:AlternateContent>
-      <mc:AlternateContent xmlns:mc="http://schemas.openxmlformats.org/markup-compatibility/2006">
-        <mc:Choice xmlns:a14="http://schemas.microsoft.com/office/drawing/2010/main" Requires="a14">
+      <mc:AlternateContent xmlns:mc="http://schemas.openxmlformats.org/markup-compatibility/2006" xmlns:a14="http://schemas.microsoft.com/office/drawing/2010/main">
+        <mc:Choice Requires="a14">
           <p:sp>
             <p:nvSpPr>
               <p:cNvPr id="134" name="CasellaDiTesto 133">
@@ -9197,6 +9243,7 @@
               </a:bodyPr>
               <a:lstStyle/>
               <a:p>
+                <a:pPr/>
                 <a14:m>
                   <m:oMathPara xmlns:m="http://schemas.openxmlformats.org/officeDocument/2006/math">
                     <m:oMathParaPr>
@@ -9217,7 +9264,7 @@
             </p:txBody>
           </p:sp>
         </mc:Choice>
-        <mc:Fallback>
+        <mc:Fallback xmlns="">
           <p:sp>
             <p:nvSpPr>
               <p:cNvPr id="134" name="CasellaDiTesto 133">
@@ -9262,8 +9309,8 @@
           </p:sp>
         </mc:Fallback>
       </mc:AlternateContent>
-      <mc:AlternateContent xmlns:mc="http://schemas.openxmlformats.org/markup-compatibility/2006">
-        <mc:Choice xmlns:a14="http://schemas.microsoft.com/office/drawing/2010/main" Requires="a14">
+      <mc:AlternateContent xmlns:mc="http://schemas.openxmlformats.org/markup-compatibility/2006" xmlns:a14="http://schemas.microsoft.com/office/drawing/2010/main">
+        <mc:Choice Requires="a14">
           <p:sp>
             <p:nvSpPr>
               <p:cNvPr id="135" name="CasellaDiTesto 134">
@@ -9292,6 +9339,7 @@
               </a:bodyPr>
               <a:lstStyle/>
               <a:p>
+                <a:pPr/>
                 <a14:m>
                   <m:oMathPara xmlns:m="http://schemas.openxmlformats.org/officeDocument/2006/math">
                     <m:oMathParaPr>
@@ -9312,7 +9360,7 @@
             </p:txBody>
           </p:sp>
         </mc:Choice>
-        <mc:Fallback>
+        <mc:Fallback xmlns="">
           <p:sp>
             <p:nvSpPr>
               <p:cNvPr id="135" name="CasellaDiTesto 134">
@@ -9463,8 +9511,8 @@
           </a:p>
         </p:txBody>
       </p:sp>
-      <mc:AlternateContent xmlns:mc="http://schemas.openxmlformats.org/markup-compatibility/2006">
-        <mc:Choice xmlns:a14="http://schemas.microsoft.com/office/drawing/2010/main" Requires="a14">
+      <mc:AlternateContent xmlns:mc="http://schemas.openxmlformats.org/markup-compatibility/2006" xmlns:a14="http://schemas.microsoft.com/office/drawing/2010/main">
+        <mc:Choice Requires="a14">
           <p:sp>
             <p:nvSpPr>
               <p:cNvPr id="138" name="CasellaDiTesto 137">
@@ -9493,6 +9541,7 @@
               </a:bodyPr>
               <a:lstStyle/>
               <a:p>
+                <a:pPr/>
                 <a14:m>
                   <m:oMathPara xmlns:m="http://schemas.openxmlformats.org/officeDocument/2006/math">
                     <m:oMathParaPr>
@@ -9531,7 +9580,7 @@
             </p:txBody>
           </p:sp>
         </mc:Choice>
-        <mc:Fallback>
+        <mc:Fallback xmlns="">
           <p:sp>
             <p:nvSpPr>
               <p:cNvPr id="138" name="CasellaDiTesto 137">
@@ -11593,8 +11642,8 @@
           </a:fontRef>
         </p:style>
       </p:cxnSp>
-      <mc:AlternateContent xmlns:mc="http://schemas.openxmlformats.org/markup-compatibility/2006">
-        <mc:Choice xmlns:a14="http://schemas.microsoft.com/office/drawing/2010/main" Requires="a14">
+      <mc:AlternateContent xmlns:mc="http://schemas.openxmlformats.org/markup-compatibility/2006" xmlns:a14="http://schemas.microsoft.com/office/drawing/2010/main">
+        <mc:Choice Requires="a14">
           <p:sp>
             <p:nvSpPr>
               <p:cNvPr id="67" name="CasellaDiTesto 66">
@@ -11623,6 +11672,7 @@
               </a:bodyPr>
               <a:lstStyle/>
               <a:p>
+                <a:pPr/>
                 <a14:m>
                   <m:oMathPara xmlns:m="http://schemas.openxmlformats.org/officeDocument/2006/math">
                     <m:oMathParaPr>
@@ -11643,7 +11693,7 @@
             </p:txBody>
           </p:sp>
         </mc:Choice>
-        <mc:Fallback>
+        <mc:Fallback xmlns="">
           <p:sp>
             <p:nvSpPr>
               <p:cNvPr id="67" name="CasellaDiTesto 66">
@@ -11688,8 +11738,8 @@
           </p:sp>
         </mc:Fallback>
       </mc:AlternateContent>
-      <mc:AlternateContent xmlns:mc="http://schemas.openxmlformats.org/markup-compatibility/2006">
-        <mc:Choice xmlns:a14="http://schemas.microsoft.com/office/drawing/2010/main" Requires="a14">
+      <mc:AlternateContent xmlns:mc="http://schemas.openxmlformats.org/markup-compatibility/2006" xmlns:a14="http://schemas.microsoft.com/office/drawing/2010/main">
+        <mc:Choice Requires="a14">
           <p:sp>
             <p:nvSpPr>
               <p:cNvPr id="68" name="CasellaDiTesto 67">
@@ -11718,6 +11768,7 @@
               </a:bodyPr>
               <a:lstStyle/>
               <a:p>
+                <a:pPr/>
                 <a14:m>
                   <m:oMathPara xmlns:m="http://schemas.openxmlformats.org/officeDocument/2006/math">
                     <m:oMathParaPr>
@@ -11756,7 +11807,7 @@
             </p:txBody>
           </p:sp>
         </mc:Choice>
-        <mc:Fallback>
+        <mc:Fallback xmlns="">
           <p:sp>
             <p:nvSpPr>
               <p:cNvPr id="68" name="CasellaDiTesto 67">
@@ -11801,8 +11852,8 @@
           </p:sp>
         </mc:Fallback>
       </mc:AlternateContent>
-      <mc:AlternateContent xmlns:mc="http://schemas.openxmlformats.org/markup-compatibility/2006">
-        <mc:Choice xmlns:a14="http://schemas.microsoft.com/office/drawing/2010/main" Requires="a14">
+      <mc:AlternateContent xmlns:mc="http://schemas.openxmlformats.org/markup-compatibility/2006" xmlns:a14="http://schemas.microsoft.com/office/drawing/2010/main">
+        <mc:Choice Requires="a14">
           <p:sp>
             <p:nvSpPr>
               <p:cNvPr id="69" name="CasellaDiTesto 68">
@@ -11831,6 +11882,7 @@
               </a:bodyPr>
               <a:lstStyle/>
               <a:p>
+                <a:pPr/>
                 <a14:m>
                   <m:oMathPara xmlns:m="http://schemas.openxmlformats.org/officeDocument/2006/math">
                     <m:oMathParaPr>
@@ -11851,7 +11903,7 @@
             </p:txBody>
           </p:sp>
         </mc:Choice>
-        <mc:Fallback>
+        <mc:Fallback xmlns="">
           <p:sp>
             <p:nvSpPr>
               <p:cNvPr id="69" name="CasellaDiTesto 68">
@@ -11896,8 +11948,8 @@
           </p:sp>
         </mc:Fallback>
       </mc:AlternateContent>
-      <mc:AlternateContent xmlns:mc="http://schemas.openxmlformats.org/markup-compatibility/2006">
-        <mc:Choice xmlns:a14="http://schemas.microsoft.com/office/drawing/2010/main" Requires="a14">
+      <mc:AlternateContent xmlns:mc="http://schemas.openxmlformats.org/markup-compatibility/2006" xmlns:a14="http://schemas.microsoft.com/office/drawing/2010/main">
+        <mc:Choice Requires="a14">
           <p:sp>
             <p:nvSpPr>
               <p:cNvPr id="70" name="CasellaDiTesto 69">
@@ -11926,6 +11978,7 @@
               </a:bodyPr>
               <a:lstStyle/>
               <a:p>
+                <a:pPr/>
                 <a14:m>
                   <m:oMathPara xmlns:m="http://schemas.openxmlformats.org/officeDocument/2006/math">
                     <m:oMathParaPr>
@@ -11946,7 +11999,7 @@
             </p:txBody>
           </p:sp>
         </mc:Choice>
-        <mc:Fallback>
+        <mc:Fallback xmlns="">
           <p:sp>
             <p:nvSpPr>
               <p:cNvPr id="70" name="CasellaDiTesto 69">
@@ -11991,8 +12044,8 @@
           </p:sp>
         </mc:Fallback>
       </mc:AlternateContent>
-      <mc:AlternateContent xmlns:mc="http://schemas.openxmlformats.org/markup-compatibility/2006">
-        <mc:Choice xmlns:a14="http://schemas.microsoft.com/office/drawing/2010/main" Requires="a14">
+      <mc:AlternateContent xmlns:mc="http://schemas.openxmlformats.org/markup-compatibility/2006" xmlns:a14="http://schemas.microsoft.com/office/drawing/2010/main">
+        <mc:Choice Requires="a14">
           <p:sp>
             <p:nvSpPr>
               <p:cNvPr id="72" name="CasellaDiTesto 71">
@@ -12021,6 +12074,7 @@
               </a:bodyPr>
               <a:lstStyle/>
               <a:p>
+                <a:pPr/>
                 <a14:m>
                   <m:oMathPara xmlns:m="http://schemas.openxmlformats.org/officeDocument/2006/math">
                     <m:oMathParaPr>
@@ -12041,7 +12095,7 @@
             </p:txBody>
           </p:sp>
         </mc:Choice>
-        <mc:Fallback>
+        <mc:Fallback xmlns="">
           <p:sp>
             <p:nvSpPr>
               <p:cNvPr id="72" name="CasellaDiTesto 71">
@@ -12086,8 +12140,8 @@
           </p:sp>
         </mc:Fallback>
       </mc:AlternateContent>
-      <mc:AlternateContent xmlns:mc="http://schemas.openxmlformats.org/markup-compatibility/2006">
-        <mc:Choice xmlns:a14="http://schemas.microsoft.com/office/drawing/2010/main" Requires="a14">
+      <mc:AlternateContent xmlns:mc="http://schemas.openxmlformats.org/markup-compatibility/2006" xmlns:a14="http://schemas.microsoft.com/office/drawing/2010/main">
+        <mc:Choice Requires="a14">
           <p:sp>
             <p:nvSpPr>
               <p:cNvPr id="73" name="CasellaDiTesto 72">
@@ -12116,6 +12170,7 @@
               </a:bodyPr>
               <a:lstStyle/>
               <a:p>
+                <a:pPr/>
                 <a14:m>
                   <m:oMathPara xmlns:m="http://schemas.openxmlformats.org/officeDocument/2006/math">
                     <m:oMathParaPr>
@@ -12136,7 +12191,7 @@
             </p:txBody>
           </p:sp>
         </mc:Choice>
-        <mc:Fallback>
+        <mc:Fallback xmlns="">
           <p:sp>
             <p:nvSpPr>
               <p:cNvPr id="73" name="CasellaDiTesto 72">
@@ -12267,8 +12322,8 @@
           </a:fontRef>
         </p:style>
       </p:cxnSp>
-      <mc:AlternateContent xmlns:mc="http://schemas.openxmlformats.org/markup-compatibility/2006">
-        <mc:Choice xmlns:a14="http://schemas.microsoft.com/office/drawing/2010/main" Requires="a14">
+      <mc:AlternateContent xmlns:mc="http://schemas.openxmlformats.org/markup-compatibility/2006" xmlns:a14="http://schemas.microsoft.com/office/drawing/2010/main">
+        <mc:Choice Requires="a14">
           <p:sp>
             <p:nvSpPr>
               <p:cNvPr id="84" name="CasellaDiTesto 83">
@@ -12297,6 +12352,7 @@
               </a:bodyPr>
               <a:lstStyle/>
               <a:p>
+                <a:pPr/>
                 <a14:m>
                   <m:oMathPara xmlns:m="http://schemas.openxmlformats.org/officeDocument/2006/math">
                     <m:oMathParaPr>
@@ -12335,7 +12391,7 @@
             </p:txBody>
           </p:sp>
         </mc:Choice>
-        <mc:Fallback>
+        <mc:Fallback xmlns="">
           <p:sp>
             <p:nvSpPr>
               <p:cNvPr id="84" name="CasellaDiTesto 83">
@@ -12873,8 +12929,8 @@
           </a:fontRef>
         </p:style>
       </p:cxnSp>
-      <mc:AlternateContent xmlns:mc="http://schemas.openxmlformats.org/markup-compatibility/2006">
-        <mc:Choice xmlns:a14="http://schemas.microsoft.com/office/drawing/2010/main" Requires="a14">
+      <mc:AlternateContent xmlns:mc="http://schemas.openxmlformats.org/markup-compatibility/2006" xmlns:a14="http://schemas.microsoft.com/office/drawing/2010/main">
+        <mc:Choice Requires="a14">
           <p:sp>
             <p:nvSpPr>
               <p:cNvPr id="62" name="CasellaDiTesto 61">
@@ -12903,6 +12959,7 @@
               </a:bodyPr>
               <a:lstStyle/>
               <a:p>
+                <a:pPr/>
                 <a14:m>
                   <m:oMathPara xmlns:m="http://schemas.openxmlformats.org/officeDocument/2006/math">
                     <m:oMathParaPr>
@@ -12923,7 +12980,7 @@
             </p:txBody>
           </p:sp>
         </mc:Choice>
-        <mc:Fallback>
+        <mc:Fallback xmlns="">
           <p:sp>
             <p:nvSpPr>
               <p:cNvPr id="62" name="CasellaDiTesto 61">
@@ -12968,8 +13025,8 @@
           </p:sp>
         </mc:Fallback>
       </mc:AlternateContent>
-      <mc:AlternateContent xmlns:mc="http://schemas.openxmlformats.org/markup-compatibility/2006">
-        <mc:Choice xmlns:a14="http://schemas.microsoft.com/office/drawing/2010/main" Requires="a14">
+      <mc:AlternateContent xmlns:mc="http://schemas.openxmlformats.org/markup-compatibility/2006" xmlns:a14="http://schemas.microsoft.com/office/drawing/2010/main">
+        <mc:Choice Requires="a14">
           <p:sp>
             <p:nvSpPr>
               <p:cNvPr id="63" name="CasellaDiTesto 62">
@@ -12998,6 +13055,7 @@
               </a:bodyPr>
               <a:lstStyle/>
               <a:p>
+                <a:pPr/>
                 <a14:m>
                   <m:oMathPara xmlns:m="http://schemas.openxmlformats.org/officeDocument/2006/math">
                     <m:oMathParaPr>
@@ -13018,7 +13076,7 @@
             </p:txBody>
           </p:sp>
         </mc:Choice>
-        <mc:Fallback>
+        <mc:Fallback xmlns="">
           <p:sp>
             <p:nvSpPr>
               <p:cNvPr id="63" name="CasellaDiTesto 62">
@@ -13063,8 +13121,8 @@
           </p:sp>
         </mc:Fallback>
       </mc:AlternateContent>
-      <mc:AlternateContent xmlns:mc="http://schemas.openxmlformats.org/markup-compatibility/2006">
-        <mc:Choice xmlns:a14="http://schemas.microsoft.com/office/drawing/2010/main" Requires="a14">
+      <mc:AlternateContent xmlns:mc="http://schemas.openxmlformats.org/markup-compatibility/2006" xmlns:a14="http://schemas.microsoft.com/office/drawing/2010/main">
+        <mc:Choice Requires="a14">
           <p:sp>
             <p:nvSpPr>
               <p:cNvPr id="64" name="CasellaDiTesto 63">
@@ -13093,6 +13151,7 @@
               </a:bodyPr>
               <a:lstStyle/>
               <a:p>
+                <a:pPr/>
                 <a14:m>
                   <m:oMathPara xmlns:m="http://schemas.openxmlformats.org/officeDocument/2006/math">
                     <m:oMathParaPr>
@@ -13113,7 +13172,7 @@
             </p:txBody>
           </p:sp>
         </mc:Choice>
-        <mc:Fallback>
+        <mc:Fallback xmlns="">
           <p:sp>
             <p:nvSpPr>
               <p:cNvPr id="64" name="CasellaDiTesto 63">
@@ -13158,8 +13217,8 @@
           </p:sp>
         </mc:Fallback>
       </mc:AlternateContent>
-      <mc:AlternateContent xmlns:mc="http://schemas.openxmlformats.org/markup-compatibility/2006">
-        <mc:Choice xmlns:a14="http://schemas.microsoft.com/office/drawing/2010/main" Requires="a14">
+      <mc:AlternateContent xmlns:mc="http://schemas.openxmlformats.org/markup-compatibility/2006" xmlns:a14="http://schemas.microsoft.com/office/drawing/2010/main">
+        <mc:Choice Requires="a14">
           <p:sp>
             <p:nvSpPr>
               <p:cNvPr id="65" name="CasellaDiTesto 64">
@@ -13188,6 +13247,7 @@
               </a:bodyPr>
               <a:lstStyle/>
               <a:p>
+                <a:pPr/>
                 <a14:m>
                   <m:oMathPara xmlns:m="http://schemas.openxmlformats.org/officeDocument/2006/math">
                     <m:oMathParaPr>
@@ -13208,7 +13268,7 @@
             </p:txBody>
           </p:sp>
         </mc:Choice>
-        <mc:Fallback>
+        <mc:Fallback xmlns="">
           <p:sp>
             <p:nvSpPr>
               <p:cNvPr id="65" name="CasellaDiTesto 64">
@@ -13253,8 +13313,8 @@
           </p:sp>
         </mc:Fallback>
       </mc:AlternateContent>
-      <mc:AlternateContent xmlns:mc="http://schemas.openxmlformats.org/markup-compatibility/2006">
-        <mc:Choice xmlns:a14="http://schemas.microsoft.com/office/drawing/2010/main" Requires="a14">
+      <mc:AlternateContent xmlns:mc="http://schemas.openxmlformats.org/markup-compatibility/2006" xmlns:a14="http://schemas.microsoft.com/office/drawing/2010/main">
+        <mc:Choice Requires="a14">
           <p:sp>
             <p:nvSpPr>
               <p:cNvPr id="66" name="CasellaDiTesto 65">
@@ -13283,6 +13343,7 @@
               </a:bodyPr>
               <a:lstStyle/>
               <a:p>
+                <a:pPr/>
                 <a14:m>
                   <m:oMathPara xmlns:m="http://schemas.openxmlformats.org/officeDocument/2006/math">
                     <m:oMathParaPr>
@@ -13303,7 +13364,7 @@
             </p:txBody>
           </p:sp>
         </mc:Choice>
-        <mc:Fallback>
+        <mc:Fallback xmlns="">
           <p:sp>
             <p:nvSpPr>
               <p:cNvPr id="66" name="CasellaDiTesto 65">
@@ -13348,8 +13409,8 @@
           </p:sp>
         </mc:Fallback>
       </mc:AlternateContent>
-      <mc:AlternateContent xmlns:mc="http://schemas.openxmlformats.org/markup-compatibility/2006">
-        <mc:Choice xmlns:a14="http://schemas.microsoft.com/office/drawing/2010/main" Requires="a14">
+      <mc:AlternateContent xmlns:mc="http://schemas.openxmlformats.org/markup-compatibility/2006" xmlns:a14="http://schemas.microsoft.com/office/drawing/2010/main">
+        <mc:Choice Requires="a14">
           <p:sp>
             <p:nvSpPr>
               <p:cNvPr id="71" name="CasellaDiTesto 70">
@@ -13378,6 +13439,7 @@
               </a:bodyPr>
               <a:lstStyle/>
               <a:p>
+                <a:pPr/>
                 <a14:m>
                   <m:oMathPara xmlns:m="http://schemas.openxmlformats.org/officeDocument/2006/math">
                     <m:oMathParaPr>
@@ -13398,7 +13460,7 @@
             </p:txBody>
           </p:sp>
         </mc:Choice>
-        <mc:Fallback>
+        <mc:Fallback xmlns="">
           <p:sp>
             <p:nvSpPr>
               <p:cNvPr id="71" name="CasellaDiTesto 70">
@@ -13549,8 +13611,8 @@
           </a:p>
         </p:txBody>
       </p:sp>
-      <mc:AlternateContent xmlns:mc="http://schemas.openxmlformats.org/markup-compatibility/2006">
-        <mc:Choice xmlns:a14="http://schemas.microsoft.com/office/drawing/2010/main" Requires="a14">
+      <mc:AlternateContent xmlns:mc="http://schemas.openxmlformats.org/markup-compatibility/2006" xmlns:a14="http://schemas.microsoft.com/office/drawing/2010/main">
+        <mc:Choice Requires="a14">
           <p:sp>
             <p:nvSpPr>
               <p:cNvPr id="76" name="CasellaDiTesto 75">
@@ -13579,6 +13641,7 @@
               </a:bodyPr>
               <a:lstStyle/>
               <a:p>
+                <a:pPr/>
                 <a14:m>
                   <m:oMathPara xmlns:m="http://schemas.openxmlformats.org/officeDocument/2006/math">
                     <m:oMathParaPr>
@@ -13617,7 +13680,7 @@
             </p:txBody>
           </p:sp>
         </mc:Choice>
-        <mc:Fallback>
+        <mc:Fallback xmlns="">
           <p:sp>
             <p:nvSpPr>
               <p:cNvPr id="76" name="CasellaDiTesto 75">
@@ -13704,8 +13767,8 @@
           </a:fontRef>
         </p:style>
       </p:cxnSp>
-      <mc:AlternateContent xmlns:mc="http://schemas.openxmlformats.org/markup-compatibility/2006">
-        <mc:Choice xmlns:a14="http://schemas.microsoft.com/office/drawing/2010/main" Requires="a14">
+      <mc:AlternateContent xmlns:mc="http://schemas.openxmlformats.org/markup-compatibility/2006" xmlns:a14="http://schemas.microsoft.com/office/drawing/2010/main">
+        <mc:Choice Requires="a14">
           <p:sp>
             <p:nvSpPr>
               <p:cNvPr id="88" name="CasellaDiTesto 87">
@@ -13734,6 +13797,7 @@
               </a:bodyPr>
               <a:lstStyle/>
               <a:p>
+                <a:pPr/>
                 <a14:m>
                   <m:oMathPara xmlns:m="http://schemas.openxmlformats.org/officeDocument/2006/math">
                     <m:oMathParaPr>
@@ -13772,7 +13836,7 @@
             </p:txBody>
           </p:sp>
         </mc:Choice>
-        <mc:Fallback>
+        <mc:Fallback xmlns="">
           <p:sp>
             <p:nvSpPr>
               <p:cNvPr id="88" name="CasellaDiTesto 87">
@@ -13861,8 +13925,8 @@
           </a:fontRef>
         </p:style>
       </p:cxnSp>
-      <mc:AlternateContent xmlns:mc="http://schemas.openxmlformats.org/markup-compatibility/2006">
-        <mc:Choice xmlns:a14="http://schemas.microsoft.com/office/drawing/2010/main" Requires="a14">
+      <mc:AlternateContent xmlns:mc="http://schemas.openxmlformats.org/markup-compatibility/2006" xmlns:a14="http://schemas.microsoft.com/office/drawing/2010/main">
+        <mc:Choice Requires="a14">
           <p:sp>
             <p:nvSpPr>
               <p:cNvPr id="90" name="CasellaDiTesto 89">
@@ -13891,6 +13955,7 @@
               </a:bodyPr>
               <a:lstStyle/>
               <a:p>
+                <a:pPr/>
                 <a14:m>
                   <m:oMathPara xmlns:m="http://schemas.openxmlformats.org/officeDocument/2006/math">
                     <m:oMathParaPr>
@@ -13911,7 +13976,7 @@
             </p:txBody>
           </p:sp>
         </mc:Choice>
-        <mc:Fallback>
+        <mc:Fallback xmlns="">
           <p:sp>
             <p:nvSpPr>
               <p:cNvPr id="90" name="CasellaDiTesto 89">
